--- a/docs/final/Space_Biology_Evidence_Engine_Pitch_Deck.pptx
+++ b/docs/final/Space_Biology_Evidence_Engine_Pitch_Deck.pptx
@@ -583,7 +583,7 @@
           <a:lstStyle/>
           <a:p>
             <a:r>
-              <a:t>Explain the live-demo sequence and backup plan. The student has already notified the program that he will not participate in the live final showcase presentation; these artifacts support evaluation and handoff.</a:t>
+              <a:t>Explain the live-demo sequence and backup plan. These committed artifacts support evaluation and handoff if the live environment is unavailable.</a:t>
             </a:r>
           </a:p>
         </p:txBody>

--- a/docs/final/Space_Biology_Evidence_Engine_Pitch_Deck.pptx
+++ b/docs/final/Space_Biology_Evidence_Engine_Pitch_Deck.pptx
@@ -4,21 +4,24 @@
   <p:sldMasterIdLst>
     <p:sldMasterId id="2147483648" r:id="rId1"/>
   </p:sldMasterIdLst>
+  <p:notesMasterIdLst>
+    <p:notesMasterId r:id="rId14"/>
+  </p:notesMasterIdLst>
   <p:sldIdLst>
-    <p:sldId id="256" r:id="rId7"/>
-    <p:sldId id="257" r:id="rId9"/>
-    <p:sldId id="258" r:id="rId10"/>
-    <p:sldId id="259" r:id="rId11"/>
-    <p:sldId id="260" r:id="rId12"/>
-    <p:sldId id="261" r:id="rId13"/>
-    <p:sldId id="262" r:id="rId14"/>
-    <p:sldId id="263" r:id="rId15"/>
-    <p:sldId id="264" r:id="rId16"/>
-    <p:sldId id="265" r:id="rId17"/>
-    <p:sldId id="266" r:id="rId18"/>
-    <p:sldId id="267" r:id="rId19"/>
+    <p:sldId id="268" r:id="rId2"/>
+    <p:sldId id="257" r:id="rId3"/>
+    <p:sldId id="258" r:id="rId4"/>
+    <p:sldId id="259" r:id="rId5"/>
+    <p:sldId id="260" r:id="rId6"/>
+    <p:sldId id="261" r:id="rId7"/>
+    <p:sldId id="262" r:id="rId8"/>
+    <p:sldId id="263" r:id="rId9"/>
+    <p:sldId id="264" r:id="rId10"/>
+    <p:sldId id="265" r:id="rId11"/>
+    <p:sldId id="266" r:id="rId12"/>
+    <p:sldId id="269" r:id="rId13"/>
   </p:sldIdLst>
-  <p:sldSz cx="12191695" cy="6858000" type="screen4x3"/>
+  <p:sldSz cx="12192000" cy="6858000"/>
   <p:notesSz cx="6858000" cy="9144000"/>
   <p:defaultTextStyle>
     <a:defPPr>
@@ -115,11 +118,3302 @@
       </a:defRPr>
     </a:lvl9pPr>
   </p:defaultTextStyle>
+  <p:extLst>
+    <p:ext uri="{EFAFB233-063F-42B5-8137-9DF3F51BA10A}">
+      <p15:sldGuideLst xmlns:p15="http://schemas.microsoft.com/office/powerpoint/2012/main">
+        <p15:guide id="1" orient="horz" pos="2160">
+          <p15:clr>
+            <a:srgbClr val="A4A3A4"/>
+          </p15:clr>
+        </p15:guide>
+        <p15:guide id="2" pos="2880">
+          <p15:clr>
+            <a:srgbClr val="A4A3A4"/>
+          </p15:clr>
+        </p15:guide>
+      </p15:sldGuideLst>
+    </p:ext>
+  </p:extLst>
 </p:presentation>
 </file>
 
+<file path=ppt/diagrams/colors1.xml><?xml version="1.0" encoding="utf-8"?>
+<dgm:colorsDef xmlns:dgm="http://schemas.openxmlformats.org/drawingml/2006/diagram" xmlns:a="http://schemas.openxmlformats.org/drawingml/2006/main" uniqueId="urn:microsoft.com/office/officeart/2005/8/colors/accent1_2#1">
+  <dgm:title val=""/>
+  <dgm:desc val=""/>
+  <dgm:catLst>
+    <dgm:cat type="accent1" pri="11200"/>
+  </dgm:catLst>
+  <dgm:styleLbl name="node0">
+    <dgm:fillClrLst meth="repeat">
+      <a:schemeClr val="accent1"/>
+    </dgm:fillClrLst>
+    <dgm:linClrLst meth="repeat">
+      <a:schemeClr val="lt1"/>
+    </dgm:linClrLst>
+    <dgm:effectClrLst/>
+    <dgm:txLinClrLst/>
+    <dgm:txFillClrLst/>
+    <dgm:txEffectClrLst/>
+  </dgm:styleLbl>
+  <dgm:styleLbl name="alignNode1">
+    <dgm:fillClrLst meth="repeat">
+      <a:schemeClr val="accent1"/>
+    </dgm:fillClrLst>
+    <dgm:linClrLst meth="repeat">
+      <a:schemeClr val="accent1"/>
+    </dgm:linClrLst>
+    <dgm:effectClrLst/>
+    <dgm:txLinClrLst/>
+    <dgm:txFillClrLst/>
+    <dgm:txEffectClrLst/>
+  </dgm:styleLbl>
+  <dgm:styleLbl name="node1">
+    <dgm:fillClrLst meth="repeat">
+      <a:schemeClr val="accent1"/>
+    </dgm:fillClrLst>
+    <dgm:linClrLst meth="repeat">
+      <a:schemeClr val="lt1"/>
+    </dgm:linClrLst>
+    <dgm:effectClrLst/>
+    <dgm:txLinClrLst/>
+    <dgm:txFillClrLst/>
+    <dgm:txEffectClrLst/>
+  </dgm:styleLbl>
+  <dgm:styleLbl name="lnNode1">
+    <dgm:fillClrLst meth="repeat">
+      <a:schemeClr val="accent1"/>
+    </dgm:fillClrLst>
+    <dgm:linClrLst meth="repeat">
+      <a:schemeClr val="lt1"/>
+    </dgm:linClrLst>
+    <dgm:effectClrLst/>
+    <dgm:txLinClrLst/>
+    <dgm:txFillClrLst/>
+    <dgm:txEffectClrLst/>
+  </dgm:styleLbl>
+  <dgm:styleLbl name="vennNode1">
+    <dgm:fillClrLst meth="repeat">
+      <a:schemeClr val="accent1">
+        <a:alpha val="50000"/>
+      </a:schemeClr>
+    </dgm:fillClrLst>
+    <dgm:linClrLst meth="repeat">
+      <a:schemeClr val="lt1"/>
+    </dgm:linClrLst>
+    <dgm:effectClrLst/>
+    <dgm:txLinClrLst/>
+    <dgm:txFillClrLst/>
+    <dgm:txEffectClrLst/>
+  </dgm:styleLbl>
+  <dgm:styleLbl name="node2">
+    <dgm:fillClrLst meth="repeat">
+      <a:schemeClr val="accent1"/>
+    </dgm:fillClrLst>
+    <dgm:linClrLst meth="repeat">
+      <a:schemeClr val="lt1"/>
+    </dgm:linClrLst>
+    <dgm:effectClrLst/>
+    <dgm:txLinClrLst/>
+    <dgm:txFillClrLst/>
+    <dgm:txEffectClrLst/>
+  </dgm:styleLbl>
+  <dgm:styleLbl name="node3">
+    <dgm:fillClrLst meth="repeat">
+      <a:schemeClr val="accent1"/>
+    </dgm:fillClrLst>
+    <dgm:linClrLst meth="repeat">
+      <a:schemeClr val="lt1"/>
+    </dgm:linClrLst>
+    <dgm:effectClrLst/>
+    <dgm:txLinClrLst/>
+    <dgm:txFillClrLst/>
+    <dgm:txEffectClrLst/>
+  </dgm:styleLbl>
+  <dgm:styleLbl name="node4">
+    <dgm:fillClrLst meth="repeat">
+      <a:schemeClr val="accent1"/>
+    </dgm:fillClrLst>
+    <dgm:linClrLst meth="repeat">
+      <a:schemeClr val="lt1"/>
+    </dgm:linClrLst>
+    <dgm:effectClrLst/>
+    <dgm:txLinClrLst/>
+    <dgm:txFillClrLst/>
+    <dgm:txEffectClrLst/>
+  </dgm:styleLbl>
+  <dgm:styleLbl name="fgImgPlace1">
+    <dgm:fillClrLst meth="repeat">
+      <a:schemeClr val="accent1">
+        <a:tint val="50000"/>
+      </a:schemeClr>
+    </dgm:fillClrLst>
+    <dgm:linClrLst meth="repeat">
+      <a:schemeClr val="lt1"/>
+    </dgm:linClrLst>
+    <dgm:effectClrLst/>
+    <dgm:txLinClrLst/>
+    <dgm:txFillClrLst meth="repeat">
+      <a:schemeClr val="lt1"/>
+    </dgm:txFillClrLst>
+    <dgm:txEffectClrLst/>
+  </dgm:styleLbl>
+  <dgm:styleLbl name="alignImgPlace1">
+    <dgm:fillClrLst meth="repeat">
+      <a:schemeClr val="accent1">
+        <a:tint val="50000"/>
+      </a:schemeClr>
+    </dgm:fillClrLst>
+    <dgm:linClrLst meth="repeat">
+      <a:schemeClr val="lt1"/>
+    </dgm:linClrLst>
+    <dgm:effectClrLst/>
+    <dgm:txLinClrLst/>
+    <dgm:txFillClrLst meth="repeat">
+      <a:schemeClr val="lt1"/>
+    </dgm:txFillClrLst>
+    <dgm:txEffectClrLst/>
+  </dgm:styleLbl>
+  <dgm:styleLbl name="bgImgPlace1">
+    <dgm:fillClrLst meth="repeat">
+      <a:schemeClr val="accent1">
+        <a:tint val="50000"/>
+      </a:schemeClr>
+    </dgm:fillClrLst>
+    <dgm:linClrLst meth="repeat">
+      <a:schemeClr val="lt1"/>
+    </dgm:linClrLst>
+    <dgm:effectClrLst/>
+    <dgm:txLinClrLst/>
+    <dgm:txFillClrLst meth="repeat">
+      <a:schemeClr val="lt1"/>
+    </dgm:txFillClrLst>
+    <dgm:txEffectClrLst/>
+  </dgm:styleLbl>
+  <dgm:styleLbl name="sibTrans2D1">
+    <dgm:fillClrLst meth="repeat">
+      <a:schemeClr val="accent1">
+        <a:tint val="60000"/>
+      </a:schemeClr>
+    </dgm:fillClrLst>
+    <dgm:linClrLst meth="repeat">
+      <a:schemeClr val="accent1">
+        <a:tint val="60000"/>
+      </a:schemeClr>
+    </dgm:linClrLst>
+    <dgm:effectClrLst/>
+    <dgm:txLinClrLst/>
+    <dgm:txFillClrLst/>
+    <dgm:txEffectClrLst/>
+  </dgm:styleLbl>
+  <dgm:styleLbl name="fgSibTrans2D1">
+    <dgm:fillClrLst meth="repeat">
+      <a:schemeClr val="accent1">
+        <a:tint val="60000"/>
+      </a:schemeClr>
+    </dgm:fillClrLst>
+    <dgm:linClrLst meth="repeat">
+      <a:schemeClr val="accent1">
+        <a:tint val="60000"/>
+      </a:schemeClr>
+    </dgm:linClrLst>
+    <dgm:effectClrLst/>
+    <dgm:txLinClrLst/>
+    <dgm:txFillClrLst/>
+    <dgm:txEffectClrLst/>
+  </dgm:styleLbl>
+  <dgm:styleLbl name="bgSibTrans2D1">
+    <dgm:fillClrLst meth="repeat">
+      <a:schemeClr val="accent1">
+        <a:tint val="60000"/>
+      </a:schemeClr>
+    </dgm:fillClrLst>
+    <dgm:linClrLst meth="repeat">
+      <a:schemeClr val="accent1">
+        <a:tint val="60000"/>
+      </a:schemeClr>
+    </dgm:linClrLst>
+    <dgm:effectClrLst/>
+    <dgm:txLinClrLst/>
+    <dgm:txFillClrLst/>
+    <dgm:txEffectClrLst/>
+  </dgm:styleLbl>
+  <dgm:styleLbl name="sibTrans1D1">
+    <dgm:fillClrLst meth="repeat">
+      <a:schemeClr val="accent1"/>
+    </dgm:fillClrLst>
+    <dgm:linClrLst meth="repeat">
+      <a:schemeClr val="accent1"/>
+    </dgm:linClrLst>
+    <dgm:effectClrLst/>
+    <dgm:txLinClrLst/>
+    <dgm:txFillClrLst meth="repeat">
+      <a:schemeClr val="tx1"/>
+    </dgm:txFillClrLst>
+    <dgm:txEffectClrLst/>
+  </dgm:styleLbl>
+  <dgm:styleLbl name="callout">
+    <dgm:fillClrLst meth="repeat">
+      <a:schemeClr val="accent1"/>
+    </dgm:fillClrLst>
+    <dgm:linClrLst meth="repeat">
+      <a:schemeClr val="accent1">
+        <a:tint val="50000"/>
+      </a:schemeClr>
+    </dgm:linClrLst>
+    <dgm:effectClrLst/>
+    <dgm:txLinClrLst/>
+    <dgm:txFillClrLst meth="repeat">
+      <a:schemeClr val="tx1"/>
+    </dgm:txFillClrLst>
+    <dgm:txEffectClrLst/>
+  </dgm:styleLbl>
+  <dgm:styleLbl name="asst0">
+    <dgm:fillClrLst meth="repeat">
+      <a:schemeClr val="accent1"/>
+    </dgm:fillClrLst>
+    <dgm:linClrLst meth="repeat">
+      <a:schemeClr val="lt1"/>
+    </dgm:linClrLst>
+    <dgm:effectClrLst/>
+    <dgm:txLinClrLst/>
+    <dgm:txFillClrLst/>
+    <dgm:txEffectClrLst/>
+  </dgm:styleLbl>
+  <dgm:styleLbl name="asst1">
+    <dgm:fillClrLst meth="repeat">
+      <a:schemeClr val="accent1"/>
+    </dgm:fillClrLst>
+    <dgm:linClrLst meth="repeat">
+      <a:schemeClr val="lt1"/>
+    </dgm:linClrLst>
+    <dgm:effectClrLst/>
+    <dgm:txLinClrLst/>
+    <dgm:txFillClrLst/>
+    <dgm:txEffectClrLst/>
+  </dgm:styleLbl>
+  <dgm:styleLbl name="asst2">
+    <dgm:fillClrLst meth="repeat">
+      <a:schemeClr val="accent1"/>
+    </dgm:fillClrLst>
+    <dgm:linClrLst meth="repeat">
+      <a:schemeClr val="lt1"/>
+    </dgm:linClrLst>
+    <dgm:effectClrLst/>
+    <dgm:txLinClrLst/>
+    <dgm:txFillClrLst/>
+    <dgm:txEffectClrLst/>
+  </dgm:styleLbl>
+  <dgm:styleLbl name="asst3">
+    <dgm:fillClrLst meth="repeat">
+      <a:schemeClr val="accent1"/>
+    </dgm:fillClrLst>
+    <dgm:linClrLst meth="repeat">
+      <a:schemeClr val="lt1"/>
+    </dgm:linClrLst>
+    <dgm:effectClrLst/>
+    <dgm:txLinClrLst/>
+    <dgm:txFillClrLst/>
+    <dgm:txEffectClrLst/>
+  </dgm:styleLbl>
+  <dgm:styleLbl name="asst4">
+    <dgm:fillClrLst meth="repeat">
+      <a:schemeClr val="accent1"/>
+    </dgm:fillClrLst>
+    <dgm:linClrLst meth="repeat">
+      <a:schemeClr val="lt1"/>
+    </dgm:linClrLst>
+    <dgm:effectClrLst/>
+    <dgm:txLinClrLst/>
+    <dgm:txFillClrLst/>
+    <dgm:txEffectClrLst/>
+  </dgm:styleLbl>
+  <dgm:styleLbl name="parChTrans2D1">
+    <dgm:fillClrLst meth="repeat">
+      <a:schemeClr val="accent1">
+        <a:tint val="60000"/>
+      </a:schemeClr>
+    </dgm:fillClrLst>
+    <dgm:linClrLst meth="repeat">
+      <a:schemeClr val="accent1">
+        <a:tint val="60000"/>
+      </a:schemeClr>
+    </dgm:linClrLst>
+    <dgm:effectClrLst/>
+    <dgm:txLinClrLst/>
+    <dgm:txFillClrLst meth="repeat">
+      <a:schemeClr val="lt1"/>
+    </dgm:txFillClrLst>
+    <dgm:txEffectClrLst/>
+  </dgm:styleLbl>
+  <dgm:styleLbl name="parChTrans2D2">
+    <dgm:fillClrLst meth="repeat">
+      <a:schemeClr val="accent1"/>
+    </dgm:fillClrLst>
+    <dgm:linClrLst meth="repeat">
+      <a:schemeClr val="accent1"/>
+    </dgm:linClrLst>
+    <dgm:effectClrLst/>
+    <dgm:txLinClrLst/>
+    <dgm:txFillClrLst meth="repeat">
+      <a:schemeClr val="lt1"/>
+    </dgm:txFillClrLst>
+    <dgm:txEffectClrLst/>
+  </dgm:styleLbl>
+  <dgm:styleLbl name="parChTrans2D3">
+    <dgm:fillClrLst meth="repeat">
+      <a:schemeClr val="accent1"/>
+    </dgm:fillClrLst>
+    <dgm:linClrLst meth="repeat">
+      <a:schemeClr val="accent1"/>
+    </dgm:linClrLst>
+    <dgm:effectClrLst/>
+    <dgm:txLinClrLst/>
+    <dgm:txFillClrLst meth="repeat">
+      <a:schemeClr val="lt1"/>
+    </dgm:txFillClrLst>
+    <dgm:txEffectClrLst/>
+  </dgm:styleLbl>
+  <dgm:styleLbl name="parChTrans2D4">
+    <dgm:fillClrLst meth="repeat">
+      <a:schemeClr val="accent1"/>
+    </dgm:fillClrLst>
+    <dgm:linClrLst meth="repeat">
+      <a:schemeClr val="accent1"/>
+    </dgm:linClrLst>
+    <dgm:effectClrLst/>
+    <dgm:txLinClrLst/>
+    <dgm:txFillClrLst meth="repeat">
+      <a:schemeClr val="lt1"/>
+    </dgm:txFillClrLst>
+    <dgm:txEffectClrLst/>
+  </dgm:styleLbl>
+  <dgm:styleLbl name="parChTrans1D1">
+    <dgm:fillClrLst meth="repeat">
+      <a:schemeClr val="accent1"/>
+    </dgm:fillClrLst>
+    <dgm:linClrLst meth="repeat">
+      <a:schemeClr val="accent1">
+        <a:shade val="60000"/>
+      </a:schemeClr>
+    </dgm:linClrLst>
+    <dgm:effectClrLst/>
+    <dgm:txLinClrLst/>
+    <dgm:txFillClrLst meth="repeat">
+      <a:schemeClr val="tx1"/>
+    </dgm:txFillClrLst>
+    <dgm:txEffectClrLst/>
+  </dgm:styleLbl>
+  <dgm:styleLbl name="parChTrans1D2">
+    <dgm:fillClrLst meth="repeat">
+      <a:schemeClr val="accent1"/>
+    </dgm:fillClrLst>
+    <dgm:linClrLst meth="repeat">
+      <a:schemeClr val="accent1">
+        <a:shade val="60000"/>
+      </a:schemeClr>
+    </dgm:linClrLst>
+    <dgm:effectClrLst/>
+    <dgm:txLinClrLst/>
+    <dgm:txFillClrLst meth="repeat">
+      <a:schemeClr val="tx1"/>
+    </dgm:txFillClrLst>
+    <dgm:txEffectClrLst/>
+  </dgm:styleLbl>
+  <dgm:styleLbl name="parChTrans1D3">
+    <dgm:fillClrLst meth="repeat">
+      <a:schemeClr val="accent1"/>
+    </dgm:fillClrLst>
+    <dgm:linClrLst meth="repeat">
+      <a:schemeClr val="accent1">
+        <a:shade val="80000"/>
+      </a:schemeClr>
+    </dgm:linClrLst>
+    <dgm:effectClrLst/>
+    <dgm:txLinClrLst/>
+    <dgm:txFillClrLst meth="repeat">
+      <a:schemeClr val="tx1"/>
+    </dgm:txFillClrLst>
+    <dgm:txEffectClrLst/>
+  </dgm:styleLbl>
+  <dgm:styleLbl name="parChTrans1D4">
+    <dgm:fillClrLst meth="repeat">
+      <a:schemeClr val="accent1"/>
+    </dgm:fillClrLst>
+    <dgm:linClrLst meth="repeat">
+      <a:schemeClr val="accent1">
+        <a:shade val="80000"/>
+      </a:schemeClr>
+    </dgm:linClrLst>
+    <dgm:effectClrLst/>
+    <dgm:txLinClrLst/>
+    <dgm:txFillClrLst meth="repeat">
+      <a:schemeClr val="tx1"/>
+    </dgm:txFillClrLst>
+    <dgm:txEffectClrLst/>
+  </dgm:styleLbl>
+  <dgm:styleLbl name="fgAcc1">
+    <dgm:fillClrLst meth="repeat">
+      <a:schemeClr val="lt1">
+        <a:alpha val="90000"/>
+      </a:schemeClr>
+    </dgm:fillClrLst>
+    <dgm:linClrLst meth="repeat">
+      <a:schemeClr val="accent1"/>
+    </dgm:linClrLst>
+    <dgm:effectClrLst/>
+    <dgm:txLinClrLst/>
+    <dgm:txFillClrLst meth="repeat">
+      <a:schemeClr val="dk1"/>
+    </dgm:txFillClrLst>
+    <dgm:txEffectClrLst/>
+  </dgm:styleLbl>
+  <dgm:styleLbl name="conFgAcc1">
+    <dgm:fillClrLst meth="repeat">
+      <a:schemeClr val="lt1">
+        <a:alpha val="90000"/>
+      </a:schemeClr>
+    </dgm:fillClrLst>
+    <dgm:linClrLst meth="repeat">
+      <a:schemeClr val="accent1"/>
+    </dgm:linClrLst>
+    <dgm:effectClrLst/>
+    <dgm:txLinClrLst/>
+    <dgm:txFillClrLst meth="repeat">
+      <a:schemeClr val="dk1"/>
+    </dgm:txFillClrLst>
+    <dgm:txEffectClrLst/>
+  </dgm:styleLbl>
+  <dgm:styleLbl name="alignAcc1">
+    <dgm:fillClrLst meth="repeat">
+      <a:schemeClr val="lt1">
+        <a:alpha val="90000"/>
+      </a:schemeClr>
+    </dgm:fillClrLst>
+    <dgm:linClrLst meth="repeat">
+      <a:schemeClr val="accent1"/>
+    </dgm:linClrLst>
+    <dgm:effectClrLst/>
+    <dgm:txLinClrLst/>
+    <dgm:txFillClrLst meth="repeat">
+      <a:schemeClr val="dk1"/>
+    </dgm:txFillClrLst>
+    <dgm:txEffectClrLst/>
+  </dgm:styleLbl>
+  <dgm:styleLbl name="trAlignAcc1">
+    <dgm:fillClrLst meth="repeat">
+      <a:schemeClr val="lt1">
+        <a:alpha val="40000"/>
+      </a:schemeClr>
+    </dgm:fillClrLst>
+    <dgm:linClrLst meth="repeat">
+      <a:schemeClr val="accent1"/>
+    </dgm:linClrLst>
+    <dgm:effectClrLst/>
+    <dgm:txLinClrLst/>
+    <dgm:txFillClrLst meth="repeat">
+      <a:schemeClr val="dk1"/>
+    </dgm:txFillClrLst>
+    <dgm:txEffectClrLst/>
+  </dgm:styleLbl>
+  <dgm:styleLbl name="bgAcc1">
+    <dgm:fillClrLst meth="repeat">
+      <a:schemeClr val="lt1">
+        <a:alpha val="90000"/>
+      </a:schemeClr>
+    </dgm:fillClrLst>
+    <dgm:linClrLst meth="repeat">
+      <a:schemeClr val="accent1"/>
+    </dgm:linClrLst>
+    <dgm:effectClrLst/>
+    <dgm:txLinClrLst/>
+    <dgm:txFillClrLst meth="repeat">
+      <a:schemeClr val="dk1"/>
+    </dgm:txFillClrLst>
+    <dgm:txEffectClrLst/>
+  </dgm:styleLbl>
+  <dgm:styleLbl name="solidFgAcc1">
+    <dgm:fillClrLst meth="repeat">
+      <a:schemeClr val="lt1"/>
+    </dgm:fillClrLst>
+    <dgm:linClrLst meth="repeat">
+      <a:schemeClr val="accent1"/>
+    </dgm:linClrLst>
+    <dgm:effectClrLst/>
+    <dgm:txLinClrLst/>
+    <dgm:txFillClrLst meth="repeat">
+      <a:schemeClr val="dk1"/>
+    </dgm:txFillClrLst>
+    <dgm:txEffectClrLst/>
+  </dgm:styleLbl>
+  <dgm:styleLbl name="solidAlignAcc1">
+    <dgm:fillClrLst meth="repeat">
+      <a:schemeClr val="lt1"/>
+    </dgm:fillClrLst>
+    <dgm:linClrLst meth="repeat">
+      <a:schemeClr val="accent1"/>
+    </dgm:linClrLst>
+    <dgm:effectClrLst/>
+    <dgm:txLinClrLst/>
+    <dgm:txFillClrLst meth="repeat">
+      <a:schemeClr val="dk1"/>
+    </dgm:txFillClrLst>
+    <dgm:txEffectClrLst/>
+  </dgm:styleLbl>
+  <dgm:styleLbl name="solidBgAcc1">
+    <dgm:fillClrLst meth="repeat">
+      <a:schemeClr val="lt1"/>
+    </dgm:fillClrLst>
+    <dgm:linClrLst meth="repeat">
+      <a:schemeClr val="accent1"/>
+    </dgm:linClrLst>
+    <dgm:effectClrLst/>
+    <dgm:txLinClrLst/>
+    <dgm:txFillClrLst meth="repeat">
+      <a:schemeClr val="dk1"/>
+    </dgm:txFillClrLst>
+    <dgm:txEffectClrLst/>
+  </dgm:styleLbl>
+  <dgm:styleLbl name="fgAccFollowNode1">
+    <dgm:fillClrLst meth="repeat">
+      <a:schemeClr val="accent1">
+        <a:alpha val="90000"/>
+        <a:tint val="40000"/>
+      </a:schemeClr>
+    </dgm:fillClrLst>
+    <dgm:linClrLst meth="repeat">
+      <a:schemeClr val="accent1">
+        <a:alpha val="90000"/>
+        <a:tint val="40000"/>
+      </a:schemeClr>
+    </dgm:linClrLst>
+    <dgm:effectClrLst/>
+    <dgm:txLinClrLst/>
+    <dgm:txFillClrLst meth="repeat">
+      <a:schemeClr val="dk1"/>
+    </dgm:txFillClrLst>
+    <dgm:txEffectClrLst/>
+  </dgm:styleLbl>
+  <dgm:styleLbl name="alignAccFollowNode1">
+    <dgm:fillClrLst meth="repeat">
+      <a:schemeClr val="accent1">
+        <a:alpha val="90000"/>
+        <a:tint val="40000"/>
+      </a:schemeClr>
+    </dgm:fillClrLst>
+    <dgm:linClrLst meth="repeat">
+      <a:schemeClr val="accent1">
+        <a:alpha val="90000"/>
+        <a:tint val="40000"/>
+      </a:schemeClr>
+    </dgm:linClrLst>
+    <dgm:effectClrLst/>
+    <dgm:txLinClrLst/>
+    <dgm:txFillClrLst meth="repeat">
+      <a:schemeClr val="dk1"/>
+    </dgm:txFillClrLst>
+    <dgm:txEffectClrLst/>
+  </dgm:styleLbl>
+  <dgm:styleLbl name="bgAccFollowNode1">
+    <dgm:fillClrLst meth="repeat">
+      <a:schemeClr val="accent1">
+        <a:alpha val="90000"/>
+        <a:tint val="40000"/>
+      </a:schemeClr>
+    </dgm:fillClrLst>
+    <dgm:linClrLst meth="repeat">
+      <a:schemeClr val="accent1">
+        <a:alpha val="90000"/>
+        <a:tint val="40000"/>
+      </a:schemeClr>
+    </dgm:linClrLst>
+    <dgm:effectClrLst/>
+    <dgm:txLinClrLst/>
+    <dgm:txFillClrLst meth="repeat">
+      <a:schemeClr val="dk1"/>
+    </dgm:txFillClrLst>
+    <dgm:txEffectClrLst/>
+  </dgm:styleLbl>
+  <dgm:styleLbl name="fgAcc0">
+    <dgm:fillClrLst meth="repeat">
+      <a:schemeClr val="lt1">
+        <a:alpha val="90000"/>
+      </a:schemeClr>
+    </dgm:fillClrLst>
+    <dgm:linClrLst meth="repeat">
+      <a:schemeClr val="accent1"/>
+    </dgm:linClrLst>
+    <dgm:effectClrLst/>
+    <dgm:txLinClrLst/>
+    <dgm:txFillClrLst meth="repeat">
+      <a:schemeClr val="dk1"/>
+    </dgm:txFillClrLst>
+    <dgm:txEffectClrLst/>
+  </dgm:styleLbl>
+  <dgm:styleLbl name="fgAcc2">
+    <dgm:fillClrLst meth="repeat">
+      <a:schemeClr val="lt1">
+        <a:alpha val="90000"/>
+      </a:schemeClr>
+    </dgm:fillClrLst>
+    <dgm:linClrLst meth="repeat">
+      <a:schemeClr val="accent1"/>
+    </dgm:linClrLst>
+    <dgm:effectClrLst/>
+    <dgm:txLinClrLst/>
+    <dgm:txFillClrLst meth="repeat">
+      <a:schemeClr val="dk1"/>
+    </dgm:txFillClrLst>
+    <dgm:txEffectClrLst/>
+  </dgm:styleLbl>
+  <dgm:styleLbl name="fgAcc3">
+    <dgm:fillClrLst meth="repeat">
+      <a:schemeClr val="lt1">
+        <a:alpha val="90000"/>
+      </a:schemeClr>
+    </dgm:fillClrLst>
+    <dgm:linClrLst meth="repeat">
+      <a:schemeClr val="accent1"/>
+    </dgm:linClrLst>
+    <dgm:effectClrLst/>
+    <dgm:txLinClrLst/>
+    <dgm:txFillClrLst meth="repeat">
+      <a:schemeClr val="dk1"/>
+    </dgm:txFillClrLst>
+    <dgm:txEffectClrLst/>
+  </dgm:styleLbl>
+  <dgm:styleLbl name="fgAcc4">
+    <dgm:fillClrLst meth="repeat">
+      <a:schemeClr val="lt1">
+        <a:alpha val="90000"/>
+      </a:schemeClr>
+    </dgm:fillClrLst>
+    <dgm:linClrLst meth="repeat">
+      <a:schemeClr val="accent1"/>
+    </dgm:linClrLst>
+    <dgm:effectClrLst/>
+    <dgm:txLinClrLst/>
+    <dgm:txFillClrLst meth="repeat">
+      <a:schemeClr val="dk1"/>
+    </dgm:txFillClrLst>
+    <dgm:txEffectClrLst/>
+  </dgm:styleLbl>
+  <dgm:styleLbl name="bgShp">
+    <dgm:fillClrLst meth="repeat">
+      <a:schemeClr val="accent1">
+        <a:tint val="40000"/>
+      </a:schemeClr>
+    </dgm:fillClrLst>
+    <dgm:linClrLst meth="repeat">
+      <a:schemeClr val="accent1"/>
+    </dgm:linClrLst>
+    <dgm:effectClrLst/>
+    <dgm:txLinClrLst/>
+    <dgm:txFillClrLst meth="repeat">
+      <a:schemeClr val="dk1"/>
+    </dgm:txFillClrLst>
+    <dgm:txEffectClrLst/>
+  </dgm:styleLbl>
+  <dgm:styleLbl name="dkBgShp">
+    <dgm:fillClrLst meth="repeat">
+      <a:schemeClr val="accent1">
+        <a:shade val="80000"/>
+      </a:schemeClr>
+    </dgm:fillClrLst>
+    <dgm:linClrLst meth="repeat">
+      <a:schemeClr val="accent1"/>
+    </dgm:linClrLst>
+    <dgm:effectClrLst/>
+    <dgm:txLinClrLst/>
+    <dgm:txFillClrLst meth="repeat">
+      <a:schemeClr val="lt1"/>
+    </dgm:txFillClrLst>
+    <dgm:txEffectClrLst/>
+  </dgm:styleLbl>
+  <dgm:styleLbl name="trBgShp">
+    <dgm:fillClrLst meth="repeat">
+      <a:schemeClr val="accent1">
+        <a:tint val="50000"/>
+        <a:alpha val="40000"/>
+      </a:schemeClr>
+    </dgm:fillClrLst>
+    <dgm:linClrLst meth="repeat">
+      <a:schemeClr val="accent1"/>
+    </dgm:linClrLst>
+    <dgm:effectClrLst/>
+    <dgm:txLinClrLst/>
+    <dgm:txFillClrLst meth="repeat">
+      <a:schemeClr val="lt1"/>
+    </dgm:txFillClrLst>
+    <dgm:txEffectClrLst/>
+  </dgm:styleLbl>
+  <dgm:styleLbl name="fgShp">
+    <dgm:fillClrLst meth="repeat">
+      <a:schemeClr val="accent1">
+        <a:tint val="60000"/>
+      </a:schemeClr>
+    </dgm:fillClrLst>
+    <dgm:linClrLst meth="repeat">
+      <a:schemeClr val="lt1"/>
+    </dgm:linClrLst>
+    <dgm:effectClrLst/>
+    <dgm:txLinClrLst/>
+    <dgm:txFillClrLst meth="repeat">
+      <a:schemeClr val="dk1"/>
+    </dgm:txFillClrLst>
+    <dgm:txEffectClrLst/>
+  </dgm:styleLbl>
+  <dgm:styleLbl name="revTx">
+    <dgm:fillClrLst meth="repeat">
+      <a:schemeClr val="lt1">
+        <a:alpha val="0"/>
+      </a:schemeClr>
+    </dgm:fillClrLst>
+    <dgm:linClrLst meth="repeat">
+      <a:schemeClr val="dk1">
+        <a:alpha val="0"/>
+      </a:schemeClr>
+    </dgm:linClrLst>
+    <dgm:effectClrLst/>
+    <dgm:txLinClrLst/>
+    <dgm:txFillClrLst meth="repeat">
+      <a:schemeClr val="tx1"/>
+    </dgm:txFillClrLst>
+    <dgm:txEffectClrLst/>
+  </dgm:styleLbl>
+</dgm:colorsDef>
+</file>
+
+<file path=ppt/diagrams/data1.xml><?xml version="1.0" encoding="utf-8"?>
+<dgm:dataModel xmlns:dgm="http://schemas.openxmlformats.org/drawingml/2006/diagram" xmlns:a="http://schemas.openxmlformats.org/drawingml/2006/main">
+  <dgm:ptLst>
+    <dgm:pt modelId="{D7E5864B-8D14-4B36-89DD-680E3E8AFB94}" type="doc">
+      <dgm:prSet loTypeId="urn:microsoft.com/office/officeart/2018/2/layout/IconLabelList" loCatId="icon" qsTypeId="urn:microsoft.com/office/officeart/2005/8/quickstyle/simple1#1" qsCatId="simple" csTypeId="urn:microsoft.com/office/officeart/2005/8/colors/accent1_2#1" csCatId="accent1" phldr="1"/>
+      <dgm:spPr/>
+      <dgm:t>
+        <a:bodyPr/>
+        <a:lstStyle/>
+        <a:p>
+          <a:endParaRPr lang="en-US"/>
+        </a:p>
+      </dgm:t>
+    </dgm:pt>
+    <dgm:pt modelId="{655F724C-0FE3-433C-AD56-1C856B8A5239}">
+      <dgm:prSet/>
+      <dgm:spPr/>
+      <dgm:t>
+        <a:bodyPr/>
+        <a:lstStyle/>
+        <a:p>
+          <a:pPr>
+            <a:lnSpc>
+              <a:spcPct val="100000"/>
+            </a:lnSpc>
+          </a:pPr>
+          <a:r>
+            <a:rPr lang="en-US"/>
+            <a:t>•  Local deployment only; no public production URL</a:t>
+          </a:r>
+        </a:p>
+      </dgm:t>
+    </dgm:pt>
+    <dgm:pt modelId="{845E9E0A-3D1A-4E1F-B649-0E59E1060025}" type="parTrans" cxnId="{73763C07-AD96-42DF-9FDA-8A17F39D4D85}">
+      <dgm:prSet/>
+      <dgm:spPr/>
+      <dgm:t>
+        <a:bodyPr/>
+        <a:lstStyle/>
+        <a:p>
+          <a:endParaRPr lang="en-US"/>
+        </a:p>
+      </dgm:t>
+    </dgm:pt>
+    <dgm:pt modelId="{422A5CA8-CE36-4B86-8D06-67F613E86F81}" type="sibTrans" cxnId="{73763C07-AD96-42DF-9FDA-8A17F39D4D85}">
+      <dgm:prSet/>
+      <dgm:spPr/>
+      <dgm:t>
+        <a:bodyPr/>
+        <a:lstStyle/>
+        <a:p>
+          <a:endParaRPr lang="en-US"/>
+        </a:p>
+      </dgm:t>
+    </dgm:pt>
+    <dgm:pt modelId="{ADAA5705-65BC-45DF-96AA-BAEC2ABC7FB9}">
+      <dgm:prSet/>
+      <dgm:spPr/>
+      <dgm:t>
+        <a:bodyPr/>
+        <a:lstStyle/>
+        <a:p>
+          <a:pPr>
+            <a:lnSpc>
+              <a:spcPct val="100000"/>
+            </a:lnSpc>
+          </a:pPr>
+          <a:r>
+            <a:rPr lang="en-US"/>
+            <a:t>•  Grounded Ask requires an indexed corpus plus configured OpenAI or Ollama provider</a:t>
+          </a:r>
+        </a:p>
+      </dgm:t>
+    </dgm:pt>
+    <dgm:pt modelId="{3C391262-A41D-4E48-A8AB-DA8806EC25DC}" type="parTrans" cxnId="{E861373C-0884-4B08-8A05-5977712D4AC6}">
+      <dgm:prSet/>
+      <dgm:spPr/>
+      <dgm:t>
+        <a:bodyPr/>
+        <a:lstStyle/>
+        <a:p>
+          <a:endParaRPr lang="en-US"/>
+        </a:p>
+      </dgm:t>
+    </dgm:pt>
+    <dgm:pt modelId="{CD7CD5A7-43B8-43D0-B905-670FC6DD3290}" type="sibTrans" cxnId="{E861373C-0884-4B08-8A05-5977712D4AC6}">
+      <dgm:prSet/>
+      <dgm:spPr/>
+      <dgm:t>
+        <a:bodyPr/>
+        <a:lstStyle/>
+        <a:p>
+          <a:endParaRPr lang="en-US"/>
+        </a:p>
+      </dgm:t>
+    </dgm:pt>
+    <dgm:pt modelId="{E9E9F1A1-5F54-4F5F-A8CA-3CC10706D776}">
+      <dgm:prSet/>
+      <dgm:spPr/>
+      <dgm:t>
+        <a:bodyPr/>
+        <a:lstStyle/>
+        <a:p>
+          <a:pPr>
+            <a:lnSpc>
+              <a:spcPct val="100000"/>
+            </a:lnSpc>
+          </a:pPr>
+          <a:r>
+            <a:rPr lang="en-US"/>
+            <a:t>•  Scientific outputs still require human review</a:t>
+          </a:r>
+        </a:p>
+      </dgm:t>
+    </dgm:pt>
+    <dgm:pt modelId="{FB8BFB87-65F9-4D7F-A25E-D1D84F04AAC7}" type="parTrans" cxnId="{2407F629-D3EA-4671-B84F-51D068237726}">
+      <dgm:prSet/>
+      <dgm:spPr/>
+      <dgm:t>
+        <a:bodyPr/>
+        <a:lstStyle/>
+        <a:p>
+          <a:endParaRPr lang="en-US"/>
+        </a:p>
+      </dgm:t>
+    </dgm:pt>
+    <dgm:pt modelId="{E3BEEC16-E156-4E2E-908E-A6FA6F6E799E}" type="sibTrans" cxnId="{2407F629-D3EA-4671-B84F-51D068237726}">
+      <dgm:prSet/>
+      <dgm:spPr/>
+      <dgm:t>
+        <a:bodyPr/>
+        <a:lstStyle/>
+        <a:p>
+          <a:endParaRPr lang="en-US"/>
+        </a:p>
+      </dgm:t>
+    </dgm:pt>
+    <dgm:pt modelId="{55B13F4C-1DC1-48ED-87D6-D6E64540F49B}">
+      <dgm:prSet/>
+      <dgm:spPr/>
+      <dgm:t>
+        <a:bodyPr/>
+        <a:lstStyle/>
+        <a:p>
+          <a:pPr>
+            <a:lnSpc>
+              <a:spcPct val="100000"/>
+            </a:lnSpc>
+          </a:pPr>
+          <a:r>
+            <a:rPr lang="en-US"/>
+            <a:t>•  Corpus focuses on microgravity and skeletal muscle</a:t>
+          </a:r>
+        </a:p>
+      </dgm:t>
+    </dgm:pt>
+    <dgm:pt modelId="{C95743D1-5E53-436F-AD58-E5BC5DBB490A}" type="parTrans" cxnId="{8A3FEB0E-0B16-4FDE-AF53-96D4DE14BAC1}">
+      <dgm:prSet/>
+      <dgm:spPr/>
+      <dgm:t>
+        <a:bodyPr/>
+        <a:lstStyle/>
+        <a:p>
+          <a:endParaRPr lang="en-US"/>
+        </a:p>
+      </dgm:t>
+    </dgm:pt>
+    <dgm:pt modelId="{32E52C9B-A439-4702-9B58-ACC8ACBF538D}" type="sibTrans" cxnId="{8A3FEB0E-0B16-4FDE-AF53-96D4DE14BAC1}">
+      <dgm:prSet/>
+      <dgm:spPr/>
+      <dgm:t>
+        <a:bodyPr/>
+        <a:lstStyle/>
+        <a:p>
+          <a:endParaRPr lang="en-US"/>
+        </a:p>
+      </dgm:t>
+    </dgm:pt>
+    <dgm:pt modelId="{4841D909-0ECA-47F1-B60F-CC10392949AD}">
+      <dgm:prSet/>
+      <dgm:spPr/>
+      <dgm:t>
+        <a:bodyPr/>
+        <a:lstStyle/>
+        <a:p>
+          <a:pPr>
+            <a:lnSpc>
+              <a:spcPct val="100000"/>
+            </a:lnSpc>
+          </a:pPr>
+          <a:r>
+            <a:rPr lang="en-US"/>
+            <a:t>•  Future: stronger retrieval benchmarks, broader curated corpus, reviewer workflow, and production deployment</a:t>
+          </a:r>
+        </a:p>
+      </dgm:t>
+    </dgm:pt>
+    <dgm:pt modelId="{A7CD1A93-C9F9-47CE-93EB-5201E11A793D}" type="parTrans" cxnId="{81643F3A-1AA5-4A42-8F52-263236B90B5C}">
+      <dgm:prSet/>
+      <dgm:spPr/>
+      <dgm:t>
+        <a:bodyPr/>
+        <a:lstStyle/>
+        <a:p>
+          <a:endParaRPr lang="en-US"/>
+        </a:p>
+      </dgm:t>
+    </dgm:pt>
+    <dgm:pt modelId="{130EC4CB-714D-4E1C-B7B5-16D8B46F6D8E}" type="sibTrans" cxnId="{81643F3A-1AA5-4A42-8F52-263236B90B5C}">
+      <dgm:prSet/>
+      <dgm:spPr/>
+      <dgm:t>
+        <a:bodyPr/>
+        <a:lstStyle/>
+        <a:p>
+          <a:endParaRPr lang="en-US"/>
+        </a:p>
+      </dgm:t>
+    </dgm:pt>
+    <dgm:pt modelId="{BE080DBF-1A07-4576-93F7-55277512753A}">
+      <dgm:prSet/>
+      <dgm:spPr/>
+      <dgm:t>
+        <a:bodyPr/>
+        <a:lstStyle/>
+        <a:p>
+          <a:pPr>
+            <a:lnSpc>
+              <a:spcPct val="100000"/>
+            </a:lnSpc>
+          </a:pPr>
+          <a:r>
+            <a:rPr lang="en-US"/>
+            <a:t>•  Graph extraction remains experimental; no graph database in the MVP</a:t>
+          </a:r>
+        </a:p>
+      </dgm:t>
+    </dgm:pt>
+    <dgm:pt modelId="{9C927B6E-BDD5-4F92-A92E-4CE52227AA74}" type="parTrans" cxnId="{B422EFD3-70CF-4883-A7CC-C33E917BC4A6}">
+      <dgm:prSet/>
+      <dgm:spPr/>
+      <dgm:t>
+        <a:bodyPr/>
+        <a:lstStyle/>
+        <a:p>
+          <a:endParaRPr lang="en-US"/>
+        </a:p>
+      </dgm:t>
+    </dgm:pt>
+    <dgm:pt modelId="{34C30DFD-0D0D-41AE-AEF5-76F5EADD3709}" type="sibTrans" cxnId="{B422EFD3-70CF-4883-A7CC-C33E917BC4A6}">
+      <dgm:prSet/>
+      <dgm:spPr/>
+      <dgm:t>
+        <a:bodyPr/>
+        <a:lstStyle/>
+        <a:p>
+          <a:endParaRPr lang="en-US"/>
+        </a:p>
+      </dgm:t>
+    </dgm:pt>
+    <dgm:pt modelId="{989C3F12-1DE6-4B34-83FC-42455D24DC64}" type="pres">
+      <dgm:prSet presAssocID="{D7E5864B-8D14-4B36-89DD-680E3E8AFB94}" presName="root" presStyleCnt="0">
+        <dgm:presLayoutVars>
+          <dgm:dir/>
+          <dgm:resizeHandles val="exact"/>
+        </dgm:presLayoutVars>
+      </dgm:prSet>
+      <dgm:spPr/>
+    </dgm:pt>
+    <dgm:pt modelId="{A9D239A2-D8D0-49CF-8AFC-DD6E5D4C31B6}" type="pres">
+      <dgm:prSet presAssocID="{655F724C-0FE3-433C-AD56-1C856B8A5239}" presName="compNode" presStyleCnt="0"/>
+      <dgm:spPr/>
+    </dgm:pt>
+    <dgm:pt modelId="{8C9ED2B8-5F0F-44D6-BB47-B52AA1070A65}" type="pres">
+      <dgm:prSet presAssocID="{655F724C-0FE3-433C-AD56-1C856B8A5239}" presName="iconRect" presStyleLbl="node1" presStyleIdx="0" presStyleCnt="6"/>
+      <dgm:spPr>
+        <a:blipFill>
+          <a:blip xmlns:r="http://schemas.openxmlformats.org/officeDocument/2006/relationships">
+            <a:extLst>
+              <a:ext uri="{28A0092B-C50C-407E-A947-70E740481C1C}">
+                <a14:useLocalDpi xmlns:a14="http://schemas.microsoft.com/office/drawing/2010/main" val="0"/>
+              </a:ext>
+              <a:ext uri="{96DAC541-7B7A-43D3-8B79-37D633B846F1}">
+                <asvg:svgBlip xmlns:asvg="http://schemas.microsoft.com/office/drawing/2016/SVG/main" r:embed="rId1"/>
+              </a:ext>
+            </a:extLst>
+          </a:blip>
+          <a:stretch>
+            <a:fillRect/>
+          </a:stretch>
+        </a:blipFill>
+      </dgm:spPr>
+      <dgm:extLst>
+        <a:ext uri="{E40237B7-FDA0-4F09-8148-C483321AD2D9}">
+          <dgm14:cNvPr xmlns:dgm14="http://schemas.microsoft.com/office/drawing/2010/diagram" id="0" name="" descr="Server"/>
+        </a:ext>
+      </dgm:extLst>
+    </dgm:pt>
+    <dgm:pt modelId="{AFD85991-1D28-4CA0-82B5-85ADEDFD21D8}" type="pres">
+      <dgm:prSet presAssocID="{655F724C-0FE3-433C-AD56-1C856B8A5239}" presName="spaceRect" presStyleCnt="0"/>
+      <dgm:spPr/>
+    </dgm:pt>
+    <dgm:pt modelId="{1557FBA4-4C71-4185-BE01-539A645F79CC}" type="pres">
+      <dgm:prSet presAssocID="{655F724C-0FE3-433C-AD56-1C856B8A5239}" presName="textRect" presStyleLbl="revTx" presStyleIdx="0" presStyleCnt="6">
+        <dgm:presLayoutVars>
+          <dgm:chMax val="1"/>
+          <dgm:chPref val="1"/>
+        </dgm:presLayoutVars>
+      </dgm:prSet>
+      <dgm:spPr/>
+    </dgm:pt>
+    <dgm:pt modelId="{7B2F8A88-C3A8-43E8-981A-B7BCFB0577F0}" type="pres">
+      <dgm:prSet presAssocID="{422A5CA8-CE36-4B86-8D06-67F613E86F81}" presName="sibTrans" presStyleCnt="0"/>
+      <dgm:spPr/>
+    </dgm:pt>
+    <dgm:pt modelId="{D1A1C142-852D-4D1E-8572-5A16722E0BD4}" type="pres">
+      <dgm:prSet presAssocID="{ADAA5705-65BC-45DF-96AA-BAEC2ABC7FB9}" presName="compNode" presStyleCnt="0"/>
+      <dgm:spPr/>
+    </dgm:pt>
+    <dgm:pt modelId="{748D82E9-9BB4-439A-B265-335B5C1C1506}" type="pres">
+      <dgm:prSet presAssocID="{ADAA5705-65BC-45DF-96AA-BAEC2ABC7FB9}" presName="iconRect" presStyleLbl="node1" presStyleIdx="1" presStyleCnt="6"/>
+      <dgm:spPr>
+        <a:blipFill>
+          <a:blip xmlns:r="http://schemas.openxmlformats.org/officeDocument/2006/relationships">
+            <a:extLst>
+              <a:ext uri="{28A0092B-C50C-407E-A947-70E740481C1C}">
+                <a14:useLocalDpi xmlns:a14="http://schemas.microsoft.com/office/drawing/2010/main" val="0"/>
+              </a:ext>
+              <a:ext uri="{96DAC541-7B7A-43D3-8B79-37D633B846F1}">
+                <asvg:svgBlip xmlns:asvg="http://schemas.microsoft.com/office/drawing/2016/SVG/main" r:embed="rId2"/>
+              </a:ext>
+            </a:extLst>
+          </a:blip>
+          <a:stretch>
+            <a:fillRect/>
+          </a:stretch>
+        </a:blipFill>
+      </dgm:spPr>
+      <dgm:extLst>
+        <a:ext uri="{E40237B7-FDA0-4F09-8148-C483321AD2D9}">
+          <dgm14:cNvPr xmlns:dgm14="http://schemas.microsoft.com/office/drawing/2010/diagram" id="0" name="" descr="Database"/>
+        </a:ext>
+      </dgm:extLst>
+    </dgm:pt>
+    <dgm:pt modelId="{53373FD7-1C88-45E5-82D6-19FD0ECC520B}" type="pres">
+      <dgm:prSet presAssocID="{ADAA5705-65BC-45DF-96AA-BAEC2ABC7FB9}" presName="spaceRect" presStyleCnt="0"/>
+      <dgm:spPr/>
+    </dgm:pt>
+    <dgm:pt modelId="{8D039C46-DB95-453B-A120-9BD6217202A5}" type="pres">
+      <dgm:prSet presAssocID="{ADAA5705-65BC-45DF-96AA-BAEC2ABC7FB9}" presName="textRect" presStyleLbl="revTx" presStyleIdx="1" presStyleCnt="6">
+        <dgm:presLayoutVars>
+          <dgm:chMax val="1"/>
+          <dgm:chPref val="1"/>
+        </dgm:presLayoutVars>
+      </dgm:prSet>
+      <dgm:spPr/>
+    </dgm:pt>
+    <dgm:pt modelId="{B67AB8C9-4C56-4D55-947E-B352458068E0}" type="pres">
+      <dgm:prSet presAssocID="{CD7CD5A7-43B8-43D0-B905-670FC6DD3290}" presName="sibTrans" presStyleCnt="0"/>
+      <dgm:spPr/>
+    </dgm:pt>
+    <dgm:pt modelId="{99E3F4EC-AFB3-4E06-90A4-A99B4CCE9511}" type="pres">
+      <dgm:prSet presAssocID="{E9E9F1A1-5F54-4F5F-A8CA-3CC10706D776}" presName="compNode" presStyleCnt="0"/>
+      <dgm:spPr/>
+    </dgm:pt>
+    <dgm:pt modelId="{B6F205E8-8DD2-4F29-B9D6-37E66D1FC58F}" type="pres">
+      <dgm:prSet presAssocID="{E9E9F1A1-5F54-4F5F-A8CA-3CC10706D776}" presName="iconRect" presStyleLbl="node1" presStyleIdx="2" presStyleCnt="6"/>
+      <dgm:spPr>
+        <a:blipFill>
+          <a:blip xmlns:r="http://schemas.openxmlformats.org/officeDocument/2006/relationships">
+            <a:extLst>
+              <a:ext uri="{28A0092B-C50C-407E-A947-70E740481C1C}">
+                <a14:useLocalDpi xmlns:a14="http://schemas.microsoft.com/office/drawing/2010/main" val="0"/>
+              </a:ext>
+              <a:ext uri="{96DAC541-7B7A-43D3-8B79-37D633B846F1}">
+                <asvg:svgBlip xmlns:asvg="http://schemas.microsoft.com/office/drawing/2016/SVG/main" r:embed="rId3"/>
+              </a:ext>
+            </a:extLst>
+          </a:blip>
+          <a:stretch>
+            <a:fillRect/>
+          </a:stretch>
+        </a:blipFill>
+      </dgm:spPr>
+      <dgm:extLst>
+        <a:ext uri="{E40237B7-FDA0-4F09-8148-C483321AD2D9}">
+          <dgm14:cNvPr xmlns:dgm14="http://schemas.microsoft.com/office/drawing/2010/diagram" id="0" name="" descr="Flask"/>
+        </a:ext>
+      </dgm:extLst>
+    </dgm:pt>
+    <dgm:pt modelId="{34E05C53-073D-4938-85BE-86CA894B610E}" type="pres">
+      <dgm:prSet presAssocID="{E9E9F1A1-5F54-4F5F-A8CA-3CC10706D776}" presName="spaceRect" presStyleCnt="0"/>
+      <dgm:spPr/>
+    </dgm:pt>
+    <dgm:pt modelId="{B04D4E1A-9E43-4766-BE67-38F98048B9C4}" type="pres">
+      <dgm:prSet presAssocID="{E9E9F1A1-5F54-4F5F-A8CA-3CC10706D776}" presName="textRect" presStyleLbl="revTx" presStyleIdx="2" presStyleCnt="6">
+        <dgm:presLayoutVars>
+          <dgm:chMax val="1"/>
+          <dgm:chPref val="1"/>
+        </dgm:presLayoutVars>
+      </dgm:prSet>
+      <dgm:spPr/>
+    </dgm:pt>
+    <dgm:pt modelId="{E950B444-3E44-4CE1-AD1D-75DA7588D22A}" type="pres">
+      <dgm:prSet presAssocID="{E3BEEC16-E156-4E2E-908E-A6FA6F6E799E}" presName="sibTrans" presStyleCnt="0"/>
+      <dgm:spPr/>
+    </dgm:pt>
+    <dgm:pt modelId="{B1C7748F-D882-4E4B-9EBF-B3CC22E53258}" type="pres">
+      <dgm:prSet presAssocID="{55B13F4C-1DC1-48ED-87D6-D6E64540F49B}" presName="compNode" presStyleCnt="0"/>
+      <dgm:spPr/>
+    </dgm:pt>
+    <dgm:pt modelId="{00F88EDF-63E8-4E09-8E2E-8B7137800330}" type="pres">
+      <dgm:prSet presAssocID="{55B13F4C-1DC1-48ED-87D6-D6E64540F49B}" presName="iconRect" presStyleLbl="node1" presStyleIdx="3" presStyleCnt="6"/>
+      <dgm:spPr>
+        <a:blipFill>
+          <a:blip xmlns:r="http://schemas.openxmlformats.org/officeDocument/2006/relationships">
+            <a:extLst>
+              <a:ext uri="{28A0092B-C50C-407E-A947-70E740481C1C}">
+                <a14:useLocalDpi xmlns:a14="http://schemas.microsoft.com/office/drawing/2010/main" val="0"/>
+              </a:ext>
+              <a:ext uri="{96DAC541-7B7A-43D3-8B79-37D633B846F1}">
+                <asvg:svgBlip xmlns:asvg="http://schemas.microsoft.com/office/drawing/2016/SVG/main" r:embed="rId4"/>
+              </a:ext>
+            </a:extLst>
+          </a:blip>
+          <a:stretch>
+            <a:fillRect/>
+          </a:stretch>
+        </a:blipFill>
+      </dgm:spPr>
+      <dgm:extLst>
+        <a:ext uri="{E40237B7-FDA0-4F09-8148-C483321AD2D9}">
+          <dgm14:cNvPr xmlns:dgm14="http://schemas.microsoft.com/office/drawing/2010/diagram" id="0" name="" descr="Brain"/>
+        </a:ext>
+      </dgm:extLst>
+    </dgm:pt>
+    <dgm:pt modelId="{849D82F4-6709-4AE7-B4DD-083B891442E8}" type="pres">
+      <dgm:prSet presAssocID="{55B13F4C-1DC1-48ED-87D6-D6E64540F49B}" presName="spaceRect" presStyleCnt="0"/>
+      <dgm:spPr/>
+    </dgm:pt>
+    <dgm:pt modelId="{414B806F-CFDD-4901-8D52-862E3CA26E50}" type="pres">
+      <dgm:prSet presAssocID="{55B13F4C-1DC1-48ED-87D6-D6E64540F49B}" presName="textRect" presStyleLbl="revTx" presStyleIdx="3" presStyleCnt="6">
+        <dgm:presLayoutVars>
+          <dgm:chMax val="1"/>
+          <dgm:chPref val="1"/>
+        </dgm:presLayoutVars>
+      </dgm:prSet>
+      <dgm:spPr/>
+    </dgm:pt>
+    <dgm:pt modelId="{EDFA6C46-68DE-4F4E-8BD5-DBFCB259C7D5}" type="pres">
+      <dgm:prSet presAssocID="{32E52C9B-A439-4702-9B58-ACC8ACBF538D}" presName="sibTrans" presStyleCnt="0"/>
+      <dgm:spPr/>
+    </dgm:pt>
+    <dgm:pt modelId="{39F721D3-1955-4E6D-8423-4CEB78BA2E93}" type="pres">
+      <dgm:prSet presAssocID="{4841D909-0ECA-47F1-B60F-CC10392949AD}" presName="compNode" presStyleCnt="0"/>
+      <dgm:spPr/>
+    </dgm:pt>
+    <dgm:pt modelId="{D185AC82-5F25-46B0-BBE7-61526303D853}" type="pres">
+      <dgm:prSet presAssocID="{4841D909-0ECA-47F1-B60F-CC10392949AD}" presName="iconRect" presStyleLbl="node1" presStyleIdx="4" presStyleCnt="6"/>
+      <dgm:spPr>
+        <a:blipFill>
+          <a:blip xmlns:r="http://schemas.openxmlformats.org/officeDocument/2006/relationships">
+            <a:extLst>
+              <a:ext uri="{28A0092B-C50C-407E-A947-70E740481C1C}">
+                <a14:useLocalDpi xmlns:a14="http://schemas.microsoft.com/office/drawing/2010/main" val="0"/>
+              </a:ext>
+              <a:ext uri="{96DAC541-7B7A-43D3-8B79-37D633B846F1}">
+                <asvg:svgBlip xmlns:asvg="http://schemas.microsoft.com/office/drawing/2016/SVG/main" r:embed="rId5"/>
+              </a:ext>
+            </a:extLst>
+          </a:blip>
+          <a:stretch>
+            <a:fillRect/>
+          </a:stretch>
+        </a:blipFill>
+      </dgm:spPr>
+      <dgm:extLst>
+        <a:ext uri="{E40237B7-FDA0-4F09-8148-C483321AD2D9}">
+          <dgm14:cNvPr xmlns:dgm14="http://schemas.microsoft.com/office/drawing/2010/diagram" id="0" name="" descr="Document"/>
+        </a:ext>
+      </dgm:extLst>
+    </dgm:pt>
+    <dgm:pt modelId="{5E7C3065-1A91-422C-B2D3-35633DEBFA0A}" type="pres">
+      <dgm:prSet presAssocID="{4841D909-0ECA-47F1-B60F-CC10392949AD}" presName="spaceRect" presStyleCnt="0"/>
+      <dgm:spPr/>
+    </dgm:pt>
+    <dgm:pt modelId="{3D0B3615-2CD5-496A-BC99-DE4A243DE9BA}" type="pres">
+      <dgm:prSet presAssocID="{4841D909-0ECA-47F1-B60F-CC10392949AD}" presName="textRect" presStyleLbl="revTx" presStyleIdx="4" presStyleCnt="6">
+        <dgm:presLayoutVars>
+          <dgm:chMax val="1"/>
+          <dgm:chPref val="1"/>
+        </dgm:presLayoutVars>
+      </dgm:prSet>
+      <dgm:spPr/>
+    </dgm:pt>
+    <dgm:pt modelId="{5D60E614-D225-4E91-A549-EEC05826BBEE}" type="pres">
+      <dgm:prSet presAssocID="{130EC4CB-714D-4E1C-B7B5-16D8B46F6D8E}" presName="sibTrans" presStyleCnt="0"/>
+      <dgm:spPr/>
+    </dgm:pt>
+    <dgm:pt modelId="{EC31F4B1-B870-4217-BFF2-48917C909CAC}" type="pres">
+      <dgm:prSet presAssocID="{BE080DBF-1A07-4576-93F7-55277512753A}" presName="compNode" presStyleCnt="0"/>
+      <dgm:spPr/>
+    </dgm:pt>
+    <dgm:pt modelId="{CD089A89-7A1F-471B-AE09-999296963FA3}" type="pres">
+      <dgm:prSet presAssocID="{BE080DBF-1A07-4576-93F7-55277512753A}" presName="iconRect" presStyleLbl="node1" presStyleIdx="5" presStyleCnt="6"/>
+      <dgm:spPr>
+        <a:blipFill>
+          <a:blip xmlns:r="http://schemas.openxmlformats.org/officeDocument/2006/relationships">
+            <a:extLst>
+              <a:ext uri="{28A0092B-C50C-407E-A947-70E740481C1C}">
+                <a14:useLocalDpi xmlns:a14="http://schemas.microsoft.com/office/drawing/2010/main" val="0"/>
+              </a:ext>
+              <a:ext uri="{96DAC541-7B7A-43D3-8B79-37D633B846F1}">
+                <asvg:svgBlip xmlns:asvg="http://schemas.microsoft.com/office/drawing/2016/SVG/main" r:embed="rId6"/>
+              </a:ext>
+            </a:extLst>
+          </a:blip>
+          <a:stretch>
+            <a:fillRect/>
+          </a:stretch>
+        </a:blipFill>
+      </dgm:spPr>
+      <dgm:extLst>
+        <a:ext uri="{E40237B7-FDA0-4F09-8148-C483321AD2D9}">
+          <dgm14:cNvPr xmlns:dgm14="http://schemas.microsoft.com/office/drawing/2010/diagram" id="0" name="" descr="Statistics"/>
+        </a:ext>
+      </dgm:extLst>
+    </dgm:pt>
+    <dgm:pt modelId="{056CA989-856B-43AF-A529-9BEE2D5F3728}" type="pres">
+      <dgm:prSet presAssocID="{BE080DBF-1A07-4576-93F7-55277512753A}" presName="spaceRect" presStyleCnt="0"/>
+      <dgm:spPr/>
+    </dgm:pt>
+    <dgm:pt modelId="{DDE195DC-E6A4-4F62-9AD1-D43E0C9C96B4}" type="pres">
+      <dgm:prSet presAssocID="{BE080DBF-1A07-4576-93F7-55277512753A}" presName="textRect" presStyleLbl="revTx" presStyleIdx="5" presStyleCnt="6">
+        <dgm:presLayoutVars>
+          <dgm:chMax val="1"/>
+          <dgm:chPref val="1"/>
+        </dgm:presLayoutVars>
+      </dgm:prSet>
+      <dgm:spPr/>
+    </dgm:pt>
+  </dgm:ptLst>
+  <dgm:cxnLst>
+    <dgm:cxn modelId="{73763C07-AD96-42DF-9FDA-8A17F39D4D85}" srcId="{D7E5864B-8D14-4B36-89DD-680E3E8AFB94}" destId="{655F724C-0FE3-433C-AD56-1C856B8A5239}" srcOrd="0" destOrd="0" parTransId="{845E9E0A-3D1A-4E1F-B649-0E59E1060025}" sibTransId="{422A5CA8-CE36-4B86-8D06-67F613E86F81}"/>
+    <dgm:cxn modelId="{8A3FEB0E-0B16-4FDE-AF53-96D4DE14BAC1}" srcId="{D7E5864B-8D14-4B36-89DD-680E3E8AFB94}" destId="{55B13F4C-1DC1-48ED-87D6-D6E64540F49B}" srcOrd="3" destOrd="0" parTransId="{C95743D1-5E53-436F-AD58-E5BC5DBB490A}" sibTransId="{32E52C9B-A439-4702-9B58-ACC8ACBF538D}"/>
+    <dgm:cxn modelId="{2407F629-D3EA-4671-B84F-51D068237726}" srcId="{D7E5864B-8D14-4B36-89DD-680E3E8AFB94}" destId="{E9E9F1A1-5F54-4F5F-A8CA-3CC10706D776}" srcOrd="2" destOrd="0" parTransId="{FB8BFB87-65F9-4D7F-A25E-D1D84F04AAC7}" sibTransId="{E3BEEC16-E156-4E2E-908E-A6FA6F6E799E}"/>
+    <dgm:cxn modelId="{81643F3A-1AA5-4A42-8F52-263236B90B5C}" srcId="{D7E5864B-8D14-4B36-89DD-680E3E8AFB94}" destId="{4841D909-0ECA-47F1-B60F-CC10392949AD}" srcOrd="4" destOrd="0" parTransId="{A7CD1A93-C9F9-47CE-93EB-5201E11A793D}" sibTransId="{130EC4CB-714D-4E1C-B7B5-16D8B46F6D8E}"/>
+    <dgm:cxn modelId="{E861373C-0884-4B08-8A05-5977712D4AC6}" srcId="{D7E5864B-8D14-4B36-89DD-680E3E8AFB94}" destId="{ADAA5705-65BC-45DF-96AA-BAEC2ABC7FB9}" srcOrd="1" destOrd="0" parTransId="{3C391262-A41D-4E48-A8AB-DA8806EC25DC}" sibTransId="{CD7CD5A7-43B8-43D0-B905-670FC6DD3290}"/>
+    <dgm:cxn modelId="{837E5B5A-6CF4-40B1-92ED-DAE7A7788CA5}" type="presOf" srcId="{55B13F4C-1DC1-48ED-87D6-D6E64540F49B}" destId="{414B806F-CFDD-4901-8D52-862E3CA26E50}" srcOrd="0" destOrd="0" presId="urn:microsoft.com/office/officeart/2018/2/layout/IconLabelList"/>
+    <dgm:cxn modelId="{95095785-9EBA-4027-8EEF-C60465CF83DC}" type="presOf" srcId="{ADAA5705-65BC-45DF-96AA-BAEC2ABC7FB9}" destId="{8D039C46-DB95-453B-A120-9BD6217202A5}" srcOrd="0" destOrd="0" presId="urn:microsoft.com/office/officeart/2018/2/layout/IconLabelList"/>
+    <dgm:cxn modelId="{30A03BA2-0B9B-408C-814E-2479A36698C3}" type="presOf" srcId="{4841D909-0ECA-47F1-B60F-CC10392949AD}" destId="{3D0B3615-2CD5-496A-BC99-DE4A243DE9BA}" srcOrd="0" destOrd="0" presId="urn:microsoft.com/office/officeart/2018/2/layout/IconLabelList"/>
+    <dgm:cxn modelId="{3B1A0AA8-65FD-4093-B432-949ADF8D3AC7}" type="presOf" srcId="{BE080DBF-1A07-4576-93F7-55277512753A}" destId="{DDE195DC-E6A4-4F62-9AD1-D43E0C9C96B4}" srcOrd="0" destOrd="0" presId="urn:microsoft.com/office/officeart/2018/2/layout/IconLabelList"/>
+    <dgm:cxn modelId="{B422EFD3-70CF-4883-A7CC-C33E917BC4A6}" srcId="{D7E5864B-8D14-4B36-89DD-680E3E8AFB94}" destId="{BE080DBF-1A07-4576-93F7-55277512753A}" srcOrd="5" destOrd="0" parTransId="{9C927B6E-BDD5-4F92-A92E-4CE52227AA74}" sibTransId="{34C30DFD-0D0D-41AE-AEF5-76F5EADD3709}"/>
+    <dgm:cxn modelId="{A073CEDB-61F6-4D27-93A7-42DFDD900B43}" type="presOf" srcId="{D7E5864B-8D14-4B36-89DD-680E3E8AFB94}" destId="{989C3F12-1DE6-4B34-83FC-42455D24DC64}" srcOrd="0" destOrd="0" presId="urn:microsoft.com/office/officeart/2018/2/layout/IconLabelList"/>
+    <dgm:cxn modelId="{BF3DA2E6-CCD8-40B1-B262-36525119D026}" type="presOf" srcId="{E9E9F1A1-5F54-4F5F-A8CA-3CC10706D776}" destId="{B04D4E1A-9E43-4766-BE67-38F98048B9C4}" srcOrd="0" destOrd="0" presId="urn:microsoft.com/office/officeart/2018/2/layout/IconLabelList"/>
+    <dgm:cxn modelId="{AD75EAF2-4801-46CD-A9FA-912A9C727373}" type="presOf" srcId="{655F724C-0FE3-433C-AD56-1C856B8A5239}" destId="{1557FBA4-4C71-4185-BE01-539A645F79CC}" srcOrd="0" destOrd="0" presId="urn:microsoft.com/office/officeart/2018/2/layout/IconLabelList"/>
+    <dgm:cxn modelId="{11DC6D0D-9AF8-4CCC-BDD4-A27565569564}" type="presParOf" srcId="{989C3F12-1DE6-4B34-83FC-42455D24DC64}" destId="{A9D239A2-D8D0-49CF-8AFC-DD6E5D4C31B6}" srcOrd="0" destOrd="0" presId="urn:microsoft.com/office/officeart/2018/2/layout/IconLabelList"/>
+    <dgm:cxn modelId="{B6603E56-99C6-437C-84BF-AA85018C7965}" type="presParOf" srcId="{A9D239A2-D8D0-49CF-8AFC-DD6E5D4C31B6}" destId="{8C9ED2B8-5F0F-44D6-BB47-B52AA1070A65}" srcOrd="0" destOrd="0" presId="urn:microsoft.com/office/officeart/2018/2/layout/IconLabelList"/>
+    <dgm:cxn modelId="{2FFD2A04-244F-4FF8-ADC3-FAEEC90F40C7}" type="presParOf" srcId="{A9D239A2-D8D0-49CF-8AFC-DD6E5D4C31B6}" destId="{AFD85991-1D28-4CA0-82B5-85ADEDFD21D8}" srcOrd="1" destOrd="0" presId="urn:microsoft.com/office/officeart/2018/2/layout/IconLabelList"/>
+    <dgm:cxn modelId="{BCD73334-CB31-4CFC-BAF1-2823BE2EEAE4}" type="presParOf" srcId="{A9D239A2-D8D0-49CF-8AFC-DD6E5D4C31B6}" destId="{1557FBA4-4C71-4185-BE01-539A645F79CC}" srcOrd="2" destOrd="0" presId="urn:microsoft.com/office/officeart/2018/2/layout/IconLabelList"/>
+    <dgm:cxn modelId="{0BBD95C4-B717-4A29-82EA-567F2982C0B2}" type="presParOf" srcId="{989C3F12-1DE6-4B34-83FC-42455D24DC64}" destId="{7B2F8A88-C3A8-43E8-981A-B7BCFB0577F0}" srcOrd="1" destOrd="0" presId="urn:microsoft.com/office/officeart/2018/2/layout/IconLabelList"/>
+    <dgm:cxn modelId="{0B0BAE09-75AA-4E8F-8993-6222F2EDBCBE}" type="presParOf" srcId="{989C3F12-1DE6-4B34-83FC-42455D24DC64}" destId="{D1A1C142-852D-4D1E-8572-5A16722E0BD4}" srcOrd="2" destOrd="0" presId="urn:microsoft.com/office/officeart/2018/2/layout/IconLabelList"/>
+    <dgm:cxn modelId="{90C1771D-04AA-4608-B384-024E1895B19B}" type="presParOf" srcId="{D1A1C142-852D-4D1E-8572-5A16722E0BD4}" destId="{748D82E9-9BB4-439A-B265-335B5C1C1506}" srcOrd="0" destOrd="0" presId="urn:microsoft.com/office/officeart/2018/2/layout/IconLabelList"/>
+    <dgm:cxn modelId="{F04C8658-8762-44F7-B03A-9DDCBD91C75C}" type="presParOf" srcId="{D1A1C142-852D-4D1E-8572-5A16722E0BD4}" destId="{53373FD7-1C88-45E5-82D6-19FD0ECC520B}" srcOrd="1" destOrd="0" presId="urn:microsoft.com/office/officeart/2018/2/layout/IconLabelList"/>
+    <dgm:cxn modelId="{9E3C73B6-F029-4BD4-B9EC-7D4F559FA7EC}" type="presParOf" srcId="{D1A1C142-852D-4D1E-8572-5A16722E0BD4}" destId="{8D039C46-DB95-453B-A120-9BD6217202A5}" srcOrd="2" destOrd="0" presId="urn:microsoft.com/office/officeart/2018/2/layout/IconLabelList"/>
+    <dgm:cxn modelId="{6A26833A-F9BC-47C6-9464-8A20700BAF64}" type="presParOf" srcId="{989C3F12-1DE6-4B34-83FC-42455D24DC64}" destId="{B67AB8C9-4C56-4D55-947E-B352458068E0}" srcOrd="3" destOrd="0" presId="urn:microsoft.com/office/officeart/2018/2/layout/IconLabelList"/>
+    <dgm:cxn modelId="{5BE5BB71-8A9F-4C14-B767-A7C2F9A72423}" type="presParOf" srcId="{989C3F12-1DE6-4B34-83FC-42455D24DC64}" destId="{99E3F4EC-AFB3-4E06-90A4-A99B4CCE9511}" srcOrd="4" destOrd="0" presId="urn:microsoft.com/office/officeart/2018/2/layout/IconLabelList"/>
+    <dgm:cxn modelId="{3A868543-5304-4E4B-A11A-5E32DF2E4AF2}" type="presParOf" srcId="{99E3F4EC-AFB3-4E06-90A4-A99B4CCE9511}" destId="{B6F205E8-8DD2-4F29-B9D6-37E66D1FC58F}" srcOrd="0" destOrd="0" presId="urn:microsoft.com/office/officeart/2018/2/layout/IconLabelList"/>
+    <dgm:cxn modelId="{4A5A606E-5B53-4E0F-8AA8-57D9CB31DD6A}" type="presParOf" srcId="{99E3F4EC-AFB3-4E06-90A4-A99B4CCE9511}" destId="{34E05C53-073D-4938-85BE-86CA894B610E}" srcOrd="1" destOrd="0" presId="urn:microsoft.com/office/officeart/2018/2/layout/IconLabelList"/>
+    <dgm:cxn modelId="{224F13E8-0CF7-4B61-AA7B-68CFB18DB744}" type="presParOf" srcId="{99E3F4EC-AFB3-4E06-90A4-A99B4CCE9511}" destId="{B04D4E1A-9E43-4766-BE67-38F98048B9C4}" srcOrd="2" destOrd="0" presId="urn:microsoft.com/office/officeart/2018/2/layout/IconLabelList"/>
+    <dgm:cxn modelId="{2B1C685C-3B62-427A-B52B-A399DAE3B990}" type="presParOf" srcId="{989C3F12-1DE6-4B34-83FC-42455D24DC64}" destId="{E950B444-3E44-4CE1-AD1D-75DA7588D22A}" srcOrd="5" destOrd="0" presId="urn:microsoft.com/office/officeart/2018/2/layout/IconLabelList"/>
+    <dgm:cxn modelId="{753328B2-33B4-4D63-8A24-3E9D6E09AD2E}" type="presParOf" srcId="{989C3F12-1DE6-4B34-83FC-42455D24DC64}" destId="{B1C7748F-D882-4E4B-9EBF-B3CC22E53258}" srcOrd="6" destOrd="0" presId="urn:microsoft.com/office/officeart/2018/2/layout/IconLabelList"/>
+    <dgm:cxn modelId="{40D5A600-1170-4463-BAE5-56C229DBBD47}" type="presParOf" srcId="{B1C7748F-D882-4E4B-9EBF-B3CC22E53258}" destId="{00F88EDF-63E8-4E09-8E2E-8B7137800330}" srcOrd="0" destOrd="0" presId="urn:microsoft.com/office/officeart/2018/2/layout/IconLabelList"/>
+    <dgm:cxn modelId="{A5F21BD6-D1DE-4539-B2DC-31D12C4FBBF3}" type="presParOf" srcId="{B1C7748F-D882-4E4B-9EBF-B3CC22E53258}" destId="{849D82F4-6709-4AE7-B4DD-083B891442E8}" srcOrd="1" destOrd="0" presId="urn:microsoft.com/office/officeart/2018/2/layout/IconLabelList"/>
+    <dgm:cxn modelId="{4A339E65-64B2-4D93-ACE2-D2D4C520909F}" type="presParOf" srcId="{B1C7748F-D882-4E4B-9EBF-B3CC22E53258}" destId="{414B806F-CFDD-4901-8D52-862E3CA26E50}" srcOrd="2" destOrd="0" presId="urn:microsoft.com/office/officeart/2018/2/layout/IconLabelList"/>
+    <dgm:cxn modelId="{4457C01E-874C-45D5-ADCE-C12514FA352C}" type="presParOf" srcId="{989C3F12-1DE6-4B34-83FC-42455D24DC64}" destId="{EDFA6C46-68DE-4F4E-8BD5-DBFCB259C7D5}" srcOrd="7" destOrd="0" presId="urn:microsoft.com/office/officeart/2018/2/layout/IconLabelList"/>
+    <dgm:cxn modelId="{AA6A617A-581E-4487-A200-C083EBB79265}" type="presParOf" srcId="{989C3F12-1DE6-4B34-83FC-42455D24DC64}" destId="{39F721D3-1955-4E6D-8423-4CEB78BA2E93}" srcOrd="8" destOrd="0" presId="urn:microsoft.com/office/officeart/2018/2/layout/IconLabelList"/>
+    <dgm:cxn modelId="{ECA74DBE-6684-4F27-A0BB-92D008C3CF19}" type="presParOf" srcId="{39F721D3-1955-4E6D-8423-4CEB78BA2E93}" destId="{D185AC82-5F25-46B0-BBE7-61526303D853}" srcOrd="0" destOrd="0" presId="urn:microsoft.com/office/officeart/2018/2/layout/IconLabelList"/>
+    <dgm:cxn modelId="{07FB7A03-C25E-4B6B-99B5-3AB671B7DF81}" type="presParOf" srcId="{39F721D3-1955-4E6D-8423-4CEB78BA2E93}" destId="{5E7C3065-1A91-422C-B2D3-35633DEBFA0A}" srcOrd="1" destOrd="0" presId="urn:microsoft.com/office/officeart/2018/2/layout/IconLabelList"/>
+    <dgm:cxn modelId="{CAD0C802-61B2-430D-B41F-EA1A697E4B3B}" type="presParOf" srcId="{39F721D3-1955-4E6D-8423-4CEB78BA2E93}" destId="{3D0B3615-2CD5-496A-BC99-DE4A243DE9BA}" srcOrd="2" destOrd="0" presId="urn:microsoft.com/office/officeart/2018/2/layout/IconLabelList"/>
+    <dgm:cxn modelId="{AEA97288-54F5-470E-87E8-22F4B9FBE992}" type="presParOf" srcId="{989C3F12-1DE6-4B34-83FC-42455D24DC64}" destId="{5D60E614-D225-4E91-A549-EEC05826BBEE}" srcOrd="9" destOrd="0" presId="urn:microsoft.com/office/officeart/2018/2/layout/IconLabelList"/>
+    <dgm:cxn modelId="{58684883-00F0-405F-AA0A-F4341B571490}" type="presParOf" srcId="{989C3F12-1DE6-4B34-83FC-42455D24DC64}" destId="{EC31F4B1-B870-4217-BFF2-48917C909CAC}" srcOrd="10" destOrd="0" presId="urn:microsoft.com/office/officeart/2018/2/layout/IconLabelList"/>
+    <dgm:cxn modelId="{65520542-8F8D-451B-968B-6DAE8A95726C}" type="presParOf" srcId="{EC31F4B1-B870-4217-BFF2-48917C909CAC}" destId="{CD089A89-7A1F-471B-AE09-999296963FA3}" srcOrd="0" destOrd="0" presId="urn:microsoft.com/office/officeart/2018/2/layout/IconLabelList"/>
+    <dgm:cxn modelId="{750706E4-0CC6-4B16-B2E6-8DC885BBA69D}" type="presParOf" srcId="{EC31F4B1-B870-4217-BFF2-48917C909CAC}" destId="{056CA989-856B-43AF-A529-9BEE2D5F3728}" srcOrd="1" destOrd="0" presId="urn:microsoft.com/office/officeart/2018/2/layout/IconLabelList"/>
+    <dgm:cxn modelId="{E81695E6-5629-4060-931D-8BB214BED000}" type="presParOf" srcId="{EC31F4B1-B870-4217-BFF2-48917C909CAC}" destId="{DDE195DC-E6A4-4F62-9AD1-D43E0C9C96B4}" srcOrd="2" destOrd="0" presId="urn:microsoft.com/office/officeart/2018/2/layout/IconLabelList"/>
+  </dgm:cxnLst>
+  <dgm:bg/>
+  <dgm:whole/>
+  <dgm:extLst>
+    <a:ext uri="http://schemas.microsoft.com/office/drawing/2008/diagram">
+      <dsp:dataModelExt xmlns:dsp="http://schemas.microsoft.com/office/drawing/2008/diagram" relId="rId7" minVer="http://schemas.openxmlformats.org/drawingml/2006/diagram"/>
+    </a:ext>
+  </dgm:extLst>
+</dgm:dataModel>
+</file>
+
+<file path=ppt/diagrams/drawing1.xml><?xml version="1.0" encoding="utf-8"?>
+<dsp:drawing xmlns:dgm="http://schemas.openxmlformats.org/drawingml/2006/diagram" xmlns:dsp="http://schemas.microsoft.com/office/drawing/2008/diagram" xmlns:a="http://schemas.openxmlformats.org/drawingml/2006/main">
+  <dsp:spTree>
+    <dsp:nvGrpSpPr>
+      <dsp:cNvPr id="0" name=""/>
+      <dsp:cNvGrpSpPr/>
+    </dsp:nvGrpSpPr>
+    <dsp:grpSpPr/>
+    <dsp:sp modelId="{8C9ED2B8-5F0F-44D6-BB47-B52AA1070A65}">
+      <dsp:nvSpPr>
+        <dsp:cNvPr id="0" name=""/>
+        <dsp:cNvSpPr/>
+      </dsp:nvSpPr>
+      <dsp:spPr>
+        <a:xfrm>
+          <a:off x="404043" y="1226439"/>
+          <a:ext cx="658125" cy="658125"/>
+        </a:xfrm>
+        <a:prstGeom prst="rect">
+          <a:avLst/>
+        </a:prstGeom>
+        <a:blipFill>
+          <a:blip xmlns:r="http://schemas.openxmlformats.org/officeDocument/2006/relationships">
+            <a:extLst>
+              <a:ext uri="{28A0092B-C50C-407E-A947-70E740481C1C}">
+                <a14:useLocalDpi xmlns:a14="http://schemas.microsoft.com/office/drawing/2010/main" val="0"/>
+              </a:ext>
+              <a:ext uri="{96DAC541-7B7A-43D3-8B79-37D633B846F1}">
+                <asvg:svgBlip xmlns:asvg="http://schemas.microsoft.com/office/drawing/2016/SVG/main" r:embed="rId1"/>
+              </a:ext>
+            </a:extLst>
+          </a:blip>
+          <a:stretch>
+            <a:fillRect/>
+          </a:stretch>
+        </a:blipFill>
+        <a:ln w="25400" cap="flat" cmpd="sng" algn="ctr">
+          <a:solidFill>
+            <a:schemeClr val="lt1">
+              <a:hueOff val="0"/>
+              <a:satOff val="0"/>
+              <a:lumOff val="0"/>
+              <a:alphaOff val="0"/>
+            </a:schemeClr>
+          </a:solidFill>
+          <a:prstDash val="solid"/>
+        </a:ln>
+        <a:effectLst/>
+      </dsp:spPr>
+      <dsp:style>
+        <a:lnRef idx="2">
+          <a:scrgbClr r="0" g="0" b="0"/>
+        </a:lnRef>
+        <a:fillRef idx="1">
+          <a:scrgbClr r="0" g="0" b="0"/>
+        </a:fillRef>
+        <a:effectRef idx="0">
+          <a:scrgbClr r="0" g="0" b="0"/>
+        </a:effectRef>
+        <a:fontRef idx="minor">
+          <a:schemeClr val="lt1"/>
+        </a:fontRef>
+      </dsp:style>
+    </dsp:sp>
+    <dsp:sp modelId="{1557FBA4-4C71-4185-BE01-539A645F79CC}">
+      <dsp:nvSpPr>
+        <dsp:cNvPr id="0" name=""/>
+        <dsp:cNvSpPr/>
+      </dsp:nvSpPr>
+      <dsp:spPr>
+        <a:xfrm>
+          <a:off x="1856" y="2120480"/>
+          <a:ext cx="1462500" cy="585000"/>
+        </a:xfrm>
+        <a:prstGeom prst="rect">
+          <a:avLst/>
+        </a:prstGeom>
+        <a:noFill/>
+        <a:ln>
+          <a:noFill/>
+        </a:ln>
+        <a:effectLst/>
+      </dsp:spPr>
+      <dsp:style>
+        <a:lnRef idx="0">
+          <a:scrgbClr r="0" g="0" b="0"/>
+        </a:lnRef>
+        <a:fillRef idx="0">
+          <a:scrgbClr r="0" g="0" b="0"/>
+        </a:fillRef>
+        <a:effectRef idx="0">
+          <a:scrgbClr r="0" g="0" b="0"/>
+        </a:effectRef>
+        <a:fontRef idx="minor"/>
+      </dsp:style>
+      <dsp:txBody>
+        <a:bodyPr spcFirstLastPara="0" vert="horz" wrap="square" lIns="0" tIns="0" rIns="0" bIns="0" numCol="1" spcCol="1270" anchor="t" anchorCtr="0">
+          <a:noAutofit/>
+        </a:bodyPr>
+        <a:lstStyle/>
+        <a:p>
+          <a:pPr marL="0" lvl="0" indent="0" algn="ctr" defTabSz="488950">
+            <a:lnSpc>
+              <a:spcPct val="100000"/>
+            </a:lnSpc>
+            <a:spcBef>
+              <a:spcPct val="0"/>
+            </a:spcBef>
+            <a:spcAft>
+              <a:spcPct val="35000"/>
+            </a:spcAft>
+            <a:buNone/>
+          </a:pPr>
+          <a:r>
+            <a:rPr lang="en-US" sz="1100" kern="1200"/>
+            <a:t>•  Local deployment only; no public production URL</a:t>
+          </a:r>
+        </a:p>
+      </dsp:txBody>
+      <dsp:txXfrm>
+        <a:off x="1856" y="2120480"/>
+        <a:ext cx="1462500" cy="585000"/>
+      </dsp:txXfrm>
+    </dsp:sp>
+    <dsp:sp modelId="{748D82E9-9BB4-439A-B265-335B5C1C1506}">
+      <dsp:nvSpPr>
+        <dsp:cNvPr id="0" name=""/>
+        <dsp:cNvSpPr/>
+      </dsp:nvSpPr>
+      <dsp:spPr>
+        <a:xfrm>
+          <a:off x="2122481" y="1226439"/>
+          <a:ext cx="658125" cy="658125"/>
+        </a:xfrm>
+        <a:prstGeom prst="rect">
+          <a:avLst/>
+        </a:prstGeom>
+        <a:blipFill>
+          <a:blip xmlns:r="http://schemas.openxmlformats.org/officeDocument/2006/relationships">
+            <a:extLst>
+              <a:ext uri="{28A0092B-C50C-407E-A947-70E740481C1C}">
+                <a14:useLocalDpi xmlns:a14="http://schemas.microsoft.com/office/drawing/2010/main" val="0"/>
+              </a:ext>
+              <a:ext uri="{96DAC541-7B7A-43D3-8B79-37D633B846F1}">
+                <asvg:svgBlip xmlns:asvg="http://schemas.microsoft.com/office/drawing/2016/SVG/main" r:embed="rId2"/>
+              </a:ext>
+            </a:extLst>
+          </a:blip>
+          <a:stretch>
+            <a:fillRect/>
+          </a:stretch>
+        </a:blipFill>
+        <a:ln w="25400" cap="flat" cmpd="sng" algn="ctr">
+          <a:solidFill>
+            <a:schemeClr val="lt1">
+              <a:hueOff val="0"/>
+              <a:satOff val="0"/>
+              <a:lumOff val="0"/>
+              <a:alphaOff val="0"/>
+            </a:schemeClr>
+          </a:solidFill>
+          <a:prstDash val="solid"/>
+        </a:ln>
+        <a:effectLst/>
+      </dsp:spPr>
+      <dsp:style>
+        <a:lnRef idx="2">
+          <a:scrgbClr r="0" g="0" b="0"/>
+        </a:lnRef>
+        <a:fillRef idx="1">
+          <a:scrgbClr r="0" g="0" b="0"/>
+        </a:fillRef>
+        <a:effectRef idx="0">
+          <a:scrgbClr r="0" g="0" b="0"/>
+        </a:effectRef>
+        <a:fontRef idx="minor">
+          <a:schemeClr val="lt1"/>
+        </a:fontRef>
+      </dsp:style>
+    </dsp:sp>
+    <dsp:sp modelId="{8D039C46-DB95-453B-A120-9BD6217202A5}">
+      <dsp:nvSpPr>
+        <dsp:cNvPr id="0" name=""/>
+        <dsp:cNvSpPr/>
+      </dsp:nvSpPr>
+      <dsp:spPr>
+        <a:xfrm>
+          <a:off x="1720293" y="2120480"/>
+          <a:ext cx="1462500" cy="585000"/>
+        </a:xfrm>
+        <a:prstGeom prst="rect">
+          <a:avLst/>
+        </a:prstGeom>
+        <a:noFill/>
+        <a:ln>
+          <a:noFill/>
+        </a:ln>
+        <a:effectLst/>
+      </dsp:spPr>
+      <dsp:style>
+        <a:lnRef idx="0">
+          <a:scrgbClr r="0" g="0" b="0"/>
+        </a:lnRef>
+        <a:fillRef idx="0">
+          <a:scrgbClr r="0" g="0" b="0"/>
+        </a:fillRef>
+        <a:effectRef idx="0">
+          <a:scrgbClr r="0" g="0" b="0"/>
+        </a:effectRef>
+        <a:fontRef idx="minor"/>
+      </dsp:style>
+      <dsp:txBody>
+        <a:bodyPr spcFirstLastPara="0" vert="horz" wrap="square" lIns="0" tIns="0" rIns="0" bIns="0" numCol="1" spcCol="1270" anchor="t" anchorCtr="0">
+          <a:noAutofit/>
+        </a:bodyPr>
+        <a:lstStyle/>
+        <a:p>
+          <a:pPr marL="0" lvl="0" indent="0" algn="ctr" defTabSz="488950">
+            <a:lnSpc>
+              <a:spcPct val="100000"/>
+            </a:lnSpc>
+            <a:spcBef>
+              <a:spcPct val="0"/>
+            </a:spcBef>
+            <a:spcAft>
+              <a:spcPct val="35000"/>
+            </a:spcAft>
+            <a:buNone/>
+          </a:pPr>
+          <a:r>
+            <a:rPr lang="en-US" sz="1100" kern="1200"/>
+            <a:t>•  Grounded Ask requires an indexed corpus plus configured OpenAI or Ollama provider</a:t>
+          </a:r>
+        </a:p>
+      </dsp:txBody>
+      <dsp:txXfrm>
+        <a:off x="1720293" y="2120480"/>
+        <a:ext cx="1462500" cy="585000"/>
+      </dsp:txXfrm>
+    </dsp:sp>
+    <dsp:sp modelId="{B6F205E8-8DD2-4F29-B9D6-37E66D1FC58F}">
+      <dsp:nvSpPr>
+        <dsp:cNvPr id="0" name=""/>
+        <dsp:cNvSpPr/>
+      </dsp:nvSpPr>
+      <dsp:spPr>
+        <a:xfrm>
+          <a:off x="3840918" y="1226439"/>
+          <a:ext cx="658125" cy="658125"/>
+        </a:xfrm>
+        <a:prstGeom prst="rect">
+          <a:avLst/>
+        </a:prstGeom>
+        <a:blipFill>
+          <a:blip xmlns:r="http://schemas.openxmlformats.org/officeDocument/2006/relationships">
+            <a:extLst>
+              <a:ext uri="{28A0092B-C50C-407E-A947-70E740481C1C}">
+                <a14:useLocalDpi xmlns:a14="http://schemas.microsoft.com/office/drawing/2010/main" val="0"/>
+              </a:ext>
+              <a:ext uri="{96DAC541-7B7A-43D3-8B79-37D633B846F1}">
+                <asvg:svgBlip xmlns:asvg="http://schemas.microsoft.com/office/drawing/2016/SVG/main" r:embed="rId3"/>
+              </a:ext>
+            </a:extLst>
+          </a:blip>
+          <a:stretch>
+            <a:fillRect/>
+          </a:stretch>
+        </a:blipFill>
+        <a:ln w="25400" cap="flat" cmpd="sng" algn="ctr">
+          <a:solidFill>
+            <a:schemeClr val="lt1">
+              <a:hueOff val="0"/>
+              <a:satOff val="0"/>
+              <a:lumOff val="0"/>
+              <a:alphaOff val="0"/>
+            </a:schemeClr>
+          </a:solidFill>
+          <a:prstDash val="solid"/>
+        </a:ln>
+        <a:effectLst/>
+      </dsp:spPr>
+      <dsp:style>
+        <a:lnRef idx="2">
+          <a:scrgbClr r="0" g="0" b="0"/>
+        </a:lnRef>
+        <a:fillRef idx="1">
+          <a:scrgbClr r="0" g="0" b="0"/>
+        </a:fillRef>
+        <a:effectRef idx="0">
+          <a:scrgbClr r="0" g="0" b="0"/>
+        </a:effectRef>
+        <a:fontRef idx="minor">
+          <a:schemeClr val="lt1"/>
+        </a:fontRef>
+      </dsp:style>
+    </dsp:sp>
+    <dsp:sp modelId="{B04D4E1A-9E43-4766-BE67-38F98048B9C4}">
+      <dsp:nvSpPr>
+        <dsp:cNvPr id="0" name=""/>
+        <dsp:cNvSpPr/>
+      </dsp:nvSpPr>
+      <dsp:spPr>
+        <a:xfrm>
+          <a:off x="3438731" y="2120480"/>
+          <a:ext cx="1462500" cy="585000"/>
+        </a:xfrm>
+        <a:prstGeom prst="rect">
+          <a:avLst/>
+        </a:prstGeom>
+        <a:noFill/>
+        <a:ln>
+          <a:noFill/>
+        </a:ln>
+        <a:effectLst/>
+      </dsp:spPr>
+      <dsp:style>
+        <a:lnRef idx="0">
+          <a:scrgbClr r="0" g="0" b="0"/>
+        </a:lnRef>
+        <a:fillRef idx="0">
+          <a:scrgbClr r="0" g="0" b="0"/>
+        </a:fillRef>
+        <a:effectRef idx="0">
+          <a:scrgbClr r="0" g="0" b="0"/>
+        </a:effectRef>
+        <a:fontRef idx="minor"/>
+      </dsp:style>
+      <dsp:txBody>
+        <a:bodyPr spcFirstLastPara="0" vert="horz" wrap="square" lIns="0" tIns="0" rIns="0" bIns="0" numCol="1" spcCol="1270" anchor="t" anchorCtr="0">
+          <a:noAutofit/>
+        </a:bodyPr>
+        <a:lstStyle/>
+        <a:p>
+          <a:pPr marL="0" lvl="0" indent="0" algn="ctr" defTabSz="488950">
+            <a:lnSpc>
+              <a:spcPct val="100000"/>
+            </a:lnSpc>
+            <a:spcBef>
+              <a:spcPct val="0"/>
+            </a:spcBef>
+            <a:spcAft>
+              <a:spcPct val="35000"/>
+            </a:spcAft>
+            <a:buNone/>
+          </a:pPr>
+          <a:r>
+            <a:rPr lang="en-US" sz="1100" kern="1200"/>
+            <a:t>•  Scientific outputs still require human review</a:t>
+          </a:r>
+        </a:p>
+      </dsp:txBody>
+      <dsp:txXfrm>
+        <a:off x="3438731" y="2120480"/>
+        <a:ext cx="1462500" cy="585000"/>
+      </dsp:txXfrm>
+    </dsp:sp>
+    <dsp:sp modelId="{00F88EDF-63E8-4E09-8E2E-8B7137800330}">
+      <dsp:nvSpPr>
+        <dsp:cNvPr id="0" name=""/>
+        <dsp:cNvSpPr/>
+      </dsp:nvSpPr>
+      <dsp:spPr>
+        <a:xfrm>
+          <a:off x="5559356" y="1226439"/>
+          <a:ext cx="658125" cy="658125"/>
+        </a:xfrm>
+        <a:prstGeom prst="rect">
+          <a:avLst/>
+        </a:prstGeom>
+        <a:blipFill>
+          <a:blip xmlns:r="http://schemas.openxmlformats.org/officeDocument/2006/relationships">
+            <a:extLst>
+              <a:ext uri="{28A0092B-C50C-407E-A947-70E740481C1C}">
+                <a14:useLocalDpi xmlns:a14="http://schemas.microsoft.com/office/drawing/2010/main" val="0"/>
+              </a:ext>
+              <a:ext uri="{96DAC541-7B7A-43D3-8B79-37D633B846F1}">
+                <asvg:svgBlip xmlns:asvg="http://schemas.microsoft.com/office/drawing/2016/SVG/main" r:embed="rId4"/>
+              </a:ext>
+            </a:extLst>
+          </a:blip>
+          <a:stretch>
+            <a:fillRect/>
+          </a:stretch>
+        </a:blipFill>
+        <a:ln w="25400" cap="flat" cmpd="sng" algn="ctr">
+          <a:solidFill>
+            <a:schemeClr val="lt1">
+              <a:hueOff val="0"/>
+              <a:satOff val="0"/>
+              <a:lumOff val="0"/>
+              <a:alphaOff val="0"/>
+            </a:schemeClr>
+          </a:solidFill>
+          <a:prstDash val="solid"/>
+        </a:ln>
+        <a:effectLst/>
+      </dsp:spPr>
+      <dsp:style>
+        <a:lnRef idx="2">
+          <a:scrgbClr r="0" g="0" b="0"/>
+        </a:lnRef>
+        <a:fillRef idx="1">
+          <a:scrgbClr r="0" g="0" b="0"/>
+        </a:fillRef>
+        <a:effectRef idx="0">
+          <a:scrgbClr r="0" g="0" b="0"/>
+        </a:effectRef>
+        <a:fontRef idx="minor">
+          <a:schemeClr val="lt1"/>
+        </a:fontRef>
+      </dsp:style>
+    </dsp:sp>
+    <dsp:sp modelId="{414B806F-CFDD-4901-8D52-862E3CA26E50}">
+      <dsp:nvSpPr>
+        <dsp:cNvPr id="0" name=""/>
+        <dsp:cNvSpPr/>
+      </dsp:nvSpPr>
+      <dsp:spPr>
+        <a:xfrm>
+          <a:off x="5157168" y="2120480"/>
+          <a:ext cx="1462500" cy="585000"/>
+        </a:xfrm>
+        <a:prstGeom prst="rect">
+          <a:avLst/>
+        </a:prstGeom>
+        <a:noFill/>
+        <a:ln>
+          <a:noFill/>
+        </a:ln>
+        <a:effectLst/>
+      </dsp:spPr>
+      <dsp:style>
+        <a:lnRef idx="0">
+          <a:scrgbClr r="0" g="0" b="0"/>
+        </a:lnRef>
+        <a:fillRef idx="0">
+          <a:scrgbClr r="0" g="0" b="0"/>
+        </a:fillRef>
+        <a:effectRef idx="0">
+          <a:scrgbClr r="0" g="0" b="0"/>
+        </a:effectRef>
+        <a:fontRef idx="minor"/>
+      </dsp:style>
+      <dsp:txBody>
+        <a:bodyPr spcFirstLastPara="0" vert="horz" wrap="square" lIns="0" tIns="0" rIns="0" bIns="0" numCol="1" spcCol="1270" anchor="t" anchorCtr="0">
+          <a:noAutofit/>
+        </a:bodyPr>
+        <a:lstStyle/>
+        <a:p>
+          <a:pPr marL="0" lvl="0" indent="0" algn="ctr" defTabSz="488950">
+            <a:lnSpc>
+              <a:spcPct val="100000"/>
+            </a:lnSpc>
+            <a:spcBef>
+              <a:spcPct val="0"/>
+            </a:spcBef>
+            <a:spcAft>
+              <a:spcPct val="35000"/>
+            </a:spcAft>
+            <a:buNone/>
+          </a:pPr>
+          <a:r>
+            <a:rPr lang="en-US" sz="1100" kern="1200"/>
+            <a:t>•  Corpus focuses on microgravity and skeletal muscle</a:t>
+          </a:r>
+        </a:p>
+      </dsp:txBody>
+      <dsp:txXfrm>
+        <a:off x="5157168" y="2120480"/>
+        <a:ext cx="1462500" cy="585000"/>
+      </dsp:txXfrm>
+    </dsp:sp>
+    <dsp:sp modelId="{D185AC82-5F25-46B0-BBE7-61526303D853}">
+      <dsp:nvSpPr>
+        <dsp:cNvPr id="0" name=""/>
+        <dsp:cNvSpPr/>
+      </dsp:nvSpPr>
+      <dsp:spPr>
+        <a:xfrm>
+          <a:off x="7277793" y="1226439"/>
+          <a:ext cx="658125" cy="658125"/>
+        </a:xfrm>
+        <a:prstGeom prst="rect">
+          <a:avLst/>
+        </a:prstGeom>
+        <a:blipFill>
+          <a:blip xmlns:r="http://schemas.openxmlformats.org/officeDocument/2006/relationships">
+            <a:extLst>
+              <a:ext uri="{28A0092B-C50C-407E-A947-70E740481C1C}">
+                <a14:useLocalDpi xmlns:a14="http://schemas.microsoft.com/office/drawing/2010/main" val="0"/>
+              </a:ext>
+              <a:ext uri="{96DAC541-7B7A-43D3-8B79-37D633B846F1}">
+                <asvg:svgBlip xmlns:asvg="http://schemas.microsoft.com/office/drawing/2016/SVG/main" r:embed="rId5"/>
+              </a:ext>
+            </a:extLst>
+          </a:blip>
+          <a:stretch>
+            <a:fillRect/>
+          </a:stretch>
+        </a:blipFill>
+        <a:ln w="25400" cap="flat" cmpd="sng" algn="ctr">
+          <a:solidFill>
+            <a:schemeClr val="lt1">
+              <a:hueOff val="0"/>
+              <a:satOff val="0"/>
+              <a:lumOff val="0"/>
+              <a:alphaOff val="0"/>
+            </a:schemeClr>
+          </a:solidFill>
+          <a:prstDash val="solid"/>
+        </a:ln>
+        <a:effectLst/>
+      </dsp:spPr>
+      <dsp:style>
+        <a:lnRef idx="2">
+          <a:scrgbClr r="0" g="0" b="0"/>
+        </a:lnRef>
+        <a:fillRef idx="1">
+          <a:scrgbClr r="0" g="0" b="0"/>
+        </a:fillRef>
+        <a:effectRef idx="0">
+          <a:scrgbClr r="0" g="0" b="0"/>
+        </a:effectRef>
+        <a:fontRef idx="minor">
+          <a:schemeClr val="lt1"/>
+        </a:fontRef>
+      </dsp:style>
+    </dsp:sp>
+    <dsp:sp modelId="{3D0B3615-2CD5-496A-BC99-DE4A243DE9BA}">
+      <dsp:nvSpPr>
+        <dsp:cNvPr id="0" name=""/>
+        <dsp:cNvSpPr/>
+      </dsp:nvSpPr>
+      <dsp:spPr>
+        <a:xfrm>
+          <a:off x="6875606" y="2120480"/>
+          <a:ext cx="1462500" cy="585000"/>
+        </a:xfrm>
+        <a:prstGeom prst="rect">
+          <a:avLst/>
+        </a:prstGeom>
+        <a:noFill/>
+        <a:ln>
+          <a:noFill/>
+        </a:ln>
+        <a:effectLst/>
+      </dsp:spPr>
+      <dsp:style>
+        <a:lnRef idx="0">
+          <a:scrgbClr r="0" g="0" b="0"/>
+        </a:lnRef>
+        <a:fillRef idx="0">
+          <a:scrgbClr r="0" g="0" b="0"/>
+        </a:fillRef>
+        <a:effectRef idx="0">
+          <a:scrgbClr r="0" g="0" b="0"/>
+        </a:effectRef>
+        <a:fontRef idx="minor"/>
+      </dsp:style>
+      <dsp:txBody>
+        <a:bodyPr spcFirstLastPara="0" vert="horz" wrap="square" lIns="0" tIns="0" rIns="0" bIns="0" numCol="1" spcCol="1270" anchor="t" anchorCtr="0">
+          <a:noAutofit/>
+        </a:bodyPr>
+        <a:lstStyle/>
+        <a:p>
+          <a:pPr marL="0" lvl="0" indent="0" algn="ctr" defTabSz="488950">
+            <a:lnSpc>
+              <a:spcPct val="100000"/>
+            </a:lnSpc>
+            <a:spcBef>
+              <a:spcPct val="0"/>
+            </a:spcBef>
+            <a:spcAft>
+              <a:spcPct val="35000"/>
+            </a:spcAft>
+            <a:buNone/>
+          </a:pPr>
+          <a:r>
+            <a:rPr lang="en-US" sz="1100" kern="1200"/>
+            <a:t>•  Future: stronger retrieval benchmarks, broader curated corpus, reviewer workflow, and production deployment</a:t>
+          </a:r>
+        </a:p>
+      </dsp:txBody>
+      <dsp:txXfrm>
+        <a:off x="6875606" y="2120480"/>
+        <a:ext cx="1462500" cy="585000"/>
+      </dsp:txXfrm>
+    </dsp:sp>
+    <dsp:sp modelId="{CD089A89-7A1F-471B-AE09-999296963FA3}">
+      <dsp:nvSpPr>
+        <dsp:cNvPr id="0" name=""/>
+        <dsp:cNvSpPr/>
+      </dsp:nvSpPr>
+      <dsp:spPr>
+        <a:xfrm>
+          <a:off x="8996231" y="1226439"/>
+          <a:ext cx="658125" cy="658125"/>
+        </a:xfrm>
+        <a:prstGeom prst="rect">
+          <a:avLst/>
+        </a:prstGeom>
+        <a:blipFill>
+          <a:blip xmlns:r="http://schemas.openxmlformats.org/officeDocument/2006/relationships">
+            <a:extLst>
+              <a:ext uri="{28A0092B-C50C-407E-A947-70E740481C1C}">
+                <a14:useLocalDpi xmlns:a14="http://schemas.microsoft.com/office/drawing/2010/main" val="0"/>
+              </a:ext>
+              <a:ext uri="{96DAC541-7B7A-43D3-8B79-37D633B846F1}">
+                <asvg:svgBlip xmlns:asvg="http://schemas.microsoft.com/office/drawing/2016/SVG/main" r:embed="rId6"/>
+              </a:ext>
+            </a:extLst>
+          </a:blip>
+          <a:stretch>
+            <a:fillRect/>
+          </a:stretch>
+        </a:blipFill>
+        <a:ln w="25400" cap="flat" cmpd="sng" algn="ctr">
+          <a:solidFill>
+            <a:schemeClr val="lt1">
+              <a:hueOff val="0"/>
+              <a:satOff val="0"/>
+              <a:lumOff val="0"/>
+              <a:alphaOff val="0"/>
+            </a:schemeClr>
+          </a:solidFill>
+          <a:prstDash val="solid"/>
+        </a:ln>
+        <a:effectLst/>
+      </dsp:spPr>
+      <dsp:style>
+        <a:lnRef idx="2">
+          <a:scrgbClr r="0" g="0" b="0"/>
+        </a:lnRef>
+        <a:fillRef idx="1">
+          <a:scrgbClr r="0" g="0" b="0"/>
+        </a:fillRef>
+        <a:effectRef idx="0">
+          <a:scrgbClr r="0" g="0" b="0"/>
+        </a:effectRef>
+        <a:fontRef idx="minor">
+          <a:schemeClr val="lt1"/>
+        </a:fontRef>
+      </dsp:style>
+    </dsp:sp>
+    <dsp:sp modelId="{DDE195DC-E6A4-4F62-9AD1-D43E0C9C96B4}">
+      <dsp:nvSpPr>
+        <dsp:cNvPr id="0" name=""/>
+        <dsp:cNvSpPr/>
+      </dsp:nvSpPr>
+      <dsp:spPr>
+        <a:xfrm>
+          <a:off x="8594043" y="2120480"/>
+          <a:ext cx="1462500" cy="585000"/>
+        </a:xfrm>
+        <a:prstGeom prst="rect">
+          <a:avLst/>
+        </a:prstGeom>
+        <a:noFill/>
+        <a:ln>
+          <a:noFill/>
+        </a:ln>
+        <a:effectLst/>
+      </dsp:spPr>
+      <dsp:style>
+        <a:lnRef idx="0">
+          <a:scrgbClr r="0" g="0" b="0"/>
+        </a:lnRef>
+        <a:fillRef idx="0">
+          <a:scrgbClr r="0" g="0" b="0"/>
+        </a:fillRef>
+        <a:effectRef idx="0">
+          <a:scrgbClr r="0" g="0" b="0"/>
+        </a:effectRef>
+        <a:fontRef idx="minor"/>
+      </dsp:style>
+      <dsp:txBody>
+        <a:bodyPr spcFirstLastPara="0" vert="horz" wrap="square" lIns="0" tIns="0" rIns="0" bIns="0" numCol="1" spcCol="1270" anchor="t" anchorCtr="0">
+          <a:noAutofit/>
+        </a:bodyPr>
+        <a:lstStyle/>
+        <a:p>
+          <a:pPr marL="0" lvl="0" indent="0" algn="ctr" defTabSz="488950">
+            <a:lnSpc>
+              <a:spcPct val="100000"/>
+            </a:lnSpc>
+            <a:spcBef>
+              <a:spcPct val="0"/>
+            </a:spcBef>
+            <a:spcAft>
+              <a:spcPct val="35000"/>
+            </a:spcAft>
+            <a:buNone/>
+          </a:pPr>
+          <a:r>
+            <a:rPr lang="en-US" sz="1100" kern="1200"/>
+            <a:t>•  Graph extraction remains experimental; no graph database in the MVP</a:t>
+          </a:r>
+        </a:p>
+      </dsp:txBody>
+      <dsp:txXfrm>
+        <a:off x="8594043" y="2120480"/>
+        <a:ext cx="1462500" cy="585000"/>
+      </dsp:txXfrm>
+    </dsp:sp>
+  </dsp:spTree>
+</dsp:drawing>
+</file>
+
+<file path=ppt/diagrams/layout1.xml><?xml version="1.0" encoding="utf-8"?>
+<dgm:layoutDef xmlns:dgm="http://schemas.openxmlformats.org/drawingml/2006/diagram" xmlns:a="http://schemas.openxmlformats.org/drawingml/2006/main" uniqueId="urn:microsoft.com/office/officeart/2018/2/layout/IconLabelList">
+  <dgm:title val="Icon Label List"/>
+  <dgm:desc val="Use to show non-sequential or grouped chunks of information accompanied by a related visuals. Works best with icons or small pictures with short text captions."/>
+  <dgm:catLst>
+    <dgm:cat type="icon" pri="500"/>
+  </dgm:catLst>
+  <dgm:sampData useDef="1">
+    <dgm:dataModel>
+      <dgm:ptLst/>
+      <dgm:bg/>
+      <dgm:whole/>
+    </dgm:dataModel>
+  </dgm:sampData>
+  <dgm:styleData useDef="1">
+    <dgm:dataModel>
+      <dgm:ptLst/>
+      <dgm:bg/>
+      <dgm:whole/>
+    </dgm:dataModel>
+  </dgm:styleData>
+  <dgm:clrData useDef="1">
+    <dgm:dataModel>
+      <dgm:ptLst/>
+      <dgm:bg/>
+      <dgm:whole/>
+    </dgm:dataModel>
+  </dgm:clrData>
+  <dgm:layoutNode name="root">
+    <dgm:varLst>
+      <dgm:dir/>
+      <dgm:resizeHandles val="exact"/>
+    </dgm:varLst>
+    <dgm:choose name="Name0">
+      <dgm:if name="Name1" axis="self" func="var" arg="dir" op="equ" val="norm">
+        <dgm:alg type="snake">
+          <dgm:param type="grDir" val="tL"/>
+          <dgm:param type="flowDir" val="row"/>
+          <dgm:param type="contDir" val="sameDir"/>
+          <dgm:param type="off" val="ctr"/>
+          <dgm:param type="vertAlign" val="mid"/>
+          <dgm:param type="horzAlign" val="ctr"/>
+        </dgm:alg>
+      </dgm:if>
+      <dgm:else name="Name2">
+        <dgm:alg type="snake">
+          <dgm:param type="grDir" val="tR"/>
+          <dgm:param type="flowDir" val="row"/>
+          <dgm:param type="contDir" val="sameDir"/>
+          <dgm:param type="off" val="ctr"/>
+          <dgm:param type="vertAlign" val="mid"/>
+          <dgm:param type="horzAlign" val="ctr"/>
+        </dgm:alg>
+      </dgm:else>
+    </dgm:choose>
+    <dgm:shape xmlns:r="http://schemas.openxmlformats.org/officeDocument/2006/relationships" r:blip="">
+      <dgm:adjLst/>
+    </dgm:shape>
+    <dgm:presOf/>
+    <dgm:choose name="Name3">
+      <dgm:if name="Name4" axis="ch" ptType="node" func="cnt" op="lte" val="2">
+        <dgm:constrLst>
+          <dgm:constr type="h" for="ch" forName="compNode" refType="h" fact="0.4"/>
+          <dgm:constr type="w" for="ch" forName="compNode" val="120"/>
+          <dgm:constr type="w" for="ch" forName="sibTrans" refType="w" refFor="ch" refForName="compNode" fact="0.175"/>
+          <dgm:constr type="sp" refType="w" refFor="ch" refForName="compNode" op="equ" fact="0.25"/>
+          <dgm:constr type="primFontSz" for="des" ptType="node" op="equ" val="50"/>
+          <dgm:constr type="h" for="des" forName="compNode" op="equ"/>
+          <dgm:constr type="h" for="des" forName="textRect" op="equ"/>
+        </dgm:constrLst>
+      </dgm:if>
+      <dgm:if name="Name5" axis="ch" ptType="node" func="cnt" op="lte" val="4">
+        <dgm:constrLst>
+          <dgm:constr type="h" for="ch" forName="compNode" refType="h" fact="0.4"/>
+          <dgm:constr type="w" for="ch" forName="compNode" refType="w"/>
+          <dgm:constr type="w" for="ch" forName="sibTrans" refType="w" refFor="ch" refForName="compNode" fact="0.175"/>
+          <dgm:constr type="sp" refType="w" refFor="ch" refForName="compNode" op="equ" fact="0.25"/>
+          <dgm:constr type="primFontSz" for="des" ptType="node" op="equ" val="36"/>
+          <dgm:constr type="h" for="des" forName="compNode" op="equ"/>
+          <dgm:constr type="h" for="des" forName="textRect" op="equ"/>
+        </dgm:constrLst>
+      </dgm:if>
+      <dgm:else name="Name6">
+        <dgm:constrLst>
+          <dgm:constr type="h" for="ch" forName="compNode" refType="h" fact="0.4"/>
+          <dgm:constr type="w" for="ch" forName="compNode" refType="w"/>
+          <dgm:constr type="w" for="ch" forName="sibTrans" refType="w" refFor="ch" refForName="compNode" fact="0.175"/>
+          <dgm:constr type="sp" refType="w" refFor="ch" refForName="compNode" op="equ" fact="0.25"/>
+          <dgm:constr type="primFontSz" for="des" ptType="node" op="equ" val="24"/>
+          <dgm:constr type="h" for="des" forName="compNode" op="equ"/>
+          <dgm:constr type="h" for="des" forName="textRect" op="equ"/>
+        </dgm:constrLst>
+      </dgm:else>
+    </dgm:choose>
+    <dgm:ruleLst>
+      <dgm:rule type="w" for="ch" forName="compNode" val="50" fact="NaN" max="NaN"/>
+    </dgm:ruleLst>
+    <dgm:forEach name="Name7" axis="ch" ptType="node">
+      <dgm:layoutNode name="compNode">
+        <dgm:alg type="composite"/>
+        <dgm:shape xmlns:r="http://schemas.openxmlformats.org/officeDocument/2006/relationships" r:blip="">
+          <dgm:adjLst/>
+        </dgm:shape>
+        <dgm:presOf axis="self"/>
+        <dgm:constrLst>
+          <dgm:constr type="w" for="ch" forName="iconRect" refType="w" fact="0.45"/>
+          <dgm:constr type="h" for="ch" forName="iconRect" refType="w" refFor="ch" refForName="iconRect"/>
+          <dgm:constr type="ctrX" for="ch" forName="iconRect" refType="w" fact="0.5"/>
+          <dgm:constr type="t" for="ch" forName="iconRect"/>
+          <dgm:constr type="h" for="ch" forName="spaceRect" refType="h" fact="0.15"/>
+          <dgm:constr type="w" for="ch" forName="spaceRect" refType="w"/>
+          <dgm:constr type="l" for="ch" forName="spaceRect"/>
+          <dgm:constr type="t" for="ch" forName="spaceRect" refType="b" refFor="ch" refForName="iconRect"/>
+          <dgm:constr type="h" for="ch" forName="textRect" val="20"/>
+          <dgm:constr type="w" for="ch" forName="textRect" refType="w"/>
+          <dgm:constr type="l" for="ch" forName="textRect"/>
+          <dgm:constr type="t" for="ch" forName="textRect" refType="b" refFor="ch" refForName="spaceRect"/>
+        </dgm:constrLst>
+        <dgm:ruleLst>
+          <dgm:rule type="h" val="INF" fact="NaN" max="NaN"/>
+        </dgm:ruleLst>
+        <dgm:layoutNode name="iconRect" styleLbl="node1">
+          <dgm:alg type="sp"/>
+          <dgm:shape xmlns:r="http://schemas.openxmlformats.org/officeDocument/2006/relationships" type="rect" r:blip="" blipPhldr="1">
+            <dgm:adjLst/>
+          </dgm:shape>
+          <dgm:presOf/>
+          <dgm:constrLst/>
+          <dgm:ruleLst/>
+        </dgm:layoutNode>
+        <dgm:layoutNode name="spaceRect">
+          <dgm:alg type="sp"/>
+          <dgm:shape xmlns:r="http://schemas.openxmlformats.org/officeDocument/2006/relationships" r:blip="">
+            <dgm:adjLst/>
+          </dgm:shape>
+          <dgm:presOf/>
+          <dgm:constrLst/>
+          <dgm:ruleLst/>
+        </dgm:layoutNode>
+        <dgm:layoutNode name="textRect" styleLbl="revTx">
+          <dgm:varLst>
+            <dgm:chMax val="1"/>
+            <dgm:chPref val="1"/>
+          </dgm:varLst>
+          <dgm:alg type="tx">
+            <dgm:param type="txAnchorVert" val="t"/>
+          </dgm:alg>
+          <dgm:shape xmlns:r="http://schemas.openxmlformats.org/officeDocument/2006/relationships" type="rect" r:blip="">
+            <dgm:adjLst/>
+          </dgm:shape>
+          <dgm:presOf axis="self" ptType="node"/>
+          <dgm:constrLst>
+            <dgm:constr type="lMarg"/>
+            <dgm:constr type="rMarg"/>
+            <dgm:constr type="tMarg"/>
+            <dgm:constr type="bMarg"/>
+          </dgm:constrLst>
+          <dgm:ruleLst>
+            <dgm:rule type="primFontSz" val="11" fact="NaN" max="NaN"/>
+            <dgm:rule type="h" val="INF" fact="NaN" max="NaN"/>
+          </dgm:ruleLst>
+        </dgm:layoutNode>
+      </dgm:layoutNode>
+      <dgm:forEach name="Name8" axis="followSib" ptType="sibTrans" cnt="1">
+        <dgm:layoutNode name="sibTrans">
+          <dgm:alg type="sp"/>
+          <dgm:shape xmlns:r="http://schemas.openxmlformats.org/officeDocument/2006/relationships" r:blip="">
+            <dgm:adjLst/>
+          </dgm:shape>
+          <dgm:presOf axis="self"/>
+          <dgm:constrLst/>
+          <dgm:ruleLst/>
+        </dgm:layoutNode>
+      </dgm:forEach>
+    </dgm:forEach>
+  </dgm:layoutNode>
+  <dgm:extLst>
+    <a:ext uri="{68A01E43-0DF5-4B5B-8FA6-DAF915123BFB}">
+      <dgm1612:lstStyle xmlns:dgm1612="http://schemas.microsoft.com/office/drawing/2016/12/diagram">
+        <a:lvl1pPr>
+          <a:lnSpc>
+            <a:spcPct val="100000"/>
+          </a:lnSpc>
+        </a:lvl1pPr>
+      </dgm1612:lstStyle>
+    </a:ext>
+  </dgm:extLst>
+</dgm:layoutDef>
+</file>
+
+<file path=ppt/diagrams/quickStyle1.xml><?xml version="1.0" encoding="utf-8"?>
+<dgm:styleDef xmlns:dgm="http://schemas.openxmlformats.org/drawingml/2006/diagram" xmlns:a="http://schemas.openxmlformats.org/drawingml/2006/main" uniqueId="urn:microsoft.com/office/officeart/2005/8/quickstyle/simple1#1">
+  <dgm:title val=""/>
+  <dgm:desc val=""/>
+  <dgm:catLst>
+    <dgm:cat type="simple" pri="10100"/>
+  </dgm:catLst>
+  <dgm:scene3d>
+    <a:camera prst="orthographicFront"/>
+    <a:lightRig rig="threePt" dir="t"/>
+  </dgm:scene3d>
+  <dgm:styleLbl name="node0">
+    <dgm:scene3d>
+      <a:camera prst="orthographicFront"/>
+      <a:lightRig rig="threePt" dir="t"/>
+    </dgm:scene3d>
+    <dgm:sp3d/>
+    <dgm:txPr/>
+    <dgm:style>
+      <a:lnRef idx="2">
+        <a:scrgbClr r="0" g="0" b="0"/>
+      </a:lnRef>
+      <a:fillRef idx="1">
+        <a:scrgbClr r="0" g="0" b="0"/>
+      </a:fillRef>
+      <a:effectRef idx="0">
+        <a:scrgbClr r="0" g="0" b="0"/>
+      </a:effectRef>
+      <a:fontRef idx="minor">
+        <a:schemeClr val="lt1"/>
+      </a:fontRef>
+    </dgm:style>
+  </dgm:styleLbl>
+  <dgm:styleLbl name="lnNode1">
+    <dgm:scene3d>
+      <a:camera prst="orthographicFront"/>
+      <a:lightRig rig="threePt" dir="t"/>
+    </dgm:scene3d>
+    <dgm:sp3d/>
+    <dgm:txPr/>
+    <dgm:style>
+      <a:lnRef idx="2">
+        <a:scrgbClr r="0" g="0" b="0"/>
+      </a:lnRef>
+      <a:fillRef idx="1">
+        <a:scrgbClr r="0" g="0" b="0"/>
+      </a:fillRef>
+      <a:effectRef idx="0">
+        <a:scrgbClr r="0" g="0" b="0"/>
+      </a:effectRef>
+      <a:fontRef idx="minor">
+        <a:schemeClr val="lt1"/>
+      </a:fontRef>
+    </dgm:style>
+  </dgm:styleLbl>
+  <dgm:styleLbl name="vennNode1">
+    <dgm:scene3d>
+      <a:camera prst="orthographicFront"/>
+      <a:lightRig rig="threePt" dir="t"/>
+    </dgm:scene3d>
+    <dgm:sp3d/>
+    <dgm:txPr/>
+    <dgm:style>
+      <a:lnRef idx="2">
+        <a:scrgbClr r="0" g="0" b="0"/>
+      </a:lnRef>
+      <a:fillRef idx="1">
+        <a:scrgbClr r="0" g="0" b="0"/>
+      </a:fillRef>
+      <a:effectRef idx="0">
+        <a:scrgbClr r="0" g="0" b="0"/>
+      </a:effectRef>
+      <a:fontRef idx="minor">
+        <a:schemeClr val="tx1"/>
+      </a:fontRef>
+    </dgm:style>
+  </dgm:styleLbl>
+  <dgm:styleLbl name="alignNode1">
+    <dgm:scene3d>
+      <a:camera prst="orthographicFront"/>
+      <a:lightRig rig="threePt" dir="t"/>
+    </dgm:scene3d>
+    <dgm:sp3d/>
+    <dgm:txPr/>
+    <dgm:style>
+      <a:lnRef idx="2">
+        <a:scrgbClr r="0" g="0" b="0"/>
+      </a:lnRef>
+      <a:fillRef idx="1">
+        <a:scrgbClr r="0" g="0" b="0"/>
+      </a:fillRef>
+      <a:effectRef idx="0">
+        <a:scrgbClr r="0" g="0" b="0"/>
+      </a:effectRef>
+      <a:fontRef idx="minor">
+        <a:schemeClr val="lt1"/>
+      </a:fontRef>
+    </dgm:style>
+  </dgm:styleLbl>
+  <dgm:styleLbl name="node1">
+    <dgm:scene3d>
+      <a:camera prst="orthographicFront"/>
+      <a:lightRig rig="threePt" dir="t"/>
+    </dgm:scene3d>
+    <dgm:sp3d/>
+    <dgm:txPr/>
+    <dgm:style>
+      <a:lnRef idx="2">
+        <a:scrgbClr r="0" g="0" b="0"/>
+      </a:lnRef>
+      <a:fillRef idx="1">
+        <a:scrgbClr r="0" g="0" b="0"/>
+      </a:fillRef>
+      <a:effectRef idx="0">
+        <a:scrgbClr r="0" g="0" b="0"/>
+      </a:effectRef>
+      <a:fontRef idx="minor">
+        <a:schemeClr val="lt1"/>
+      </a:fontRef>
+    </dgm:style>
+  </dgm:styleLbl>
+  <dgm:styleLbl name="node2">
+    <dgm:scene3d>
+      <a:camera prst="orthographicFront"/>
+      <a:lightRig rig="threePt" dir="t"/>
+    </dgm:scene3d>
+    <dgm:sp3d/>
+    <dgm:txPr/>
+    <dgm:style>
+      <a:lnRef idx="2">
+        <a:scrgbClr r="0" g="0" b="0"/>
+      </a:lnRef>
+      <a:fillRef idx="1">
+        <a:scrgbClr r="0" g="0" b="0"/>
+      </a:fillRef>
+      <a:effectRef idx="0">
+        <a:scrgbClr r="0" g="0" b="0"/>
+      </a:effectRef>
+      <a:fontRef idx="minor">
+        <a:schemeClr val="lt1"/>
+      </a:fontRef>
+    </dgm:style>
+  </dgm:styleLbl>
+  <dgm:styleLbl name="node3">
+    <dgm:scene3d>
+      <a:camera prst="orthographicFront"/>
+      <a:lightRig rig="threePt" dir="t"/>
+    </dgm:scene3d>
+    <dgm:sp3d/>
+    <dgm:txPr/>
+    <dgm:style>
+      <a:lnRef idx="2">
+        <a:scrgbClr r="0" g="0" b="0"/>
+      </a:lnRef>
+      <a:fillRef idx="1">
+        <a:scrgbClr r="0" g="0" b="0"/>
+      </a:fillRef>
+      <a:effectRef idx="0">
+        <a:scrgbClr r="0" g="0" b="0"/>
+      </a:effectRef>
+      <a:fontRef idx="minor">
+        <a:schemeClr val="lt1"/>
+      </a:fontRef>
+    </dgm:style>
+  </dgm:styleLbl>
+  <dgm:styleLbl name="node4">
+    <dgm:scene3d>
+      <a:camera prst="orthographicFront"/>
+      <a:lightRig rig="threePt" dir="t"/>
+    </dgm:scene3d>
+    <dgm:sp3d/>
+    <dgm:txPr/>
+    <dgm:style>
+      <a:lnRef idx="2">
+        <a:scrgbClr r="0" g="0" b="0"/>
+      </a:lnRef>
+      <a:fillRef idx="1">
+        <a:scrgbClr r="0" g="0" b="0"/>
+      </a:fillRef>
+      <a:effectRef idx="0">
+        <a:scrgbClr r="0" g="0" b="0"/>
+      </a:effectRef>
+      <a:fontRef idx="minor">
+        <a:schemeClr val="lt1"/>
+      </a:fontRef>
+    </dgm:style>
+  </dgm:styleLbl>
+  <dgm:styleLbl name="fgImgPlace1">
+    <dgm:scene3d>
+      <a:camera prst="orthographicFront"/>
+      <a:lightRig rig="threePt" dir="t"/>
+    </dgm:scene3d>
+    <dgm:sp3d/>
+    <dgm:txPr/>
+    <dgm:style>
+      <a:lnRef idx="2">
+        <a:scrgbClr r="0" g="0" b="0"/>
+      </a:lnRef>
+      <a:fillRef idx="1">
+        <a:scrgbClr r="0" g="0" b="0"/>
+      </a:fillRef>
+      <a:effectRef idx="0">
+        <a:scrgbClr r="0" g="0" b="0"/>
+      </a:effectRef>
+      <a:fontRef idx="minor"/>
+    </dgm:style>
+  </dgm:styleLbl>
+  <dgm:styleLbl name="alignImgPlace1">
+    <dgm:scene3d>
+      <a:camera prst="orthographicFront"/>
+      <a:lightRig rig="threePt" dir="t"/>
+    </dgm:scene3d>
+    <dgm:sp3d/>
+    <dgm:txPr/>
+    <dgm:style>
+      <a:lnRef idx="2">
+        <a:scrgbClr r="0" g="0" b="0"/>
+      </a:lnRef>
+      <a:fillRef idx="1">
+        <a:scrgbClr r="0" g="0" b="0"/>
+      </a:fillRef>
+      <a:effectRef idx="0">
+        <a:scrgbClr r="0" g="0" b="0"/>
+      </a:effectRef>
+      <a:fontRef idx="minor"/>
+    </dgm:style>
+  </dgm:styleLbl>
+  <dgm:styleLbl name="bgImgPlace1">
+    <dgm:scene3d>
+      <a:camera prst="orthographicFront"/>
+      <a:lightRig rig="threePt" dir="t"/>
+    </dgm:scene3d>
+    <dgm:sp3d/>
+    <dgm:txPr/>
+    <dgm:style>
+      <a:lnRef idx="2">
+        <a:scrgbClr r="0" g="0" b="0"/>
+      </a:lnRef>
+      <a:fillRef idx="1">
+        <a:scrgbClr r="0" g="0" b="0"/>
+      </a:fillRef>
+      <a:effectRef idx="0">
+        <a:scrgbClr r="0" g="0" b="0"/>
+      </a:effectRef>
+      <a:fontRef idx="minor"/>
+    </dgm:style>
+  </dgm:styleLbl>
+  <dgm:styleLbl name="sibTrans2D1">
+    <dgm:scene3d>
+      <a:camera prst="orthographicFront"/>
+      <a:lightRig rig="threePt" dir="t"/>
+    </dgm:scene3d>
+    <dgm:sp3d/>
+    <dgm:txPr/>
+    <dgm:style>
+      <a:lnRef idx="0">
+        <a:scrgbClr r="0" g="0" b="0"/>
+      </a:lnRef>
+      <a:fillRef idx="1">
+        <a:scrgbClr r="0" g="0" b="0"/>
+      </a:fillRef>
+      <a:effectRef idx="0">
+        <a:scrgbClr r="0" g="0" b="0"/>
+      </a:effectRef>
+      <a:fontRef idx="minor">
+        <a:schemeClr val="lt1"/>
+      </a:fontRef>
+    </dgm:style>
+  </dgm:styleLbl>
+  <dgm:styleLbl name="fgSibTrans2D1">
+    <dgm:scene3d>
+      <a:camera prst="orthographicFront"/>
+      <a:lightRig rig="threePt" dir="t"/>
+    </dgm:scene3d>
+    <dgm:sp3d/>
+    <dgm:txPr/>
+    <dgm:style>
+      <a:lnRef idx="0">
+        <a:scrgbClr r="0" g="0" b="0"/>
+      </a:lnRef>
+      <a:fillRef idx="1">
+        <a:scrgbClr r="0" g="0" b="0"/>
+      </a:fillRef>
+      <a:effectRef idx="0">
+        <a:scrgbClr r="0" g="0" b="0"/>
+      </a:effectRef>
+      <a:fontRef idx="minor">
+        <a:schemeClr val="lt1"/>
+      </a:fontRef>
+    </dgm:style>
+  </dgm:styleLbl>
+  <dgm:styleLbl name="bgSibTrans2D1">
+    <dgm:scene3d>
+      <a:camera prst="orthographicFront"/>
+      <a:lightRig rig="threePt" dir="t"/>
+    </dgm:scene3d>
+    <dgm:sp3d/>
+    <dgm:txPr/>
+    <dgm:style>
+      <a:lnRef idx="0">
+        <a:scrgbClr r="0" g="0" b="0"/>
+      </a:lnRef>
+      <a:fillRef idx="1">
+        <a:scrgbClr r="0" g="0" b="0"/>
+      </a:fillRef>
+      <a:effectRef idx="0">
+        <a:scrgbClr r="0" g="0" b="0"/>
+      </a:effectRef>
+      <a:fontRef idx="minor">
+        <a:schemeClr val="lt1"/>
+      </a:fontRef>
+    </dgm:style>
+  </dgm:styleLbl>
+  <dgm:styleLbl name="sibTrans1D1">
+    <dgm:scene3d>
+      <a:camera prst="orthographicFront"/>
+      <a:lightRig rig="threePt" dir="t"/>
+    </dgm:scene3d>
+    <dgm:sp3d/>
+    <dgm:txPr/>
+    <dgm:style>
+      <a:lnRef idx="1">
+        <a:scrgbClr r="0" g="0" b="0"/>
+      </a:lnRef>
+      <a:fillRef idx="0">
+        <a:scrgbClr r="0" g="0" b="0"/>
+      </a:fillRef>
+      <a:effectRef idx="0">
+        <a:scrgbClr r="0" g="0" b="0"/>
+      </a:effectRef>
+      <a:fontRef idx="minor"/>
+    </dgm:style>
+  </dgm:styleLbl>
+  <dgm:styleLbl name="callout">
+    <dgm:scene3d>
+      <a:camera prst="orthographicFront"/>
+      <a:lightRig rig="threePt" dir="t"/>
+    </dgm:scene3d>
+    <dgm:sp3d/>
+    <dgm:txPr/>
+    <dgm:style>
+      <a:lnRef idx="2">
+        <a:scrgbClr r="0" g="0" b="0"/>
+      </a:lnRef>
+      <a:fillRef idx="1">
+        <a:scrgbClr r="0" g="0" b="0"/>
+      </a:fillRef>
+      <a:effectRef idx="0">
+        <a:scrgbClr r="0" g="0" b="0"/>
+      </a:effectRef>
+      <a:fontRef idx="minor"/>
+    </dgm:style>
+  </dgm:styleLbl>
+  <dgm:styleLbl name="asst0">
+    <dgm:scene3d>
+      <a:camera prst="orthographicFront"/>
+      <a:lightRig rig="threePt" dir="t"/>
+    </dgm:scene3d>
+    <dgm:sp3d/>
+    <dgm:txPr/>
+    <dgm:style>
+      <a:lnRef idx="2">
+        <a:scrgbClr r="0" g="0" b="0"/>
+      </a:lnRef>
+      <a:fillRef idx="1">
+        <a:scrgbClr r="0" g="0" b="0"/>
+      </a:fillRef>
+      <a:effectRef idx="0">
+        <a:scrgbClr r="0" g="0" b="0"/>
+      </a:effectRef>
+      <a:fontRef idx="minor">
+        <a:schemeClr val="lt1"/>
+      </a:fontRef>
+    </dgm:style>
+  </dgm:styleLbl>
+  <dgm:styleLbl name="asst1">
+    <dgm:scene3d>
+      <a:camera prst="orthographicFront"/>
+      <a:lightRig rig="threePt" dir="t"/>
+    </dgm:scene3d>
+    <dgm:sp3d/>
+    <dgm:txPr/>
+    <dgm:style>
+      <a:lnRef idx="2">
+        <a:scrgbClr r="0" g="0" b="0"/>
+      </a:lnRef>
+      <a:fillRef idx="1">
+        <a:scrgbClr r="0" g="0" b="0"/>
+      </a:fillRef>
+      <a:effectRef idx="0">
+        <a:scrgbClr r="0" g="0" b="0"/>
+      </a:effectRef>
+      <a:fontRef idx="minor">
+        <a:schemeClr val="lt1"/>
+      </a:fontRef>
+    </dgm:style>
+  </dgm:styleLbl>
+  <dgm:styleLbl name="asst2">
+    <dgm:scene3d>
+      <a:camera prst="orthographicFront"/>
+      <a:lightRig rig="threePt" dir="t"/>
+    </dgm:scene3d>
+    <dgm:sp3d/>
+    <dgm:txPr/>
+    <dgm:style>
+      <a:lnRef idx="2">
+        <a:scrgbClr r="0" g="0" b="0"/>
+      </a:lnRef>
+      <a:fillRef idx="1">
+        <a:scrgbClr r="0" g="0" b="0"/>
+      </a:fillRef>
+      <a:effectRef idx="0">
+        <a:scrgbClr r="0" g="0" b="0"/>
+      </a:effectRef>
+      <a:fontRef idx="minor">
+        <a:schemeClr val="lt1"/>
+      </a:fontRef>
+    </dgm:style>
+  </dgm:styleLbl>
+  <dgm:styleLbl name="asst3">
+    <dgm:scene3d>
+      <a:camera prst="orthographicFront"/>
+      <a:lightRig rig="threePt" dir="t"/>
+    </dgm:scene3d>
+    <dgm:sp3d/>
+    <dgm:txPr/>
+    <dgm:style>
+      <a:lnRef idx="2">
+        <a:scrgbClr r="0" g="0" b="0"/>
+      </a:lnRef>
+      <a:fillRef idx="1">
+        <a:scrgbClr r="0" g="0" b="0"/>
+      </a:fillRef>
+      <a:effectRef idx="0">
+        <a:scrgbClr r="0" g="0" b="0"/>
+      </a:effectRef>
+      <a:fontRef idx="minor">
+        <a:schemeClr val="lt1"/>
+      </a:fontRef>
+    </dgm:style>
+  </dgm:styleLbl>
+  <dgm:styleLbl name="asst4">
+    <dgm:scene3d>
+      <a:camera prst="orthographicFront"/>
+      <a:lightRig rig="threePt" dir="t"/>
+    </dgm:scene3d>
+    <dgm:sp3d/>
+    <dgm:txPr/>
+    <dgm:style>
+      <a:lnRef idx="2">
+        <a:scrgbClr r="0" g="0" b="0"/>
+      </a:lnRef>
+      <a:fillRef idx="1">
+        <a:scrgbClr r="0" g="0" b="0"/>
+      </a:fillRef>
+      <a:effectRef idx="0">
+        <a:scrgbClr r="0" g="0" b="0"/>
+      </a:effectRef>
+      <a:fontRef idx="minor">
+        <a:schemeClr val="lt1"/>
+      </a:fontRef>
+    </dgm:style>
+  </dgm:styleLbl>
+  <dgm:styleLbl name="parChTrans2D1">
+    <dgm:scene3d>
+      <a:camera prst="orthographicFront"/>
+      <a:lightRig rig="threePt" dir="t"/>
+    </dgm:scene3d>
+    <dgm:sp3d/>
+    <dgm:txPr/>
+    <dgm:style>
+      <a:lnRef idx="2">
+        <a:scrgbClr r="0" g="0" b="0"/>
+      </a:lnRef>
+      <a:fillRef idx="1">
+        <a:scrgbClr r="0" g="0" b="0"/>
+      </a:fillRef>
+      <a:effectRef idx="0">
+        <a:scrgbClr r="0" g="0" b="0"/>
+      </a:effectRef>
+      <a:fontRef idx="minor">
+        <a:schemeClr val="lt1"/>
+      </a:fontRef>
+    </dgm:style>
+  </dgm:styleLbl>
+  <dgm:styleLbl name="parChTrans2D2">
+    <dgm:scene3d>
+      <a:camera prst="orthographicFront"/>
+      <a:lightRig rig="threePt" dir="t"/>
+    </dgm:scene3d>
+    <dgm:sp3d/>
+    <dgm:txPr/>
+    <dgm:style>
+      <a:lnRef idx="2">
+        <a:scrgbClr r="0" g="0" b="0"/>
+      </a:lnRef>
+      <a:fillRef idx="1">
+        <a:scrgbClr r="0" g="0" b="0"/>
+      </a:fillRef>
+      <a:effectRef idx="0">
+        <a:scrgbClr r="0" g="0" b="0"/>
+      </a:effectRef>
+      <a:fontRef idx="minor">
+        <a:schemeClr val="lt1"/>
+      </a:fontRef>
+    </dgm:style>
+  </dgm:styleLbl>
+  <dgm:styleLbl name="parChTrans2D3">
+    <dgm:scene3d>
+      <a:camera prst="orthographicFront"/>
+      <a:lightRig rig="threePt" dir="t"/>
+    </dgm:scene3d>
+    <dgm:sp3d/>
+    <dgm:txPr/>
+    <dgm:style>
+      <a:lnRef idx="2">
+        <a:scrgbClr r="0" g="0" b="0"/>
+      </a:lnRef>
+      <a:fillRef idx="1">
+        <a:scrgbClr r="0" g="0" b="0"/>
+      </a:fillRef>
+      <a:effectRef idx="0">
+        <a:scrgbClr r="0" g="0" b="0"/>
+      </a:effectRef>
+      <a:fontRef idx="minor">
+        <a:schemeClr val="lt1"/>
+      </a:fontRef>
+    </dgm:style>
+  </dgm:styleLbl>
+  <dgm:styleLbl name="parChTrans2D4">
+    <dgm:scene3d>
+      <a:camera prst="orthographicFront"/>
+      <a:lightRig rig="threePt" dir="t"/>
+    </dgm:scene3d>
+    <dgm:sp3d/>
+    <dgm:txPr/>
+    <dgm:style>
+      <a:lnRef idx="2">
+        <a:scrgbClr r="0" g="0" b="0"/>
+      </a:lnRef>
+      <a:fillRef idx="1">
+        <a:scrgbClr r="0" g="0" b="0"/>
+      </a:fillRef>
+      <a:effectRef idx="0">
+        <a:scrgbClr r="0" g="0" b="0"/>
+      </a:effectRef>
+      <a:fontRef idx="minor">
+        <a:schemeClr val="lt1"/>
+      </a:fontRef>
+    </dgm:style>
+  </dgm:styleLbl>
+  <dgm:styleLbl name="parChTrans1D1">
+    <dgm:scene3d>
+      <a:camera prst="orthographicFront"/>
+      <a:lightRig rig="threePt" dir="t"/>
+    </dgm:scene3d>
+    <dgm:sp3d/>
+    <dgm:txPr/>
+    <dgm:style>
+      <a:lnRef idx="2">
+        <a:scrgbClr r="0" g="0" b="0"/>
+      </a:lnRef>
+      <a:fillRef idx="0">
+        <a:scrgbClr r="0" g="0" b="0"/>
+      </a:fillRef>
+      <a:effectRef idx="0">
+        <a:scrgbClr r="0" g="0" b="0"/>
+      </a:effectRef>
+      <a:fontRef idx="minor"/>
+    </dgm:style>
+  </dgm:styleLbl>
+  <dgm:styleLbl name="parChTrans1D2">
+    <dgm:scene3d>
+      <a:camera prst="orthographicFront"/>
+      <a:lightRig rig="threePt" dir="t"/>
+    </dgm:scene3d>
+    <dgm:sp3d/>
+    <dgm:txPr/>
+    <dgm:style>
+      <a:lnRef idx="2">
+        <a:scrgbClr r="0" g="0" b="0"/>
+      </a:lnRef>
+      <a:fillRef idx="0">
+        <a:scrgbClr r="0" g="0" b="0"/>
+      </a:fillRef>
+      <a:effectRef idx="0">
+        <a:scrgbClr r="0" g="0" b="0"/>
+      </a:effectRef>
+      <a:fontRef idx="minor"/>
+    </dgm:style>
+  </dgm:styleLbl>
+  <dgm:styleLbl name="parChTrans1D3">
+    <dgm:scene3d>
+      <a:camera prst="orthographicFront"/>
+      <a:lightRig rig="threePt" dir="t"/>
+    </dgm:scene3d>
+    <dgm:sp3d/>
+    <dgm:txPr/>
+    <dgm:style>
+      <a:lnRef idx="2">
+        <a:scrgbClr r="0" g="0" b="0"/>
+      </a:lnRef>
+      <a:fillRef idx="0">
+        <a:scrgbClr r="0" g="0" b="0"/>
+      </a:fillRef>
+      <a:effectRef idx="0">
+        <a:scrgbClr r="0" g="0" b="0"/>
+      </a:effectRef>
+      <a:fontRef idx="minor"/>
+    </dgm:style>
+  </dgm:styleLbl>
+  <dgm:styleLbl name="parChTrans1D4">
+    <dgm:scene3d>
+      <a:camera prst="orthographicFront"/>
+      <a:lightRig rig="threePt" dir="t"/>
+    </dgm:scene3d>
+    <dgm:sp3d/>
+    <dgm:txPr/>
+    <dgm:style>
+      <a:lnRef idx="2">
+        <a:scrgbClr r="0" g="0" b="0"/>
+      </a:lnRef>
+      <a:fillRef idx="0">
+        <a:scrgbClr r="0" g="0" b="0"/>
+      </a:fillRef>
+      <a:effectRef idx="0">
+        <a:scrgbClr r="0" g="0" b="0"/>
+      </a:effectRef>
+      <a:fontRef idx="minor"/>
+    </dgm:style>
+  </dgm:styleLbl>
+  <dgm:styleLbl name="fgAcc1">
+    <dgm:scene3d>
+      <a:camera prst="orthographicFront"/>
+      <a:lightRig rig="threePt" dir="t"/>
+    </dgm:scene3d>
+    <dgm:sp3d/>
+    <dgm:txPr/>
+    <dgm:style>
+      <a:lnRef idx="2">
+        <a:scrgbClr r="0" g="0" b="0"/>
+      </a:lnRef>
+      <a:fillRef idx="1">
+        <a:scrgbClr r="0" g="0" b="0"/>
+      </a:fillRef>
+      <a:effectRef idx="0">
+        <a:scrgbClr r="0" g="0" b="0"/>
+      </a:effectRef>
+      <a:fontRef idx="minor"/>
+    </dgm:style>
+  </dgm:styleLbl>
+  <dgm:styleLbl name="conFgAcc1">
+    <dgm:scene3d>
+      <a:camera prst="orthographicFront"/>
+      <a:lightRig rig="threePt" dir="t"/>
+    </dgm:scene3d>
+    <dgm:sp3d/>
+    <dgm:txPr/>
+    <dgm:style>
+      <a:lnRef idx="2">
+        <a:scrgbClr r="0" g="0" b="0"/>
+      </a:lnRef>
+      <a:fillRef idx="1">
+        <a:scrgbClr r="0" g="0" b="0"/>
+      </a:fillRef>
+      <a:effectRef idx="0">
+        <a:scrgbClr r="0" g="0" b="0"/>
+      </a:effectRef>
+      <a:fontRef idx="minor"/>
+    </dgm:style>
+  </dgm:styleLbl>
+  <dgm:styleLbl name="alignAcc1">
+    <dgm:scene3d>
+      <a:camera prst="orthographicFront"/>
+      <a:lightRig rig="threePt" dir="t"/>
+    </dgm:scene3d>
+    <dgm:sp3d/>
+    <dgm:txPr/>
+    <dgm:style>
+      <a:lnRef idx="2">
+        <a:scrgbClr r="0" g="0" b="0"/>
+      </a:lnRef>
+      <a:fillRef idx="1">
+        <a:scrgbClr r="0" g="0" b="0"/>
+      </a:fillRef>
+      <a:effectRef idx="0">
+        <a:scrgbClr r="0" g="0" b="0"/>
+      </a:effectRef>
+      <a:fontRef idx="minor"/>
+    </dgm:style>
+  </dgm:styleLbl>
+  <dgm:styleLbl name="trAlignAcc1">
+    <dgm:scene3d>
+      <a:camera prst="orthographicFront"/>
+      <a:lightRig rig="threePt" dir="t"/>
+    </dgm:scene3d>
+    <dgm:sp3d/>
+    <dgm:txPr/>
+    <dgm:style>
+      <a:lnRef idx="1">
+        <a:scrgbClr r="0" g="0" b="0"/>
+      </a:lnRef>
+      <a:fillRef idx="1">
+        <a:scrgbClr r="0" g="0" b="0"/>
+      </a:fillRef>
+      <a:effectRef idx="0">
+        <a:scrgbClr r="0" g="0" b="0"/>
+      </a:effectRef>
+      <a:fontRef idx="minor"/>
+    </dgm:style>
+  </dgm:styleLbl>
+  <dgm:styleLbl name="bgAcc1">
+    <dgm:scene3d>
+      <a:camera prst="orthographicFront"/>
+      <a:lightRig rig="threePt" dir="t"/>
+    </dgm:scene3d>
+    <dgm:sp3d/>
+    <dgm:txPr/>
+    <dgm:style>
+      <a:lnRef idx="2">
+        <a:scrgbClr r="0" g="0" b="0"/>
+      </a:lnRef>
+      <a:fillRef idx="1">
+        <a:scrgbClr r="0" g="0" b="0"/>
+      </a:fillRef>
+      <a:effectRef idx="0">
+        <a:scrgbClr r="0" g="0" b="0"/>
+      </a:effectRef>
+      <a:fontRef idx="minor"/>
+    </dgm:style>
+  </dgm:styleLbl>
+  <dgm:styleLbl name="solidFgAcc1">
+    <dgm:scene3d>
+      <a:camera prst="orthographicFront"/>
+      <a:lightRig rig="threePt" dir="t"/>
+    </dgm:scene3d>
+    <dgm:sp3d/>
+    <dgm:txPr/>
+    <dgm:style>
+      <a:lnRef idx="2">
+        <a:scrgbClr r="0" g="0" b="0"/>
+      </a:lnRef>
+      <a:fillRef idx="1">
+        <a:scrgbClr r="0" g="0" b="0"/>
+      </a:fillRef>
+      <a:effectRef idx="0">
+        <a:scrgbClr r="0" g="0" b="0"/>
+      </a:effectRef>
+      <a:fontRef idx="minor"/>
+    </dgm:style>
+  </dgm:styleLbl>
+  <dgm:styleLbl name="solidAlignAcc1">
+    <dgm:scene3d>
+      <a:camera prst="orthographicFront"/>
+      <a:lightRig rig="threePt" dir="t"/>
+    </dgm:scene3d>
+    <dgm:sp3d/>
+    <dgm:txPr/>
+    <dgm:style>
+      <a:lnRef idx="2">
+        <a:scrgbClr r="0" g="0" b="0"/>
+      </a:lnRef>
+      <a:fillRef idx="1">
+        <a:scrgbClr r="0" g="0" b="0"/>
+      </a:fillRef>
+      <a:effectRef idx="0">
+        <a:scrgbClr r="0" g="0" b="0"/>
+      </a:effectRef>
+      <a:fontRef idx="minor"/>
+    </dgm:style>
+  </dgm:styleLbl>
+  <dgm:styleLbl name="solidBgAcc1">
+    <dgm:scene3d>
+      <a:camera prst="orthographicFront"/>
+      <a:lightRig rig="threePt" dir="t"/>
+    </dgm:scene3d>
+    <dgm:sp3d/>
+    <dgm:txPr/>
+    <dgm:style>
+      <a:lnRef idx="2">
+        <a:scrgbClr r="0" g="0" b="0"/>
+      </a:lnRef>
+      <a:fillRef idx="1">
+        <a:scrgbClr r="0" g="0" b="0"/>
+      </a:fillRef>
+      <a:effectRef idx="0">
+        <a:scrgbClr r="0" g="0" b="0"/>
+      </a:effectRef>
+      <a:fontRef idx="minor"/>
+    </dgm:style>
+  </dgm:styleLbl>
+  <dgm:styleLbl name="fgAccFollowNode1">
+    <dgm:scene3d>
+      <a:camera prst="orthographicFront"/>
+      <a:lightRig rig="threePt" dir="t"/>
+    </dgm:scene3d>
+    <dgm:sp3d/>
+    <dgm:txPr/>
+    <dgm:style>
+      <a:lnRef idx="2">
+        <a:scrgbClr r="0" g="0" b="0"/>
+      </a:lnRef>
+      <a:fillRef idx="1">
+        <a:scrgbClr r="0" g="0" b="0"/>
+      </a:fillRef>
+      <a:effectRef idx="0">
+        <a:scrgbClr r="0" g="0" b="0"/>
+      </a:effectRef>
+      <a:fontRef idx="minor"/>
+    </dgm:style>
+  </dgm:styleLbl>
+  <dgm:styleLbl name="alignAccFollowNode1">
+    <dgm:scene3d>
+      <a:camera prst="orthographicFront"/>
+      <a:lightRig rig="threePt" dir="t"/>
+    </dgm:scene3d>
+    <dgm:sp3d/>
+    <dgm:txPr/>
+    <dgm:style>
+      <a:lnRef idx="2">
+        <a:scrgbClr r="0" g="0" b="0"/>
+      </a:lnRef>
+      <a:fillRef idx="1">
+        <a:scrgbClr r="0" g="0" b="0"/>
+      </a:fillRef>
+      <a:effectRef idx="0">
+        <a:scrgbClr r="0" g="0" b="0"/>
+      </a:effectRef>
+      <a:fontRef idx="minor"/>
+    </dgm:style>
+  </dgm:styleLbl>
+  <dgm:styleLbl name="bgAccFollowNode1">
+    <dgm:scene3d>
+      <a:camera prst="orthographicFront"/>
+      <a:lightRig rig="threePt" dir="t"/>
+    </dgm:scene3d>
+    <dgm:sp3d/>
+    <dgm:txPr/>
+    <dgm:style>
+      <a:lnRef idx="2">
+        <a:scrgbClr r="0" g="0" b="0"/>
+      </a:lnRef>
+      <a:fillRef idx="1">
+        <a:scrgbClr r="0" g="0" b="0"/>
+      </a:fillRef>
+      <a:effectRef idx="0">
+        <a:scrgbClr r="0" g="0" b="0"/>
+      </a:effectRef>
+      <a:fontRef idx="minor"/>
+    </dgm:style>
+  </dgm:styleLbl>
+  <dgm:styleLbl name="fgAcc0">
+    <dgm:scene3d>
+      <a:camera prst="orthographicFront"/>
+      <a:lightRig rig="threePt" dir="t"/>
+    </dgm:scene3d>
+    <dgm:sp3d/>
+    <dgm:txPr/>
+    <dgm:style>
+      <a:lnRef idx="2">
+        <a:scrgbClr r="0" g="0" b="0"/>
+      </a:lnRef>
+      <a:fillRef idx="1">
+        <a:scrgbClr r="0" g="0" b="0"/>
+      </a:fillRef>
+      <a:effectRef idx="0">
+        <a:scrgbClr r="0" g="0" b="0"/>
+      </a:effectRef>
+      <a:fontRef idx="minor"/>
+    </dgm:style>
+  </dgm:styleLbl>
+  <dgm:styleLbl name="fgAcc2">
+    <dgm:scene3d>
+      <a:camera prst="orthographicFront"/>
+      <a:lightRig rig="threePt" dir="t"/>
+    </dgm:scene3d>
+    <dgm:sp3d/>
+    <dgm:txPr/>
+    <dgm:style>
+      <a:lnRef idx="2">
+        <a:scrgbClr r="0" g="0" b="0"/>
+      </a:lnRef>
+      <a:fillRef idx="1">
+        <a:scrgbClr r="0" g="0" b="0"/>
+      </a:fillRef>
+      <a:effectRef idx="0">
+        <a:scrgbClr r="0" g="0" b="0"/>
+      </a:effectRef>
+      <a:fontRef idx="minor"/>
+    </dgm:style>
+  </dgm:styleLbl>
+  <dgm:styleLbl name="fgAcc3">
+    <dgm:scene3d>
+      <a:camera prst="orthographicFront"/>
+      <a:lightRig rig="threePt" dir="t"/>
+    </dgm:scene3d>
+    <dgm:sp3d/>
+    <dgm:txPr/>
+    <dgm:style>
+      <a:lnRef idx="2">
+        <a:scrgbClr r="0" g="0" b="0"/>
+      </a:lnRef>
+      <a:fillRef idx="1">
+        <a:scrgbClr r="0" g="0" b="0"/>
+      </a:fillRef>
+      <a:effectRef idx="0">
+        <a:scrgbClr r="0" g="0" b="0"/>
+      </a:effectRef>
+      <a:fontRef idx="minor"/>
+    </dgm:style>
+  </dgm:styleLbl>
+  <dgm:styleLbl name="fgAcc4">
+    <dgm:scene3d>
+      <a:camera prst="orthographicFront"/>
+      <a:lightRig rig="threePt" dir="t"/>
+    </dgm:scene3d>
+    <dgm:sp3d/>
+    <dgm:txPr/>
+    <dgm:style>
+      <a:lnRef idx="2">
+        <a:scrgbClr r="0" g="0" b="0"/>
+      </a:lnRef>
+      <a:fillRef idx="1">
+        <a:scrgbClr r="0" g="0" b="0"/>
+      </a:fillRef>
+      <a:effectRef idx="0">
+        <a:scrgbClr r="0" g="0" b="0"/>
+      </a:effectRef>
+      <a:fontRef idx="minor"/>
+    </dgm:style>
+  </dgm:styleLbl>
+  <dgm:styleLbl name="bgShp">
+    <dgm:scene3d>
+      <a:camera prst="orthographicFront"/>
+      <a:lightRig rig="threePt" dir="t"/>
+    </dgm:scene3d>
+    <dgm:sp3d/>
+    <dgm:txPr/>
+    <dgm:style>
+      <a:lnRef idx="0">
+        <a:scrgbClr r="0" g="0" b="0"/>
+      </a:lnRef>
+      <a:fillRef idx="1">
+        <a:scrgbClr r="0" g="0" b="0"/>
+      </a:fillRef>
+      <a:effectRef idx="0">
+        <a:scrgbClr r="0" g="0" b="0"/>
+      </a:effectRef>
+      <a:fontRef idx="minor"/>
+    </dgm:style>
+  </dgm:styleLbl>
+  <dgm:styleLbl name="dkBgShp">
+    <dgm:scene3d>
+      <a:camera prst="orthographicFront"/>
+      <a:lightRig rig="threePt" dir="t"/>
+    </dgm:scene3d>
+    <dgm:sp3d/>
+    <dgm:txPr/>
+    <dgm:style>
+      <a:lnRef idx="0">
+        <a:scrgbClr r="0" g="0" b="0"/>
+      </a:lnRef>
+      <a:fillRef idx="1">
+        <a:scrgbClr r="0" g="0" b="0"/>
+      </a:fillRef>
+      <a:effectRef idx="0">
+        <a:scrgbClr r="0" g="0" b="0"/>
+      </a:effectRef>
+      <a:fontRef idx="minor"/>
+    </dgm:style>
+  </dgm:styleLbl>
+  <dgm:styleLbl name="trBgShp">
+    <dgm:scene3d>
+      <a:camera prst="orthographicFront"/>
+      <a:lightRig rig="threePt" dir="t"/>
+    </dgm:scene3d>
+    <dgm:sp3d/>
+    <dgm:txPr/>
+    <dgm:style>
+      <a:lnRef idx="0">
+        <a:scrgbClr r="0" g="0" b="0"/>
+      </a:lnRef>
+      <a:fillRef idx="1">
+        <a:scrgbClr r="0" g="0" b="0"/>
+      </a:fillRef>
+      <a:effectRef idx="0">
+        <a:scrgbClr r="0" g="0" b="0"/>
+      </a:effectRef>
+      <a:fontRef idx="minor"/>
+    </dgm:style>
+  </dgm:styleLbl>
+  <dgm:styleLbl name="fgShp">
+    <dgm:scene3d>
+      <a:camera prst="orthographicFront"/>
+      <a:lightRig rig="threePt" dir="t"/>
+    </dgm:scene3d>
+    <dgm:sp3d/>
+    <dgm:txPr/>
+    <dgm:style>
+      <a:lnRef idx="2">
+        <a:scrgbClr r="0" g="0" b="0"/>
+      </a:lnRef>
+      <a:fillRef idx="1">
+        <a:scrgbClr r="0" g="0" b="0"/>
+      </a:fillRef>
+      <a:effectRef idx="0">
+        <a:scrgbClr r="0" g="0" b="0"/>
+      </a:effectRef>
+      <a:fontRef idx="minor"/>
+    </dgm:style>
+  </dgm:styleLbl>
+  <dgm:styleLbl name="revTx">
+    <dgm:scene3d>
+      <a:camera prst="orthographicFront"/>
+      <a:lightRig rig="threePt" dir="t"/>
+    </dgm:scene3d>
+    <dgm:sp3d/>
+    <dgm:txPr/>
+    <dgm:style>
+      <a:lnRef idx="0">
+        <a:scrgbClr r="0" g="0" b="0"/>
+      </a:lnRef>
+      <a:fillRef idx="0">
+        <a:scrgbClr r="0" g="0" b="0"/>
+      </a:fillRef>
+      <a:effectRef idx="0">
+        <a:scrgbClr r="0" g="0" b="0"/>
+      </a:effectRef>
+      <a:fontRef idx="minor"/>
+    </dgm:style>
+  </dgm:styleLbl>
+</dgm:styleDef>
+</file>
+
 <file path=ppt/notesMasters/notesMaster1.xml><?xml version="1.0" encoding="utf-8"?>
-<p:notesMaster xmlns:a="http://schemas.openxmlformats.org/drawingml/2006/main" xmlns:p="http://schemas.openxmlformats.org/presentationml/2006/main" xmlns:r="http://schemas.openxmlformats.org/officeDocument/2006/relationships">
+<p:notesMaster xmlns:a="http://schemas.openxmlformats.org/drawingml/2006/main" xmlns:r="http://schemas.openxmlformats.org/officeDocument/2006/relationships" xmlns:p="http://schemas.openxmlformats.org/presentationml/2006/main">
   <p:cSld>
     <p:bg>
       <p:bgRef idx="1001">
@@ -140,241 +3434,16 @@
           <a:chExt cx="0" cy="0"/>
         </a:xfrm>
       </p:grpSpPr>
-      <p:sp>
-        <p:nvSpPr>
-          <p:cNvPr id="2" name="Header Placeholder 1"/>
-          <p:cNvSpPr>
-            <a:spLocks noGrp="1"/>
-          </p:cNvSpPr>
-          <p:nvPr>
-            <p:ph type="hdr" sz="quarter"/>
-          </p:nvPr>
-        </p:nvSpPr>
-        <p:spPr>
-          <a:xfrm>
-            <a:off x="0" y="0"/>
-            <a:ext cx="2971800" cy="457200"/>
-          </a:xfrm>
-          <a:prstGeom prst="rect">
-            <a:avLst/>
-          </a:prstGeom>
-        </p:spPr>
-        <p:txBody>
-          <a:bodyPr vert="horz" lIns="91440" tIns="45720" rIns="91440" bIns="45720" rtlCol="0"/>
-          <a:lstStyle>
-            <a:lvl1pPr algn="l">
-              <a:defRPr sz="1200"/>
-            </a:lvl1pPr>
-          </a:lstStyle>
-          <a:p>
-            <a:endParaRPr lang="en-US"/>
-          </a:p>
-        </p:txBody>
-      </p:sp>
-      <p:sp>
-        <p:nvSpPr>
-          <p:cNvPr id="3" name="Date Placeholder 2"/>
-          <p:cNvSpPr>
-            <a:spLocks noGrp="1"/>
-          </p:cNvSpPr>
-          <p:nvPr>
-            <p:ph type="dt" idx="1"/>
-          </p:nvPr>
-        </p:nvSpPr>
-        <p:spPr>
-          <a:xfrm>
-            <a:off x="3884613" y="0"/>
-            <a:ext cx="2971800" cy="457200"/>
-          </a:xfrm>
-          <a:prstGeom prst="rect">
-            <a:avLst/>
-          </a:prstGeom>
-        </p:spPr>
-        <p:txBody>
-          <a:bodyPr vert="horz" lIns="91440" tIns="45720" rIns="91440" bIns="45720" rtlCol="0"/>
-          <a:lstStyle>
-            <a:lvl1pPr algn="r">
-              <a:defRPr sz="1200"/>
-            </a:lvl1pPr>
-          </a:lstStyle>
-          <a:p>
-            <a:fld id="{0F89C1C7-3DCD-1040-A9CF-14679D8B5DDD}" type="datetimeFigureOut">
-              <a:rPr lang="en-US" smtClean="0"/>
-              <a:t>10/17/16</a:t>
-            </a:fld>
-            <a:endParaRPr lang="en-US"/>
-          </a:p>
-        </p:txBody>
-      </p:sp>
-      <p:sp>
-        <p:nvSpPr>
-          <p:cNvPr id="4" name="Slide Image Placeholder 3"/>
-          <p:cNvSpPr>
-            <a:spLocks noGrp="1" noRot="1" noChangeAspect="1"/>
-          </p:cNvSpPr>
-          <p:nvPr>
-            <p:ph type="sldImg" idx="2"/>
-          </p:nvPr>
-        </p:nvSpPr>
-        <p:spPr>
-          <a:xfrm>
-            <a:off x="1143000" y="685800"/>
-            <a:ext cx="4572000" cy="3429000"/>
-          </a:xfrm>
-          <a:prstGeom prst="rect">
-            <a:avLst/>
-          </a:prstGeom>
-          <a:noFill/>
-          <a:ln w="12700">
-            <a:solidFill>
-              <a:prstClr val="black"/>
-            </a:solidFill>
-          </a:ln>
-        </p:spPr>
-        <p:txBody>
-          <a:bodyPr vert="horz" lIns="91440" tIns="45720" rIns="91440" bIns="45720" rtlCol="0" anchor="ctr"/>
-          <a:lstStyle/>
-          <a:p>
-            <a:endParaRPr lang="en-US"/>
-          </a:p>
-        </p:txBody>
-      </p:sp>
-      <p:sp>
-        <p:nvSpPr>
-          <p:cNvPr id="5" name="Notes Placeholder 4"/>
-          <p:cNvSpPr>
-            <a:spLocks noGrp="1"/>
-          </p:cNvSpPr>
-          <p:nvPr>
-            <p:ph type="body" sz="quarter" idx="3"/>
-          </p:nvPr>
-        </p:nvSpPr>
-        <p:spPr>
-          <a:xfrm>
-            <a:off x="685800" y="4343400"/>
-            <a:ext cx="5486400" cy="4114800"/>
-          </a:xfrm>
-          <a:prstGeom prst="rect">
-            <a:avLst/>
-          </a:prstGeom>
-        </p:spPr>
-        <p:txBody>
-          <a:bodyPr vert="horz" lIns="91440" tIns="45720" rIns="91440" bIns="45720" rtlCol="0"/>
-          <a:lstStyle/>
-          <a:p>
-            <a:pPr lvl="0"/>
-            <a:r>
-              <a:rPr lang="en-US" smtClean="0"/>
-              <a:t>Click to edit Master text styles</a:t>
-            </a:r>
-          </a:p>
-          <a:p>
-            <a:pPr lvl="1"/>
-            <a:r>
-              <a:rPr lang="en-US" smtClean="0"/>
-              <a:t>Second level</a:t>
-            </a:r>
-          </a:p>
-          <a:p>
-            <a:pPr lvl="2"/>
-            <a:r>
-              <a:rPr lang="en-US" smtClean="0"/>
-              <a:t>Third level</a:t>
-            </a:r>
-          </a:p>
-          <a:p>
-            <a:pPr lvl="3"/>
-            <a:r>
-              <a:rPr lang="en-US" smtClean="0"/>
-              <a:t>Fourth level</a:t>
-            </a:r>
-          </a:p>
-          <a:p>
-            <a:pPr lvl="4"/>
-            <a:r>
-              <a:rPr lang="en-US" smtClean="0"/>
-              <a:t>Fifth level</a:t>
-            </a:r>
-            <a:endParaRPr lang="en-US"/>
-          </a:p>
-        </p:txBody>
-      </p:sp>
-      <p:sp>
-        <p:nvSpPr>
-          <p:cNvPr id="6" name="Footer Placeholder 5"/>
-          <p:cNvSpPr>
-            <a:spLocks noGrp="1"/>
-          </p:cNvSpPr>
-          <p:nvPr>
-            <p:ph type="ftr" sz="quarter" idx="4"/>
-          </p:nvPr>
-        </p:nvSpPr>
-        <p:spPr>
-          <a:xfrm>
-            <a:off x="0" y="8685213"/>
-            <a:ext cx="2971800" cy="457200"/>
-          </a:xfrm>
-          <a:prstGeom prst="rect">
-            <a:avLst/>
-          </a:prstGeom>
-        </p:spPr>
-        <p:txBody>
-          <a:bodyPr vert="horz" lIns="91440" tIns="45720" rIns="91440" bIns="45720" rtlCol="0" anchor="b"/>
-          <a:lstStyle>
-            <a:lvl1pPr algn="l">
-              <a:defRPr sz="1200"/>
-            </a:lvl1pPr>
-          </a:lstStyle>
-          <a:p>
-            <a:endParaRPr lang="en-US"/>
-          </a:p>
-        </p:txBody>
-      </p:sp>
-      <p:sp>
-        <p:nvSpPr>
-          <p:cNvPr id="7" name="Slide Number Placeholder 6"/>
-          <p:cNvSpPr>
-            <a:spLocks noGrp="1"/>
-          </p:cNvSpPr>
-          <p:nvPr>
-            <p:ph type="sldNum" sz="quarter" idx="5"/>
-          </p:nvPr>
-        </p:nvSpPr>
-        <p:spPr>
-          <a:xfrm>
-            <a:off x="3884613" y="8685213"/>
-            <a:ext cx="2971800" cy="457200"/>
-          </a:xfrm>
-          <a:prstGeom prst="rect">
-            <a:avLst/>
-          </a:prstGeom>
-        </p:spPr>
-        <p:txBody>
-          <a:bodyPr vert="horz" lIns="91440" tIns="45720" rIns="91440" bIns="45720" rtlCol="0" anchor="b"/>
-          <a:lstStyle>
-            <a:lvl1pPr algn="r">
-              <a:defRPr sz="1200"/>
-            </a:lvl1pPr>
-          </a:lstStyle>
-          <a:p>
-            <a:fld id="{BB5E49A5-4136-284D-997B-48E1D791AD67}" type="slidenum">
-              <a:rPr lang="en-US" smtClean="0"/>
-              <a:t>‹#›</a:t>
-            </a:fld>
-            <a:endParaRPr lang="en-US"/>
-          </a:p>
-        </p:txBody>
-      </p:sp>
     </p:spTree>
     <p:extLst>
       <p:ext uri="{BB962C8B-B14F-4D97-AF65-F5344CB8AC3E}">
-        <p14:creationId xmlns:p14="http://schemas.microsoft.com/office/powerpoint/2010/main" val="2623252185"/>
+        <p14:creationId xmlns:p14="http://schemas.microsoft.com/office/powerpoint/2010/main" val="4050795812"/>
       </p:ext>
     </p:extLst>
   </p:cSld>
   <p:clrMap bg1="lt1" tx1="dk1" bg2="lt2" tx2="dk2" accent1="accent1" accent2="accent2" accent3="accent3" accent4="accent4" accent5="accent5" accent6="accent6" hlink="hlink" folHlink="folHlink"/>
   <p:notesStyle>
-    <a:lvl1pPr marL="0" algn="l" defTabSz="457200" rtl="0" eaLnBrk="1" latinLnBrk="0" hangingPunct="1">
+    <a:lvl1pPr marL="0" algn="l" defTabSz="914400" rtl="0" eaLnBrk="1" latinLnBrk="0" hangingPunct="1">
       <a:defRPr sz="1200" kern="1200">
         <a:solidFill>
           <a:schemeClr val="tx1"/>
@@ -384,7 +3453,7 @@
         <a:cs typeface="+mn-cs"/>
       </a:defRPr>
     </a:lvl1pPr>
-    <a:lvl2pPr marL="457200" algn="l" defTabSz="457200" rtl="0" eaLnBrk="1" latinLnBrk="0" hangingPunct="1">
+    <a:lvl2pPr marL="457200" algn="l" defTabSz="914400" rtl="0" eaLnBrk="1" latinLnBrk="0" hangingPunct="1">
       <a:defRPr sz="1200" kern="1200">
         <a:solidFill>
           <a:schemeClr val="tx1"/>
@@ -394,7 +3463,7 @@
         <a:cs typeface="+mn-cs"/>
       </a:defRPr>
     </a:lvl2pPr>
-    <a:lvl3pPr marL="914400" algn="l" defTabSz="457200" rtl="0" eaLnBrk="1" latinLnBrk="0" hangingPunct="1">
+    <a:lvl3pPr marL="914400" algn="l" defTabSz="914400" rtl="0" eaLnBrk="1" latinLnBrk="0" hangingPunct="1">
       <a:defRPr sz="1200" kern="1200">
         <a:solidFill>
           <a:schemeClr val="tx1"/>
@@ -404,7 +3473,7 @@
         <a:cs typeface="+mn-cs"/>
       </a:defRPr>
     </a:lvl3pPr>
-    <a:lvl4pPr marL="1371600" algn="l" defTabSz="457200" rtl="0" eaLnBrk="1" latinLnBrk="0" hangingPunct="1">
+    <a:lvl4pPr marL="1371600" algn="l" defTabSz="914400" rtl="0" eaLnBrk="1" latinLnBrk="0" hangingPunct="1">
       <a:defRPr sz="1200" kern="1200">
         <a:solidFill>
           <a:schemeClr val="tx1"/>
@@ -414,7 +3483,7 @@
         <a:cs typeface="+mn-cs"/>
       </a:defRPr>
     </a:lvl4pPr>
-    <a:lvl5pPr marL="1828800" algn="l" defTabSz="457200" rtl="0" eaLnBrk="1" latinLnBrk="0" hangingPunct="1">
+    <a:lvl5pPr marL="1828800" algn="l" defTabSz="914400" rtl="0" eaLnBrk="1" latinLnBrk="0" hangingPunct="1">
       <a:defRPr sz="1200" kern="1200">
         <a:solidFill>
           <a:schemeClr val="tx1"/>
@@ -424,7 +3493,7 @@
         <a:cs typeface="+mn-cs"/>
       </a:defRPr>
     </a:lvl5pPr>
-    <a:lvl6pPr marL="2286000" algn="l" defTabSz="457200" rtl="0" eaLnBrk="1" latinLnBrk="0" hangingPunct="1">
+    <a:lvl6pPr marL="2286000" algn="l" defTabSz="914400" rtl="0" eaLnBrk="1" latinLnBrk="0" hangingPunct="1">
       <a:defRPr sz="1200" kern="1200">
         <a:solidFill>
           <a:schemeClr val="tx1"/>
@@ -434,7 +3503,7 @@
         <a:cs typeface="+mn-cs"/>
       </a:defRPr>
     </a:lvl6pPr>
-    <a:lvl7pPr marL="2743200" algn="l" defTabSz="457200" rtl="0" eaLnBrk="1" latinLnBrk="0" hangingPunct="1">
+    <a:lvl7pPr marL="2743200" algn="l" defTabSz="914400" rtl="0" eaLnBrk="1" latinLnBrk="0" hangingPunct="1">
       <a:defRPr sz="1200" kern="1200">
         <a:solidFill>
           <a:schemeClr val="tx1"/>
@@ -444,7 +3513,7 @@
         <a:cs typeface="+mn-cs"/>
       </a:defRPr>
     </a:lvl7pPr>
-    <a:lvl8pPr marL="3200400" algn="l" defTabSz="457200" rtl="0" eaLnBrk="1" latinLnBrk="0" hangingPunct="1">
+    <a:lvl8pPr marL="3200400" algn="l" defTabSz="914400" rtl="0" eaLnBrk="1" latinLnBrk="0" hangingPunct="1">
       <a:defRPr sz="1200" kern="1200">
         <a:solidFill>
           <a:schemeClr val="tx1"/>
@@ -454,7 +3523,7 @@
         <a:cs typeface="+mn-cs"/>
       </a:defRPr>
     </a:lvl8pPr>
-    <a:lvl9pPr marL="3657600" algn="l" defTabSz="457200" rtl="0" eaLnBrk="1" latinLnBrk="0" hangingPunct="1">
+    <a:lvl9pPr marL="3657600" algn="l" defTabSz="914400" rtl="0" eaLnBrk="1" latinLnBrk="0" hangingPunct="1">
       <a:defRPr sz="1200" kern="1200">
         <a:solidFill>
           <a:schemeClr val="tx1"/>
@@ -469,7 +3538,7 @@
 </file>
 
 <file path=ppt/notesSlides/notesSlide1.xml><?xml version="1.0" encoding="utf-8"?>
-<p:notes xmlns:a="http://schemas.openxmlformats.org/drawingml/2006/main" xmlns:p="http://schemas.openxmlformats.org/presentationml/2006/main" xmlns:r="http://schemas.openxmlformats.org/officeDocument/2006/relationships">
+<p:notes xmlns:a="http://schemas.openxmlformats.org/drawingml/2006/main" xmlns:r="http://schemas.openxmlformats.org/officeDocument/2006/relationships" xmlns:p="http://schemas.openxmlformats.org/presentationml/2006/main">
   <p:cSld>
     <p:spTree>
       <p:nvGrpSpPr>
@@ -489,7 +3558,7 @@
         <p:nvSpPr>
           <p:cNvPr id="2" name="Slide Image Placeholder 1"/>
           <p:cNvSpPr>
-            <a:spLocks noGrp="1"/>
+            <a:spLocks noGrp="1" noRot="1" noChangeAspect="1"/>
           </p:cNvSpPr>
           <p:nvPr>
             <p:ph type="sldImg" idx="2"/>
@@ -504,7 +3573,7 @@
             <a:spLocks noGrp="1"/>
           </p:cNvSpPr>
           <p:nvPr>
-            <p:ph type="body" idx="3" sz="quarter"/>
+            <p:ph type="body" sz="quarter" idx="3"/>
           </p:nvPr>
         </p:nvSpPr>
         <p:spPr/>
@@ -513,7 +3582,7 @@
           <a:lstStyle/>
           <a:p>
             <a:r>
-              <a:t>Open with the challenge: researchers need trustworthy answers, not another general-purpose chatbot. Introduce the project as a local-first, citation-first evidence workspace.</a:t>
+              <a:t>Explain that the core problem is not access to a language model. It is evidence discovery with scientific provenance and explicit limits.</a:t>
             </a:r>
           </a:p>
         </p:txBody>
@@ -525,7 +3594,7 @@
             <a:spLocks noGrp="1"/>
           </p:cNvSpPr>
           <p:nvPr>
-            <p:ph type="sldNum" idx="5" sz="quarter"/>
+            <p:ph type="sldNum" sz="quarter" idx="5"/>
           </p:nvPr>
         </p:nvSpPr>
         <p:spPr/>
@@ -539,7 +3608,7 @@
 </file>
 
 <file path=ppt/notesSlides/notesSlide10.xml><?xml version="1.0" encoding="utf-8"?>
-<p:notes xmlns:a="http://schemas.openxmlformats.org/drawingml/2006/main" xmlns:p="http://schemas.openxmlformats.org/presentationml/2006/main" xmlns:r="http://schemas.openxmlformats.org/officeDocument/2006/relationships">
+<p:notes xmlns:a="http://schemas.openxmlformats.org/drawingml/2006/main" xmlns:r="http://schemas.openxmlformats.org/officeDocument/2006/relationships" xmlns:p="http://schemas.openxmlformats.org/presentationml/2006/main">
   <p:cSld>
     <p:spTree>
       <p:nvGrpSpPr>
@@ -559,7 +3628,7 @@
         <p:nvSpPr>
           <p:cNvPr id="2" name="Slide Image Placeholder 1"/>
           <p:cNvSpPr>
-            <a:spLocks noGrp="1"/>
+            <a:spLocks noGrp="1" noRot="1" noChangeAspect="1"/>
           </p:cNvSpPr>
           <p:nvPr>
             <p:ph type="sldImg" idx="2"/>
@@ -574,7 +3643,7 @@
             <a:spLocks noGrp="1"/>
           </p:cNvSpPr>
           <p:nvPr>
-            <p:ph type="body" idx="3" sz="quarter"/>
+            <p:ph type="body" sz="quarter" idx="3"/>
           </p:nvPr>
         </p:nvSpPr>
         <p:spPr/>
@@ -583,7 +3652,7 @@
           <a:lstStyle/>
           <a:p>
             <a:r>
-              <a:t>Explain the live-demo sequence and backup plan. These committed artifacts support evaluation and handoff if the live environment is unavailable.</a:t>
+              <a:t>Be candid about limitations. Emphasize that local-first deployment and a controlled topic were conscious scope decisions, not hidden gaps.</a:t>
             </a:r>
           </a:p>
         </p:txBody>
@@ -595,7 +3664,7 @@
             <a:spLocks noGrp="1"/>
           </p:cNvSpPr>
           <p:nvPr>
-            <p:ph type="sldNum" idx="5" sz="quarter"/>
+            <p:ph type="sldNum" sz="quarter" idx="5"/>
           </p:nvPr>
         </p:nvSpPr>
         <p:spPr/>
@@ -608,8 +3677,8 @@
 </p:notes>
 </file>
 
-<file path=ppt/notesSlides/notesSlide11.xml><?xml version="1.0" encoding="utf-8"?>
-<p:notes xmlns:a="http://schemas.openxmlformats.org/drawingml/2006/main" xmlns:p="http://schemas.openxmlformats.org/presentationml/2006/main" xmlns:r="http://schemas.openxmlformats.org/officeDocument/2006/relationships">
+<file path=ppt/notesSlides/notesSlide2.xml><?xml version="1.0" encoding="utf-8"?>
+<p:notes xmlns:a="http://schemas.openxmlformats.org/drawingml/2006/main" xmlns:r="http://schemas.openxmlformats.org/officeDocument/2006/relationships" xmlns:p="http://schemas.openxmlformats.org/presentationml/2006/main">
   <p:cSld>
     <p:spTree>
       <p:nvGrpSpPr>
@@ -629,7 +3698,7 @@
         <p:nvSpPr>
           <p:cNvPr id="2" name="Slide Image Placeholder 1"/>
           <p:cNvSpPr>
-            <a:spLocks noGrp="1"/>
+            <a:spLocks noGrp="1" noRot="1" noChangeAspect="1"/>
           </p:cNvSpPr>
           <p:nvPr>
             <p:ph type="sldImg" idx="2"/>
@@ -644,7 +3713,7 @@
             <a:spLocks noGrp="1"/>
           </p:cNvSpPr>
           <p:nvPr>
-            <p:ph type="body" idx="3" sz="quarter"/>
+            <p:ph type="body" sz="quarter" idx="3"/>
           </p:nvPr>
         </p:nvSpPr>
         <p:spPr/>
@@ -653,7 +3722,7 @@
           <a:lstStyle/>
           <a:p>
             <a:r>
-              <a:t>Be candid about limitations. Emphasize that local-first deployment and a controlled topic were conscious scope decisions, not hidden gaps.</a:t>
+              <a:t>Walk through the controlled corpus and fail-closed approach. Stress that the system does not silently fall back to general model knowledge.</a:t>
             </a:r>
           </a:p>
         </p:txBody>
@@ -665,7 +3734,7 @@
             <a:spLocks noGrp="1"/>
           </p:cNvSpPr>
           <p:nvPr>
-            <p:ph type="sldNum" idx="5" sz="quarter"/>
+            <p:ph type="sldNum" sz="quarter" idx="5"/>
           </p:nvPr>
         </p:nvSpPr>
         <p:spPr/>
@@ -678,8 +3747,8 @@
 </p:notes>
 </file>
 
-<file path=ppt/notesSlides/notesSlide12.xml><?xml version="1.0" encoding="utf-8"?>
-<p:notes xmlns:a="http://schemas.openxmlformats.org/drawingml/2006/main" xmlns:p="http://schemas.openxmlformats.org/presentationml/2006/main" xmlns:r="http://schemas.openxmlformats.org/officeDocument/2006/relationships">
+<file path=ppt/notesSlides/notesSlide3.xml><?xml version="1.0" encoding="utf-8"?>
+<p:notes xmlns:a="http://schemas.openxmlformats.org/drawingml/2006/main" xmlns:r="http://schemas.openxmlformats.org/officeDocument/2006/relationships" xmlns:p="http://schemas.openxmlformats.org/presentationml/2006/main">
   <p:cSld>
     <p:spTree>
       <p:nvGrpSpPr>
@@ -699,7 +3768,7 @@
         <p:nvSpPr>
           <p:cNvPr id="2" name="Slide Image Placeholder 1"/>
           <p:cNvSpPr>
-            <a:spLocks noGrp="1"/>
+            <a:spLocks noGrp="1" noRot="1" noChangeAspect="1"/>
           </p:cNvSpPr>
           <p:nvPr>
             <p:ph type="sldImg" idx="2"/>
@@ -714,7 +3783,7 @@
             <a:spLocks noGrp="1"/>
           </p:cNvSpPr>
           <p:nvPr>
-            <p:ph type="body" idx="3" sz="quarter"/>
+            <p:ph type="body" sz="quarter" idx="3"/>
           </p:nvPr>
         </p:nvSpPr>
         <p:spPr/>
@@ -723,7 +3792,7 @@
           <a:lstStyle/>
           <a:p>
             <a:r>
-              <a:t>Close by returning to the core value: scientific synthesis that stays linked to inspectable evidence. Invite repository-based review and questions.</a:t>
+              <a:t>Describe the data flow left to right. The same provenance fields survive extraction, retrieval, answer generation, and citation display.</a:t>
             </a:r>
           </a:p>
         </p:txBody>
@@ -735,7 +3804,7 @@
             <a:spLocks noGrp="1"/>
           </p:cNvSpPr>
           <p:nvPr>
-            <p:ph type="sldNum" idx="5" sz="quarter"/>
+            <p:ph type="sldNum" sz="quarter" idx="5"/>
           </p:nvPr>
         </p:nvSpPr>
         <p:spPr/>
@@ -748,8 +3817,8 @@
 </p:notes>
 </file>
 
-<file path=ppt/notesSlides/notesSlide2.xml><?xml version="1.0" encoding="utf-8"?>
-<p:notes xmlns:a="http://schemas.openxmlformats.org/drawingml/2006/main" xmlns:p="http://schemas.openxmlformats.org/presentationml/2006/main" xmlns:r="http://schemas.openxmlformats.org/officeDocument/2006/relationships">
+<file path=ppt/notesSlides/notesSlide4.xml><?xml version="1.0" encoding="utf-8"?>
+<p:notes xmlns:a="http://schemas.openxmlformats.org/drawingml/2006/main" xmlns:r="http://schemas.openxmlformats.org/officeDocument/2006/relationships" xmlns:p="http://schemas.openxmlformats.org/presentationml/2006/main">
   <p:cSld>
     <p:spTree>
       <p:nvGrpSpPr>
@@ -769,7 +3838,7 @@
         <p:nvSpPr>
           <p:cNvPr id="2" name="Slide Image Placeholder 1"/>
           <p:cNvSpPr>
-            <a:spLocks noGrp="1"/>
+            <a:spLocks noGrp="1" noRot="1" noChangeAspect="1"/>
           </p:cNvSpPr>
           <p:nvPr>
             <p:ph type="sldImg" idx="2"/>
@@ -784,7 +3853,7 @@
             <a:spLocks noGrp="1"/>
           </p:cNvSpPr>
           <p:nvPr>
-            <p:ph type="body" idx="3" sz="quarter"/>
+            <p:ph type="body" sz="quarter" idx="3"/>
           </p:nvPr>
         </p:nvSpPr>
         <p:spPr/>
@@ -793,7 +3862,7 @@
           <a:lstStyle/>
           <a:p>
             <a:r>
-              <a:t>Explain that the core problem is not access to a language model. It is evidence discovery with scientific provenance and explicit limits.</a:t>
+              <a:t>Demonstrate the Ask form. Explain that every answer claim should map to a retrieved citation and that unsupported generation is rejected.</a:t>
             </a:r>
           </a:p>
         </p:txBody>
@@ -805,7 +3874,7 @@
             <a:spLocks noGrp="1"/>
           </p:cNvSpPr>
           <p:nvPr>
-            <p:ph type="sldNum" idx="5" sz="quarter"/>
+            <p:ph type="sldNum" sz="quarter" idx="5"/>
           </p:nvPr>
         </p:nvSpPr>
         <p:spPr/>
@@ -818,8 +3887,8 @@
 </p:notes>
 </file>
 
-<file path=ppt/notesSlides/notesSlide3.xml><?xml version="1.0" encoding="utf-8"?>
-<p:notes xmlns:a="http://schemas.openxmlformats.org/drawingml/2006/main" xmlns:p="http://schemas.openxmlformats.org/presentationml/2006/main" xmlns:r="http://schemas.openxmlformats.org/officeDocument/2006/relationships">
+<file path=ppt/notesSlides/notesSlide5.xml><?xml version="1.0" encoding="utf-8"?>
+<p:notes xmlns:a="http://schemas.openxmlformats.org/drawingml/2006/main" xmlns:r="http://schemas.openxmlformats.org/officeDocument/2006/relationships" xmlns:p="http://schemas.openxmlformats.org/presentationml/2006/main">
   <p:cSld>
     <p:spTree>
       <p:nvGrpSpPr>
@@ -839,7 +3908,7 @@
         <p:nvSpPr>
           <p:cNvPr id="2" name="Slide Image Placeholder 1"/>
           <p:cNvSpPr>
-            <a:spLocks noGrp="1"/>
+            <a:spLocks noGrp="1" noRot="1" noChangeAspect="1"/>
           </p:cNvSpPr>
           <p:nvPr>
             <p:ph type="sldImg" idx="2"/>
@@ -854,7 +3923,7 @@
             <a:spLocks noGrp="1"/>
           </p:cNvSpPr>
           <p:nvPr>
-            <p:ph type="body" idx="3" sz="quarter"/>
+            <p:ph type="body" sz="quarter" idx="3"/>
           </p:nvPr>
         </p:nvSpPr>
         <p:spPr/>
@@ -863,7 +3932,7 @@
           <a:lstStyle/>
           <a:p>
             <a:r>
-              <a:t>Walk through the controlled corpus and fail-closed approach. Stress that the system does not silently fall back to general model knowledge.</a:t>
+              <a:t>Show that users can inspect the approved corpus and open individual publication metadata, DOI, license, organism, exposure, and ingest status.</a:t>
             </a:r>
           </a:p>
         </p:txBody>
@@ -875,7 +3944,7 @@
             <a:spLocks noGrp="1"/>
           </p:cNvSpPr>
           <p:nvPr>
-            <p:ph type="sldNum" idx="5" sz="quarter"/>
+            <p:ph type="sldNum" sz="quarter" idx="5"/>
           </p:nvPr>
         </p:nvSpPr>
         <p:spPr/>
@@ -888,8 +3957,8 @@
 </p:notes>
 </file>
 
-<file path=ppt/notesSlides/notesSlide4.xml><?xml version="1.0" encoding="utf-8"?>
-<p:notes xmlns:a="http://schemas.openxmlformats.org/drawingml/2006/main" xmlns:p="http://schemas.openxmlformats.org/presentationml/2006/main" xmlns:r="http://schemas.openxmlformats.org/officeDocument/2006/relationships">
+<file path=ppt/notesSlides/notesSlide6.xml><?xml version="1.0" encoding="utf-8"?>
+<p:notes xmlns:a="http://schemas.openxmlformats.org/drawingml/2006/main" xmlns:r="http://schemas.openxmlformats.org/officeDocument/2006/relationships" xmlns:p="http://schemas.openxmlformats.org/presentationml/2006/main">
   <p:cSld>
     <p:spTree>
       <p:nvGrpSpPr>
@@ -909,7 +3978,7 @@
         <p:nvSpPr>
           <p:cNvPr id="2" name="Slide Image Placeholder 1"/>
           <p:cNvSpPr>
-            <a:spLocks noGrp="1"/>
+            <a:spLocks noGrp="1" noRot="1" noChangeAspect="1"/>
           </p:cNvSpPr>
           <p:nvPr>
             <p:ph type="sldImg" idx="2"/>
@@ -924,7 +3993,7 @@
             <a:spLocks noGrp="1"/>
           </p:cNvSpPr>
           <p:nvPr>
-            <p:ph type="body" idx="3" sz="quarter"/>
+            <p:ph type="body" sz="quarter" idx="3"/>
           </p:nvPr>
         </p:nvSpPr>
         <p:spPr/>
@@ -933,7 +4002,7 @@
           <a:lstStyle/>
           <a:p>
             <a:r>
-              <a:t>Describe the data flow left to right. The same provenance fields survive extraction, retrieval, answer generation, and citation display.</a:t>
+              <a:t>Explain semantic/keyword search and the compare workspace. Comparison is metadata-based and deliberately does not invent cross-study findings.</a:t>
             </a:r>
           </a:p>
         </p:txBody>
@@ -945,7 +4014,7 @@
             <a:spLocks noGrp="1"/>
           </p:cNvSpPr>
           <p:nvPr>
-            <p:ph type="sldNum" idx="5" sz="quarter"/>
+            <p:ph type="sldNum" sz="quarter" idx="5"/>
           </p:nvPr>
         </p:nvSpPr>
         <p:spPr/>
@@ -958,8 +4027,8 @@
 </p:notes>
 </file>
 
-<file path=ppt/notesSlides/notesSlide5.xml><?xml version="1.0" encoding="utf-8"?>
-<p:notes xmlns:a="http://schemas.openxmlformats.org/drawingml/2006/main" xmlns:p="http://schemas.openxmlformats.org/presentationml/2006/main" xmlns:r="http://schemas.openxmlformats.org/officeDocument/2006/relationships">
+<file path=ppt/notesSlides/notesSlide7.xml><?xml version="1.0" encoding="utf-8"?>
+<p:notes xmlns:a="http://schemas.openxmlformats.org/drawingml/2006/main" xmlns:r="http://schemas.openxmlformats.org/officeDocument/2006/relationships" xmlns:p="http://schemas.openxmlformats.org/presentationml/2006/main">
   <p:cSld>
     <p:spTree>
       <p:nvGrpSpPr>
@@ -979,7 +4048,7 @@
         <p:nvSpPr>
           <p:cNvPr id="2" name="Slide Image Placeholder 1"/>
           <p:cNvSpPr>
-            <a:spLocks noGrp="1"/>
+            <a:spLocks noGrp="1" noRot="1" noChangeAspect="1"/>
           </p:cNvSpPr>
           <p:nvPr>
             <p:ph type="sldImg" idx="2"/>
@@ -994,7 +4063,7 @@
             <a:spLocks noGrp="1"/>
           </p:cNvSpPr>
           <p:nvPr>
-            <p:ph type="body" idx="3" sz="quarter"/>
+            <p:ph type="body" sz="quarter" idx="3"/>
           </p:nvPr>
         </p:nvSpPr>
         <p:spPr/>
@@ -1003,7 +4072,7 @@
           <a:lstStyle/>
           <a:p>
             <a:r>
-              <a:t>Demonstrate the Ask form. Explain that every answer claim should map to a retrieved citation and that unsupported generation is rejected.</a:t>
+              <a:t>Cover the AI stack and safeguards. Keep the distinction clear: retrieval identifies evidence; generation summarizes only what retrieval supports.</a:t>
             </a:r>
           </a:p>
         </p:txBody>
@@ -1015,7 +4084,7 @@
             <a:spLocks noGrp="1"/>
           </p:cNvSpPr>
           <p:nvPr>
-            <p:ph type="sldNum" idx="5" sz="quarter"/>
+            <p:ph type="sldNum" sz="quarter" idx="5"/>
           </p:nvPr>
         </p:nvSpPr>
         <p:spPr/>
@@ -1028,8 +4097,8 @@
 </p:notes>
 </file>
 
-<file path=ppt/notesSlides/notesSlide6.xml><?xml version="1.0" encoding="utf-8"?>
-<p:notes xmlns:a="http://schemas.openxmlformats.org/drawingml/2006/main" xmlns:p="http://schemas.openxmlformats.org/presentationml/2006/main" xmlns:r="http://schemas.openxmlformats.org/officeDocument/2006/relationships">
+<file path=ppt/notesSlides/notesSlide8.xml><?xml version="1.0" encoding="utf-8"?>
+<p:notes xmlns:a="http://schemas.openxmlformats.org/drawingml/2006/main" xmlns:r="http://schemas.openxmlformats.org/officeDocument/2006/relationships" xmlns:p="http://schemas.openxmlformats.org/presentationml/2006/main">
   <p:cSld>
     <p:spTree>
       <p:nvGrpSpPr>
@@ -1049,7 +4118,7 @@
         <p:nvSpPr>
           <p:cNvPr id="2" name="Slide Image Placeholder 1"/>
           <p:cNvSpPr>
-            <a:spLocks noGrp="1"/>
+            <a:spLocks noGrp="1" noRot="1" noChangeAspect="1"/>
           </p:cNvSpPr>
           <p:nvPr>
             <p:ph type="sldImg" idx="2"/>
@@ -1064,7 +4133,7 @@
             <a:spLocks noGrp="1"/>
           </p:cNvSpPr>
           <p:nvPr>
-            <p:ph type="body" idx="3" sz="quarter"/>
+            <p:ph type="body" sz="quarter" idx="3"/>
           </p:nvPr>
         </p:nvSpPr>
         <p:spPr/>
@@ -1073,7 +4142,7 @@
           <a:lstStyle/>
           <a:p>
             <a:r>
-              <a:t>Show that users can inspect the approved corpus and open individual publication metadata, DOI, license, organism, exposure, and ingest status.</a:t>
+              <a:t>Summarize measurable engineering results. Avoid claiming scientific accuracy beyond the available evaluation fixtures and human review process.</a:t>
             </a:r>
           </a:p>
         </p:txBody>
@@ -1085,7 +4154,7 @@
             <a:spLocks noGrp="1"/>
           </p:cNvSpPr>
           <p:nvPr>
-            <p:ph type="sldNum" idx="5" sz="quarter"/>
+            <p:ph type="sldNum" sz="quarter" idx="5"/>
           </p:nvPr>
         </p:nvSpPr>
         <p:spPr/>
@@ -1098,8 +4167,8 @@
 </p:notes>
 </file>
 
-<file path=ppt/notesSlides/notesSlide7.xml><?xml version="1.0" encoding="utf-8"?>
-<p:notes xmlns:a="http://schemas.openxmlformats.org/drawingml/2006/main" xmlns:p="http://schemas.openxmlformats.org/presentationml/2006/main" xmlns:r="http://schemas.openxmlformats.org/officeDocument/2006/relationships">
+<file path=ppt/notesSlides/notesSlide9.xml><?xml version="1.0" encoding="utf-8"?>
+<p:notes xmlns:a="http://schemas.openxmlformats.org/drawingml/2006/main" xmlns:r="http://schemas.openxmlformats.org/officeDocument/2006/relationships" xmlns:p="http://schemas.openxmlformats.org/presentationml/2006/main">
   <p:cSld>
     <p:spTree>
       <p:nvGrpSpPr>
@@ -1119,7 +4188,7 @@
         <p:nvSpPr>
           <p:cNvPr id="2" name="Slide Image Placeholder 1"/>
           <p:cNvSpPr>
-            <a:spLocks noGrp="1"/>
+            <a:spLocks noGrp="1" noRot="1" noChangeAspect="1"/>
           </p:cNvSpPr>
           <p:nvPr>
             <p:ph type="sldImg" idx="2"/>
@@ -1134,7 +4203,7 @@
             <a:spLocks noGrp="1"/>
           </p:cNvSpPr>
           <p:nvPr>
-            <p:ph type="body" idx="3" sz="quarter"/>
+            <p:ph type="body" sz="quarter" idx="3"/>
           </p:nvPr>
         </p:nvSpPr>
         <p:spPr/>
@@ -1143,7 +4212,7 @@
           <a:lstStyle/>
           <a:p>
             <a:r>
-              <a:t>Explain semantic/keyword search and the compare workspace. Comparison is metadata-based and deliberately does not invent cross-study findings.</a:t>
+              <a:t>Explain the live-demo sequence and backup plan. The student has already notified the program that he will not participate in the live final showcase presentation; these artifacts support evaluation and handoff.</a:t>
             </a:r>
           </a:p>
         </p:txBody>
@@ -1155,147 +4224,7 @@
             <a:spLocks noGrp="1"/>
           </p:cNvSpPr>
           <p:nvPr>
-            <p:ph type="sldNum" idx="5" sz="quarter"/>
-          </p:nvPr>
-        </p:nvSpPr>
-        <p:spPr/>
-      </p:sp>
-    </p:spTree>
-  </p:cSld>
-  <p:clrMapOvr>
-    <a:masterClrMapping/>
-  </p:clrMapOvr>
-</p:notes>
-</file>
-
-<file path=ppt/notesSlides/notesSlide8.xml><?xml version="1.0" encoding="utf-8"?>
-<p:notes xmlns:a="http://schemas.openxmlformats.org/drawingml/2006/main" xmlns:p="http://schemas.openxmlformats.org/presentationml/2006/main" xmlns:r="http://schemas.openxmlformats.org/officeDocument/2006/relationships">
-  <p:cSld>
-    <p:spTree>
-      <p:nvGrpSpPr>
-        <p:cNvPr id="1" name=""/>
-        <p:cNvGrpSpPr/>
-        <p:nvPr/>
-      </p:nvGrpSpPr>
-      <p:grpSpPr>
-        <a:xfrm>
-          <a:off x="0" y="0"/>
-          <a:ext cx="0" cy="0"/>
-          <a:chOff x="0" y="0"/>
-          <a:chExt cx="0" cy="0"/>
-        </a:xfrm>
-      </p:grpSpPr>
-      <p:sp>
-        <p:nvSpPr>
-          <p:cNvPr id="2" name="Slide Image Placeholder 1"/>
-          <p:cNvSpPr>
-            <a:spLocks noGrp="1"/>
-          </p:cNvSpPr>
-          <p:nvPr>
-            <p:ph type="sldImg" idx="2"/>
-          </p:nvPr>
-        </p:nvSpPr>
-        <p:spPr/>
-      </p:sp>
-      <p:sp>
-        <p:nvSpPr>
-          <p:cNvPr id="3" name="Notes Placeholder 2"/>
-          <p:cNvSpPr>
-            <a:spLocks noGrp="1"/>
-          </p:cNvSpPr>
-          <p:nvPr>
-            <p:ph type="body" idx="3" sz="quarter"/>
-          </p:nvPr>
-        </p:nvSpPr>
-        <p:spPr/>
-        <p:txBody>
-          <a:bodyPr/>
-          <a:lstStyle/>
-          <a:p>
-            <a:r>
-              <a:t>Cover the AI stack and safeguards. Keep the distinction clear: retrieval identifies evidence; generation summarizes only what retrieval supports.</a:t>
-            </a:r>
-          </a:p>
-        </p:txBody>
-      </p:sp>
-      <p:sp>
-        <p:nvSpPr>
-          <p:cNvPr id="4" name="Slide Number Placeholder 3"/>
-          <p:cNvSpPr>
-            <a:spLocks noGrp="1"/>
-          </p:cNvSpPr>
-          <p:nvPr>
-            <p:ph type="sldNum" idx="5" sz="quarter"/>
-          </p:nvPr>
-        </p:nvSpPr>
-        <p:spPr/>
-      </p:sp>
-    </p:spTree>
-  </p:cSld>
-  <p:clrMapOvr>
-    <a:masterClrMapping/>
-  </p:clrMapOvr>
-</p:notes>
-</file>
-
-<file path=ppt/notesSlides/notesSlide9.xml><?xml version="1.0" encoding="utf-8"?>
-<p:notes xmlns:a="http://schemas.openxmlformats.org/drawingml/2006/main" xmlns:p="http://schemas.openxmlformats.org/presentationml/2006/main" xmlns:r="http://schemas.openxmlformats.org/officeDocument/2006/relationships">
-  <p:cSld>
-    <p:spTree>
-      <p:nvGrpSpPr>
-        <p:cNvPr id="1" name=""/>
-        <p:cNvGrpSpPr/>
-        <p:nvPr/>
-      </p:nvGrpSpPr>
-      <p:grpSpPr>
-        <a:xfrm>
-          <a:off x="0" y="0"/>
-          <a:ext cx="0" cy="0"/>
-          <a:chOff x="0" y="0"/>
-          <a:chExt cx="0" cy="0"/>
-        </a:xfrm>
-      </p:grpSpPr>
-      <p:sp>
-        <p:nvSpPr>
-          <p:cNvPr id="2" name="Slide Image Placeholder 1"/>
-          <p:cNvSpPr>
-            <a:spLocks noGrp="1"/>
-          </p:cNvSpPr>
-          <p:nvPr>
-            <p:ph type="sldImg" idx="2"/>
-          </p:nvPr>
-        </p:nvSpPr>
-        <p:spPr/>
-      </p:sp>
-      <p:sp>
-        <p:nvSpPr>
-          <p:cNvPr id="3" name="Notes Placeholder 2"/>
-          <p:cNvSpPr>
-            <a:spLocks noGrp="1"/>
-          </p:cNvSpPr>
-          <p:nvPr>
-            <p:ph type="body" idx="3" sz="quarter"/>
-          </p:nvPr>
-        </p:nvSpPr>
-        <p:spPr/>
-        <p:txBody>
-          <a:bodyPr/>
-          <a:lstStyle/>
-          <a:p>
-            <a:r>
-              <a:t>Summarize measurable engineering results. Avoid claiming scientific accuracy beyond the available evaluation fixtures and human review process.</a:t>
-            </a:r>
-          </a:p>
-        </p:txBody>
-      </p:sp>
-      <p:sp>
-        <p:nvSpPr>
-          <p:cNvPr id="4" name="Slide Number Placeholder 3"/>
-          <p:cNvSpPr>
-            <a:spLocks noGrp="1"/>
-          </p:cNvSpPr>
-          <p:nvPr>
-            <p:ph type="sldNum" idx="5" sz="quarter"/>
+            <p:ph type="sldNum" sz="quarter" idx="5"/>
           </p:nvPr>
         </p:nvSpPr>
         <p:spPr/>
@@ -1346,10 +4275,9 @@
           <a:lstStyle/>
           <a:p>
             <a:r>
-              <a:rPr lang="en-US" smtClean="0"/>
+              <a:rPr lang="en-US"/>
               <a:t>Click to edit Master title style</a:t>
             </a:r>
-            <a:endParaRPr lang="en-US"/>
           </a:p>
         </p:txBody>
       </p:sp>
@@ -1465,10 +4393,9 @@
           </a:lstStyle>
           <a:p>
             <a:r>
-              <a:rPr lang="en-US" smtClean="0"/>
+              <a:rPr lang="en-US"/>
               <a:t>Click to edit Master subtitle style</a:t>
             </a:r>
-            <a:endParaRPr lang="en-US"/>
           </a:p>
         </p:txBody>
       </p:sp>
@@ -1489,7 +4416,7 @@
           <a:p>
             <a:fld id="{5BCAD085-E8A6-8845-BD4E-CB4CCA059FC4}" type="datetimeFigureOut">
               <a:rPr lang="en-US" smtClean="0"/>
-              <a:t>1/27/13</a:t>
+              <a:t>8/26/26</a:t>
             </a:fld>
             <a:endParaRPr lang="en-US"/>
           </a:p>
@@ -1583,10 +4510,9 @@
           <a:lstStyle/>
           <a:p>
             <a:r>
-              <a:rPr lang="en-US" smtClean="0"/>
+              <a:rPr lang="en-US"/>
               <a:t>Click to edit Master title style</a:t>
             </a:r>
-            <a:endParaRPr lang="en-US"/>
           </a:p>
         </p:txBody>
       </p:sp>
@@ -1607,38 +4533,37 @@
           <a:p>
             <a:pPr lvl="0"/>
             <a:r>
-              <a:rPr lang="en-US" smtClean="0"/>
+              <a:rPr lang="en-US"/>
               <a:t>Click to edit Master text styles</a:t>
             </a:r>
           </a:p>
           <a:p>
             <a:pPr lvl="1"/>
             <a:r>
-              <a:rPr lang="en-US" smtClean="0"/>
+              <a:rPr lang="en-US"/>
               <a:t>Second level</a:t>
             </a:r>
           </a:p>
           <a:p>
             <a:pPr lvl="2"/>
             <a:r>
-              <a:rPr lang="en-US" smtClean="0"/>
+              <a:rPr lang="en-US"/>
               <a:t>Third level</a:t>
             </a:r>
           </a:p>
           <a:p>
             <a:pPr lvl="3"/>
             <a:r>
-              <a:rPr lang="en-US" smtClean="0"/>
+              <a:rPr lang="en-US"/>
               <a:t>Fourth level</a:t>
             </a:r>
           </a:p>
           <a:p>
             <a:pPr lvl="4"/>
             <a:r>
-              <a:rPr lang="en-US" smtClean="0"/>
+              <a:rPr lang="en-US"/>
               <a:t>Fifth level</a:t>
             </a:r>
-            <a:endParaRPr lang="en-US"/>
           </a:p>
         </p:txBody>
       </p:sp>
@@ -1659,7 +4584,7 @@
           <a:p>
             <a:fld id="{5BCAD085-E8A6-8845-BD4E-CB4CCA059FC4}" type="datetimeFigureOut">
               <a:rPr lang="en-US" smtClean="0"/>
-              <a:t>1/27/13</a:t>
+              <a:t>8/26/26</a:t>
             </a:fld>
             <a:endParaRPr lang="en-US"/>
           </a:p>
@@ -1758,10 +4683,9 @@
           <a:lstStyle/>
           <a:p>
             <a:r>
-              <a:rPr lang="en-US" smtClean="0"/>
+              <a:rPr lang="en-US"/>
               <a:t>Click to edit Master title style</a:t>
             </a:r>
-            <a:endParaRPr lang="en-US"/>
           </a:p>
         </p:txBody>
       </p:sp>
@@ -1787,38 +4711,37 @@
           <a:p>
             <a:pPr lvl="0"/>
             <a:r>
-              <a:rPr lang="en-US" smtClean="0"/>
+              <a:rPr lang="en-US"/>
               <a:t>Click to edit Master text styles</a:t>
             </a:r>
           </a:p>
           <a:p>
             <a:pPr lvl="1"/>
             <a:r>
-              <a:rPr lang="en-US" smtClean="0"/>
+              <a:rPr lang="en-US"/>
               <a:t>Second level</a:t>
             </a:r>
           </a:p>
           <a:p>
             <a:pPr lvl="2"/>
             <a:r>
-              <a:rPr lang="en-US" smtClean="0"/>
+              <a:rPr lang="en-US"/>
               <a:t>Third level</a:t>
             </a:r>
           </a:p>
           <a:p>
             <a:pPr lvl="3"/>
             <a:r>
-              <a:rPr lang="en-US" smtClean="0"/>
+              <a:rPr lang="en-US"/>
               <a:t>Fourth level</a:t>
             </a:r>
           </a:p>
           <a:p>
             <a:pPr lvl="4"/>
             <a:r>
-              <a:rPr lang="en-US" smtClean="0"/>
+              <a:rPr lang="en-US"/>
               <a:t>Fifth level</a:t>
             </a:r>
-            <a:endParaRPr lang="en-US"/>
           </a:p>
         </p:txBody>
       </p:sp>
@@ -1839,7 +4762,7 @@
           <a:p>
             <a:fld id="{5BCAD085-E8A6-8845-BD4E-CB4CCA059FC4}" type="datetimeFigureOut">
               <a:rPr lang="en-US" smtClean="0"/>
-              <a:t>1/27/13</a:t>
+              <a:t>8/26/26</a:t>
             </a:fld>
             <a:endParaRPr lang="en-US"/>
           </a:p>
@@ -1933,10 +4856,9 @@
           <a:lstStyle/>
           <a:p>
             <a:r>
-              <a:rPr lang="en-US" smtClean="0"/>
+              <a:rPr lang="en-US"/>
               <a:t>Click to edit Master title style</a:t>
             </a:r>
-            <a:endParaRPr lang="en-US"/>
           </a:p>
         </p:txBody>
       </p:sp>
@@ -1957,38 +4879,37 @@
           <a:p>
             <a:pPr lvl="0"/>
             <a:r>
-              <a:rPr lang="en-US" smtClean="0"/>
+              <a:rPr lang="en-US"/>
               <a:t>Click to edit Master text styles</a:t>
             </a:r>
           </a:p>
           <a:p>
             <a:pPr lvl="1"/>
             <a:r>
-              <a:rPr lang="en-US" smtClean="0"/>
+              <a:rPr lang="en-US"/>
               <a:t>Second level</a:t>
             </a:r>
           </a:p>
           <a:p>
             <a:pPr lvl="2"/>
             <a:r>
-              <a:rPr lang="en-US" smtClean="0"/>
+              <a:rPr lang="en-US"/>
               <a:t>Third level</a:t>
             </a:r>
           </a:p>
           <a:p>
             <a:pPr lvl="3"/>
             <a:r>
-              <a:rPr lang="en-US" smtClean="0"/>
+              <a:rPr lang="en-US"/>
               <a:t>Fourth level</a:t>
             </a:r>
           </a:p>
           <a:p>
             <a:pPr lvl="4"/>
             <a:r>
-              <a:rPr lang="en-US" smtClean="0"/>
+              <a:rPr lang="en-US"/>
               <a:t>Fifth level</a:t>
             </a:r>
-            <a:endParaRPr lang="en-US"/>
           </a:p>
         </p:txBody>
       </p:sp>
@@ -2009,7 +4930,7 @@
           <a:p>
             <a:fld id="{5BCAD085-E8A6-8845-BD4E-CB4CCA059FC4}" type="datetimeFigureOut">
               <a:rPr lang="en-US" smtClean="0"/>
-              <a:t>1/27/13</a:t>
+              <a:t>8/26/26</a:t>
             </a:fld>
             <a:endParaRPr lang="en-US"/>
           </a:p>
@@ -2112,10 +5033,9 @@
           </a:lstStyle>
           <a:p>
             <a:r>
-              <a:rPr lang="en-US" smtClean="0"/>
+              <a:rPr lang="en-US"/>
               <a:t>Click to edit Master title style</a:t>
             </a:r>
-            <a:endParaRPr lang="en-US"/>
           </a:p>
         </p:txBody>
       </p:sp>
@@ -2232,7 +5152,7 @@
           <a:p>
             <a:pPr lvl="0"/>
             <a:r>
-              <a:rPr lang="en-US" smtClean="0"/>
+              <a:rPr lang="en-US"/>
               <a:t>Click to edit Master text styles</a:t>
             </a:r>
           </a:p>
@@ -2255,7 +5175,7 @@
           <a:p>
             <a:fld id="{5BCAD085-E8A6-8845-BD4E-CB4CCA059FC4}" type="datetimeFigureOut">
               <a:rPr lang="en-US" smtClean="0"/>
-              <a:t>1/27/13</a:t>
+              <a:t>8/26/26</a:t>
             </a:fld>
             <a:endParaRPr lang="en-US"/>
           </a:p>
@@ -2349,10 +5269,9 @@
           <a:lstStyle/>
           <a:p>
             <a:r>
-              <a:rPr lang="en-US" smtClean="0"/>
+              <a:rPr lang="en-US"/>
               <a:t>Click to edit Master title style</a:t>
             </a:r>
-            <a:endParaRPr lang="en-US"/>
           </a:p>
         </p:txBody>
       </p:sp>
@@ -2406,38 +5325,37 @@
           <a:p>
             <a:pPr lvl="0"/>
             <a:r>
-              <a:rPr lang="en-US" smtClean="0"/>
+              <a:rPr lang="en-US"/>
               <a:t>Click to edit Master text styles</a:t>
             </a:r>
           </a:p>
           <a:p>
             <a:pPr lvl="1"/>
             <a:r>
-              <a:rPr lang="en-US" smtClean="0"/>
+              <a:rPr lang="en-US"/>
               <a:t>Second level</a:t>
             </a:r>
           </a:p>
           <a:p>
             <a:pPr lvl="2"/>
             <a:r>
-              <a:rPr lang="en-US" smtClean="0"/>
+              <a:rPr lang="en-US"/>
               <a:t>Third level</a:t>
             </a:r>
           </a:p>
           <a:p>
             <a:pPr lvl="3"/>
             <a:r>
-              <a:rPr lang="en-US" smtClean="0"/>
+              <a:rPr lang="en-US"/>
               <a:t>Fourth level</a:t>
             </a:r>
           </a:p>
           <a:p>
             <a:pPr lvl="4"/>
             <a:r>
-              <a:rPr lang="en-US" smtClean="0"/>
+              <a:rPr lang="en-US"/>
               <a:t>Fifth level</a:t>
             </a:r>
-            <a:endParaRPr lang="en-US"/>
           </a:p>
         </p:txBody>
       </p:sp>
@@ -2491,38 +5409,37 @@
           <a:p>
             <a:pPr lvl="0"/>
             <a:r>
-              <a:rPr lang="en-US" smtClean="0"/>
+              <a:rPr lang="en-US"/>
               <a:t>Click to edit Master text styles</a:t>
             </a:r>
           </a:p>
           <a:p>
             <a:pPr lvl="1"/>
             <a:r>
-              <a:rPr lang="en-US" smtClean="0"/>
+              <a:rPr lang="en-US"/>
               <a:t>Second level</a:t>
             </a:r>
           </a:p>
           <a:p>
             <a:pPr lvl="2"/>
             <a:r>
-              <a:rPr lang="en-US" smtClean="0"/>
+              <a:rPr lang="en-US"/>
               <a:t>Third level</a:t>
             </a:r>
           </a:p>
           <a:p>
             <a:pPr lvl="3"/>
             <a:r>
-              <a:rPr lang="en-US" smtClean="0"/>
+              <a:rPr lang="en-US"/>
               <a:t>Fourth level</a:t>
             </a:r>
           </a:p>
           <a:p>
             <a:pPr lvl="4"/>
             <a:r>
-              <a:rPr lang="en-US" smtClean="0"/>
+              <a:rPr lang="en-US"/>
               <a:t>Fifth level</a:t>
             </a:r>
-            <a:endParaRPr lang="en-US"/>
           </a:p>
         </p:txBody>
       </p:sp>
@@ -2543,7 +5460,7 @@
           <a:p>
             <a:fld id="{5BCAD085-E8A6-8845-BD4E-CB4CCA059FC4}" type="datetimeFigureOut">
               <a:rPr lang="en-US" smtClean="0"/>
-              <a:t>1/27/13</a:t>
+              <a:t>8/26/26</a:t>
             </a:fld>
             <a:endParaRPr lang="en-US"/>
           </a:p>
@@ -2641,10 +5558,9 @@
           </a:lstStyle>
           <a:p>
             <a:r>
-              <a:rPr lang="en-US" smtClean="0"/>
+              <a:rPr lang="en-US"/>
               <a:t>Click to edit Master title style</a:t>
             </a:r>
-            <a:endParaRPr lang="en-US"/>
           </a:p>
         </p:txBody>
       </p:sp>
@@ -2707,7 +5623,7 @@
           <a:p>
             <a:pPr lvl="0"/>
             <a:r>
-              <a:rPr lang="en-US" smtClean="0"/>
+              <a:rPr lang="en-US"/>
               <a:t>Click to edit Master text styles</a:t>
             </a:r>
           </a:p>
@@ -2763,38 +5679,37 @@
           <a:p>
             <a:pPr lvl="0"/>
             <a:r>
-              <a:rPr lang="en-US" smtClean="0"/>
+              <a:rPr lang="en-US"/>
               <a:t>Click to edit Master text styles</a:t>
             </a:r>
           </a:p>
           <a:p>
             <a:pPr lvl="1"/>
             <a:r>
-              <a:rPr lang="en-US" smtClean="0"/>
+              <a:rPr lang="en-US"/>
               <a:t>Second level</a:t>
             </a:r>
           </a:p>
           <a:p>
             <a:pPr lvl="2"/>
             <a:r>
-              <a:rPr lang="en-US" smtClean="0"/>
+              <a:rPr lang="en-US"/>
               <a:t>Third level</a:t>
             </a:r>
           </a:p>
           <a:p>
             <a:pPr lvl="3"/>
             <a:r>
-              <a:rPr lang="en-US" smtClean="0"/>
+              <a:rPr lang="en-US"/>
               <a:t>Fourth level</a:t>
             </a:r>
           </a:p>
           <a:p>
             <a:pPr lvl="4"/>
             <a:r>
-              <a:rPr lang="en-US" smtClean="0"/>
+              <a:rPr lang="en-US"/>
               <a:t>Fifth level</a:t>
             </a:r>
-            <a:endParaRPr lang="en-US"/>
           </a:p>
         </p:txBody>
       </p:sp>
@@ -2857,7 +5772,7 @@
           <a:p>
             <a:pPr lvl="0"/>
             <a:r>
-              <a:rPr lang="en-US" smtClean="0"/>
+              <a:rPr lang="en-US"/>
               <a:t>Click to edit Master text styles</a:t>
             </a:r>
           </a:p>
@@ -2913,38 +5828,37 @@
           <a:p>
             <a:pPr lvl="0"/>
             <a:r>
-              <a:rPr lang="en-US" smtClean="0"/>
+              <a:rPr lang="en-US"/>
               <a:t>Click to edit Master text styles</a:t>
             </a:r>
           </a:p>
           <a:p>
             <a:pPr lvl="1"/>
             <a:r>
-              <a:rPr lang="en-US" smtClean="0"/>
+              <a:rPr lang="en-US"/>
               <a:t>Second level</a:t>
             </a:r>
           </a:p>
           <a:p>
             <a:pPr lvl="2"/>
             <a:r>
-              <a:rPr lang="en-US" smtClean="0"/>
+              <a:rPr lang="en-US"/>
               <a:t>Third level</a:t>
             </a:r>
           </a:p>
           <a:p>
             <a:pPr lvl="3"/>
             <a:r>
-              <a:rPr lang="en-US" smtClean="0"/>
+              <a:rPr lang="en-US"/>
               <a:t>Fourth level</a:t>
             </a:r>
           </a:p>
           <a:p>
             <a:pPr lvl="4"/>
             <a:r>
-              <a:rPr lang="en-US" smtClean="0"/>
+              <a:rPr lang="en-US"/>
               <a:t>Fifth level</a:t>
             </a:r>
-            <a:endParaRPr lang="en-US"/>
           </a:p>
         </p:txBody>
       </p:sp>
@@ -2965,7 +5879,7 @@
           <a:p>
             <a:fld id="{5BCAD085-E8A6-8845-BD4E-CB4CCA059FC4}" type="datetimeFigureOut">
               <a:rPr lang="en-US" smtClean="0"/>
-              <a:t>1/27/13</a:t>
+              <a:t>8/26/26</a:t>
             </a:fld>
             <a:endParaRPr lang="en-US"/>
           </a:p>
@@ -3059,10 +5973,9 @@
           <a:lstStyle/>
           <a:p>
             <a:r>
-              <a:rPr lang="en-US" smtClean="0"/>
+              <a:rPr lang="en-US"/>
               <a:t>Click to edit Master title style</a:t>
             </a:r>
-            <a:endParaRPr lang="en-US"/>
           </a:p>
         </p:txBody>
       </p:sp>
@@ -3083,7 +5996,7 @@
           <a:p>
             <a:fld id="{5BCAD085-E8A6-8845-BD4E-CB4CCA059FC4}" type="datetimeFigureOut">
               <a:rPr lang="en-US" smtClean="0"/>
-              <a:t>1/27/13</a:t>
+              <a:t>8/26/26</a:t>
             </a:fld>
             <a:endParaRPr lang="en-US"/>
           </a:p>
@@ -3178,7 +6091,7 @@
           <a:p>
             <a:fld id="{5BCAD085-E8A6-8845-BD4E-CB4CCA059FC4}" type="datetimeFigureOut">
               <a:rPr lang="en-US" smtClean="0"/>
-              <a:t>1/27/13</a:t>
+              <a:t>8/26/26</a:t>
             </a:fld>
             <a:endParaRPr lang="en-US"/>
           </a:p>
@@ -3281,10 +6194,9 @@
           </a:lstStyle>
           <a:p>
             <a:r>
-              <a:rPr lang="en-US" smtClean="0"/>
+              <a:rPr lang="en-US"/>
               <a:t>Click to edit Master title style</a:t>
             </a:r>
-            <a:endParaRPr lang="en-US"/>
           </a:p>
         </p:txBody>
       </p:sp>
@@ -3338,38 +6250,37 @@
           <a:p>
             <a:pPr lvl="0"/>
             <a:r>
-              <a:rPr lang="en-US" smtClean="0"/>
+              <a:rPr lang="en-US"/>
               <a:t>Click to edit Master text styles</a:t>
             </a:r>
           </a:p>
           <a:p>
             <a:pPr lvl="1"/>
             <a:r>
-              <a:rPr lang="en-US" smtClean="0"/>
+              <a:rPr lang="en-US"/>
               <a:t>Second level</a:t>
             </a:r>
           </a:p>
           <a:p>
             <a:pPr lvl="2"/>
             <a:r>
-              <a:rPr lang="en-US" smtClean="0"/>
+              <a:rPr lang="en-US"/>
               <a:t>Third level</a:t>
             </a:r>
           </a:p>
           <a:p>
             <a:pPr lvl="3"/>
             <a:r>
-              <a:rPr lang="en-US" smtClean="0"/>
+              <a:rPr lang="en-US"/>
               <a:t>Fourth level</a:t>
             </a:r>
           </a:p>
           <a:p>
             <a:pPr lvl="4"/>
             <a:r>
-              <a:rPr lang="en-US" smtClean="0"/>
+              <a:rPr lang="en-US"/>
               <a:t>Fifth level</a:t>
             </a:r>
-            <a:endParaRPr lang="en-US"/>
           </a:p>
         </p:txBody>
       </p:sp>
@@ -3432,7 +6343,7 @@
           <a:p>
             <a:pPr lvl="0"/>
             <a:r>
-              <a:rPr lang="en-US" smtClean="0"/>
+              <a:rPr lang="en-US"/>
               <a:t>Click to edit Master text styles</a:t>
             </a:r>
           </a:p>
@@ -3455,7 +6366,7 @@
           <a:p>
             <a:fld id="{5BCAD085-E8A6-8845-BD4E-CB4CCA059FC4}" type="datetimeFigureOut">
               <a:rPr lang="en-US" smtClean="0"/>
-              <a:t>1/27/13</a:t>
+              <a:t>8/26/26</a:t>
             </a:fld>
             <a:endParaRPr lang="en-US"/>
           </a:p>
@@ -3558,10 +6469,9 @@
           </a:lstStyle>
           <a:p>
             <a:r>
-              <a:rPr lang="en-US" smtClean="0"/>
+              <a:rPr lang="en-US"/>
               <a:t>Click to edit Master title style</a:t>
             </a:r>
-            <a:endParaRPr lang="en-US"/>
           </a:p>
         </p:txBody>
       </p:sp>
@@ -3685,7 +6595,7 @@
           <a:p>
             <a:pPr lvl="0"/>
             <a:r>
-              <a:rPr lang="en-US" smtClean="0"/>
+              <a:rPr lang="en-US"/>
               <a:t>Click to edit Master text styles</a:t>
             </a:r>
           </a:p>
@@ -3708,7 +6618,7 @@
           <a:p>
             <a:fld id="{5BCAD085-E8A6-8845-BD4E-CB4CCA059FC4}" type="datetimeFigureOut">
               <a:rPr lang="en-US" smtClean="0"/>
-              <a:t>1/27/13</a:t>
+              <a:t>8/26/26</a:t>
             </a:fld>
             <a:endParaRPr lang="en-US"/>
           </a:p>
@@ -3817,10 +6727,9 @@
           <a:lstStyle/>
           <a:p>
             <a:r>
-              <a:rPr lang="en-US" smtClean="0"/>
+              <a:rPr lang="en-US"/>
               <a:t>Click to edit Master title style</a:t>
             </a:r>
-            <a:endParaRPr lang="en-US"/>
           </a:p>
         </p:txBody>
       </p:sp>
@@ -3851,38 +6760,37 @@
           <a:p>
             <a:pPr lvl="0"/>
             <a:r>
-              <a:rPr lang="en-US" smtClean="0"/>
+              <a:rPr lang="en-US"/>
               <a:t>Click to edit Master text styles</a:t>
             </a:r>
           </a:p>
           <a:p>
             <a:pPr lvl="1"/>
             <a:r>
-              <a:rPr lang="en-US" smtClean="0"/>
+              <a:rPr lang="en-US"/>
               <a:t>Second level</a:t>
             </a:r>
           </a:p>
           <a:p>
             <a:pPr lvl="2"/>
             <a:r>
-              <a:rPr lang="en-US" smtClean="0"/>
+              <a:rPr lang="en-US"/>
               <a:t>Third level</a:t>
             </a:r>
           </a:p>
           <a:p>
             <a:pPr lvl="3"/>
             <a:r>
-              <a:rPr lang="en-US" smtClean="0"/>
+              <a:rPr lang="en-US"/>
               <a:t>Fourth level</a:t>
             </a:r>
           </a:p>
           <a:p>
             <a:pPr lvl="4"/>
             <a:r>
-              <a:rPr lang="en-US" smtClean="0"/>
+              <a:rPr lang="en-US"/>
               <a:t>Fifth level</a:t>
             </a:r>
-            <a:endParaRPr lang="en-US"/>
           </a:p>
         </p:txBody>
       </p:sp>
@@ -3921,7 +6829,7 @@
           <a:p>
             <a:fld id="{5BCAD085-E8A6-8845-BD4E-CB4CCA059FC4}" type="datetimeFigureOut">
               <a:rPr lang="en-US" smtClean="0"/>
-              <a:t>1/27/13</a:t>
+              <a:t>8/26/26</a:t>
             </a:fld>
             <a:endParaRPr lang="en-US"/>
           </a:p>
@@ -4280,26 +7188,31 @@
 </file>
 
 <file path=ppt/slides/slide1.xml><?xml version="1.0" encoding="utf-8"?>
-<p:sld xmlns:a="http://schemas.openxmlformats.org/drawingml/2006/main" xmlns:p="http://schemas.openxmlformats.org/presentationml/2006/main" xmlns:r="http://schemas.openxmlformats.org/officeDocument/2006/relationships">
+<p:sld xmlns:a="http://schemas.openxmlformats.org/drawingml/2006/main" xmlns:r="http://schemas.openxmlformats.org/officeDocument/2006/relationships" xmlns:p="http://schemas.openxmlformats.org/presentationml/2006/main">
   <p:cSld>
-    <p:bg>
-      <p:bgPr>
-        <a:solidFill>
-          <a:srgbClr val="041839"/>
-        </a:solidFill>
-        <a:effectLst/>
-      </p:bgPr>
-    </p:bg>
     <p:spTree>
       <p:nvGrpSpPr>
         <p:cNvPr id="1" name=""/>
         <p:cNvGrpSpPr/>
         <p:nvPr/>
       </p:nvGrpSpPr>
-      <p:grpSpPr/>
+      <p:grpSpPr>
+        <a:xfrm>
+          <a:off x="0" y="0"/>
+          <a:ext cx="0" cy="0"/>
+          <a:chOff x="0" y="0"/>
+          <a:chExt cx="0" cy="0"/>
+        </a:xfrm>
+      </p:grpSpPr>
       <p:pic>
         <p:nvPicPr>
-          <p:cNvPr id="2" name="Picture 1" descr="hero-atmosphere.png"/>
+          <p:cNvPr id="2" name="Picture 1" descr="hero-atmosphere.png">
+            <a:extLst>
+              <a:ext uri="{FF2B5EF4-FFF2-40B4-BE49-F238E27FC236}">
+                <a16:creationId xmlns:a16="http://schemas.microsoft.com/office/drawing/2014/main" id="{8A9097BF-3F2E-92F7-7FB2-6663ED7C7909}"/>
+              </a:ext>
+            </a:extLst>
+          </p:cNvPr>
           <p:cNvPicPr>
             <a:picLocks noChangeAspect="1"/>
           </p:cNvPicPr>
@@ -4313,60 +7226,23 @@
         </p:blipFill>
         <p:spPr>
           <a:xfrm>
-            <a:off x="6035040" y="0"/>
-            <a:ext cx="6156655" cy="6858000"/>
+            <a:off x="0" y="1106060"/>
+            <a:ext cx="12192000" cy="5751940"/>
           </a:xfrm>
           <a:prstGeom prst="rect">
             <a:avLst/>
           </a:prstGeom>
         </p:spPr>
       </p:pic>
-      <p:sp>
-        <p:nvSpPr>
-          <p:cNvPr id="3" name="Rectangle 2"/>
-          <p:cNvSpPr/>
-          <p:nvPr/>
-        </p:nvSpPr>
-        <p:spPr>
-          <a:xfrm>
-            <a:off x="5760720" y="0"/>
-            <a:ext cx="6492240" cy="6858000"/>
-          </a:xfrm>
-          <a:prstGeom prst="rect">
-            <a:avLst/>
-          </a:prstGeom>
-          <a:solidFill>
-            <a:srgbClr val="041839"/>
-          </a:solidFill>
-          <a:ln>
-            <a:noFill/>
-          </a:ln>
-        </p:spPr>
-        <p:style>
-          <a:lnRef idx="1">
-            <a:schemeClr val="accent1"/>
-          </a:lnRef>
-          <a:fillRef idx="3">
-            <a:schemeClr val="accent1"/>
-          </a:fillRef>
-          <a:effectRef idx="2">
-            <a:schemeClr val="accent1"/>
-          </a:effectRef>
-          <a:fontRef idx="minor">
-            <a:schemeClr val="lt1"/>
-          </a:fontRef>
-        </p:style>
-        <p:txBody>
-          <a:bodyPr rtlCol="0" anchor="ctr"/>
-          <a:lstStyle/>
-          <a:p>
-            <a:pPr algn="ctr"/>
-          </a:p>
-        </p:txBody>
-      </p:sp>
       <p:pic>
         <p:nvPicPr>
-          <p:cNvPr id="4" name="Picture 3" descr="logo-wordmark.png"/>
+          <p:cNvPr id="3" name="Picture 2" descr="logo-wordmark.png">
+            <a:extLst>
+              <a:ext uri="{FF2B5EF4-FFF2-40B4-BE49-F238E27FC236}">
+                <a16:creationId xmlns:a16="http://schemas.microsoft.com/office/drawing/2014/main" id="{2AD057C0-A077-8FAC-2CA3-6045656E07A4}"/>
+              </a:ext>
+            </a:extLst>
+          </p:cNvPr>
           <p:cNvPicPr>
             <a:picLocks noChangeAspect="1"/>
           </p:cNvPicPr>
@@ -4380,7 +7256,7 @@
         </p:blipFill>
         <p:spPr>
           <a:xfrm>
-            <a:off x="685800" y="502920"/>
+            <a:off x="822960" y="38474"/>
             <a:ext cx="3291840" cy="1029112"/>
           </a:xfrm>
           <a:prstGeom prst="rect">
@@ -4390,7 +7266,13 @@
       </p:pic>
       <p:sp>
         <p:nvSpPr>
-          <p:cNvPr id="5" name="TextBox 4"/>
+          <p:cNvPr id="4" name="TextBox 3">
+            <a:extLst>
+              <a:ext uri="{FF2B5EF4-FFF2-40B4-BE49-F238E27FC236}">
+                <a16:creationId xmlns:a16="http://schemas.microsoft.com/office/drawing/2014/main" id="{B8934F98-5C9C-92FB-714F-281ADAAAC473}"/>
+              </a:ext>
+            </a:extLst>
+          </p:cNvPr>
           <p:cNvSpPr txBox="1"/>
           <p:nvPr/>
         </p:nvSpPr>
@@ -4430,14 +7312,20 @@
       </p:sp>
       <p:sp>
         <p:nvSpPr>
-          <p:cNvPr id="6" name="TextBox 5"/>
+          <p:cNvPr id="5" name="TextBox 4">
+            <a:extLst>
+              <a:ext uri="{FF2B5EF4-FFF2-40B4-BE49-F238E27FC236}">
+                <a16:creationId xmlns:a16="http://schemas.microsoft.com/office/drawing/2014/main" id="{119C2DA2-98A7-65C9-6DBD-A1370885F7B8}"/>
+              </a:ext>
+            </a:extLst>
+          </p:cNvPr>
           <p:cNvSpPr txBox="1"/>
           <p:nvPr/>
         </p:nvSpPr>
         <p:spPr>
           <a:xfrm>
             <a:off x="822960" y="3401568"/>
-            <a:ext cx="5486400" cy="914400"/>
+            <a:ext cx="2551611" cy="1323439"/>
           </a:xfrm>
           <a:prstGeom prst="rect">
             <a:avLst/>
@@ -4445,7 +7333,7 @@
           <a:noFill/>
         </p:spPr>
         <p:txBody>
-          <a:bodyPr wrap="none">
+          <a:bodyPr wrap="square">
             <a:spAutoFit/>
           </a:bodyPr>
           <a:lstStyle/>
@@ -4459,6 +7347,7 @@
               </a:defRPr>
             </a:pPr>
             <a:r>
+              <a:rPr dirty="0"/>
               <a:t>Citation-first research synthesis from a controlled corpus</a:t>
             </a:r>
           </a:p>
@@ -4466,7 +7355,13 @@
       </p:sp>
       <p:sp>
         <p:nvSpPr>
-          <p:cNvPr id="7" name="TextBox 6"/>
+          <p:cNvPr id="6" name="TextBox 5">
+            <a:extLst>
+              <a:ext uri="{FF2B5EF4-FFF2-40B4-BE49-F238E27FC236}">
+                <a16:creationId xmlns:a16="http://schemas.microsoft.com/office/drawing/2014/main" id="{9FF7343E-689B-A844-6C2D-F234D31D7F7A}"/>
+              </a:ext>
+            </a:extLst>
+          </p:cNvPr>
           <p:cNvSpPr txBox="1"/>
           <p:nvPr/>
         </p:nvSpPr>
@@ -4505,6 +7400,11 @@
         </p:txBody>
       </p:sp>
     </p:spTree>
+    <p:extLst>
+      <p:ext uri="{BB962C8B-B14F-4D97-AF65-F5344CB8AC3E}">
+        <p14:creationId xmlns:p14="http://schemas.microsoft.com/office/powerpoint/2010/main" val="3088137514"/>
+      </p:ext>
+    </p:extLst>
   </p:cSld>
   <p:clrMapOvr>
     <a:masterClrMapping/>
@@ -4513,7 +7413,7 @@
 </file>
 
 <file path=ppt/slides/slide10.xml><?xml version="1.0" encoding="utf-8"?>
-<p:sld xmlns:a="http://schemas.openxmlformats.org/drawingml/2006/main" xmlns:p="http://schemas.openxmlformats.org/presentationml/2006/main" xmlns:r="http://schemas.openxmlformats.org/officeDocument/2006/relationships">
+<p:sld xmlns:a="http://schemas.openxmlformats.org/drawingml/2006/main" xmlns:r="http://schemas.openxmlformats.org/officeDocument/2006/relationships" xmlns:p="http://schemas.openxmlformats.org/presentationml/2006/main">
   <p:cSld>
     <p:bg>
       <p:bgPr>
@@ -4529,7 +7429,14 @@
         <p:cNvGrpSpPr/>
         <p:nvPr/>
       </p:nvGrpSpPr>
-      <p:grpSpPr/>
+      <p:grpSpPr>
+        <a:xfrm>
+          <a:off x="0" y="0"/>
+          <a:ext cx="0" cy="0"/>
+          <a:chOff x="0" y="0"/>
+          <a:chExt cx="0" cy="0"/>
+        </a:xfrm>
+      </p:grpSpPr>
       <p:sp>
         <p:nvSpPr>
           <p:cNvPr id="2" name="TextBox 1"/>
@@ -4640,7 +7547,7 @@
           </a:fontRef>
         </p:style>
         <p:txBody>
-          <a:bodyPr rtlCol="0" anchor="ctr" lIns="164592" rIns="164592" tIns="128016"/>
+          <a:bodyPr lIns="164592" tIns="128016" rIns="164592" rtlCol="0" anchor="ctr"/>
           <a:lstStyle/>
           <a:p>
             <a:pPr algn="ctr">
@@ -4711,7 +7618,7 @@
           </a:fontRef>
         </p:style>
         <p:txBody>
-          <a:bodyPr rtlCol="0" anchor="ctr" lIns="164592" rIns="164592" tIns="128016"/>
+          <a:bodyPr lIns="164592" tIns="128016" rIns="164592" rtlCol="0" anchor="ctr"/>
           <a:lstStyle/>
           <a:p>
             <a:pPr algn="ctr">
@@ -4860,7 +7767,7 @@
 </file>
 
 <file path=ppt/slides/slide11.xml><?xml version="1.0" encoding="utf-8"?>
-<p:sld xmlns:a="http://schemas.openxmlformats.org/drawingml/2006/main" xmlns:p="http://schemas.openxmlformats.org/presentationml/2006/main" xmlns:r="http://schemas.openxmlformats.org/officeDocument/2006/relationships">
+<p:sld xmlns:a="http://schemas.openxmlformats.org/drawingml/2006/main" xmlns:r="http://schemas.openxmlformats.org/officeDocument/2006/relationships" xmlns:p="http://schemas.openxmlformats.org/presentationml/2006/main">
   <p:cSld>
     <p:bg>
       <p:bgPr>
@@ -4876,7 +7783,14 @@
         <p:cNvGrpSpPr/>
         <p:nvPr/>
       </p:nvGrpSpPr>
-      <p:grpSpPr/>
+      <p:grpSpPr>
+        <a:xfrm>
+          <a:off x="0" y="0"/>
+          <a:ext cx="0" cy="0"/>
+          <a:chOff x="0" y="0"/>
+          <a:chExt cx="0" cy="0"/>
+        </a:xfrm>
+      </p:grpSpPr>
       <p:sp>
         <p:nvSpPr>
           <p:cNvPr id="2" name="TextBox 1"/>
@@ -4951,125 +7865,6 @@
       </p:sp>
       <p:sp>
         <p:nvSpPr>
-          <p:cNvPr id="4" name="TextBox 3"/>
-          <p:cNvSpPr txBox="1"/>
-          <p:nvPr/>
-        </p:nvSpPr>
-        <p:spPr>
-          <a:xfrm>
-            <a:off x="914400" y="1965960"/>
-            <a:ext cx="10058400" cy="3931920"/>
-          </a:xfrm>
-          <a:prstGeom prst="rect">
-            <a:avLst/>
-          </a:prstGeom>
-          <a:noFill/>
-        </p:spPr>
-        <p:txBody>
-          <a:bodyPr wrap="square" lIns="73152" rIns="73152">
-            <a:spAutoFit/>
-          </a:bodyPr>
-          <a:lstStyle/>
-          <a:p>
-            <a:pPr>
-              <a:spcAft>
-                <a:spcPts val="1200"/>
-              </a:spcAft>
-              <a:defRPr sz="2000">
-                <a:solidFill>
-                  <a:srgbClr val="041839"/>
-                </a:solidFill>
-                <a:latin typeface="Aptos"/>
-              </a:defRPr>
-            </a:pPr>
-            <a:r>
-              <a:t>•  Local deployment only; no public production URL</a:t>
-            </a:r>
-          </a:p>
-          <a:p>
-            <a:pPr>
-              <a:spcAft>
-                <a:spcPts val="1200"/>
-              </a:spcAft>
-              <a:defRPr sz="2000">
-                <a:solidFill>
-                  <a:srgbClr val="041839"/>
-                </a:solidFill>
-                <a:latin typeface="Aptos"/>
-              </a:defRPr>
-            </a:pPr>
-            <a:r>
-              <a:t>•  Grounded Ask requires an indexed corpus plus configured OpenAI or Ollama provider</a:t>
-            </a:r>
-          </a:p>
-          <a:p>
-            <a:pPr>
-              <a:spcAft>
-                <a:spcPts val="1200"/>
-              </a:spcAft>
-              <a:defRPr sz="2000">
-                <a:solidFill>
-                  <a:srgbClr val="041839"/>
-                </a:solidFill>
-                <a:latin typeface="Aptos"/>
-              </a:defRPr>
-            </a:pPr>
-            <a:r>
-              <a:t>•  Scientific outputs still require human review</a:t>
-            </a:r>
-          </a:p>
-          <a:p>
-            <a:pPr>
-              <a:spcAft>
-                <a:spcPts val="1200"/>
-              </a:spcAft>
-              <a:defRPr sz="2000">
-                <a:solidFill>
-                  <a:srgbClr val="041839"/>
-                </a:solidFill>
-                <a:latin typeface="Aptos"/>
-              </a:defRPr>
-            </a:pPr>
-            <a:r>
-              <a:t>•  Corpus focuses on microgravity and skeletal muscle</a:t>
-            </a:r>
-          </a:p>
-          <a:p>
-            <a:pPr>
-              <a:spcAft>
-                <a:spcPts val="1200"/>
-              </a:spcAft>
-              <a:defRPr sz="2000">
-                <a:solidFill>
-                  <a:srgbClr val="041839"/>
-                </a:solidFill>
-                <a:latin typeface="Aptos"/>
-              </a:defRPr>
-            </a:pPr>
-            <a:r>
-              <a:t>•  Future: stronger retrieval benchmarks, broader curated corpus, reviewer workflow, and production deployment</a:t>
-            </a:r>
-          </a:p>
-          <a:p>
-            <a:pPr>
-              <a:spcAft>
-                <a:spcPts val="1200"/>
-              </a:spcAft>
-              <a:defRPr sz="2000">
-                <a:solidFill>
-                  <a:srgbClr val="041839"/>
-                </a:solidFill>
-                <a:latin typeface="Aptos"/>
-              </a:defRPr>
-            </a:pPr>
-            <a:r>
-              <a:t>•  Graph extraction remains experimental; no graph database in the MVP</a:t>
-            </a:r>
-          </a:p>
-        </p:txBody>
-      </p:sp>
-      <p:sp>
-        <p:nvSpPr>
           <p:cNvPr id="5" name="TextBox 4"/>
           <p:cNvSpPr txBox="1"/>
           <p:nvPr/>
@@ -5104,6 +7899,28 @@
           </a:p>
         </p:txBody>
       </p:sp>
+      <p:graphicFrame>
+        <p:nvGraphicFramePr>
+          <p:cNvPr id="7" name="TextBox 3">
+            <a:extLst>
+              <a:ext uri="{FF2B5EF4-FFF2-40B4-BE49-F238E27FC236}">
+                <a16:creationId xmlns:a16="http://schemas.microsoft.com/office/drawing/2014/main" id="{F37A08E5-75AE-51A9-4609-AB66425FC12F}"/>
+              </a:ext>
+            </a:extLst>
+          </p:cNvPr>
+          <p:cNvGraphicFramePr/>
+          <p:nvPr/>
+        </p:nvGraphicFramePr>
+        <p:xfrm>
+          <a:off x="914400" y="1965960"/>
+          <a:ext cx="10058400" cy="3931920"/>
+        </p:xfrm>
+        <a:graphic>
+          <a:graphicData uri="http://schemas.openxmlformats.org/drawingml/2006/diagram">
+            <dgm:relIds xmlns:dgm="http://schemas.openxmlformats.org/drawingml/2006/diagram" xmlns:r="http://schemas.openxmlformats.org/officeDocument/2006/relationships" r:dm="rId3" r:lo="rId4" r:qs="rId5" r:cs="rId6"/>
+          </a:graphicData>
+        </a:graphic>
+      </p:graphicFrame>
     </p:spTree>
   </p:cSld>
   <p:clrMapOvr>
@@ -5113,26 +7930,31 @@
 </file>
 
 <file path=ppt/slides/slide12.xml><?xml version="1.0" encoding="utf-8"?>
-<p:sld xmlns:a="http://schemas.openxmlformats.org/drawingml/2006/main" xmlns:p="http://schemas.openxmlformats.org/presentationml/2006/main" xmlns:r="http://schemas.openxmlformats.org/officeDocument/2006/relationships">
+<p:sld xmlns:a="http://schemas.openxmlformats.org/drawingml/2006/main" xmlns:r="http://schemas.openxmlformats.org/officeDocument/2006/relationships" xmlns:p="http://schemas.openxmlformats.org/presentationml/2006/main">
   <p:cSld>
-    <p:bg>
-      <p:bgPr>
-        <a:solidFill>
-          <a:srgbClr val="041839"/>
-        </a:solidFill>
-        <a:effectLst/>
-      </p:bgPr>
-    </p:bg>
     <p:spTree>
       <p:nvGrpSpPr>
         <p:cNvPr id="1" name=""/>
         <p:cNvGrpSpPr/>
         <p:nvPr/>
       </p:nvGrpSpPr>
-      <p:grpSpPr/>
+      <p:grpSpPr>
+        <a:xfrm>
+          <a:off x="0" y="0"/>
+          <a:ext cx="0" cy="0"/>
+          <a:chOff x="0" y="0"/>
+          <a:chExt cx="0" cy="0"/>
+        </a:xfrm>
+      </p:grpSpPr>
       <p:pic>
         <p:nvPicPr>
-          <p:cNvPr id="2" name="Picture 1" descr="hero-atmosphere.png"/>
+          <p:cNvPr id="11" name="Picture 10" descr="hero-atmosphere.png">
+            <a:extLst>
+              <a:ext uri="{FF2B5EF4-FFF2-40B4-BE49-F238E27FC236}">
+                <a16:creationId xmlns:a16="http://schemas.microsoft.com/office/drawing/2014/main" id="{2E54B34C-32C0-D0DA-CCF8-F06C955E18C1}"/>
+              </a:ext>
+            </a:extLst>
+          </p:cNvPr>
           <p:cNvPicPr>
             <a:picLocks noChangeAspect="1"/>
           </p:cNvPicPr>
@@ -5146,8 +7968,8 @@
         </p:blipFill>
         <p:spPr>
           <a:xfrm>
-            <a:off x="6035040" y="0"/>
-            <a:ext cx="6156655" cy="6858000"/>
+            <a:off x="0" y="1106060"/>
+            <a:ext cx="12192000" cy="5751940"/>
           </a:xfrm>
           <a:prstGeom prst="rect">
             <a:avLst/>
@@ -5156,50 +7978,287 @@
       </p:pic>
       <p:sp>
         <p:nvSpPr>
-          <p:cNvPr id="3" name="Rectangle 2"/>
-          <p:cNvSpPr/>
+          <p:cNvPr id="5" name="TextBox 4">
+            <a:extLst>
+              <a:ext uri="{FF2B5EF4-FFF2-40B4-BE49-F238E27FC236}">
+                <a16:creationId xmlns:a16="http://schemas.microsoft.com/office/drawing/2014/main" id="{9CCFEA96-19D9-7739-B6A9-6D6804CC0D38}"/>
+              </a:ext>
+            </a:extLst>
+          </p:cNvPr>
+          <p:cNvSpPr txBox="1"/>
           <p:nvPr/>
         </p:nvSpPr>
         <p:spPr>
           <a:xfrm>
-            <a:off x="5760720" y="0"/>
-            <a:ext cx="6492240" cy="6858000"/>
+            <a:off x="640080" y="1813561"/>
+            <a:ext cx="10972800" cy="685800"/>
           </a:xfrm>
           <a:prstGeom prst="rect">
             <a:avLst/>
           </a:prstGeom>
-          <a:solidFill>
-            <a:srgbClr val="041839"/>
-          </a:solidFill>
-          <a:ln>
-            <a:noFill/>
-          </a:ln>
+          <a:noFill/>
         </p:spPr>
-        <p:style>
-          <a:lnRef idx="1">
-            <a:schemeClr val="accent1"/>
-          </a:lnRef>
-          <a:fillRef idx="3">
-            <a:schemeClr val="accent1"/>
-          </a:fillRef>
-          <a:effectRef idx="2">
-            <a:schemeClr val="accent1"/>
-          </a:effectRef>
-          <a:fontRef idx="minor">
-            <a:schemeClr val="lt1"/>
-          </a:fontRef>
-        </p:style>
-        <p:txBody>
-          <a:bodyPr rtlCol="0" anchor="ctr"/>
+        <p:txBody>
+          <a:bodyPr wrap="none">
+            <a:spAutoFit/>
+          </a:bodyPr>
           <a:lstStyle/>
           <a:p>
-            <a:pPr algn="ctr"/>
+            <a:pPr>
+              <a:defRPr sz="3000" b="1">
+                <a:solidFill>
+                  <a:srgbClr val="FFFFFF"/>
+                </a:solidFill>
+                <a:latin typeface="Aptos Display"/>
+              </a:defRPr>
+            </a:pPr>
+            <a:r>
+              <a:rPr dirty="0"/>
+              <a:t>Trustworthy evidence, one passage at a time</a:t>
+            </a:r>
+          </a:p>
+        </p:txBody>
+      </p:sp>
+      <p:sp>
+        <p:nvSpPr>
+          <p:cNvPr id="6" name="TextBox 5">
+            <a:extLst>
+              <a:ext uri="{FF2B5EF4-FFF2-40B4-BE49-F238E27FC236}">
+                <a16:creationId xmlns:a16="http://schemas.microsoft.com/office/drawing/2014/main" id="{96F36217-D559-8B0D-8F79-D1645EF5CD71}"/>
+              </a:ext>
+            </a:extLst>
+          </p:cNvPr>
+          <p:cNvSpPr txBox="1"/>
+          <p:nvPr/>
+        </p:nvSpPr>
+        <p:spPr>
+          <a:xfrm>
+            <a:off x="658368" y="2499361"/>
+            <a:ext cx="10789920" cy="548640"/>
+          </a:xfrm>
+          <a:prstGeom prst="rect">
+            <a:avLst/>
+          </a:prstGeom>
+          <a:noFill/>
+        </p:spPr>
+        <p:txBody>
+          <a:bodyPr wrap="none">
+            <a:spAutoFit/>
+          </a:bodyPr>
+          <a:lstStyle/>
+          <a:p>
+            <a:pPr>
+              <a:defRPr sz="1400">
+                <a:solidFill>
+                  <a:srgbClr val="D2E2EE"/>
+                </a:solidFill>
+                <a:latin typeface="Aptos"/>
+              </a:defRPr>
+            </a:pPr>
+            <a:r>
+              <a:t>A practical foundation for citation-first space-biology research</a:t>
+            </a:r>
+          </a:p>
+        </p:txBody>
+      </p:sp>
+      <p:sp>
+        <p:nvSpPr>
+          <p:cNvPr id="7" name="TextBox 6">
+            <a:extLst>
+              <a:ext uri="{FF2B5EF4-FFF2-40B4-BE49-F238E27FC236}">
+                <a16:creationId xmlns:a16="http://schemas.microsoft.com/office/drawing/2014/main" id="{421907FF-CAB1-6237-DEFA-0D552A6758DA}"/>
+              </a:ext>
+            </a:extLst>
+          </p:cNvPr>
+          <p:cNvSpPr txBox="1"/>
+          <p:nvPr/>
+        </p:nvSpPr>
+        <p:spPr>
+          <a:xfrm>
+            <a:off x="868680" y="3413761"/>
+            <a:ext cx="4572000" cy="2286000"/>
+          </a:xfrm>
+          <a:prstGeom prst="rect">
+            <a:avLst/>
+          </a:prstGeom>
+          <a:noFill/>
+        </p:spPr>
+        <p:txBody>
+          <a:bodyPr wrap="square" lIns="73152" rIns="73152">
+            <a:spAutoFit/>
+          </a:bodyPr>
+          <a:lstStyle/>
+          <a:p>
+            <a:pPr>
+              <a:spcAft>
+                <a:spcPts val="1200"/>
+              </a:spcAft>
+              <a:defRPr sz="2400">
+                <a:solidFill>
+                  <a:srgbClr val="FFFFFF"/>
+                </a:solidFill>
+                <a:latin typeface="Aptos"/>
+              </a:defRPr>
+            </a:pPr>
+            <a:r>
+              <a:rPr dirty="0"/>
+              <a:t>•  Controlled corpus</a:t>
+            </a:r>
+          </a:p>
+          <a:p>
+            <a:pPr>
+              <a:spcAft>
+                <a:spcPts val="1200"/>
+              </a:spcAft>
+              <a:defRPr sz="2400">
+                <a:solidFill>
+                  <a:srgbClr val="FFFFFF"/>
+                </a:solidFill>
+                <a:latin typeface="Aptos"/>
+              </a:defRPr>
+            </a:pPr>
+            <a:r>
+              <a:rPr dirty="0"/>
+              <a:t>•  Grounded retrieval</a:t>
+            </a:r>
+          </a:p>
+          <a:p>
+            <a:pPr>
+              <a:spcAft>
+                <a:spcPts val="1200"/>
+              </a:spcAft>
+              <a:defRPr sz="2400">
+                <a:solidFill>
+                  <a:srgbClr val="FFFFFF"/>
+                </a:solidFill>
+                <a:latin typeface="Aptos"/>
+              </a:defRPr>
+            </a:pPr>
+            <a:r>
+              <a:rPr dirty="0"/>
+              <a:t>•  Validated citations</a:t>
+            </a:r>
+          </a:p>
+          <a:p>
+            <a:pPr>
+              <a:spcAft>
+                <a:spcPts val="1200"/>
+              </a:spcAft>
+              <a:defRPr sz="2400">
+                <a:solidFill>
+                  <a:srgbClr val="FFFFFF"/>
+                </a:solidFill>
+                <a:latin typeface="Aptos"/>
+              </a:defRPr>
+            </a:pPr>
+            <a:r>
+              <a:rPr dirty="0"/>
+              <a:t>•  Transparent limitations</a:t>
+            </a:r>
+          </a:p>
+        </p:txBody>
+      </p:sp>
+      <p:sp>
+        <p:nvSpPr>
+          <p:cNvPr id="8" name="TextBox 7">
+            <a:extLst>
+              <a:ext uri="{FF2B5EF4-FFF2-40B4-BE49-F238E27FC236}">
+                <a16:creationId xmlns:a16="http://schemas.microsoft.com/office/drawing/2014/main" id="{FC6A7092-4A33-BA2F-37BE-40C16570FC1C}"/>
+              </a:ext>
+            </a:extLst>
+          </p:cNvPr>
+          <p:cNvSpPr txBox="1"/>
+          <p:nvPr/>
+        </p:nvSpPr>
+        <p:spPr>
+          <a:xfrm>
+            <a:off x="3854095" y="5655885"/>
+            <a:ext cx="4544769" cy="923330"/>
+          </a:xfrm>
+          <a:prstGeom prst="rect">
+            <a:avLst/>
+          </a:prstGeom>
+          <a:noFill/>
+        </p:spPr>
+        <p:txBody>
+          <a:bodyPr wrap="none">
+            <a:spAutoFit/>
+          </a:bodyPr>
+          <a:lstStyle/>
+          <a:p>
+            <a:pPr algn="ctr">
+              <a:defRPr sz="1800">
+                <a:solidFill>
+                  <a:srgbClr val="FFFFFF"/>
+                </a:solidFill>
+                <a:latin typeface="Aptos"/>
+              </a:defRPr>
+            </a:pPr>
+            <a:r>
+              <a:t>John Hernandez</a:t>
+            </a:r>
+            <a:br/>
+            <a:r>
+              <a:t>jherna65@fau.edu</a:t>
+            </a:r>
+            <a:br/>
+            <a:r>
+              <a:t>GitHub: bluefate/spacebio-evidence-engine</a:t>
+            </a:r>
+          </a:p>
+        </p:txBody>
+      </p:sp>
+      <p:sp>
+        <p:nvSpPr>
+          <p:cNvPr id="9" name="TextBox 8">
+            <a:extLst>
+              <a:ext uri="{FF2B5EF4-FFF2-40B4-BE49-F238E27FC236}">
+                <a16:creationId xmlns:a16="http://schemas.microsoft.com/office/drawing/2014/main" id="{58DB9DFD-463E-C724-8678-805790C10BC4}"/>
+              </a:ext>
+            </a:extLst>
+          </p:cNvPr>
+          <p:cNvSpPr txBox="1"/>
+          <p:nvPr/>
+        </p:nvSpPr>
+        <p:spPr>
+          <a:xfrm>
+            <a:off x="640080" y="6492240"/>
+            <a:ext cx="10972800" cy="201168"/>
+          </a:xfrm>
+          <a:prstGeom prst="rect">
+            <a:avLst/>
+          </a:prstGeom>
+          <a:noFill/>
+        </p:spPr>
+        <p:txBody>
+          <a:bodyPr wrap="none">
+            <a:spAutoFit/>
+          </a:bodyPr>
+          <a:lstStyle/>
+          <a:p>
+            <a:pPr algn="r">
+              <a:defRPr sz="800">
+                <a:solidFill>
+                  <a:srgbClr val="B4D2E1"/>
+                </a:solidFill>
+                <a:latin typeface="Aptos"/>
+              </a:defRPr>
+            </a:pPr>
+            <a:r>
+              <a:t>Space Biology Evidence Engine  |  John Hernandez  |  12</a:t>
+            </a:r>
           </a:p>
         </p:txBody>
       </p:sp>
       <p:pic>
         <p:nvPicPr>
-          <p:cNvPr id="4" name="Picture 3" descr="logo-wordmark.png"/>
+          <p:cNvPr id="10" name="Picture 9" descr="logo-wordmark.png">
+            <a:extLst>
+              <a:ext uri="{FF2B5EF4-FFF2-40B4-BE49-F238E27FC236}">
+                <a16:creationId xmlns:a16="http://schemas.microsoft.com/office/drawing/2014/main" id="{A7801251-E1E2-1453-9BEA-B46D0FFA1D9A}"/>
+              </a:ext>
+            </a:extLst>
+          </p:cNvPr>
           <p:cNvPicPr>
             <a:picLocks noChangeAspect="1"/>
           </p:cNvPicPr>
@@ -5213,254 +8272,20 @@
         </p:blipFill>
         <p:spPr>
           <a:xfrm>
-            <a:off x="777240" y="640080"/>
-            <a:ext cx="3657600" cy="1143458"/>
+            <a:off x="822960" y="38474"/>
+            <a:ext cx="3291840" cy="1029112"/>
           </a:xfrm>
           <a:prstGeom prst="rect">
             <a:avLst/>
           </a:prstGeom>
         </p:spPr>
       </p:pic>
-      <p:sp>
-        <p:nvSpPr>
-          <p:cNvPr id="5" name="TextBox 4"/>
-          <p:cNvSpPr txBox="1"/>
-          <p:nvPr/>
-        </p:nvSpPr>
-        <p:spPr>
-          <a:xfrm>
-            <a:off x="640080" y="822960"/>
-            <a:ext cx="10972800" cy="685800"/>
-          </a:xfrm>
-          <a:prstGeom prst="rect">
-            <a:avLst/>
-          </a:prstGeom>
-          <a:noFill/>
-        </p:spPr>
-        <p:txBody>
-          <a:bodyPr wrap="none">
-            <a:spAutoFit/>
-          </a:bodyPr>
-          <a:lstStyle/>
-          <a:p>
-            <a:pPr>
-              <a:defRPr sz="3000" b="1">
-                <a:solidFill>
-                  <a:srgbClr val="FFFFFF"/>
-                </a:solidFill>
-                <a:latin typeface="Aptos Display"/>
-              </a:defRPr>
-            </a:pPr>
-            <a:r>
-              <a:t>Trustworthy evidence, one passage at a time</a:t>
-            </a:r>
-          </a:p>
-        </p:txBody>
-      </p:sp>
-      <p:sp>
-        <p:nvSpPr>
-          <p:cNvPr id="6" name="TextBox 5"/>
-          <p:cNvSpPr txBox="1"/>
-          <p:nvPr/>
-        </p:nvSpPr>
-        <p:spPr>
-          <a:xfrm>
-            <a:off x="658368" y="1508760"/>
-            <a:ext cx="10789920" cy="548640"/>
-          </a:xfrm>
-          <a:prstGeom prst="rect">
-            <a:avLst/>
-          </a:prstGeom>
-          <a:noFill/>
-        </p:spPr>
-        <p:txBody>
-          <a:bodyPr wrap="none">
-            <a:spAutoFit/>
-          </a:bodyPr>
-          <a:lstStyle/>
-          <a:p>
-            <a:pPr>
-              <a:defRPr sz="1400">
-                <a:solidFill>
-                  <a:srgbClr val="D2E2EE"/>
-                </a:solidFill>
-                <a:latin typeface="Aptos"/>
-              </a:defRPr>
-            </a:pPr>
-            <a:r>
-              <a:t>A practical foundation for citation-first space-biology research</a:t>
-            </a:r>
-          </a:p>
-        </p:txBody>
-      </p:sp>
-      <p:sp>
-        <p:nvSpPr>
-          <p:cNvPr id="7" name="TextBox 6"/>
-          <p:cNvSpPr txBox="1"/>
-          <p:nvPr/>
-        </p:nvSpPr>
-        <p:spPr>
-          <a:xfrm>
-            <a:off x="868680" y="2423160"/>
-            <a:ext cx="4572000" cy="2286000"/>
-          </a:xfrm>
-          <a:prstGeom prst="rect">
-            <a:avLst/>
-          </a:prstGeom>
-          <a:noFill/>
-        </p:spPr>
-        <p:txBody>
-          <a:bodyPr wrap="square" lIns="73152" rIns="73152">
-            <a:spAutoFit/>
-          </a:bodyPr>
-          <a:lstStyle/>
-          <a:p>
-            <a:pPr>
-              <a:spcAft>
-                <a:spcPts val="1200"/>
-              </a:spcAft>
-              <a:defRPr sz="2400">
-                <a:solidFill>
-                  <a:srgbClr val="FFFFFF"/>
-                </a:solidFill>
-                <a:latin typeface="Aptos"/>
-              </a:defRPr>
-            </a:pPr>
-            <a:r>
-              <a:t>•  Controlled corpus</a:t>
-            </a:r>
-          </a:p>
-          <a:p>
-            <a:pPr>
-              <a:spcAft>
-                <a:spcPts val="1200"/>
-              </a:spcAft>
-              <a:defRPr sz="2400">
-                <a:solidFill>
-                  <a:srgbClr val="FFFFFF"/>
-                </a:solidFill>
-                <a:latin typeface="Aptos"/>
-              </a:defRPr>
-            </a:pPr>
-            <a:r>
-              <a:t>•  Grounded retrieval</a:t>
-            </a:r>
-          </a:p>
-          <a:p>
-            <a:pPr>
-              <a:spcAft>
-                <a:spcPts val="1200"/>
-              </a:spcAft>
-              <a:defRPr sz="2400">
-                <a:solidFill>
-                  <a:srgbClr val="FFFFFF"/>
-                </a:solidFill>
-                <a:latin typeface="Aptos"/>
-              </a:defRPr>
-            </a:pPr>
-            <a:r>
-              <a:t>•  Validated citations</a:t>
-            </a:r>
-          </a:p>
-          <a:p>
-            <a:pPr>
-              <a:spcAft>
-                <a:spcPts val="1200"/>
-              </a:spcAft>
-              <a:defRPr sz="2400">
-                <a:solidFill>
-                  <a:srgbClr val="FFFFFF"/>
-                </a:solidFill>
-                <a:latin typeface="Aptos"/>
-              </a:defRPr>
-            </a:pPr>
-            <a:r>
-              <a:t>•  Transparent limitations</a:t>
-            </a:r>
-          </a:p>
-        </p:txBody>
-      </p:sp>
-      <p:sp>
-        <p:nvSpPr>
-          <p:cNvPr id="8" name="TextBox 7"/>
-          <p:cNvSpPr txBox="1"/>
-          <p:nvPr/>
-        </p:nvSpPr>
-        <p:spPr>
-          <a:xfrm>
-            <a:off x="6583680" y="4297680"/>
-            <a:ext cx="4754880" cy="1097280"/>
-          </a:xfrm>
-          <a:prstGeom prst="rect">
-            <a:avLst/>
-          </a:prstGeom>
-          <a:noFill/>
-        </p:spPr>
-        <p:txBody>
-          <a:bodyPr wrap="none">
-            <a:spAutoFit/>
-          </a:bodyPr>
-          <a:lstStyle/>
-          <a:p>
-            <a:pPr algn="r">
-              <a:defRPr sz="1800">
-                <a:solidFill>
-                  <a:srgbClr val="FFFFFF"/>
-                </a:solidFill>
-                <a:latin typeface="Aptos"/>
-              </a:defRPr>
-            </a:pPr>
-            <a:r>
-              <a:t>John Hernandez</a:t>
-            </a:r>
-            <a:br/>
-            <a:r>
-              <a:t>jherna65@fau.edu</a:t>
-            </a:r>
-            <a:br/>
-            <a:r>
-              <a:t>GitHub: bluefate/spacebio-evidence-engine</a:t>
-            </a:r>
-          </a:p>
-        </p:txBody>
-      </p:sp>
-      <p:sp>
-        <p:nvSpPr>
-          <p:cNvPr id="9" name="TextBox 8"/>
-          <p:cNvSpPr txBox="1"/>
-          <p:nvPr/>
-        </p:nvSpPr>
-        <p:spPr>
-          <a:xfrm>
-            <a:off x="640080" y="6492240"/>
-            <a:ext cx="10972800" cy="201168"/>
-          </a:xfrm>
-          <a:prstGeom prst="rect">
-            <a:avLst/>
-          </a:prstGeom>
-          <a:noFill/>
-        </p:spPr>
-        <p:txBody>
-          <a:bodyPr wrap="none">
-            <a:spAutoFit/>
-          </a:bodyPr>
-          <a:lstStyle/>
-          <a:p>
-            <a:pPr algn="r">
-              <a:defRPr sz="800">
-                <a:solidFill>
-                  <a:srgbClr val="B4D2E1"/>
-                </a:solidFill>
-                <a:latin typeface="Aptos"/>
-              </a:defRPr>
-            </a:pPr>
-            <a:r>
-              <a:t>Space Biology Evidence Engine  |  John Hernandez  |  12</a:t>
-            </a:r>
-          </a:p>
-        </p:txBody>
-      </p:sp>
     </p:spTree>
+    <p:extLst>
+      <p:ext uri="{BB962C8B-B14F-4D97-AF65-F5344CB8AC3E}">
+        <p14:creationId xmlns:p14="http://schemas.microsoft.com/office/powerpoint/2010/main" val="1925692193"/>
+      </p:ext>
+    </p:extLst>
   </p:cSld>
   <p:clrMapOvr>
     <a:masterClrMapping/>
@@ -5469,7 +8294,7 @@
 </file>
 
 <file path=ppt/slides/slide2.xml><?xml version="1.0" encoding="utf-8"?>
-<p:sld xmlns:a="http://schemas.openxmlformats.org/drawingml/2006/main" xmlns:p="http://schemas.openxmlformats.org/presentationml/2006/main" xmlns:r="http://schemas.openxmlformats.org/officeDocument/2006/relationships">
+<p:sld xmlns:a="http://schemas.openxmlformats.org/drawingml/2006/main" xmlns:r="http://schemas.openxmlformats.org/officeDocument/2006/relationships" xmlns:p="http://schemas.openxmlformats.org/presentationml/2006/main">
   <p:cSld>
     <p:bg>
       <p:bgPr>
@@ -5485,7 +8310,14 @@
         <p:cNvGrpSpPr/>
         <p:nvPr/>
       </p:nvGrpSpPr>
-      <p:grpSpPr/>
+      <p:grpSpPr>
+        <a:xfrm>
+          <a:off x="0" y="0"/>
+          <a:ext cx="0" cy="0"/>
+          <a:chOff x="0" y="0"/>
+          <a:chExt cx="0" cy="0"/>
+        </a:xfrm>
+      </p:grpSpPr>
       <p:sp>
         <p:nvSpPr>
           <p:cNvPr id="2" name="TextBox 1"/>
@@ -5596,7 +8428,7 @@
           </a:fontRef>
         </p:style>
         <p:txBody>
-          <a:bodyPr rtlCol="0" anchor="ctr" lIns="164592" rIns="164592" tIns="128016"/>
+          <a:bodyPr lIns="164592" tIns="128016" rIns="164592" rtlCol="0" anchor="ctr"/>
           <a:lstStyle/>
           <a:p>
             <a:pPr algn="ctr">
@@ -5667,7 +8499,7 @@
           </a:fontRef>
         </p:style>
         <p:txBody>
-          <a:bodyPr rtlCol="0" anchor="ctr" lIns="164592" rIns="164592" tIns="128016"/>
+          <a:bodyPr lIns="164592" tIns="128016" rIns="164592" rtlCol="0" anchor="ctr"/>
           <a:lstStyle/>
           <a:p>
             <a:pPr algn="ctr">
@@ -5738,7 +8570,7 @@
           </a:fontRef>
         </p:style>
         <p:txBody>
-          <a:bodyPr rtlCol="0" anchor="ctr" lIns="164592" rIns="164592" tIns="128016"/>
+          <a:bodyPr lIns="164592" tIns="128016" rIns="164592" rtlCol="0" anchor="ctr"/>
           <a:lstStyle/>
           <a:p>
             <a:pPr algn="ctr">
@@ -5855,7 +8687,7 @@
 </file>
 
 <file path=ppt/slides/slide3.xml><?xml version="1.0" encoding="utf-8"?>
-<p:sld xmlns:a="http://schemas.openxmlformats.org/drawingml/2006/main" xmlns:p="http://schemas.openxmlformats.org/presentationml/2006/main" xmlns:r="http://schemas.openxmlformats.org/officeDocument/2006/relationships">
+<p:sld xmlns:a="http://schemas.openxmlformats.org/drawingml/2006/main" xmlns:r="http://schemas.openxmlformats.org/officeDocument/2006/relationships" xmlns:p="http://schemas.openxmlformats.org/presentationml/2006/main">
   <p:cSld>
     <p:bg>
       <p:bgPr>
@@ -5871,297 +8703,23 @@
         <p:cNvGrpSpPr/>
         <p:nvPr/>
       </p:nvGrpSpPr>
-      <p:grpSpPr/>
+      <p:grpSpPr>
+        <a:xfrm>
+          <a:off x="0" y="0"/>
+          <a:ext cx="0" cy="0"/>
+          <a:chOff x="0" y="0"/>
+          <a:chExt cx="0" cy="0"/>
+        </a:xfrm>
+      </p:grpSpPr>
       <p:pic>
         <p:nvPicPr>
-          <p:cNvPr id="2" name="Picture 1" descr="hero-atmosphere.png"/>
-          <p:cNvPicPr>
-            <a:picLocks noChangeAspect="1"/>
-          </p:cNvPicPr>
-          <p:nvPr/>
-        </p:nvPicPr>
-        <p:blipFill>
-          <a:blip r:embed="rId2"/>
-          <a:stretch>
-            <a:fillRect/>
-          </a:stretch>
-        </p:blipFill>
-        <p:spPr>
-          <a:xfrm>
-            <a:off x="6035040" y="0"/>
-            <a:ext cx="6156655" cy="6858000"/>
-          </a:xfrm>
-          <a:prstGeom prst="rect">
-            <a:avLst/>
-          </a:prstGeom>
-        </p:spPr>
-      </p:pic>
-      <p:sp>
-        <p:nvSpPr>
-          <p:cNvPr id="3" name="Rectangle 2"/>
-          <p:cNvSpPr/>
-          <p:nvPr/>
-        </p:nvSpPr>
-        <p:spPr>
-          <a:xfrm>
-            <a:off x="5760720" y="0"/>
-            <a:ext cx="6492240" cy="6858000"/>
-          </a:xfrm>
-          <a:prstGeom prst="rect">
-            <a:avLst/>
-          </a:prstGeom>
-          <a:solidFill>
-            <a:srgbClr val="041839"/>
-          </a:solidFill>
-          <a:ln>
-            <a:noFill/>
-          </a:ln>
-        </p:spPr>
-        <p:style>
-          <a:lnRef idx="1">
-            <a:schemeClr val="accent1"/>
-          </a:lnRef>
-          <a:fillRef idx="3">
-            <a:schemeClr val="accent1"/>
-          </a:fillRef>
-          <a:effectRef idx="2">
-            <a:schemeClr val="accent1"/>
-          </a:effectRef>
-          <a:fontRef idx="minor">
-            <a:schemeClr val="lt1"/>
-          </a:fontRef>
-        </p:style>
-        <p:txBody>
-          <a:bodyPr rtlCol="0" anchor="ctr"/>
-          <a:lstStyle/>
-          <a:p>
-            <a:pPr algn="ctr"/>
-          </a:p>
-        </p:txBody>
-      </p:sp>
-      <p:sp>
-        <p:nvSpPr>
-          <p:cNvPr id="4" name="TextBox 3"/>
-          <p:cNvSpPr txBox="1"/>
-          <p:nvPr/>
-        </p:nvSpPr>
-        <p:spPr>
-          <a:xfrm>
-            <a:off x="640080" y="822960"/>
-            <a:ext cx="10972800" cy="685800"/>
-          </a:xfrm>
-          <a:prstGeom prst="rect">
-            <a:avLst/>
-          </a:prstGeom>
-          <a:noFill/>
-        </p:spPr>
-        <p:txBody>
-          <a:bodyPr wrap="none">
-            <a:spAutoFit/>
-          </a:bodyPr>
-          <a:lstStyle/>
-          <a:p>
-            <a:pPr>
-              <a:defRPr sz="3000" b="1">
-                <a:solidFill>
-                  <a:srgbClr val="FFFFFF"/>
-                </a:solidFill>
-                <a:latin typeface="Aptos Display"/>
-              </a:defRPr>
-            </a:pPr>
-            <a:r>
-              <a:t>The solution</a:t>
-            </a:r>
-          </a:p>
-        </p:txBody>
-      </p:sp>
-      <p:sp>
-        <p:nvSpPr>
-          <p:cNvPr id="5" name="TextBox 4"/>
-          <p:cNvSpPr txBox="1"/>
-          <p:nvPr/>
-        </p:nvSpPr>
-        <p:spPr>
-          <a:xfrm>
-            <a:off x="658368" y="1508760"/>
-            <a:ext cx="10789920" cy="548640"/>
-          </a:xfrm>
-          <a:prstGeom prst="rect">
-            <a:avLst/>
-          </a:prstGeom>
-          <a:noFill/>
-        </p:spPr>
-        <p:txBody>
-          <a:bodyPr wrap="none">
-            <a:spAutoFit/>
-          </a:bodyPr>
-          <a:lstStyle/>
-          <a:p>
-            <a:pPr>
-              <a:defRPr sz="1400">
-                <a:solidFill>
-                  <a:srgbClr val="D2E2EE"/>
-                </a:solidFill>
-                <a:latin typeface="Aptos"/>
-              </a:defRPr>
-            </a:pPr>
-            <a:r>
-              <a:t>A controlled, provenance-preserving evidence engine</a:t>
-            </a:r>
-          </a:p>
-        </p:txBody>
-      </p:sp>
-      <p:sp>
-        <p:nvSpPr>
-          <p:cNvPr id="6" name="TextBox 5"/>
-          <p:cNvSpPr txBox="1"/>
-          <p:nvPr/>
-        </p:nvSpPr>
-        <p:spPr>
-          <a:xfrm>
-            <a:off x="822960" y="2103120"/>
-            <a:ext cx="4846320" cy="3474720"/>
-          </a:xfrm>
-          <a:prstGeom prst="rect">
-            <a:avLst/>
-          </a:prstGeom>
-          <a:noFill/>
-        </p:spPr>
-        <p:txBody>
-          <a:bodyPr wrap="square" lIns="73152" rIns="73152">
-            <a:spAutoFit/>
-          </a:bodyPr>
-          <a:lstStyle/>
-          <a:p>
-            <a:pPr>
-              <a:spcAft>
-                <a:spcPts val="1200"/>
-              </a:spcAft>
-              <a:defRPr sz="2000">
-                <a:solidFill>
-                  <a:srgbClr val="FFFFFF"/>
-                </a:solidFill>
-                <a:latin typeface="Aptos"/>
-              </a:defRPr>
-            </a:pPr>
-            <a:r>
-              <a:t>•  23 owner-approved open-access publications</a:t>
-            </a:r>
-          </a:p>
-          <a:p>
-            <a:pPr>
-              <a:spcAft>
-                <a:spcPts val="1200"/>
-              </a:spcAft>
-              <a:defRPr sz="2000">
-                <a:solidFill>
-                  <a:srgbClr val="FFFFFF"/>
-                </a:solidFill>
-                <a:latin typeface="Aptos"/>
-              </a:defRPr>
-            </a:pPr>
-            <a:r>
-              <a:t>•  Semantic + keyword retrieval over indexed passages</a:t>
-            </a:r>
-          </a:p>
-          <a:p>
-            <a:pPr>
-              <a:spcAft>
-                <a:spcPts val="1200"/>
-              </a:spcAft>
-              <a:defRPr sz="2000">
-                <a:solidFill>
-                  <a:srgbClr val="FFFFFF"/>
-                </a:solidFill>
-                <a:latin typeface="Aptos"/>
-              </a:defRPr>
-            </a:pPr>
-            <a:r>
-              <a:t>•  Grounded answers with passage-level citations</a:t>
-            </a:r>
-          </a:p>
-          <a:p>
-            <a:pPr>
-              <a:spcAft>
-                <a:spcPts val="1200"/>
-              </a:spcAft>
-              <a:defRPr sz="2000">
-                <a:solidFill>
-                  <a:srgbClr val="FFFFFF"/>
-                </a:solidFill>
-                <a:latin typeface="Aptos"/>
-              </a:defRPr>
-            </a:pPr>
-            <a:r>
-              <a:t>•  Explicit insufficient-evidence responses</a:t>
-            </a:r>
-          </a:p>
-          <a:p>
-            <a:pPr>
-              <a:spcAft>
-                <a:spcPts val="1200"/>
-              </a:spcAft>
-              <a:defRPr sz="2000">
-                <a:solidFill>
-                  <a:srgbClr val="FFFFFF"/>
-                </a:solidFill>
-                <a:latin typeface="Aptos"/>
-              </a:defRPr>
-            </a:pPr>
-            <a:r>
-              <a:t>•  Local-first operation with optional OpenAI or Ollama generation</a:t>
-            </a:r>
-          </a:p>
-        </p:txBody>
-      </p:sp>
-      <p:sp>
-        <p:nvSpPr>
-          <p:cNvPr id="7" name="Rounded Rectangle 6"/>
-          <p:cNvSpPr/>
-          <p:nvPr/>
-        </p:nvSpPr>
-        <p:spPr>
-          <a:xfrm>
-            <a:off x="5943600" y="1828799"/>
-            <a:ext cx="5669279" cy="3968496"/>
-          </a:xfrm>
-          <a:prstGeom prst="roundRect">
-            <a:avLst/>
-          </a:prstGeom>
-          <a:solidFill>
-            <a:srgbClr val="FFFFFF"/>
-          </a:solidFill>
-          <a:ln w="19050">
-            <a:solidFill>
-              <a:srgbClr val="27B9CD"/>
-            </a:solidFill>
-          </a:ln>
-        </p:spPr>
-        <p:style>
-          <a:lnRef idx="1">
-            <a:schemeClr val="accent1"/>
-          </a:lnRef>
-          <a:fillRef idx="3">
-            <a:schemeClr val="accent1"/>
-          </a:fillRef>
-          <a:effectRef idx="2">
-            <a:schemeClr val="accent1"/>
-          </a:effectRef>
-          <a:fontRef idx="minor">
-            <a:schemeClr val="lt1"/>
-          </a:fontRef>
-        </p:style>
-        <p:txBody>
-          <a:bodyPr rtlCol="0" anchor="ctr"/>
-          <a:lstStyle/>
-          <a:p>
-            <a:pPr algn="ctr"/>
-          </a:p>
-        </p:txBody>
-      </p:sp>
-      <p:pic>
-        <p:nvPicPr>
-          <p:cNvPr id="8" name="Picture 7" descr="01-home.png"/>
+          <p:cNvPr id="10" name="Picture 9" descr="hero-atmosphere.png">
+            <a:extLst>
+              <a:ext uri="{FF2B5EF4-FFF2-40B4-BE49-F238E27FC236}">
+                <a16:creationId xmlns:a16="http://schemas.microsoft.com/office/drawing/2014/main" id="{77A83B27-ABAB-96C5-7E4B-F6DC8CD05673}"/>
+              </a:ext>
+            </a:extLst>
+          </p:cNvPr>
           <p:cNvPicPr>
             <a:picLocks noChangeAspect="1"/>
           </p:cNvPicPr>
@@ -6175,12 +8733,237 @@
         </p:blipFill>
         <p:spPr>
           <a:xfrm>
-            <a:off x="5989320" y="1874519"/>
-            <a:ext cx="5577840" cy="3877056"/>
+            <a:off x="0" y="0"/>
+            <a:ext cx="12191695" cy="6858000"/>
           </a:xfrm>
           <a:prstGeom prst="rect">
             <a:avLst/>
           </a:prstGeom>
+        </p:spPr>
+      </p:pic>
+      <p:sp>
+        <p:nvSpPr>
+          <p:cNvPr id="4" name="TextBox 3"/>
+          <p:cNvSpPr txBox="1"/>
+          <p:nvPr/>
+        </p:nvSpPr>
+        <p:spPr>
+          <a:xfrm>
+            <a:off x="640080" y="822960"/>
+            <a:ext cx="10972800" cy="685800"/>
+          </a:xfrm>
+          <a:prstGeom prst="rect">
+            <a:avLst/>
+          </a:prstGeom>
+          <a:noFill/>
+        </p:spPr>
+        <p:txBody>
+          <a:bodyPr wrap="none">
+            <a:spAutoFit/>
+          </a:bodyPr>
+          <a:lstStyle/>
+          <a:p>
+            <a:pPr>
+              <a:defRPr sz="3000" b="1">
+                <a:solidFill>
+                  <a:srgbClr val="FFFFFF"/>
+                </a:solidFill>
+                <a:latin typeface="Aptos Display"/>
+              </a:defRPr>
+            </a:pPr>
+            <a:r>
+              <a:t>The solution</a:t>
+            </a:r>
+          </a:p>
+        </p:txBody>
+      </p:sp>
+      <p:sp>
+        <p:nvSpPr>
+          <p:cNvPr id="5" name="TextBox 4"/>
+          <p:cNvSpPr txBox="1"/>
+          <p:nvPr/>
+        </p:nvSpPr>
+        <p:spPr>
+          <a:xfrm>
+            <a:off x="658368" y="1508760"/>
+            <a:ext cx="10789920" cy="548640"/>
+          </a:xfrm>
+          <a:prstGeom prst="rect">
+            <a:avLst/>
+          </a:prstGeom>
+          <a:noFill/>
+        </p:spPr>
+        <p:txBody>
+          <a:bodyPr wrap="none">
+            <a:spAutoFit/>
+          </a:bodyPr>
+          <a:lstStyle/>
+          <a:p>
+            <a:pPr>
+              <a:defRPr sz="1400">
+                <a:solidFill>
+                  <a:srgbClr val="D2E2EE"/>
+                </a:solidFill>
+                <a:latin typeface="Aptos"/>
+              </a:defRPr>
+            </a:pPr>
+            <a:r>
+              <a:t>A controlled, provenance-preserving evidence engine</a:t>
+            </a:r>
+          </a:p>
+        </p:txBody>
+      </p:sp>
+      <p:sp>
+        <p:nvSpPr>
+          <p:cNvPr id="6" name="TextBox 5"/>
+          <p:cNvSpPr txBox="1"/>
+          <p:nvPr/>
+        </p:nvSpPr>
+        <p:spPr>
+          <a:xfrm>
+            <a:off x="822960" y="2103120"/>
+            <a:ext cx="4846320" cy="3474720"/>
+          </a:xfrm>
+          <a:prstGeom prst="rect">
+            <a:avLst/>
+          </a:prstGeom>
+          <a:noFill/>
+        </p:spPr>
+        <p:txBody>
+          <a:bodyPr wrap="square" lIns="73152" rIns="73152">
+            <a:spAutoFit/>
+          </a:bodyPr>
+          <a:lstStyle/>
+          <a:p>
+            <a:pPr>
+              <a:spcAft>
+                <a:spcPts val="1200"/>
+              </a:spcAft>
+              <a:defRPr sz="2000">
+                <a:solidFill>
+                  <a:srgbClr val="FFFFFF"/>
+                </a:solidFill>
+                <a:latin typeface="Aptos"/>
+              </a:defRPr>
+            </a:pPr>
+            <a:r>
+              <a:t>•  23 owner-approved open-access publications</a:t>
+            </a:r>
+          </a:p>
+          <a:p>
+            <a:pPr>
+              <a:spcAft>
+                <a:spcPts val="1200"/>
+              </a:spcAft>
+              <a:defRPr sz="2000">
+                <a:solidFill>
+                  <a:srgbClr val="FFFFFF"/>
+                </a:solidFill>
+                <a:latin typeface="Aptos"/>
+              </a:defRPr>
+            </a:pPr>
+            <a:r>
+              <a:t>•  Semantic + keyword retrieval over indexed passages</a:t>
+            </a:r>
+          </a:p>
+          <a:p>
+            <a:pPr>
+              <a:spcAft>
+                <a:spcPts val="1200"/>
+              </a:spcAft>
+              <a:defRPr sz="2000">
+                <a:solidFill>
+                  <a:srgbClr val="FFFFFF"/>
+                </a:solidFill>
+                <a:latin typeface="Aptos"/>
+              </a:defRPr>
+            </a:pPr>
+            <a:r>
+              <a:t>•  Grounded answers with passage-level citations</a:t>
+            </a:r>
+          </a:p>
+          <a:p>
+            <a:pPr>
+              <a:spcAft>
+                <a:spcPts val="1200"/>
+              </a:spcAft>
+              <a:defRPr sz="2000">
+                <a:solidFill>
+                  <a:srgbClr val="FFFFFF"/>
+                </a:solidFill>
+                <a:latin typeface="Aptos"/>
+              </a:defRPr>
+            </a:pPr>
+            <a:r>
+              <a:t>•  Explicit insufficient-evidence responses</a:t>
+            </a:r>
+          </a:p>
+          <a:p>
+            <a:pPr>
+              <a:spcAft>
+                <a:spcPts val="1200"/>
+              </a:spcAft>
+              <a:defRPr sz="2000">
+                <a:solidFill>
+                  <a:srgbClr val="FFFFFF"/>
+                </a:solidFill>
+                <a:latin typeface="Aptos"/>
+              </a:defRPr>
+            </a:pPr>
+            <a:r>
+              <a:t>•  Local-first operation with optional OpenAI or Ollama generation</a:t>
+            </a:r>
+          </a:p>
+        </p:txBody>
+      </p:sp>
+      <p:pic>
+        <p:nvPicPr>
+          <p:cNvPr id="8" name="Picture 7" descr="01-home.png"/>
+          <p:cNvPicPr>
+            <a:picLocks noChangeAspect="1"/>
+          </p:cNvPicPr>
+          <p:nvPr/>
+        </p:nvPicPr>
+        <p:blipFill>
+          <a:blip r:embed="rId4"/>
+          <a:stretch>
+            <a:fillRect/>
+          </a:stretch>
+        </p:blipFill>
+        <p:spPr>
+          <a:xfrm>
+            <a:off x="6079454" y="1700784"/>
+            <a:ext cx="5577840" cy="3877056"/>
+          </a:xfrm>
+          <a:prstGeom prst="roundRect">
+            <a:avLst>
+              <a:gd name="adj" fmla="val 4167"/>
+            </a:avLst>
+          </a:prstGeom>
+          <a:solidFill>
+            <a:srgbClr val="FFFFFF"/>
+          </a:solidFill>
+          <a:ln w="76200" cap="sq">
+            <a:solidFill>
+              <a:srgbClr val="EAEAEA"/>
+            </a:solidFill>
+            <a:miter lim="800000"/>
+          </a:ln>
+          <a:effectLst>
+            <a:reflection blurRad="12700" stA="33000" endPos="28000" dist="5000" dir="5400000" sy="-100000" algn="bl" rotWithShape="0"/>
+          </a:effectLst>
+          <a:scene3d>
+            <a:camera prst="orthographicFront"/>
+            <a:lightRig rig="threePt" dir="t">
+              <a:rot lat="0" lon="0" rev="2700000"/>
+            </a:lightRig>
+          </a:scene3d>
+          <a:sp3d contourW="6350">
+            <a:bevelT h="38100"/>
+            <a:contourClr>
+              <a:srgbClr val="C0C0C0"/>
+            </a:contourClr>
+          </a:sp3d>
         </p:spPr>
       </p:pic>
       <p:sp>
@@ -6228,7 +9011,7 @@
 </file>
 
 <file path=ppt/slides/slide4.xml><?xml version="1.0" encoding="utf-8"?>
-<p:sld xmlns:a="http://schemas.openxmlformats.org/drawingml/2006/main" xmlns:p="http://schemas.openxmlformats.org/presentationml/2006/main" xmlns:r="http://schemas.openxmlformats.org/officeDocument/2006/relationships">
+<p:sld xmlns:a="http://schemas.openxmlformats.org/drawingml/2006/main" xmlns:r="http://schemas.openxmlformats.org/officeDocument/2006/relationships" xmlns:p="http://schemas.openxmlformats.org/presentationml/2006/main">
   <p:cSld>
     <p:bg>
       <p:bgPr>
@@ -6244,7 +9027,14 @@
         <p:cNvGrpSpPr/>
         <p:nvPr/>
       </p:nvGrpSpPr>
-      <p:grpSpPr/>
+      <p:grpSpPr>
+        <a:xfrm>
+          <a:off x="0" y="0"/>
+          <a:ext cx="0" cy="0"/>
+          <a:chOff x="0" y="0"/>
+          <a:chExt cx="0" cy="0"/>
+        </a:xfrm>
+      </p:grpSpPr>
       <p:sp>
         <p:nvSpPr>
           <p:cNvPr id="2" name="TextBox 1"/>
@@ -6355,7 +9145,7 @@
           </a:fontRef>
         </p:style>
         <p:txBody>
-          <a:bodyPr rtlCol="0" anchor="ctr" lIns="164592" rIns="164592" tIns="128016"/>
+          <a:bodyPr lIns="164592" tIns="128016" rIns="164592" rtlCol="0" anchor="ctr"/>
           <a:lstStyle/>
           <a:p>
             <a:pPr algn="ctr">
@@ -6428,6 +9218,7 @@
           <a:lstStyle/>
           <a:p>
             <a:pPr algn="ctr"/>
+            <a:endParaRPr/>
           </a:p>
         </p:txBody>
       </p:sp>
@@ -6469,7 +9260,7 @@
           </a:fontRef>
         </p:style>
         <p:txBody>
-          <a:bodyPr rtlCol="0" anchor="ctr" lIns="164592" rIns="164592" tIns="128016"/>
+          <a:bodyPr lIns="164592" tIns="128016" rIns="164592" rtlCol="0" anchor="ctr"/>
           <a:lstStyle/>
           <a:p>
             <a:pPr algn="ctr">
@@ -6542,6 +9333,7 @@
           <a:lstStyle/>
           <a:p>
             <a:pPr algn="ctr"/>
+            <a:endParaRPr/>
           </a:p>
         </p:txBody>
       </p:sp>
@@ -6583,7 +9375,7 @@
           </a:fontRef>
         </p:style>
         <p:txBody>
-          <a:bodyPr rtlCol="0" anchor="ctr" lIns="164592" rIns="164592" tIns="128016"/>
+          <a:bodyPr lIns="164592" tIns="128016" rIns="164592" rtlCol="0" anchor="ctr"/>
           <a:lstStyle/>
           <a:p>
             <a:pPr algn="ctr">
@@ -6656,6 +9448,7 @@
           <a:lstStyle/>
           <a:p>
             <a:pPr algn="ctr"/>
+            <a:endParaRPr/>
           </a:p>
         </p:txBody>
       </p:sp>
@@ -6697,7 +9490,7 @@
           </a:fontRef>
         </p:style>
         <p:txBody>
-          <a:bodyPr rtlCol="0" anchor="ctr" lIns="164592" rIns="164592" tIns="128016"/>
+          <a:bodyPr lIns="164592" tIns="128016" rIns="164592" rtlCol="0" anchor="ctr"/>
           <a:lstStyle/>
           <a:p>
             <a:pPr algn="ctr">
@@ -6770,6 +9563,7 @@
           <a:lstStyle/>
           <a:p>
             <a:pPr algn="ctr"/>
+            <a:endParaRPr/>
           </a:p>
         </p:txBody>
       </p:sp>
@@ -6811,7 +9605,7 @@
           </a:fontRef>
         </p:style>
         <p:txBody>
-          <a:bodyPr rtlCol="0" anchor="ctr" lIns="164592" rIns="164592" tIns="128016"/>
+          <a:bodyPr lIns="164592" tIns="128016" rIns="164592" rtlCol="0" anchor="ctr"/>
           <a:lstStyle/>
           <a:p>
             <a:pPr algn="ctr">
@@ -6992,7 +9786,7 @@
 </file>
 
 <file path=ppt/slides/slide5.xml><?xml version="1.0" encoding="utf-8"?>
-<p:sld xmlns:a="http://schemas.openxmlformats.org/drawingml/2006/main" xmlns:p="http://schemas.openxmlformats.org/presentationml/2006/main" xmlns:r="http://schemas.openxmlformats.org/officeDocument/2006/relationships">
+<p:sld xmlns:a="http://schemas.openxmlformats.org/drawingml/2006/main" xmlns:r="http://schemas.openxmlformats.org/officeDocument/2006/relationships" xmlns:p="http://schemas.openxmlformats.org/presentationml/2006/main">
   <p:cSld>
     <p:bg>
       <p:bgPr>
@@ -7008,7 +9802,14 @@
         <p:cNvGrpSpPr/>
         <p:nvPr/>
       </p:nvGrpSpPr>
-      <p:grpSpPr/>
+      <p:grpSpPr>
+        <a:xfrm>
+          <a:off x="0" y="0"/>
+          <a:ext cx="0" cy="0"/>
+          <a:chOff x="0" y="0"/>
+          <a:chExt cx="0" cy="0"/>
+        </a:xfrm>
+      </p:grpSpPr>
       <p:sp>
         <p:nvSpPr>
           <p:cNvPr id="2" name="TextBox 1"/>
@@ -7081,51 +9882,6 @@
           </a:p>
         </p:txBody>
       </p:sp>
-      <p:sp>
-        <p:nvSpPr>
-          <p:cNvPr id="4" name="Rounded Rectangle 3"/>
-          <p:cNvSpPr/>
-          <p:nvPr/>
-        </p:nvSpPr>
-        <p:spPr>
-          <a:xfrm>
-            <a:off x="548640" y="1828799"/>
-            <a:ext cx="6492240" cy="4535424"/>
-          </a:xfrm>
-          <a:prstGeom prst="roundRect">
-            <a:avLst/>
-          </a:prstGeom>
-          <a:solidFill>
-            <a:srgbClr val="FFFFFF"/>
-          </a:solidFill>
-          <a:ln w="19050">
-            <a:solidFill>
-              <a:srgbClr val="27B9CD"/>
-            </a:solidFill>
-          </a:ln>
-        </p:spPr>
-        <p:style>
-          <a:lnRef idx="1">
-            <a:schemeClr val="accent1"/>
-          </a:lnRef>
-          <a:fillRef idx="3">
-            <a:schemeClr val="accent1"/>
-          </a:fillRef>
-          <a:effectRef idx="2">
-            <a:schemeClr val="accent1"/>
-          </a:effectRef>
-          <a:fontRef idx="minor">
-            <a:schemeClr val="lt1"/>
-          </a:fontRef>
-        </p:style>
-        <p:txBody>
-          <a:bodyPr rtlCol="0" anchor="ctr"/>
-          <a:lstStyle/>
-          <a:p>
-            <a:pPr algn="ctr"/>
-          </a:p>
-        </p:txBody>
-      </p:sp>
       <p:pic>
         <p:nvPicPr>
           <p:cNvPr id="5" name="Picture 4" descr="02-ask.png"/>
@@ -7135,7 +9891,7 @@
           <p:nvPr/>
         </p:nvPicPr>
         <p:blipFill>
-          <a:blip r:embed="rId2"/>
+          <a:blip r:embed="rId3"/>
           <a:stretch>
             <a:fillRect/>
           </a:stretch>
@@ -7145,9 +9901,35 @@
             <a:off x="594360" y="1874519"/>
             <a:ext cx="6400800" cy="4443984"/>
           </a:xfrm>
-          <a:prstGeom prst="rect">
-            <a:avLst/>
+          <a:prstGeom prst="roundRect">
+            <a:avLst>
+              <a:gd name="adj" fmla="val 4167"/>
+            </a:avLst>
           </a:prstGeom>
+          <a:solidFill>
+            <a:srgbClr val="FFFFFF"/>
+          </a:solidFill>
+          <a:ln w="76200" cap="sq">
+            <a:solidFill>
+              <a:srgbClr val="292929"/>
+            </a:solidFill>
+            <a:miter lim="800000"/>
+          </a:ln>
+          <a:effectLst>
+            <a:reflection blurRad="12700" stA="28000" endPos="28000" dist="5000" dir="5400000" sy="-100000" algn="bl" rotWithShape="0"/>
+          </a:effectLst>
+          <a:scene3d>
+            <a:camera prst="orthographicFront"/>
+            <a:lightRig rig="threePt" dir="t">
+              <a:rot lat="0" lon="0" rev="2700000"/>
+            </a:lightRig>
+          </a:scene3d>
+          <a:sp3d>
+            <a:bevelT h="38100"/>
+            <a:contourClr>
+              <a:srgbClr val="C0C0C0"/>
+            </a:contourClr>
+          </a:sp3d>
         </p:spPr>
       </p:pic>
       <p:sp>
@@ -7188,7 +9970,7 @@
           </a:fontRef>
         </p:style>
         <p:txBody>
-          <a:bodyPr rtlCol="0" anchor="ctr" lIns="164592" rIns="164592" tIns="128016"/>
+          <a:bodyPr lIns="164592" tIns="128016" rIns="164592" rtlCol="0" anchor="ctr"/>
           <a:lstStyle/>
           <a:p>
             <a:pPr algn="ctr">
@@ -7259,7 +10041,7 @@
           </a:fontRef>
         </p:style>
         <p:txBody>
-          <a:bodyPr rtlCol="0" anchor="ctr" lIns="164592" rIns="164592" tIns="128016"/>
+          <a:bodyPr lIns="164592" tIns="128016" rIns="164592" rtlCol="0" anchor="ctr"/>
           <a:lstStyle/>
           <a:p>
             <a:pPr algn="ctr">
@@ -7337,7 +10119,7 @@
 </file>
 
 <file path=ppt/slides/slide6.xml><?xml version="1.0" encoding="utf-8"?>
-<p:sld xmlns:a="http://schemas.openxmlformats.org/drawingml/2006/main" xmlns:p="http://schemas.openxmlformats.org/presentationml/2006/main" xmlns:r="http://schemas.openxmlformats.org/officeDocument/2006/relationships">
+<p:sld xmlns:a="http://schemas.openxmlformats.org/drawingml/2006/main" xmlns:r="http://schemas.openxmlformats.org/officeDocument/2006/relationships" xmlns:p="http://schemas.openxmlformats.org/presentationml/2006/main">
   <p:cSld>
     <p:bg>
       <p:bgPr>
@@ -7353,194 +10135,23 @@
         <p:cNvGrpSpPr/>
         <p:nvPr/>
       </p:nvGrpSpPr>
-      <p:grpSpPr/>
+      <p:grpSpPr>
+        <a:xfrm>
+          <a:off x="0" y="0"/>
+          <a:ext cx="0" cy="0"/>
+          <a:chOff x="0" y="0"/>
+          <a:chExt cx="0" cy="0"/>
+        </a:xfrm>
+      </p:grpSpPr>
       <p:pic>
         <p:nvPicPr>
-          <p:cNvPr id="2" name="Picture 1" descr="hero-atmosphere.png"/>
-          <p:cNvPicPr>
-            <a:picLocks noChangeAspect="1"/>
-          </p:cNvPicPr>
-          <p:nvPr/>
-        </p:nvPicPr>
-        <p:blipFill>
-          <a:blip r:embed="rId2"/>
-          <a:stretch>
-            <a:fillRect/>
-          </a:stretch>
-        </p:blipFill>
-        <p:spPr>
-          <a:xfrm>
-            <a:off x="6035040" y="0"/>
-            <a:ext cx="6156655" cy="6858000"/>
-          </a:xfrm>
-          <a:prstGeom prst="rect">
-            <a:avLst/>
-          </a:prstGeom>
-        </p:spPr>
-      </p:pic>
-      <p:sp>
-        <p:nvSpPr>
-          <p:cNvPr id="3" name="Rectangle 2"/>
-          <p:cNvSpPr/>
-          <p:nvPr/>
-        </p:nvSpPr>
-        <p:spPr>
-          <a:xfrm>
-            <a:off x="5760720" y="0"/>
-            <a:ext cx="6492240" cy="6858000"/>
-          </a:xfrm>
-          <a:prstGeom prst="rect">
-            <a:avLst/>
-          </a:prstGeom>
-          <a:solidFill>
-            <a:srgbClr val="041839"/>
-          </a:solidFill>
-          <a:ln>
-            <a:noFill/>
-          </a:ln>
-        </p:spPr>
-        <p:style>
-          <a:lnRef idx="1">
-            <a:schemeClr val="accent1"/>
-          </a:lnRef>
-          <a:fillRef idx="3">
-            <a:schemeClr val="accent1"/>
-          </a:fillRef>
-          <a:effectRef idx="2">
-            <a:schemeClr val="accent1"/>
-          </a:effectRef>
-          <a:fontRef idx="minor">
-            <a:schemeClr val="lt1"/>
-          </a:fontRef>
-        </p:style>
-        <p:txBody>
-          <a:bodyPr rtlCol="0" anchor="ctr"/>
-          <a:lstStyle/>
-          <a:p>
-            <a:pPr algn="ctr"/>
-          </a:p>
-        </p:txBody>
-      </p:sp>
-      <p:sp>
-        <p:nvSpPr>
-          <p:cNvPr id="4" name="TextBox 3"/>
-          <p:cNvSpPr txBox="1"/>
-          <p:nvPr/>
-        </p:nvSpPr>
-        <p:spPr>
-          <a:xfrm>
-            <a:off x="640080" y="822960"/>
-            <a:ext cx="10972800" cy="685800"/>
-          </a:xfrm>
-          <a:prstGeom prst="rect">
-            <a:avLst/>
-          </a:prstGeom>
-          <a:noFill/>
-        </p:spPr>
-        <p:txBody>
-          <a:bodyPr wrap="none">
-            <a:spAutoFit/>
-          </a:bodyPr>
-          <a:lstStyle/>
-          <a:p>
-            <a:pPr>
-              <a:defRPr sz="3000" b="1">
-                <a:solidFill>
-                  <a:srgbClr val="FFFFFF"/>
-                </a:solidFill>
-                <a:latin typeface="Aptos Display"/>
-              </a:defRPr>
-            </a:pPr>
-            <a:r>
-              <a:t>Controlled corpus and provenance</a:t>
-            </a:r>
-          </a:p>
-        </p:txBody>
-      </p:sp>
-      <p:sp>
-        <p:nvSpPr>
-          <p:cNvPr id="5" name="TextBox 4"/>
-          <p:cNvSpPr txBox="1"/>
-          <p:nvPr/>
-        </p:nvSpPr>
-        <p:spPr>
-          <a:xfrm>
-            <a:off x="658368" y="1508760"/>
-            <a:ext cx="10789920" cy="548640"/>
-          </a:xfrm>
-          <a:prstGeom prst="rect">
-            <a:avLst/>
-          </a:prstGeom>
-          <a:noFill/>
-        </p:spPr>
-        <p:txBody>
-          <a:bodyPr wrap="none">
-            <a:spAutoFit/>
-          </a:bodyPr>
-          <a:lstStyle/>
-          <a:p>
-            <a:pPr>
-              <a:defRPr sz="1400">
-                <a:solidFill>
-                  <a:srgbClr val="D2E2EE"/>
-                </a:solidFill>
-                <a:latin typeface="Aptos"/>
-              </a:defRPr>
-            </a:pPr>
-            <a:r>
-              <a:t>Inventory visibility makes the evidence boundary explicit</a:t>
-            </a:r>
-          </a:p>
-        </p:txBody>
-      </p:sp>
-      <p:sp>
-        <p:nvSpPr>
-          <p:cNvPr id="6" name="Rounded Rectangle 5"/>
-          <p:cNvSpPr/>
-          <p:nvPr/>
-        </p:nvSpPr>
-        <p:spPr>
-          <a:xfrm>
-            <a:off x="548640" y="1737360"/>
-            <a:ext cx="6675120" cy="4663440"/>
-          </a:xfrm>
-          <a:prstGeom prst="roundRect">
-            <a:avLst/>
-          </a:prstGeom>
-          <a:solidFill>
-            <a:srgbClr val="FFFFFF"/>
-          </a:solidFill>
-          <a:ln w="19050">
-            <a:solidFill>
-              <a:srgbClr val="27B9CD"/>
-            </a:solidFill>
-          </a:ln>
-        </p:spPr>
-        <p:style>
-          <a:lnRef idx="1">
-            <a:schemeClr val="accent1"/>
-          </a:lnRef>
-          <a:fillRef idx="3">
-            <a:schemeClr val="accent1"/>
-          </a:fillRef>
-          <a:effectRef idx="2">
-            <a:schemeClr val="accent1"/>
-          </a:effectRef>
-          <a:fontRef idx="minor">
-            <a:schemeClr val="lt1"/>
-          </a:fontRef>
-        </p:style>
-        <p:txBody>
-          <a:bodyPr rtlCol="0" anchor="ctr"/>
-          <a:lstStyle/>
-          <a:p>
-            <a:pPr algn="ctr"/>
-          </a:p>
-        </p:txBody>
-      </p:sp>
-      <p:pic>
-        <p:nvPicPr>
-          <p:cNvPr id="7" name="Picture 6" descr="04-corpus.png"/>
+          <p:cNvPr id="11" name="Picture 10" descr="hero-atmosphere.png">
+            <a:extLst>
+              <a:ext uri="{FF2B5EF4-FFF2-40B4-BE49-F238E27FC236}">
+                <a16:creationId xmlns:a16="http://schemas.microsoft.com/office/drawing/2014/main" id="{78A0A8EB-E8DF-F3D1-A7C6-EAD57B795DD1}"/>
+              </a:ext>
+            </a:extLst>
+          </p:cNvPr>
           <p:cNvPicPr>
             <a:picLocks noChangeAspect="1"/>
           </p:cNvPicPr>
@@ -7554,8 +10165,8 @@
         </p:blipFill>
         <p:spPr>
           <a:xfrm>
-            <a:off x="594360" y="1783080"/>
-            <a:ext cx="6583680" cy="4572000"/>
+            <a:off x="-42520" y="0"/>
+            <a:ext cx="12191695" cy="6858000"/>
           </a:xfrm>
           <a:prstGeom prst="rect">
             <a:avLst/>
@@ -7564,52 +10175,79 @@
       </p:pic>
       <p:sp>
         <p:nvSpPr>
-          <p:cNvPr id="8" name="Rounded Rectangle 7"/>
-          <p:cNvSpPr/>
+          <p:cNvPr id="4" name="TextBox 3"/>
+          <p:cNvSpPr txBox="1"/>
           <p:nvPr/>
         </p:nvSpPr>
         <p:spPr>
           <a:xfrm>
-            <a:off x="7406640" y="1737360"/>
-            <a:ext cx="4251959" cy="4663440"/>
+            <a:off x="640080" y="822960"/>
+            <a:ext cx="10972800" cy="685800"/>
           </a:xfrm>
-          <a:prstGeom prst="roundRect">
+          <a:prstGeom prst="rect">
             <a:avLst/>
           </a:prstGeom>
-          <a:solidFill>
-            <a:srgbClr val="FFFFFF"/>
-          </a:solidFill>
-          <a:ln w="19050">
-            <a:solidFill>
-              <a:srgbClr val="27B9CD"/>
-            </a:solidFill>
-          </a:ln>
+          <a:noFill/>
         </p:spPr>
-        <p:style>
-          <a:lnRef idx="1">
-            <a:schemeClr val="accent1"/>
-          </a:lnRef>
-          <a:fillRef idx="3">
-            <a:schemeClr val="accent1"/>
-          </a:fillRef>
-          <a:effectRef idx="2">
-            <a:schemeClr val="accent1"/>
-          </a:effectRef>
-          <a:fontRef idx="minor">
-            <a:schemeClr val="lt1"/>
-          </a:fontRef>
-        </p:style>
-        <p:txBody>
-          <a:bodyPr rtlCol="0" anchor="ctr"/>
+        <p:txBody>
+          <a:bodyPr wrap="none">
+            <a:spAutoFit/>
+          </a:bodyPr>
           <a:lstStyle/>
           <a:p>
-            <a:pPr algn="ctr"/>
+            <a:pPr>
+              <a:defRPr sz="3000" b="1">
+                <a:solidFill>
+                  <a:srgbClr val="FFFFFF"/>
+                </a:solidFill>
+                <a:latin typeface="Aptos Display"/>
+              </a:defRPr>
+            </a:pPr>
+            <a:r>
+              <a:t>Controlled corpus and provenance</a:t>
+            </a:r>
+          </a:p>
+        </p:txBody>
+      </p:sp>
+      <p:sp>
+        <p:nvSpPr>
+          <p:cNvPr id="5" name="TextBox 4"/>
+          <p:cNvSpPr txBox="1"/>
+          <p:nvPr/>
+        </p:nvSpPr>
+        <p:spPr>
+          <a:xfrm>
+            <a:off x="658368" y="1508760"/>
+            <a:ext cx="10789920" cy="548640"/>
+          </a:xfrm>
+          <a:prstGeom prst="rect">
+            <a:avLst/>
+          </a:prstGeom>
+          <a:noFill/>
+        </p:spPr>
+        <p:txBody>
+          <a:bodyPr wrap="none">
+            <a:spAutoFit/>
+          </a:bodyPr>
+          <a:lstStyle/>
+          <a:p>
+            <a:pPr>
+              <a:defRPr sz="1400">
+                <a:solidFill>
+                  <a:srgbClr val="D2E2EE"/>
+                </a:solidFill>
+                <a:latin typeface="Aptos"/>
+              </a:defRPr>
+            </a:pPr>
+            <a:r>
+              <a:t>Inventory visibility makes the evidence boundary explicit</a:t>
+            </a:r>
           </a:p>
         </p:txBody>
       </p:sp>
       <p:pic>
         <p:nvPicPr>
-          <p:cNvPr id="9" name="Picture 8" descr="06-publication.png"/>
+          <p:cNvPr id="7" name="Picture 6" descr="04-corpus.png"/>
           <p:cNvPicPr>
             <a:picLocks noChangeAspect="1"/>
           </p:cNvPicPr>
@@ -7623,12 +10261,88 @@
         </p:blipFill>
         <p:spPr>
           <a:xfrm>
-            <a:off x="7452360" y="1783080"/>
-            <a:ext cx="4160520" cy="4572000"/>
+            <a:off x="528523" y="2057400"/>
+            <a:ext cx="6649517" cy="4343400"/>
           </a:xfrm>
-          <a:prstGeom prst="rect">
-            <a:avLst/>
+          <a:prstGeom prst="roundRect">
+            <a:avLst>
+              <a:gd name="adj" fmla="val 4167"/>
+            </a:avLst>
           </a:prstGeom>
+          <a:solidFill>
+            <a:srgbClr val="FFFFFF"/>
+          </a:solidFill>
+          <a:ln w="76200" cap="sq">
+            <a:solidFill>
+              <a:srgbClr val="EAEAEA"/>
+            </a:solidFill>
+            <a:miter lim="800000"/>
+          </a:ln>
+          <a:effectLst>
+            <a:reflection blurRad="12700" stA="33000" endPos="28000" dist="5000" dir="5400000" sy="-100000" algn="bl" rotWithShape="0"/>
+          </a:effectLst>
+          <a:scene3d>
+            <a:camera prst="orthographicFront"/>
+            <a:lightRig rig="threePt" dir="t">
+              <a:rot lat="0" lon="0" rev="2700000"/>
+            </a:lightRig>
+          </a:scene3d>
+          <a:sp3d contourW="6350">
+            <a:bevelT h="38100"/>
+            <a:contourClr>
+              <a:srgbClr val="C0C0C0"/>
+            </a:contourClr>
+          </a:sp3d>
+        </p:spPr>
+      </p:pic>
+      <p:pic>
+        <p:nvPicPr>
+          <p:cNvPr id="9" name="Picture 8" descr="06-publication.png"/>
+          <p:cNvPicPr>
+            <a:picLocks noChangeAspect="1"/>
+          </p:cNvPicPr>
+          <p:nvPr/>
+        </p:nvPicPr>
+        <p:blipFill>
+          <a:blip r:embed="rId5"/>
+          <a:stretch>
+            <a:fillRect/>
+          </a:stretch>
+        </p:blipFill>
+        <p:spPr>
+          <a:xfrm>
+            <a:off x="7562088" y="2054684"/>
+            <a:ext cx="4160520" cy="4300396"/>
+          </a:xfrm>
+          <a:prstGeom prst="roundRect">
+            <a:avLst>
+              <a:gd name="adj" fmla="val 4167"/>
+            </a:avLst>
+          </a:prstGeom>
+          <a:solidFill>
+            <a:srgbClr val="FFFFFF"/>
+          </a:solidFill>
+          <a:ln w="76200" cap="sq">
+            <a:solidFill>
+              <a:srgbClr val="EAEAEA"/>
+            </a:solidFill>
+            <a:miter lim="800000"/>
+          </a:ln>
+          <a:effectLst>
+            <a:reflection blurRad="12700" stA="33000" endPos="28000" dist="5000" dir="5400000" sy="-100000" algn="bl" rotWithShape="0"/>
+          </a:effectLst>
+          <a:scene3d>
+            <a:camera prst="orthographicFront"/>
+            <a:lightRig rig="threePt" dir="t">
+              <a:rot lat="0" lon="0" rev="2700000"/>
+            </a:lightRig>
+          </a:scene3d>
+          <a:sp3d contourW="6350">
+            <a:bevelT h="38100"/>
+            <a:contourClr>
+              <a:srgbClr val="C0C0C0"/>
+            </a:contourClr>
+          </a:sp3d>
         </p:spPr>
       </p:pic>
       <p:sp>
@@ -7676,7 +10390,7 @@
 </file>
 
 <file path=ppt/slides/slide7.xml><?xml version="1.0" encoding="utf-8"?>
-<p:sld xmlns:a="http://schemas.openxmlformats.org/drawingml/2006/main" xmlns:p="http://schemas.openxmlformats.org/presentationml/2006/main" xmlns:r="http://schemas.openxmlformats.org/officeDocument/2006/relationships">
+<p:sld xmlns:a="http://schemas.openxmlformats.org/drawingml/2006/main" xmlns:r="http://schemas.openxmlformats.org/officeDocument/2006/relationships" xmlns:p="http://schemas.openxmlformats.org/presentationml/2006/main">
   <p:cSld>
     <p:bg>
       <p:bgPr>
@@ -7692,7 +10406,14 @@
         <p:cNvGrpSpPr/>
         <p:nvPr/>
       </p:nvGrpSpPr>
-      <p:grpSpPr/>
+      <p:grpSpPr>
+        <a:xfrm>
+          <a:off x="0" y="0"/>
+          <a:ext cx="0" cy="0"/>
+          <a:chOff x="0" y="0"/>
+          <a:chExt cx="0" cy="0"/>
+        </a:xfrm>
+      </p:grpSpPr>
       <p:sp>
         <p:nvSpPr>
           <p:cNvPr id="2" name="TextBox 1"/>
@@ -7765,123 +10486,9 @@
           </a:p>
         </p:txBody>
       </p:sp>
-      <p:sp>
-        <p:nvSpPr>
-          <p:cNvPr id="4" name="Rounded Rectangle 3"/>
-          <p:cNvSpPr/>
-          <p:nvPr/>
-        </p:nvSpPr>
-        <p:spPr>
-          <a:xfrm>
-            <a:off x="457200" y="1783080"/>
-            <a:ext cx="5623559" cy="3931920"/>
-          </a:xfrm>
-          <a:prstGeom prst="roundRect">
-            <a:avLst/>
-          </a:prstGeom>
-          <a:solidFill>
-            <a:srgbClr val="FFFFFF"/>
-          </a:solidFill>
-          <a:ln w="19050">
-            <a:solidFill>
-              <a:srgbClr val="27B9CD"/>
-            </a:solidFill>
-          </a:ln>
-        </p:spPr>
-        <p:style>
-          <a:lnRef idx="1">
-            <a:schemeClr val="accent1"/>
-          </a:lnRef>
-          <a:fillRef idx="3">
-            <a:schemeClr val="accent1"/>
-          </a:fillRef>
-          <a:effectRef idx="2">
-            <a:schemeClr val="accent1"/>
-          </a:effectRef>
-          <a:fontRef idx="minor">
-            <a:schemeClr val="lt1"/>
-          </a:fontRef>
-        </p:style>
-        <p:txBody>
-          <a:bodyPr rtlCol="0" anchor="ctr"/>
-          <a:lstStyle/>
-          <a:p>
-            <a:pPr algn="ctr"/>
-          </a:p>
-        </p:txBody>
-      </p:sp>
       <p:pic>
         <p:nvPicPr>
           <p:cNvPr id="5" name="Picture 4" descr="03-search.png"/>
-          <p:cNvPicPr>
-            <a:picLocks noChangeAspect="1"/>
-          </p:cNvPicPr>
-          <p:nvPr/>
-        </p:nvPicPr>
-        <p:blipFill>
-          <a:blip r:embed="rId2"/>
-          <a:stretch>
-            <a:fillRect/>
-          </a:stretch>
-        </p:blipFill>
-        <p:spPr>
-          <a:xfrm>
-            <a:off x="502920" y="1828800"/>
-            <a:ext cx="5532120" cy="3840480"/>
-          </a:xfrm>
-          <a:prstGeom prst="rect">
-            <a:avLst/>
-          </a:prstGeom>
-        </p:spPr>
-      </p:pic>
-      <p:sp>
-        <p:nvSpPr>
-          <p:cNvPr id="6" name="Rounded Rectangle 5"/>
-          <p:cNvSpPr/>
-          <p:nvPr/>
-        </p:nvSpPr>
-        <p:spPr>
-          <a:xfrm>
-            <a:off x="6126480" y="1783080"/>
-            <a:ext cx="5623559" cy="3931920"/>
-          </a:xfrm>
-          <a:prstGeom prst="roundRect">
-            <a:avLst/>
-          </a:prstGeom>
-          <a:solidFill>
-            <a:srgbClr val="FFFFFF"/>
-          </a:solidFill>
-          <a:ln w="19050">
-            <a:solidFill>
-              <a:srgbClr val="27B9CD"/>
-            </a:solidFill>
-          </a:ln>
-        </p:spPr>
-        <p:style>
-          <a:lnRef idx="1">
-            <a:schemeClr val="accent1"/>
-          </a:lnRef>
-          <a:fillRef idx="3">
-            <a:schemeClr val="accent1"/>
-          </a:fillRef>
-          <a:effectRef idx="2">
-            <a:schemeClr val="accent1"/>
-          </a:effectRef>
-          <a:fontRef idx="minor">
-            <a:schemeClr val="lt1"/>
-          </a:fontRef>
-        </p:style>
-        <p:txBody>
-          <a:bodyPr rtlCol="0" anchor="ctr"/>
-          <a:lstStyle/>
-          <a:p>
-            <a:pPr algn="ctr"/>
-          </a:p>
-        </p:txBody>
-      </p:sp>
-      <p:pic>
-        <p:nvPicPr>
-          <p:cNvPr id="7" name="Picture 6" descr="05-compare.png"/>
           <p:cNvPicPr>
             <a:picLocks noChangeAspect="1"/>
           </p:cNvPicPr>
@@ -7895,12 +10502,88 @@
         </p:blipFill>
         <p:spPr>
           <a:xfrm>
-            <a:off x="6172200" y="1828800"/>
-            <a:ext cx="5532120" cy="3840480"/>
+            <a:off x="807718" y="1926768"/>
+            <a:ext cx="5194663" cy="3611880"/>
           </a:xfrm>
-          <a:prstGeom prst="rect">
-            <a:avLst/>
+          <a:prstGeom prst="roundRect">
+            <a:avLst>
+              <a:gd name="adj" fmla="val 4167"/>
+            </a:avLst>
           </a:prstGeom>
+          <a:solidFill>
+            <a:srgbClr val="FFFFFF"/>
+          </a:solidFill>
+          <a:ln w="76200" cap="sq">
+            <a:solidFill>
+              <a:srgbClr val="292929"/>
+            </a:solidFill>
+            <a:miter lim="800000"/>
+          </a:ln>
+          <a:effectLst>
+            <a:reflection blurRad="12700" stA="28000" endPos="28000" dist="5000" dir="5400000" sy="-100000" algn="bl" rotWithShape="0"/>
+          </a:effectLst>
+          <a:scene3d>
+            <a:camera prst="orthographicFront"/>
+            <a:lightRig rig="threePt" dir="t">
+              <a:rot lat="0" lon="0" rev="2700000"/>
+            </a:lightRig>
+          </a:scene3d>
+          <a:sp3d>
+            <a:bevelT h="38100"/>
+            <a:contourClr>
+              <a:srgbClr val="C0C0C0"/>
+            </a:contourClr>
+          </a:sp3d>
+        </p:spPr>
+      </p:pic>
+      <p:pic>
+        <p:nvPicPr>
+          <p:cNvPr id="7" name="Picture 6" descr="05-compare.png"/>
+          <p:cNvPicPr>
+            <a:picLocks noChangeAspect="1"/>
+          </p:cNvPicPr>
+          <p:nvPr/>
+        </p:nvPicPr>
+        <p:blipFill>
+          <a:blip r:embed="rId4"/>
+          <a:stretch>
+            <a:fillRect/>
+          </a:stretch>
+        </p:blipFill>
+        <p:spPr>
+          <a:xfrm>
+            <a:off x="6476998" y="1926768"/>
+            <a:ext cx="5194663" cy="3611880"/>
+          </a:xfrm>
+          <a:prstGeom prst="roundRect">
+            <a:avLst>
+              <a:gd name="adj" fmla="val 4167"/>
+            </a:avLst>
+          </a:prstGeom>
+          <a:solidFill>
+            <a:srgbClr val="FFFFFF"/>
+          </a:solidFill>
+          <a:ln w="76200" cap="sq">
+            <a:solidFill>
+              <a:srgbClr val="292929"/>
+            </a:solidFill>
+            <a:miter lim="800000"/>
+          </a:ln>
+          <a:effectLst>
+            <a:reflection blurRad="12700" stA="28000" endPos="28000" dist="5000" dir="5400000" sy="-100000" algn="bl" rotWithShape="0"/>
+          </a:effectLst>
+          <a:scene3d>
+            <a:camera prst="orthographicFront"/>
+            <a:lightRig rig="threePt" dir="t">
+              <a:rot lat="0" lon="0" rev="2700000"/>
+            </a:lightRig>
+          </a:scene3d>
+          <a:sp3d>
+            <a:bevelT h="38100"/>
+            <a:contourClr>
+              <a:srgbClr val="C0C0C0"/>
+            </a:contourClr>
+          </a:sp3d>
         </p:spPr>
       </p:pic>
       <p:sp>
@@ -8003,7 +10686,7 @@
 </file>
 
 <file path=ppt/slides/slide8.xml><?xml version="1.0" encoding="utf-8"?>
-<p:sld xmlns:a="http://schemas.openxmlformats.org/drawingml/2006/main" xmlns:p="http://schemas.openxmlformats.org/presentationml/2006/main" xmlns:r="http://schemas.openxmlformats.org/officeDocument/2006/relationships">
+<p:sld xmlns:a="http://schemas.openxmlformats.org/drawingml/2006/main" xmlns:r="http://schemas.openxmlformats.org/officeDocument/2006/relationships" xmlns:p="http://schemas.openxmlformats.org/presentationml/2006/main">
   <p:cSld>
     <p:bg>
       <p:bgPr>
@@ -8019,7 +10702,14 @@
         <p:cNvGrpSpPr/>
         <p:nvPr/>
       </p:nvGrpSpPr>
-      <p:grpSpPr/>
+      <p:grpSpPr>
+        <a:xfrm>
+          <a:off x="0" y="0"/>
+          <a:ext cx="0" cy="0"/>
+          <a:chOff x="0" y="0"/>
+          <a:chExt cx="0" cy="0"/>
+        </a:xfrm>
+      </p:grpSpPr>
       <p:sp>
         <p:nvSpPr>
           <p:cNvPr id="2" name="TextBox 1"/>
@@ -8130,7 +10820,7 @@
           </a:fontRef>
         </p:style>
         <p:txBody>
-          <a:bodyPr rtlCol="0" anchor="ctr" lIns="164592" rIns="164592" tIns="128016"/>
+          <a:bodyPr lIns="164592" tIns="128016" rIns="164592" rtlCol="0" anchor="ctr"/>
           <a:lstStyle/>
           <a:p>
             <a:pPr algn="ctr">
@@ -8201,7 +10891,7 @@
           </a:fontRef>
         </p:style>
         <p:txBody>
-          <a:bodyPr rtlCol="0" anchor="ctr" lIns="164592" rIns="164592" tIns="128016"/>
+          <a:bodyPr lIns="164592" tIns="128016" rIns="164592" rtlCol="0" anchor="ctr"/>
           <a:lstStyle/>
           <a:p>
             <a:pPr algn="ctr">
@@ -8272,7 +10962,7 @@
           </a:fontRef>
         </p:style>
         <p:txBody>
-          <a:bodyPr rtlCol="0" anchor="ctr" lIns="164592" rIns="164592" tIns="128016"/>
+          <a:bodyPr lIns="164592" tIns="128016" rIns="164592" rtlCol="0" anchor="ctr"/>
           <a:lstStyle/>
           <a:p>
             <a:pPr algn="ctr">
@@ -8343,7 +11033,7 @@
           </a:fontRef>
         </p:style>
         <p:txBody>
-          <a:bodyPr rtlCol="0" anchor="ctr" lIns="164592" rIns="164592" tIns="128016"/>
+          <a:bodyPr lIns="164592" tIns="128016" rIns="164592" rtlCol="0" anchor="ctr"/>
           <a:lstStyle/>
           <a:p>
             <a:pPr algn="ctr">
@@ -8414,7 +11104,7 @@
           </a:fontRef>
         </p:style>
         <p:txBody>
-          <a:bodyPr rtlCol="0" anchor="ctr" lIns="164592" rIns="164592" tIns="128016"/>
+          <a:bodyPr lIns="164592" tIns="128016" rIns="164592" rtlCol="0" anchor="ctr"/>
           <a:lstStyle/>
           <a:p>
             <a:pPr algn="ctr">
@@ -8485,7 +11175,7 @@
           </a:fontRef>
         </p:style>
         <p:txBody>
-          <a:bodyPr rtlCol="0" anchor="ctr" lIns="164592" rIns="164592" tIns="128016"/>
+          <a:bodyPr lIns="164592" tIns="128016" rIns="164592" rtlCol="0" anchor="ctr"/>
           <a:lstStyle/>
           <a:p>
             <a:pPr algn="ctr">
@@ -8563,7 +11253,7 @@
 </file>
 
 <file path=ppt/slides/slide9.xml><?xml version="1.0" encoding="utf-8"?>
-<p:sld xmlns:a="http://schemas.openxmlformats.org/drawingml/2006/main" xmlns:p="http://schemas.openxmlformats.org/presentationml/2006/main" xmlns:r="http://schemas.openxmlformats.org/officeDocument/2006/relationships">
+<p:sld xmlns:a="http://schemas.openxmlformats.org/drawingml/2006/main" xmlns:r="http://schemas.openxmlformats.org/officeDocument/2006/relationships" xmlns:p="http://schemas.openxmlformats.org/presentationml/2006/main">
   <p:cSld>
     <p:bg>
       <p:bgPr>
@@ -8579,7 +11269,14 @@
         <p:cNvGrpSpPr/>
         <p:nvPr/>
       </p:nvGrpSpPr>
-      <p:grpSpPr/>
+      <p:grpSpPr>
+        <a:xfrm>
+          <a:off x="0" y="0"/>
+          <a:ext cx="0" cy="0"/>
+          <a:chOff x="0" y="0"/>
+          <a:chExt cx="0" cy="0"/>
+        </a:xfrm>
+      </p:grpSpPr>
       <p:pic>
         <p:nvPicPr>
           <p:cNvPr id="2" name="Picture 1" descr="hero-atmosphere.png"/>
@@ -8589,64 +11286,21 @@
           <p:nvPr/>
         </p:nvPicPr>
         <p:blipFill>
-          <a:blip r:embed="rId2"/>
+          <a:blip r:embed="rId3"/>
           <a:stretch>
             <a:fillRect/>
           </a:stretch>
         </p:blipFill>
         <p:spPr>
           <a:xfrm>
-            <a:off x="6035040" y="0"/>
-            <a:ext cx="6156655" cy="6858000"/>
+            <a:off x="0" y="0"/>
+            <a:ext cx="12191695" cy="6858000"/>
           </a:xfrm>
           <a:prstGeom prst="rect">
             <a:avLst/>
           </a:prstGeom>
         </p:spPr>
       </p:pic>
-      <p:sp>
-        <p:nvSpPr>
-          <p:cNvPr id="3" name="Rectangle 2"/>
-          <p:cNvSpPr/>
-          <p:nvPr/>
-        </p:nvSpPr>
-        <p:spPr>
-          <a:xfrm>
-            <a:off x="5760720" y="0"/>
-            <a:ext cx="6492240" cy="6858000"/>
-          </a:xfrm>
-          <a:prstGeom prst="rect">
-            <a:avLst/>
-          </a:prstGeom>
-          <a:solidFill>
-            <a:srgbClr val="041839"/>
-          </a:solidFill>
-          <a:ln>
-            <a:noFill/>
-          </a:ln>
-        </p:spPr>
-        <p:style>
-          <a:lnRef idx="1">
-            <a:schemeClr val="accent1"/>
-          </a:lnRef>
-          <a:fillRef idx="3">
-            <a:schemeClr val="accent1"/>
-          </a:fillRef>
-          <a:effectRef idx="2">
-            <a:schemeClr val="accent1"/>
-          </a:effectRef>
-          <a:fontRef idx="minor">
-            <a:schemeClr val="lt1"/>
-          </a:fontRef>
-        </p:style>
-        <p:txBody>
-          <a:bodyPr rtlCol="0" anchor="ctr"/>
-          <a:lstStyle/>
-          <a:p>
-            <a:pPr algn="ctr"/>
-          </a:p>
-        </p:txBody>
-      </p:sp>
       <p:sp>
         <p:nvSpPr>
           <p:cNvPr id="4" name="TextBox 3"/>
@@ -8757,7 +11411,7 @@
           </a:fontRef>
         </p:style>
         <p:txBody>
-          <a:bodyPr rtlCol="0" anchor="ctr" lIns="164592" rIns="164592" tIns="128016"/>
+          <a:bodyPr lIns="164592" tIns="128016" rIns="164592" rtlCol="0" anchor="ctr"/>
           <a:lstStyle/>
           <a:p>
             <a:pPr algn="ctr">
@@ -8828,7 +11482,7 @@
           </a:fontRef>
         </p:style>
         <p:txBody>
-          <a:bodyPr rtlCol="0" anchor="ctr" lIns="164592" rIns="164592" tIns="128016"/>
+          <a:bodyPr lIns="164592" tIns="128016" rIns="164592" rtlCol="0" anchor="ctr"/>
           <a:lstStyle/>
           <a:p>
             <a:pPr algn="ctr">
@@ -8899,7 +11553,7 @@
           </a:fontRef>
         </p:style>
         <p:txBody>
-          <a:bodyPr rtlCol="0" anchor="ctr" lIns="164592" rIns="164592" tIns="128016"/>
+          <a:bodyPr lIns="164592" tIns="128016" rIns="164592" rtlCol="0" anchor="ctr"/>
           <a:lstStyle/>
           <a:p>
             <a:pPr algn="ctr">
@@ -8966,6 +11620,7 @@
               </a:defRPr>
             </a:pPr>
             <a:r>
+              <a:rPr dirty="0"/>
               <a:t>•  Citation correctness, hallucination, and retrieval evaluation harnesses</a:t>
             </a:r>
           </a:p>
@@ -8982,6 +11637,7 @@
               </a:defRPr>
             </a:pPr>
             <a:r>
+              <a:rPr dirty="0"/>
               <a:t>•  No secrets committed; `.env` loading and fail-closed provider configuration</a:t>
             </a:r>
           </a:p>
@@ -8998,6 +11654,7 @@
               </a:defRPr>
             </a:pPr>
             <a:r>
+              <a:rPr dirty="0"/>
               <a:t>•  Accessible interface patterns and keyboard-tested UI components</a:t>
             </a:r>
           </a:p>
@@ -9378,44 +12035,44 @@
         <a:sysClr val="window" lastClr="FFFFFF"/>
       </a:lt1>
       <a:dk2>
-        <a:srgbClr val="1F497D"/>
+        <a:srgbClr val="0E2841"/>
       </a:dk2>
       <a:lt2>
-        <a:srgbClr val="EEECE1"/>
+        <a:srgbClr val="E8E8E8"/>
       </a:lt2>
       <a:accent1>
-        <a:srgbClr val="4F81BD"/>
+        <a:srgbClr val="156082"/>
       </a:accent1>
       <a:accent2>
-        <a:srgbClr val="C0504D"/>
+        <a:srgbClr val="E97132"/>
       </a:accent2>
       <a:accent3>
-        <a:srgbClr val="9BBB59"/>
+        <a:srgbClr val="196B24"/>
       </a:accent3>
       <a:accent4>
-        <a:srgbClr val="8064A2"/>
+        <a:srgbClr val="0F9ED5"/>
       </a:accent4>
       <a:accent5>
-        <a:srgbClr val="4BACC6"/>
+        <a:srgbClr val="A02B93"/>
       </a:accent5>
       <a:accent6>
-        <a:srgbClr val="F79646"/>
+        <a:srgbClr val="4EA72E"/>
       </a:accent6>
       <a:hlink>
-        <a:srgbClr val="0000FF"/>
+        <a:srgbClr val="467886"/>
       </a:hlink>
       <a:folHlink>
-        <a:srgbClr val="800080"/>
+        <a:srgbClr val="96607D"/>
       </a:folHlink>
     </a:clrScheme>
     <a:fontScheme name="Office">
       <a:majorFont>
-        <a:latin typeface="Calibri"/>
+        <a:latin typeface="Aptos Display" panose="02110004020202020204"/>
         <a:ea typeface=""/>
         <a:cs typeface=""/>
-        <a:font script="Jpan" typeface="ＭＳ Ｐゴシック"/>
+        <a:font script="Jpan" typeface="游ゴシック Light"/>
         <a:font script="Hang" typeface="맑은 고딕"/>
-        <a:font script="Hans" typeface="宋体"/>
+        <a:font script="Hans" typeface="等线 Light"/>
         <a:font script="Hant" typeface="新細明體"/>
         <a:font script="Arab" typeface="Times New Roman"/>
         <a:font script="Hebr" typeface="Times New Roman"/>
@@ -9443,14 +12100,31 @@
         <a:font script="Viet" typeface="Times New Roman"/>
         <a:font script="Uigh" typeface="Microsoft Uighur"/>
         <a:font script="Geor" typeface="Sylfaen"/>
+        <a:font script="Armn" typeface="Arial"/>
+        <a:font script="Bugi" typeface="Leelawadee UI"/>
+        <a:font script="Bopo" typeface="Microsoft JhengHei"/>
+        <a:font script="Java" typeface="Javanese Text"/>
+        <a:font script="Lisu" typeface="Segoe UI"/>
+        <a:font script="Mymr" typeface="Myanmar Text"/>
+        <a:font script="Nkoo" typeface="Ebrima"/>
+        <a:font script="Olck" typeface="Nirmala UI"/>
+        <a:font script="Osma" typeface="Ebrima"/>
+        <a:font script="Phag" typeface="Phagspa"/>
+        <a:font script="Syrn" typeface="Estrangelo Edessa"/>
+        <a:font script="Syrj" typeface="Estrangelo Edessa"/>
+        <a:font script="Syre" typeface="Estrangelo Edessa"/>
+        <a:font script="Sora" typeface="Nirmala UI"/>
+        <a:font script="Tale" typeface="Microsoft Tai Le"/>
+        <a:font script="Talu" typeface="Microsoft New Tai Lue"/>
+        <a:font script="Tfng" typeface="Ebrima"/>
       </a:majorFont>
       <a:minorFont>
-        <a:latin typeface="Calibri"/>
+        <a:latin typeface="Aptos" panose="02110004020202020204"/>
         <a:ea typeface=""/>
         <a:cs typeface=""/>
-        <a:font script="Jpan" typeface="ＭＳ Ｐゴシック"/>
+        <a:font script="Jpan" typeface="游ゴシック"/>
         <a:font script="Hang" typeface="맑은 고딕"/>
-        <a:font script="Hans" typeface="宋体"/>
+        <a:font script="Hans" typeface="等线"/>
         <a:font script="Hant" typeface="新細明體"/>
         <a:font script="Arab" typeface="Arial"/>
         <a:font script="Hebr" typeface="Arial"/>
@@ -9478,6 +12152,23 @@
         <a:font script="Viet" typeface="Arial"/>
         <a:font script="Uigh" typeface="Microsoft Uighur"/>
         <a:font script="Geor" typeface="Sylfaen"/>
+        <a:font script="Armn" typeface="Arial"/>
+        <a:font script="Bugi" typeface="Leelawadee UI"/>
+        <a:font script="Bopo" typeface="Microsoft JhengHei"/>
+        <a:font script="Java" typeface="Javanese Text"/>
+        <a:font script="Lisu" typeface="Segoe UI"/>
+        <a:font script="Mymr" typeface="Myanmar Text"/>
+        <a:font script="Nkoo" typeface="Ebrima"/>
+        <a:font script="Olck" typeface="Nirmala UI"/>
+        <a:font script="Osma" typeface="Ebrima"/>
+        <a:font script="Phag" typeface="Phagspa"/>
+        <a:font script="Syrn" typeface="Estrangelo Edessa"/>
+        <a:font script="Syrj" typeface="Estrangelo Edessa"/>
+        <a:font script="Syre" typeface="Estrangelo Edessa"/>
+        <a:font script="Sora" typeface="Nirmala UI"/>
+        <a:font script="Tale" typeface="Microsoft Tai Le"/>
+        <a:font script="Talu" typeface="Microsoft New Tai Lue"/>
+        <a:font script="Tfng" typeface="Ebrima"/>
       </a:minorFont>
     </a:fontScheme>
     <a:fmtScheme name="Office">
@@ -9489,180 +12180,136 @@
           <a:gsLst>
             <a:gs pos="0">
               <a:schemeClr val="phClr">
-                <a:tint val="50000"/>
-                <a:satMod val="300000"/>
+                <a:lumMod val="110000"/>
+                <a:satMod val="105000"/>
+                <a:tint val="67000"/>
               </a:schemeClr>
             </a:gs>
-            <a:gs pos="35000">
+            <a:gs pos="50000">
               <a:schemeClr val="phClr">
-                <a:tint val="37000"/>
-                <a:satMod val="300000"/>
+                <a:lumMod val="105000"/>
+                <a:satMod val="103000"/>
+                <a:tint val="73000"/>
               </a:schemeClr>
             </a:gs>
             <a:gs pos="100000">
               <a:schemeClr val="phClr">
-                <a:tint val="15000"/>
-                <a:satMod val="350000"/>
+                <a:lumMod val="105000"/>
+                <a:satMod val="109000"/>
+                <a:tint val="81000"/>
               </a:schemeClr>
             </a:gs>
           </a:gsLst>
-          <a:lin ang="16200000" scaled="1"/>
+          <a:lin ang="5400000" scaled="0"/>
         </a:gradFill>
         <a:gradFill rotWithShape="1">
           <a:gsLst>
             <a:gs pos="0">
               <a:schemeClr val="phClr">
-                <a:tint val="100000"/>
+                <a:satMod val="103000"/>
+                <a:lumMod val="102000"/>
+                <a:tint val="94000"/>
+              </a:schemeClr>
+            </a:gs>
+            <a:gs pos="50000">
+              <a:schemeClr val="phClr">
+                <a:satMod val="110000"/>
+                <a:lumMod val="100000"/>
                 <a:shade val="100000"/>
-                <a:satMod val="130000"/>
               </a:schemeClr>
             </a:gs>
             <a:gs pos="100000">
               <a:schemeClr val="phClr">
-                <a:tint val="50000"/>
-                <a:shade val="100000"/>
-                <a:satMod val="350000"/>
+                <a:lumMod val="99000"/>
+                <a:satMod val="120000"/>
+                <a:shade val="78000"/>
               </a:schemeClr>
             </a:gs>
           </a:gsLst>
-          <a:lin ang="16200000" scaled="0"/>
+          <a:lin ang="5400000" scaled="0"/>
         </a:gradFill>
       </a:fillStyleLst>
       <a:lnStyleLst>
-        <a:ln w="9525" cap="flat" cmpd="sng" algn="ctr">
+        <a:ln w="12700" cap="flat" cmpd="sng" algn="ctr">
           <a:solidFill>
-            <a:schemeClr val="phClr">
-              <a:shade val="95000"/>
-              <a:satMod val="105000"/>
-            </a:schemeClr>
+            <a:schemeClr val="phClr"/>
           </a:solidFill>
           <a:prstDash val="solid"/>
+          <a:miter lim="800000"/>
+        </a:ln>
+        <a:ln w="19050" cap="flat" cmpd="sng" algn="ctr">
+          <a:solidFill>
+            <a:schemeClr val="phClr"/>
+          </a:solidFill>
+          <a:prstDash val="solid"/>
+          <a:miter lim="800000"/>
         </a:ln>
         <a:ln w="25400" cap="flat" cmpd="sng" algn="ctr">
           <a:solidFill>
             <a:schemeClr val="phClr"/>
           </a:solidFill>
           <a:prstDash val="solid"/>
-        </a:ln>
-        <a:ln w="38100" cap="flat" cmpd="sng" algn="ctr">
-          <a:solidFill>
-            <a:schemeClr val="phClr"/>
-          </a:solidFill>
-          <a:prstDash val="solid"/>
+          <a:miter lim="800000"/>
         </a:ln>
       </a:lnStyleLst>
       <a:effectStyleLst>
         <a:effectStyle>
+          <a:effectLst/>
+        </a:effectStyle>
+        <a:effectStyle>
+          <a:effectLst/>
+        </a:effectStyle>
+        <a:effectStyle>
           <a:effectLst>
-            <a:outerShdw blurRad="40000" dist="20000" dir="5400000" rotWithShape="0">
+            <a:outerShdw blurRad="57150" dist="19050" dir="5400000" algn="ctr" rotWithShape="0">
               <a:srgbClr val="000000">
-                <a:alpha val="38000"/>
+                <a:alpha val="63000"/>
               </a:srgbClr>
             </a:outerShdw>
           </a:effectLst>
-        </a:effectStyle>
-        <a:effectStyle>
-          <a:effectLst>
-            <a:outerShdw blurRad="40000" dist="23000" dir="5400000" rotWithShape="0">
-              <a:srgbClr val="000000">
-                <a:alpha val="35000"/>
-              </a:srgbClr>
-            </a:outerShdw>
-          </a:effectLst>
-        </a:effectStyle>
-        <a:effectStyle>
-          <a:effectLst>
-            <a:outerShdw blurRad="40000" dist="23000" dir="5400000" rotWithShape="0">
-              <a:srgbClr val="000000">
-                <a:alpha val="35000"/>
-              </a:srgbClr>
-            </a:outerShdw>
-          </a:effectLst>
-          <a:scene3d>
-            <a:camera prst="orthographicFront">
-              <a:rot lat="0" lon="0" rev="0"/>
-            </a:camera>
-            <a:lightRig rig="threePt" dir="t">
-              <a:rot lat="0" lon="0" rev="1200000"/>
-            </a:lightRig>
-          </a:scene3d>
-          <a:sp3d>
-            <a:bevelT w="63500" h="25400"/>
-          </a:sp3d>
         </a:effectStyle>
       </a:effectStyleLst>
       <a:bgFillStyleLst>
         <a:solidFill>
           <a:schemeClr val="phClr"/>
         </a:solidFill>
+        <a:solidFill>
+          <a:schemeClr val="phClr">
+            <a:tint val="95000"/>
+            <a:satMod val="170000"/>
+          </a:schemeClr>
+        </a:solidFill>
         <a:gradFill rotWithShape="1">
           <a:gsLst>
             <a:gs pos="0">
               <a:schemeClr val="phClr">
-                <a:tint val="40000"/>
-                <a:satMod val="350000"/>
+                <a:tint val="93000"/>
+                <a:satMod val="150000"/>
+                <a:shade val="98000"/>
+                <a:lumMod val="102000"/>
               </a:schemeClr>
             </a:gs>
-            <a:gs pos="40000">
+            <a:gs pos="50000">
               <a:schemeClr val="phClr">
-                <a:tint val="45000"/>
-                <a:shade val="99000"/>
-                <a:satMod val="350000"/>
+                <a:tint val="98000"/>
+                <a:satMod val="130000"/>
+                <a:shade val="90000"/>
+                <a:lumMod val="103000"/>
               </a:schemeClr>
             </a:gs>
             <a:gs pos="100000">
               <a:schemeClr val="phClr">
-                <a:shade val="20000"/>
-                <a:satMod val="255000"/>
+                <a:shade val="63000"/>
+                <a:satMod val="120000"/>
               </a:schemeClr>
             </a:gs>
           </a:gsLst>
-          <a:path path="circle">
-            <a:fillToRect l="50000" t="-80000" r="50000" b="180000"/>
-          </a:path>
-        </a:gradFill>
-        <a:gradFill rotWithShape="1">
-          <a:gsLst>
-            <a:gs pos="0">
-              <a:schemeClr val="phClr">
-                <a:tint val="80000"/>
-                <a:satMod val="300000"/>
-              </a:schemeClr>
-            </a:gs>
-            <a:gs pos="100000">
-              <a:schemeClr val="phClr">
-                <a:shade val="30000"/>
-                <a:satMod val="200000"/>
-              </a:schemeClr>
-            </a:gs>
-          </a:gsLst>
-          <a:path path="circle">
-            <a:fillToRect l="50000" t="50000" r="50000" b="50000"/>
-          </a:path>
+          <a:lin ang="5400000" scaled="0"/>
         </a:gradFill>
       </a:bgFillStyleLst>
     </a:fmtScheme>
   </a:themeElements>
   <a:objectDefaults>
-    <a:spDef>
-      <a:spPr/>
-      <a:bodyPr/>
-      <a:lstStyle/>
-      <a:style>
-        <a:lnRef idx="1">
-          <a:schemeClr val="accent1"/>
-        </a:lnRef>
-        <a:fillRef idx="3">
-          <a:schemeClr val="accent1"/>
-        </a:fillRef>
-        <a:effectRef idx="2">
-          <a:schemeClr val="accent1"/>
-        </a:effectRef>
-        <a:fontRef idx="minor">
-          <a:schemeClr val="lt1"/>
-        </a:fontRef>
-      </a:style>
-    </a:spDef>
     <a:lnDef>
       <a:spPr/>
       <a:bodyPr/>
@@ -9684,5 +12331,10 @@
     </a:lnDef>
   </a:objectDefaults>
   <a:extraClrSchemeLst/>
+  <a:extLst>
+    <a:ext uri="{05A4C25C-085E-4340-85A3-A5531E510DB2}">
+      <thm15:themeFamily xmlns:thm15="http://schemas.microsoft.com/office/thememl/2012/main" name="Office Theme" id="{2E142A2C-CD16-42D6-873A-C26D2A0506FA}" vid="{1BDDFF52-6CD6-40A5-AB3C-68EB2F1E4D0A}"/>
+    </a:ext>
+  </a:extLst>
 </a:theme>
 </file>
--- a/docs/final/Space_Biology_Evidence_Engine_Pitch_Deck.pptx
+++ b/docs/final/Space_Biology_Evidence_Engine_Pitch_Deck.pptx
@@ -3561,10 +3561,24 @@
             <a:spLocks noGrp="1" noRot="1" noChangeAspect="1"/>
           </p:cNvSpPr>
           <p:nvPr>
-            <p:ph type="sldImg" idx="2"/>
+            <p:ph type="sldImg"/>
           </p:nvPr>
         </p:nvSpPr>
-        <p:spPr/>
+        <p:spPr>
+          <a:xfrm>
+            <a:off x="685800" y="1143000"/>
+            <a:ext cx="5486400" cy="3086100"/>
+          </a:xfrm>
+          <a:prstGeom prst="rect">
+            <a:avLst/>
+          </a:prstGeom>
+          <a:noFill/>
+          <a:ln w="12700">
+            <a:solidFill>
+              <a:prstClr val="black"/>
+            </a:solidFill>
+          </a:ln>
+        </p:spPr>
       </p:sp>
       <p:sp>
         <p:nvSpPr>
@@ -3573,33 +3587,420 @@
             <a:spLocks noGrp="1"/>
           </p:cNvSpPr>
           <p:nvPr>
-            <p:ph type="body" sz="quarter" idx="3"/>
+            <p:ph type="body" idx="1"/>
           </p:nvPr>
         </p:nvSpPr>
-        <p:spPr/>
+        <p:spPr>
+          <a:xfrm>
+            <a:off x="685800" y="4400550"/>
+            <a:ext cx="5486400" cy="3600450"/>
+          </a:xfrm>
+          <a:prstGeom prst="rect">
+            <a:avLst/>
+          </a:prstGeom>
+        </p:spPr>
         <p:txBody>
           <a:bodyPr/>
           <a:lstStyle/>
           <a:p>
             <a:r>
-              <a:t>Explain that the core problem is not access to a language model. It is evidence discovery with scientific provenance and explicit limits.</a:t>
-            </a:r>
+              <a:rPr lang="en-US" sz="2400" b="0" i="0" kern="1200" dirty="0">
+                <a:solidFill>
+                  <a:schemeClr val="tx1"/>
+                </a:solidFill>
+                <a:effectLst/>
+                <a:latin typeface="+mn-lt"/>
+                <a:ea typeface="+mn-ea"/>
+                <a:cs typeface="+mn-cs"/>
+              </a:rPr>
+              <a:t>Good [afternoon]. </a:t>
+            </a:r>
+          </a:p>
+          <a:p>
+            <a:endParaRPr lang="en-US" sz="2400" b="0" i="0" kern="1200" dirty="0">
+              <a:solidFill>
+                <a:schemeClr val="tx1"/>
+              </a:solidFill>
+              <a:effectLst/>
+              <a:latin typeface="+mn-lt"/>
+              <a:ea typeface="+mn-ea"/>
+              <a:cs typeface="+mn-cs"/>
+            </a:endParaRPr>
+          </a:p>
+          <a:p>
+            <a:r>
+              <a:rPr lang="en-US" sz="2400" b="0" i="0" kern="1200" dirty="0">
+                <a:solidFill>
+                  <a:schemeClr val="tx1"/>
+                </a:solidFill>
+                <a:effectLst/>
+                <a:latin typeface="+mn-lt"/>
+                <a:ea typeface="+mn-ea"/>
+                <a:cs typeface="+mn-cs"/>
+              </a:rPr>
+              <a:t>I’m presenting the Space Biology Evidence Engine, a citation-first research synthesis system for space biology. </a:t>
+            </a:r>
+          </a:p>
+          <a:p>
+            <a:endParaRPr lang="en-US" sz="2400" b="0" i="0" kern="1200" dirty="0">
+              <a:solidFill>
+                <a:schemeClr val="tx1"/>
+              </a:solidFill>
+              <a:effectLst/>
+              <a:latin typeface="+mn-lt"/>
+              <a:ea typeface="+mn-ea"/>
+              <a:cs typeface="+mn-cs"/>
+            </a:endParaRPr>
+          </a:p>
+          <a:p>
+            <a:r>
+              <a:rPr lang="en-US" sz="2400" b="0" i="0" kern="1200" dirty="0">
+                <a:solidFill>
+                  <a:schemeClr val="tx1"/>
+                </a:solidFill>
+                <a:effectLst/>
+                <a:latin typeface="+mn-lt"/>
+                <a:ea typeface="+mn-ea"/>
+                <a:cs typeface="+mn-cs"/>
+              </a:rPr>
+              <a:t>The project was originally based on NASA’s </a:t>
+            </a:r>
+          </a:p>
+          <a:p>
+            <a:r>
+              <a:rPr lang="en-US" sz="2400" b="0" i="0" kern="1200" dirty="0">
+                <a:solidFill>
+                  <a:schemeClr val="tx1"/>
+                </a:solidFill>
+                <a:effectLst/>
+                <a:latin typeface="+mn-lt"/>
+                <a:ea typeface="+mn-ea"/>
+                <a:cs typeface="+mn-cs"/>
+              </a:rPr>
+              <a:t>‘Space Biology Knowledge Engine’ challenge. </a:t>
+            </a:r>
+          </a:p>
+          <a:p>
+            <a:endParaRPr lang="en-US" sz="2400" b="0" i="0" kern="1200" dirty="0">
+              <a:solidFill>
+                <a:schemeClr val="tx1"/>
+              </a:solidFill>
+              <a:effectLst/>
+              <a:latin typeface="+mn-lt"/>
+              <a:ea typeface="+mn-ea"/>
+              <a:cs typeface="+mn-cs"/>
+            </a:endParaRPr>
+          </a:p>
+          <a:p>
+            <a:r>
+              <a:rPr lang="en-US" sz="2400" b="0" i="0" kern="1200" dirty="0">
+                <a:solidFill>
+                  <a:schemeClr val="tx1"/>
+                </a:solidFill>
+                <a:effectLst/>
+                <a:latin typeface="+mn-lt"/>
+                <a:ea typeface="+mn-ea"/>
+                <a:cs typeface="+mn-cs"/>
+              </a:rPr>
+              <a:t>However, </a:t>
+            </a:r>
+          </a:p>
+          <a:p>
+            <a:endParaRPr lang="en-US" sz="2400" b="0" i="0" kern="1200" dirty="0">
+              <a:solidFill>
+                <a:schemeClr val="tx1"/>
+              </a:solidFill>
+              <a:effectLst/>
+              <a:latin typeface="+mn-lt"/>
+              <a:ea typeface="+mn-ea"/>
+              <a:cs typeface="+mn-cs"/>
+            </a:endParaRPr>
+          </a:p>
+          <a:p>
+            <a:r>
+              <a:rPr lang="en-US" sz="2400" b="0" i="0" kern="1200" dirty="0">
+                <a:solidFill>
+                  <a:schemeClr val="tx1"/>
+                </a:solidFill>
+                <a:effectLst/>
+                <a:latin typeface="+mn-lt"/>
+                <a:ea typeface="+mn-ea"/>
+                <a:cs typeface="+mn-cs"/>
+              </a:rPr>
+              <a:t>since the competition had already closed, </a:t>
+            </a:r>
+          </a:p>
+          <a:p>
+            <a:endParaRPr lang="en-US" sz="2400" b="0" i="0" kern="1200" dirty="0">
+              <a:solidFill>
+                <a:schemeClr val="tx1"/>
+              </a:solidFill>
+              <a:effectLst/>
+              <a:latin typeface="+mn-lt"/>
+              <a:ea typeface="+mn-ea"/>
+              <a:cs typeface="+mn-cs"/>
+            </a:endParaRPr>
+          </a:p>
+          <a:p>
+            <a:r>
+              <a:rPr lang="en-US" sz="2400" b="0" i="0" kern="1200" dirty="0">
+                <a:solidFill>
+                  <a:schemeClr val="tx1"/>
+                </a:solidFill>
+                <a:effectLst/>
+                <a:latin typeface="+mn-lt"/>
+                <a:ea typeface="+mn-ea"/>
+                <a:cs typeface="+mn-cs"/>
+              </a:rPr>
+              <a:t>it was decided to continue with a similar </a:t>
+            </a:r>
+          </a:p>
+          <a:p>
+            <a:endParaRPr lang="en-US" sz="2400" b="0" i="0" kern="1200" dirty="0">
+              <a:solidFill>
+                <a:schemeClr val="tx1"/>
+              </a:solidFill>
+              <a:effectLst/>
+              <a:latin typeface="+mn-lt"/>
+              <a:ea typeface="+mn-ea"/>
+              <a:cs typeface="+mn-cs"/>
+            </a:endParaRPr>
+          </a:p>
+          <a:p>
+            <a:r>
+              <a:rPr lang="en-US" sz="2400" b="0" i="0" kern="1200" dirty="0">
+                <a:solidFill>
+                  <a:schemeClr val="tx1"/>
+                </a:solidFill>
+                <a:effectLst/>
+                <a:latin typeface="+mn-lt"/>
+                <a:ea typeface="+mn-ea"/>
+                <a:cs typeface="+mn-cs"/>
+              </a:rPr>
+              <a:t>concept as an independent project, </a:t>
+            </a:r>
+          </a:p>
+          <a:p>
+            <a:endParaRPr lang="en-US" sz="2400" b="0" i="0" kern="1200" dirty="0">
+              <a:solidFill>
+                <a:schemeClr val="tx1"/>
+              </a:solidFill>
+              <a:effectLst/>
+              <a:latin typeface="+mn-lt"/>
+              <a:ea typeface="+mn-ea"/>
+              <a:cs typeface="+mn-cs"/>
+            </a:endParaRPr>
+          </a:p>
+          <a:p>
+            <a:r>
+              <a:rPr lang="en-US" sz="2400" b="0" i="0" kern="1200" dirty="0">
+                <a:solidFill>
+                  <a:schemeClr val="tx1"/>
+                </a:solidFill>
+                <a:effectLst/>
+                <a:latin typeface="+mn-lt"/>
+                <a:ea typeface="+mn-ea"/>
+                <a:cs typeface="+mn-cs"/>
+              </a:rPr>
+              <a:t>with a stronger focus </a:t>
+            </a:r>
+          </a:p>
+          <a:p>
+            <a:endParaRPr lang="en-US" sz="2400" b="0" i="0" kern="1200" dirty="0">
+              <a:solidFill>
+                <a:schemeClr val="tx1"/>
+              </a:solidFill>
+              <a:effectLst/>
+              <a:latin typeface="+mn-lt"/>
+              <a:ea typeface="+mn-ea"/>
+              <a:cs typeface="+mn-cs"/>
+            </a:endParaRPr>
+          </a:p>
+          <a:p>
+            <a:r>
+              <a:rPr lang="en-US" sz="2400" b="0" i="0" kern="1200" dirty="0">
+                <a:solidFill>
+                  <a:schemeClr val="tx1"/>
+                </a:solidFill>
+                <a:effectLst/>
+                <a:latin typeface="+mn-lt"/>
+                <a:ea typeface="+mn-ea"/>
+                <a:cs typeface="+mn-cs"/>
+              </a:rPr>
+              <a:t>on information retrieval, </a:t>
+            </a:r>
+          </a:p>
+          <a:p>
+            <a:r>
+              <a:rPr lang="en-US" sz="2400" b="0" i="0" kern="1200" dirty="0">
+                <a:solidFill>
+                  <a:schemeClr val="tx1"/>
+                </a:solidFill>
+                <a:effectLst/>
+                <a:latin typeface="+mn-lt"/>
+                <a:ea typeface="+mn-ea"/>
+                <a:cs typeface="+mn-cs"/>
+              </a:rPr>
+              <a:t>citations, </a:t>
+            </a:r>
+          </a:p>
+          <a:p>
+            <a:r>
+              <a:rPr lang="en-US" sz="2400" b="0" i="0" kern="1200" dirty="0">
+                <a:solidFill>
+                  <a:schemeClr val="tx1"/>
+                </a:solidFill>
+                <a:effectLst/>
+                <a:latin typeface="+mn-lt"/>
+                <a:ea typeface="+mn-ea"/>
+                <a:cs typeface="+mn-cs"/>
+              </a:rPr>
+              <a:t>traceability, </a:t>
+            </a:r>
+          </a:p>
+          <a:p>
+            <a:r>
+              <a:rPr lang="en-US" sz="2400" b="0" i="0" kern="1200" dirty="0">
+                <a:solidFill>
+                  <a:schemeClr val="tx1"/>
+                </a:solidFill>
+                <a:effectLst/>
+                <a:latin typeface="+mn-lt"/>
+                <a:ea typeface="+mn-ea"/>
+                <a:cs typeface="+mn-cs"/>
+              </a:rPr>
+              <a:t>and answering scientific questions</a:t>
+            </a:r>
+          </a:p>
+          <a:p>
+            <a:r>
+              <a:rPr lang="en-US" sz="2400" b="0" i="0" kern="1200" dirty="0">
+                <a:solidFill>
+                  <a:schemeClr val="tx1"/>
+                </a:solidFill>
+                <a:effectLst/>
+                <a:latin typeface="+mn-lt"/>
+                <a:ea typeface="+mn-ea"/>
+                <a:cs typeface="+mn-cs"/>
+              </a:rPr>
+              <a:t> directly from source material. </a:t>
+            </a:r>
+          </a:p>
+          <a:p>
+            <a:endParaRPr lang="en-US" sz="2400" b="0" i="0" kern="1200" dirty="0">
+              <a:solidFill>
+                <a:schemeClr val="tx1"/>
+              </a:solidFill>
+              <a:effectLst/>
+              <a:latin typeface="+mn-lt"/>
+              <a:ea typeface="+mn-ea"/>
+              <a:cs typeface="+mn-cs"/>
+            </a:endParaRPr>
+          </a:p>
+          <a:p>
+            <a:r>
+              <a:rPr lang="en-US" sz="2400" b="0" i="0" kern="1200" dirty="0">
+                <a:solidFill>
+                  <a:schemeClr val="tx1"/>
+                </a:solidFill>
+                <a:effectLst/>
+                <a:latin typeface="+mn-lt"/>
+                <a:ea typeface="+mn-ea"/>
+                <a:cs typeface="+mn-cs"/>
+              </a:rPr>
+              <a:t>The name ‘Space Biology Evidence Engine’ </a:t>
+            </a:r>
+          </a:p>
+          <a:p>
+            <a:r>
+              <a:rPr lang="en-US" sz="2400" b="0" i="0" kern="1200" dirty="0">
+                <a:solidFill>
+                  <a:schemeClr val="tx1"/>
+                </a:solidFill>
+                <a:effectLst/>
+                <a:latin typeface="+mn-lt"/>
+                <a:ea typeface="+mn-ea"/>
+                <a:cs typeface="+mn-cs"/>
+              </a:rPr>
+              <a:t>wa</a:t>
+            </a:r>
+            <a:r>
+              <a:rPr lang="en-US" sz="1200" b="0" i="0" kern="1200" dirty="0">
+                <a:solidFill>
+                  <a:schemeClr val="tx1"/>
+                </a:solidFill>
+                <a:effectLst/>
+                <a:latin typeface="+mn-lt"/>
+                <a:ea typeface="+mn-ea"/>
+                <a:cs typeface="+mn-cs"/>
+              </a:rPr>
+              <a:t>s chosen </a:t>
+            </a:r>
+          </a:p>
+          <a:p>
+            <a:r>
+              <a:rPr lang="en-US" sz="1200" b="0" i="0" kern="1200" dirty="0">
+                <a:solidFill>
+                  <a:schemeClr val="tx1"/>
+                </a:solidFill>
+                <a:effectLst/>
+                <a:latin typeface="+mn-lt"/>
+                <a:ea typeface="+mn-ea"/>
+                <a:cs typeface="+mn-cs"/>
+              </a:rPr>
+              <a:t>because the word ‘Evidence’ </a:t>
+            </a:r>
+          </a:p>
+          <a:p>
+            <a:r>
+              <a:rPr lang="en-US" sz="1200" b="0" i="0" kern="1200" dirty="0">
+                <a:solidFill>
+                  <a:schemeClr val="tx1"/>
+                </a:solidFill>
+                <a:effectLst/>
+                <a:latin typeface="+mn-lt"/>
+                <a:ea typeface="+mn-ea"/>
+                <a:cs typeface="+mn-cs"/>
+              </a:rPr>
+              <a:t>better represents this emphasis </a:t>
+            </a:r>
+          </a:p>
+          <a:p>
+            <a:r>
+              <a:rPr lang="en-US" sz="1200" b="0" i="0" kern="1200" dirty="0">
+                <a:solidFill>
+                  <a:schemeClr val="tx1"/>
+                </a:solidFill>
+                <a:effectLst/>
+                <a:latin typeface="+mn-lt"/>
+                <a:ea typeface="+mn-ea"/>
+                <a:cs typeface="+mn-cs"/>
+              </a:rPr>
+              <a:t>than the broader term ‘Knowledge.’</a:t>
+            </a:r>
+          </a:p>
+          <a:p>
+            <a:endParaRPr lang="en-US" sz="1200" b="0" i="0" kern="1200" dirty="0">
+              <a:solidFill>
+                <a:schemeClr val="tx1"/>
+              </a:solidFill>
+              <a:effectLst/>
+              <a:latin typeface="+mn-lt"/>
+              <a:ea typeface="+mn-ea"/>
+              <a:cs typeface="+mn-cs"/>
+            </a:endParaRPr>
+          </a:p>
+          <a:p>
+            <a:endParaRPr lang="en-US" dirty="0"/>
           </a:p>
         </p:txBody>
       </p:sp>
-      <p:sp>
-        <p:nvSpPr>
-          <p:cNvPr id="4" name="Slide Number Placeholder 3"/>
-          <p:cNvSpPr>
-            <a:spLocks noGrp="1"/>
-          </p:cNvSpPr>
-          <p:nvPr>
-            <p:ph type="sldNum" sz="quarter" idx="5"/>
-          </p:nvPr>
-        </p:nvSpPr>
-        <p:spPr/>
-      </p:sp>
     </p:spTree>
+    <p:extLst>
+      <p:ext uri="{BB962C8B-B14F-4D97-AF65-F5344CB8AC3E}">
+        <p14:creationId xmlns:p14="http://schemas.microsoft.com/office/powerpoint/2010/main" val="831333922"/>
+      </p:ext>
+    </p:extLst>
   </p:cSld>
   <p:clrMapOvr>
     <a:masterClrMapping/>
@@ -3652,8 +4053,137 @@
           <a:lstStyle/>
           <a:p>
             <a:r>
-              <a:t>Be candid about limitations. Emphasize that local-first deployment and a controlled topic were conscious scope decisions, not hidden gaps.</a:t>
-            </a:r>
+              <a:rPr lang="en-US" sz="1200" b="0" i="0" kern="1200" dirty="0">
+                <a:solidFill>
+                  <a:schemeClr val="tx1"/>
+                </a:solidFill>
+                <a:effectLst/>
+                <a:latin typeface="+mn-lt"/>
+                <a:ea typeface="+mn-ea"/>
+                <a:cs typeface="+mn-cs"/>
+              </a:rPr>
+              <a:t>This slide explains the live-demo sequence and backup plan: </a:t>
+            </a:r>
+          </a:p>
+          <a:p>
+            <a:endParaRPr lang="en-US" sz="1200" b="0" i="0" kern="1200" dirty="0">
+              <a:solidFill>
+                <a:schemeClr val="tx1"/>
+              </a:solidFill>
+              <a:effectLst/>
+              <a:latin typeface="+mn-lt"/>
+              <a:ea typeface="+mn-ea"/>
+              <a:cs typeface="+mn-cs"/>
+            </a:endParaRPr>
+          </a:p>
+          <a:p>
+            <a:r>
+              <a:rPr lang="en-US" sz="1200" b="0" i="0" kern="1200" dirty="0">
+                <a:solidFill>
+                  <a:schemeClr val="tx1"/>
+                </a:solidFill>
+                <a:effectLst/>
+                <a:latin typeface="+mn-lt"/>
+                <a:ea typeface="+mn-ea"/>
+                <a:cs typeface="+mn-cs"/>
+              </a:rPr>
+              <a:t>the application can be started locally </a:t>
+            </a:r>
+            <a:br>
+              <a:rPr lang="en-US" sz="1200" b="0" i="0" kern="1200" dirty="0">
+                <a:solidFill>
+                  <a:schemeClr val="tx1"/>
+                </a:solidFill>
+                <a:effectLst/>
+                <a:latin typeface="+mn-lt"/>
+                <a:ea typeface="+mn-ea"/>
+                <a:cs typeface="+mn-cs"/>
+              </a:rPr>
+            </a:br>
+            <a:r>
+              <a:rPr lang="en-US" sz="1200" b="0" i="0" kern="1200" dirty="0">
+                <a:solidFill>
+                  <a:schemeClr val="tx1"/>
+                </a:solidFill>
+                <a:effectLst/>
+                <a:latin typeface="+mn-lt"/>
+                <a:ea typeface="+mn-ea"/>
+                <a:cs typeface="+mn-cs"/>
+              </a:rPr>
+              <a:t>with Docker Compose, </a:t>
+            </a:r>
+          </a:p>
+          <a:p>
+            <a:endParaRPr lang="en-US" sz="1200" b="0" i="0" kern="1200" dirty="0">
+              <a:solidFill>
+                <a:schemeClr val="tx1"/>
+              </a:solidFill>
+              <a:effectLst/>
+              <a:latin typeface="+mn-lt"/>
+              <a:ea typeface="+mn-ea"/>
+              <a:cs typeface="+mn-cs"/>
+            </a:endParaRPr>
+          </a:p>
+          <a:p>
+            <a:r>
+              <a:rPr lang="en-US" sz="1200" b="0" i="0" kern="1200" dirty="0">
+                <a:solidFill>
+                  <a:schemeClr val="tx1"/>
+                </a:solidFill>
+                <a:effectLst/>
+                <a:latin typeface="+mn-lt"/>
+                <a:ea typeface="+mn-ea"/>
+                <a:cs typeface="+mn-cs"/>
+              </a:rPr>
+              <a:t>plus it contains </a:t>
+            </a:r>
+            <a:br>
+              <a:rPr lang="en-US" sz="1200" b="0" i="0" kern="1200" dirty="0">
+                <a:solidFill>
+                  <a:schemeClr val="tx1"/>
+                </a:solidFill>
+                <a:effectLst/>
+                <a:latin typeface="+mn-lt"/>
+                <a:ea typeface="+mn-ea"/>
+                <a:cs typeface="+mn-cs"/>
+              </a:rPr>
+            </a:br>
+            <a:r>
+              <a:rPr lang="en-US" sz="1200" b="0" i="0" kern="1200" dirty="0">
+                <a:solidFill>
+                  <a:schemeClr val="tx1"/>
+                </a:solidFill>
+                <a:effectLst/>
+                <a:latin typeface="+mn-lt"/>
+                <a:ea typeface="+mn-ea"/>
+                <a:cs typeface="+mn-cs"/>
+              </a:rPr>
+              <a:t>static corpus to provide fallback </a:t>
+            </a:r>
+            <a:br>
+              <a:rPr lang="en-US" sz="1200" b="0" i="0" kern="1200" dirty="0">
+                <a:solidFill>
+                  <a:schemeClr val="tx1"/>
+                </a:solidFill>
+                <a:effectLst/>
+                <a:latin typeface="+mn-lt"/>
+                <a:ea typeface="+mn-ea"/>
+                <a:cs typeface="+mn-cs"/>
+              </a:rPr>
+            </a:br>
+            <a:r>
+              <a:rPr lang="en-US" sz="1200" b="0" i="0" kern="1200" dirty="0">
+                <a:solidFill>
+                  <a:schemeClr val="tx1"/>
+                </a:solidFill>
+                <a:effectLst/>
+                <a:latin typeface="+mn-lt"/>
+                <a:ea typeface="+mn-ea"/>
+                <a:cs typeface="+mn-cs"/>
+              </a:rPr>
+              <a:t>if any service is unavailable during review</a:t>
+            </a:r>
+            <a:endParaRPr dirty="0"/>
           </a:p>
         </p:txBody>
       </p:sp>
@@ -3670,6 +4200,329 @@
         <p:spPr/>
       </p:sp>
     </p:spTree>
+  </p:cSld>
+  <p:clrMapOvr>
+    <a:masterClrMapping/>
+  </p:clrMapOvr>
+</p:notes>
+</file>
+
+<file path=ppt/notesSlides/notesSlide11.xml><?xml version="1.0" encoding="utf-8"?>
+<p:notes xmlns:a="http://schemas.openxmlformats.org/drawingml/2006/main" xmlns:r="http://schemas.openxmlformats.org/officeDocument/2006/relationships" xmlns:p="http://schemas.openxmlformats.org/presentationml/2006/main">
+  <p:cSld>
+    <p:spTree>
+      <p:nvGrpSpPr>
+        <p:cNvPr id="1" name=""/>
+        <p:cNvGrpSpPr/>
+        <p:nvPr/>
+      </p:nvGrpSpPr>
+      <p:grpSpPr>
+        <a:xfrm>
+          <a:off x="0" y="0"/>
+          <a:ext cx="0" cy="0"/>
+          <a:chOff x="0" y="0"/>
+          <a:chExt cx="0" cy="0"/>
+        </a:xfrm>
+      </p:grpSpPr>
+      <p:sp>
+        <p:nvSpPr>
+          <p:cNvPr id="2" name="Slide Image Placeholder 1"/>
+          <p:cNvSpPr>
+            <a:spLocks noGrp="1" noRot="1" noChangeAspect="1"/>
+          </p:cNvSpPr>
+          <p:nvPr>
+            <p:ph type="sldImg" idx="2"/>
+          </p:nvPr>
+        </p:nvSpPr>
+        <p:spPr/>
+      </p:sp>
+      <p:sp>
+        <p:nvSpPr>
+          <p:cNvPr id="3" name="Notes Placeholder 2"/>
+          <p:cNvSpPr>
+            <a:spLocks noGrp="1"/>
+          </p:cNvSpPr>
+          <p:nvPr>
+            <p:ph type="body" sz="quarter" idx="3"/>
+          </p:nvPr>
+        </p:nvSpPr>
+        <p:spPr/>
+        <p:txBody>
+          <a:bodyPr/>
+          <a:lstStyle/>
+          <a:p>
+            <a:r>
+              <a:rPr lang="en-US" sz="1200" b="0" i="0" kern="1200" dirty="0">
+                <a:solidFill>
+                  <a:schemeClr val="tx1"/>
+                </a:solidFill>
+                <a:effectLst/>
+                <a:latin typeface="+mn-lt"/>
+                <a:ea typeface="+mn-ea"/>
+                <a:cs typeface="+mn-cs"/>
+              </a:rPr>
+              <a:t>There are some limitations. </a:t>
+            </a:r>
+          </a:p>
+          <a:p>
+            <a:r>
+              <a:rPr lang="en-US" sz="1200" b="0" i="0" kern="1200" dirty="0">
+                <a:solidFill>
+                  <a:schemeClr val="tx1"/>
+                </a:solidFill>
+                <a:effectLst/>
+                <a:latin typeface="+mn-lt"/>
+                <a:ea typeface="+mn-ea"/>
+                <a:cs typeface="+mn-cs"/>
+              </a:rPr>
+              <a:t>Local-first deployment </a:t>
+            </a:r>
+          </a:p>
+          <a:p>
+            <a:r>
+              <a:rPr lang="en-US" sz="1200" b="0" i="0" kern="1200" dirty="0">
+                <a:solidFill>
+                  <a:schemeClr val="tx1"/>
+                </a:solidFill>
+                <a:effectLst/>
+                <a:latin typeface="+mn-lt"/>
+                <a:ea typeface="+mn-ea"/>
+                <a:cs typeface="+mn-cs"/>
+              </a:rPr>
+              <a:t>and a tightly controlled topics </a:t>
+            </a:r>
+          </a:p>
+          <a:p>
+            <a:r>
+              <a:rPr lang="en-US" sz="1200" b="0" i="0" kern="1200" dirty="0">
+                <a:solidFill>
+                  <a:schemeClr val="tx1"/>
+                </a:solidFill>
+                <a:effectLst/>
+                <a:latin typeface="+mn-lt"/>
+                <a:ea typeface="+mn-ea"/>
+                <a:cs typeface="+mn-cs"/>
+              </a:rPr>
+              <a:t>were conscious scope decisions, not hidden gaps. </a:t>
+            </a:r>
+          </a:p>
+          <a:p>
+            <a:endParaRPr lang="en-US" sz="1200" b="0" i="0" kern="1200" dirty="0">
+              <a:solidFill>
+                <a:schemeClr val="tx1"/>
+              </a:solidFill>
+              <a:effectLst/>
+              <a:latin typeface="+mn-lt"/>
+              <a:ea typeface="+mn-ea"/>
+              <a:cs typeface="+mn-cs"/>
+            </a:endParaRPr>
+          </a:p>
+          <a:p>
+            <a:r>
+              <a:rPr lang="en-US" sz="1200" b="0" i="0" kern="1200" dirty="0">
+                <a:solidFill>
+                  <a:schemeClr val="tx1"/>
+                </a:solidFill>
+                <a:effectLst/>
+                <a:latin typeface="+mn-lt"/>
+                <a:ea typeface="+mn-ea"/>
+                <a:cs typeface="+mn-cs"/>
+              </a:rPr>
+              <a:t>Future work includes </a:t>
+            </a:r>
+          </a:p>
+          <a:p>
+            <a:r>
+              <a:rPr lang="en-US" sz="1200" b="0" i="0" kern="1200" dirty="0">
+                <a:solidFill>
+                  <a:schemeClr val="tx1"/>
+                </a:solidFill>
+                <a:effectLst/>
+                <a:latin typeface="+mn-lt"/>
+                <a:ea typeface="+mn-ea"/>
+                <a:cs typeface="+mn-cs"/>
+              </a:rPr>
+              <a:t>broader corpus expansion, </a:t>
+            </a:r>
+          </a:p>
+          <a:p>
+            <a:r>
+              <a:rPr lang="en-US" sz="1200" b="0" i="0" kern="1200" dirty="0">
+                <a:solidFill>
+                  <a:schemeClr val="tx1"/>
+                </a:solidFill>
+                <a:effectLst/>
+                <a:latin typeface="+mn-lt"/>
+                <a:ea typeface="+mn-ea"/>
+                <a:cs typeface="+mn-cs"/>
+              </a:rPr>
+              <a:t>deeper evaluation, </a:t>
+            </a:r>
+          </a:p>
+          <a:p>
+            <a:r>
+              <a:rPr lang="en-US" sz="1200" b="0" i="0" kern="1200" dirty="0">
+                <a:solidFill>
+                  <a:schemeClr val="tx1"/>
+                </a:solidFill>
+                <a:effectLst/>
+                <a:latin typeface="+mn-lt"/>
+                <a:ea typeface="+mn-ea"/>
+                <a:cs typeface="+mn-cs"/>
+              </a:rPr>
+              <a:t>and optional graph-native persistence </a:t>
+            </a:r>
+          </a:p>
+          <a:p>
+            <a:r>
+              <a:rPr lang="en-US" sz="1200" b="0" i="0" kern="1200" dirty="0">
+                <a:solidFill>
+                  <a:schemeClr val="tx1"/>
+                </a:solidFill>
+                <a:effectLst/>
+                <a:latin typeface="+mn-lt"/>
+                <a:ea typeface="+mn-ea"/>
+                <a:cs typeface="+mn-cs"/>
+              </a:rPr>
+              <a:t>once the retrieval pipeline is fully validated</a:t>
+            </a:r>
+            <a:endParaRPr dirty="0"/>
+          </a:p>
+        </p:txBody>
+      </p:sp>
+      <p:sp>
+        <p:nvSpPr>
+          <p:cNvPr id="4" name="Slide Number Placeholder 3"/>
+          <p:cNvSpPr>
+            <a:spLocks noGrp="1"/>
+          </p:cNvSpPr>
+          <p:nvPr>
+            <p:ph type="sldNum" sz="quarter" idx="5"/>
+          </p:nvPr>
+        </p:nvSpPr>
+        <p:spPr/>
+      </p:sp>
+    </p:spTree>
+  </p:cSld>
+  <p:clrMapOvr>
+    <a:masterClrMapping/>
+  </p:clrMapOvr>
+</p:notes>
+</file>
+
+<file path=ppt/notesSlides/notesSlide12.xml><?xml version="1.0" encoding="utf-8"?>
+<p:notes xmlns:a="http://schemas.openxmlformats.org/drawingml/2006/main" xmlns:r="http://schemas.openxmlformats.org/officeDocument/2006/relationships" xmlns:p="http://schemas.openxmlformats.org/presentationml/2006/main">
+  <p:cSld>
+    <p:spTree>
+      <p:nvGrpSpPr>
+        <p:cNvPr id="1" name=""/>
+        <p:cNvGrpSpPr/>
+        <p:nvPr/>
+      </p:nvGrpSpPr>
+      <p:grpSpPr>
+        <a:xfrm>
+          <a:off x="0" y="0"/>
+          <a:ext cx="0" cy="0"/>
+          <a:chOff x="0" y="0"/>
+          <a:chExt cx="0" cy="0"/>
+        </a:xfrm>
+      </p:grpSpPr>
+      <p:sp>
+        <p:nvSpPr>
+          <p:cNvPr id="2" name="Slide Image Placeholder 1"/>
+          <p:cNvSpPr>
+            <a:spLocks noGrp="1" noRot="1" noChangeAspect="1"/>
+          </p:cNvSpPr>
+          <p:nvPr>
+            <p:ph type="sldImg"/>
+          </p:nvPr>
+        </p:nvSpPr>
+        <p:spPr>
+          <a:xfrm>
+            <a:off x="685800" y="1143000"/>
+            <a:ext cx="5486400" cy="3086100"/>
+          </a:xfrm>
+          <a:prstGeom prst="rect">
+            <a:avLst/>
+          </a:prstGeom>
+          <a:noFill/>
+          <a:ln w="12700">
+            <a:solidFill>
+              <a:prstClr val="black"/>
+            </a:solidFill>
+          </a:ln>
+        </p:spPr>
+      </p:sp>
+      <p:sp>
+        <p:nvSpPr>
+          <p:cNvPr id="3" name="Notes Placeholder 2"/>
+          <p:cNvSpPr>
+            <a:spLocks noGrp="1"/>
+          </p:cNvSpPr>
+          <p:nvPr>
+            <p:ph type="body" idx="1"/>
+          </p:nvPr>
+        </p:nvSpPr>
+        <p:spPr>
+          <a:xfrm>
+            <a:off x="685800" y="4400550"/>
+            <a:ext cx="5486400" cy="3600450"/>
+          </a:xfrm>
+          <a:prstGeom prst="rect">
+            <a:avLst/>
+          </a:prstGeom>
+        </p:spPr>
+        <p:txBody>
+          <a:bodyPr/>
+          <a:lstStyle/>
+          <a:p>
+            <a:r>
+              <a:rPr lang="en-US" sz="1200" b="0" i="0" kern="1200" dirty="0">
+                <a:solidFill>
+                  <a:schemeClr val="tx1"/>
+                </a:solidFill>
+                <a:effectLst/>
+                <a:latin typeface="+mn-lt"/>
+                <a:ea typeface="+mn-ea"/>
+                <a:cs typeface="+mn-cs"/>
+              </a:rPr>
+              <a:t>The goal again is trustworthy evidence, one passage at a time. </a:t>
+            </a:r>
+          </a:p>
+          <a:p>
+            <a:endParaRPr lang="en-US" sz="1200" b="0" i="0" kern="1200" dirty="0">
+              <a:solidFill>
+                <a:schemeClr val="tx1"/>
+              </a:solidFill>
+              <a:effectLst/>
+              <a:latin typeface="+mn-lt"/>
+              <a:ea typeface="+mn-ea"/>
+              <a:cs typeface="+mn-cs"/>
+            </a:endParaRPr>
+          </a:p>
+          <a:p>
+            <a:r>
+              <a:rPr lang="en-US" sz="1200" b="0" i="0" kern="1200" dirty="0">
+                <a:solidFill>
+                  <a:schemeClr val="tx1"/>
+                </a:solidFill>
+                <a:effectLst/>
+                <a:latin typeface="+mn-lt"/>
+                <a:ea typeface="+mn-ea"/>
+                <a:cs typeface="+mn-cs"/>
+              </a:rPr>
+              <a:t>Thank you for your time.</a:t>
+            </a:r>
+            <a:endParaRPr lang="en-US" dirty="0"/>
+          </a:p>
+        </p:txBody>
+      </p:sp>
+    </p:spTree>
+    <p:extLst>
+      <p:ext uri="{BB962C8B-B14F-4D97-AF65-F5344CB8AC3E}">
+        <p14:creationId xmlns:p14="http://schemas.microsoft.com/office/powerpoint/2010/main" val="825929130"/>
+      </p:ext>
+    </p:extLst>
   </p:cSld>
   <p:clrMapOvr>
     <a:masterClrMapping/>
@@ -3722,8 +4575,168 @@
           <a:lstStyle/>
           <a:p>
             <a:r>
-              <a:t>Walk through the controlled corpus and fail-closed approach. Stress that the system does not silently fall back to general model knowledge.</a:t>
-            </a:r>
+              <a:rPr lang="en-US" sz="1200" b="0" i="0" kern="1200" dirty="0">
+                <a:solidFill>
+                  <a:schemeClr val="tx1"/>
+                </a:solidFill>
+                <a:effectLst/>
+                <a:latin typeface="+mn-lt"/>
+                <a:ea typeface="+mn-ea"/>
+                <a:cs typeface="+mn-cs"/>
+              </a:rPr>
+              <a:t>The core problem we’re solving is not access to a language model. </a:t>
+            </a:r>
+          </a:p>
+          <a:p>
+            <a:endParaRPr lang="en-US" sz="1200" b="0" i="0" kern="1200" dirty="0">
+              <a:solidFill>
+                <a:schemeClr val="tx1"/>
+              </a:solidFill>
+              <a:effectLst/>
+              <a:latin typeface="+mn-lt"/>
+              <a:ea typeface="+mn-ea"/>
+              <a:cs typeface="+mn-cs"/>
+            </a:endParaRPr>
+          </a:p>
+          <a:p>
+            <a:r>
+              <a:rPr lang="en-US" sz="1200" b="0" i="0" kern="1200" dirty="0">
+                <a:solidFill>
+                  <a:schemeClr val="tx1"/>
+                </a:solidFill>
+                <a:effectLst/>
+                <a:latin typeface="+mn-lt"/>
+                <a:ea typeface="+mn-ea"/>
+                <a:cs typeface="+mn-cs"/>
+              </a:rPr>
+              <a:t>Researchers already have that. </a:t>
+            </a:r>
+          </a:p>
+          <a:p>
+            <a:endParaRPr lang="en-US" sz="1200" b="0" i="0" kern="1200" dirty="0">
+              <a:solidFill>
+                <a:schemeClr val="tx1"/>
+              </a:solidFill>
+              <a:effectLst/>
+              <a:latin typeface="+mn-lt"/>
+              <a:ea typeface="+mn-ea"/>
+              <a:cs typeface="+mn-cs"/>
+            </a:endParaRPr>
+          </a:p>
+          <a:p>
+            <a:r>
+              <a:rPr lang="en-US" sz="1200" b="0" i="0" kern="1200" dirty="0">
+                <a:solidFill>
+                  <a:schemeClr val="tx1"/>
+                </a:solidFill>
+                <a:effectLst/>
+                <a:latin typeface="+mn-lt"/>
+                <a:ea typeface="+mn-ea"/>
+                <a:cs typeface="+mn-cs"/>
+              </a:rPr>
+              <a:t>The real problem is evidence discovery with scientific provenance and explicit limits. </a:t>
+            </a:r>
+          </a:p>
+          <a:p>
+            <a:endParaRPr lang="en-US" sz="1200" b="0" i="0" kern="1200" dirty="0">
+              <a:solidFill>
+                <a:schemeClr val="tx1"/>
+              </a:solidFill>
+              <a:effectLst/>
+              <a:latin typeface="+mn-lt"/>
+              <a:ea typeface="+mn-ea"/>
+              <a:cs typeface="+mn-cs"/>
+            </a:endParaRPr>
+          </a:p>
+          <a:p>
+            <a:r>
+              <a:rPr lang="en-US" sz="1200" b="0" i="0" kern="1200" dirty="0">
+                <a:solidFill>
+                  <a:schemeClr val="tx1"/>
+                </a:solidFill>
+                <a:effectLst/>
+                <a:latin typeface="+mn-lt"/>
+                <a:ea typeface="+mn-ea"/>
+                <a:cs typeface="+mn-cs"/>
+              </a:rPr>
+              <a:t>We need to know where an answer comes from, </a:t>
+            </a:r>
+          </a:p>
+          <a:p>
+            <a:endParaRPr lang="en-US" sz="1200" b="0" i="0" kern="1200" dirty="0">
+              <a:solidFill>
+                <a:schemeClr val="tx1"/>
+              </a:solidFill>
+              <a:effectLst/>
+              <a:latin typeface="+mn-lt"/>
+              <a:ea typeface="+mn-ea"/>
+              <a:cs typeface="+mn-cs"/>
+            </a:endParaRPr>
+          </a:p>
+          <a:p>
+            <a:r>
+              <a:rPr lang="en-US" sz="1200" b="0" i="0" kern="1200" dirty="0">
+                <a:solidFill>
+                  <a:schemeClr val="tx1"/>
+                </a:solidFill>
+                <a:effectLst/>
+                <a:latin typeface="+mn-lt"/>
+                <a:ea typeface="+mn-ea"/>
+                <a:cs typeface="+mn-cs"/>
+              </a:rPr>
+              <a:t>what study it is based on, </a:t>
+            </a:r>
+          </a:p>
+          <a:p>
+            <a:endParaRPr lang="en-US" sz="1200" b="0" i="0" kern="1200" dirty="0">
+              <a:solidFill>
+                <a:schemeClr val="tx1"/>
+              </a:solidFill>
+              <a:effectLst/>
+              <a:latin typeface="+mn-lt"/>
+              <a:ea typeface="+mn-ea"/>
+              <a:cs typeface="+mn-cs"/>
+            </a:endParaRPr>
+          </a:p>
+          <a:p>
+            <a:r>
+              <a:rPr lang="en-US" sz="1200" b="0" i="0" kern="1200" dirty="0">
+                <a:solidFill>
+                  <a:schemeClr val="tx1"/>
+                </a:solidFill>
+                <a:effectLst/>
+                <a:latin typeface="+mn-lt"/>
+                <a:ea typeface="+mn-ea"/>
+                <a:cs typeface="+mn-cs"/>
+              </a:rPr>
+              <a:t>and when the evidence is simply not strong </a:t>
+            </a:r>
+          </a:p>
+          <a:p>
+            <a:endParaRPr lang="en-US" sz="1200" b="0" i="0" kern="1200" dirty="0">
+              <a:solidFill>
+                <a:schemeClr val="tx1"/>
+              </a:solidFill>
+              <a:effectLst/>
+              <a:latin typeface="+mn-lt"/>
+              <a:ea typeface="+mn-ea"/>
+              <a:cs typeface="+mn-cs"/>
+            </a:endParaRPr>
+          </a:p>
+          <a:p>
+            <a:r>
+              <a:rPr lang="en-US" sz="1200" b="0" i="0" kern="1200" dirty="0">
+                <a:solidFill>
+                  <a:schemeClr val="tx1"/>
+                </a:solidFill>
+                <a:effectLst/>
+                <a:latin typeface="+mn-lt"/>
+                <a:ea typeface="+mn-ea"/>
+                <a:cs typeface="+mn-cs"/>
+              </a:rPr>
+              <a:t>enough to support a claim</a:t>
+            </a:r>
+            <a:endParaRPr dirty="0"/>
           </a:p>
         </p:txBody>
       </p:sp>
@@ -3792,8 +4805,152 @@
           <a:lstStyle/>
           <a:p>
             <a:r>
-              <a:t>Describe the data flow left to right. The same provenance fields survive extraction, retrieval, answer generation, and citation display.</a:t>
-            </a:r>
+              <a:rPr lang="en-US" sz="1200" b="0" i="0" kern="1200" dirty="0">
+                <a:solidFill>
+                  <a:schemeClr val="tx1"/>
+                </a:solidFill>
+                <a:effectLst/>
+                <a:latin typeface="+mn-lt"/>
+                <a:ea typeface="+mn-ea"/>
+                <a:cs typeface="+mn-cs"/>
+              </a:rPr>
+              <a:t>Our solution is a controlled corpus and a fail-closed design. </a:t>
+            </a:r>
+          </a:p>
+          <a:p>
+            <a:endParaRPr lang="en-US" sz="1200" b="0" i="0" kern="1200" dirty="0">
+              <a:solidFill>
+                <a:schemeClr val="tx1"/>
+              </a:solidFill>
+              <a:effectLst/>
+              <a:latin typeface="+mn-lt"/>
+              <a:ea typeface="+mn-ea"/>
+              <a:cs typeface="+mn-cs"/>
+            </a:endParaRPr>
+          </a:p>
+          <a:p>
+            <a:r>
+              <a:rPr lang="en-US" sz="1200" b="0" i="0" kern="1200" dirty="0">
+                <a:solidFill>
+                  <a:schemeClr val="tx1"/>
+                </a:solidFill>
+                <a:effectLst/>
+                <a:latin typeface="+mn-lt"/>
+                <a:ea typeface="+mn-ea"/>
+                <a:cs typeface="+mn-cs"/>
+              </a:rPr>
+              <a:t>The system only answers from </a:t>
+            </a:r>
+            <a:br>
+              <a:rPr lang="en-US" sz="1200" b="0" i="0" kern="1200" dirty="0">
+                <a:solidFill>
+                  <a:schemeClr val="tx1"/>
+                </a:solidFill>
+                <a:effectLst/>
+                <a:latin typeface="+mn-lt"/>
+                <a:ea typeface="+mn-ea"/>
+                <a:cs typeface="+mn-cs"/>
+              </a:rPr>
+            </a:br>
+            <a:r>
+              <a:rPr lang="en-US" sz="1200" b="0" i="0" kern="1200" dirty="0">
+                <a:solidFill>
+                  <a:schemeClr val="tx1"/>
+                </a:solidFill>
+                <a:effectLst/>
+                <a:latin typeface="+mn-lt"/>
+                <a:ea typeface="+mn-ea"/>
+                <a:cs typeface="+mn-cs"/>
+              </a:rPr>
+              <a:t>an approved set of open-access publications. </a:t>
+            </a:r>
+          </a:p>
+          <a:p>
+            <a:endParaRPr lang="en-US" sz="1200" b="0" i="0" kern="1200" dirty="0">
+              <a:solidFill>
+                <a:schemeClr val="tx1"/>
+              </a:solidFill>
+              <a:effectLst/>
+              <a:latin typeface="+mn-lt"/>
+              <a:ea typeface="+mn-ea"/>
+              <a:cs typeface="+mn-cs"/>
+            </a:endParaRPr>
+          </a:p>
+          <a:p>
+            <a:r>
+              <a:rPr lang="en-US" sz="1200" b="0" i="0" kern="1200" dirty="0">
+                <a:solidFill>
+                  <a:schemeClr val="tx1"/>
+                </a:solidFill>
+                <a:effectLst/>
+                <a:latin typeface="+mn-lt"/>
+                <a:ea typeface="+mn-ea"/>
+                <a:cs typeface="+mn-cs"/>
+              </a:rPr>
+              <a:t>If it cannot retrieve supporting passages, </a:t>
+            </a:r>
+          </a:p>
+          <a:p>
+            <a:endParaRPr lang="en-US" sz="1200" b="0" i="0" kern="1200" dirty="0">
+              <a:solidFill>
+                <a:schemeClr val="tx1"/>
+              </a:solidFill>
+              <a:effectLst/>
+              <a:latin typeface="+mn-lt"/>
+              <a:ea typeface="+mn-ea"/>
+              <a:cs typeface="+mn-cs"/>
+            </a:endParaRPr>
+          </a:p>
+          <a:p>
+            <a:r>
+              <a:rPr lang="en-US" sz="1200" b="0" i="0" kern="1200" dirty="0">
+                <a:solidFill>
+                  <a:schemeClr val="tx1"/>
+                </a:solidFill>
+                <a:effectLst/>
+                <a:latin typeface="+mn-lt"/>
+                <a:ea typeface="+mn-ea"/>
+                <a:cs typeface="+mn-cs"/>
+              </a:rPr>
+              <a:t>it does not silently fall back to general model knowledge. </a:t>
+            </a:r>
+          </a:p>
+          <a:p>
+            <a:endParaRPr lang="en-US" sz="1200" b="0" i="0" kern="1200" dirty="0">
+              <a:solidFill>
+                <a:schemeClr val="tx1"/>
+              </a:solidFill>
+              <a:effectLst/>
+              <a:latin typeface="+mn-lt"/>
+              <a:ea typeface="+mn-ea"/>
+              <a:cs typeface="+mn-cs"/>
+            </a:endParaRPr>
+          </a:p>
+          <a:p>
+            <a:r>
+              <a:rPr lang="en-US" sz="1200" b="0" i="0" kern="1200" dirty="0">
+                <a:solidFill>
+                  <a:schemeClr val="tx1"/>
+                </a:solidFill>
+                <a:effectLst/>
+                <a:latin typeface="+mn-lt"/>
+                <a:ea typeface="+mn-ea"/>
+                <a:cs typeface="+mn-cs"/>
+              </a:rPr>
+              <a:t>It tells the user the evidence is insufficient</a:t>
+            </a:r>
+            <a:br>
+              <a:rPr lang="en-US" sz="1200" b="0" i="0" kern="1200" dirty="0">
+                <a:solidFill>
+                  <a:schemeClr val="tx1"/>
+                </a:solidFill>
+                <a:effectLst/>
+                <a:latin typeface="+mn-lt"/>
+                <a:ea typeface="+mn-ea"/>
+                <a:cs typeface="+mn-cs"/>
+              </a:rPr>
+            </a:br>
+            <a:endParaRPr dirty="0"/>
           </a:p>
         </p:txBody>
       </p:sp>
@@ -3862,8 +5019,246 @@
           <a:lstStyle/>
           <a:p>
             <a:r>
-              <a:t>Demonstrate the Ask form. Explain that every answer claim should map to a retrieved citation and that unsupported generation is rejected.</a:t>
-            </a:r>
+              <a:rPr lang="en-US" sz="1200" b="0" i="0" kern="1200" dirty="0">
+                <a:solidFill>
+                  <a:schemeClr val="tx1"/>
+                </a:solidFill>
+                <a:effectLst/>
+                <a:latin typeface="+mn-lt"/>
+                <a:ea typeface="+mn-ea"/>
+                <a:cs typeface="+mn-cs"/>
+              </a:rPr>
+              <a:t>Here is the architecture. </a:t>
+            </a:r>
+          </a:p>
+          <a:p>
+            <a:endParaRPr lang="en-US" sz="1200" b="0" i="0" kern="1200" dirty="0">
+              <a:solidFill>
+                <a:schemeClr val="tx1"/>
+              </a:solidFill>
+              <a:effectLst/>
+              <a:latin typeface="+mn-lt"/>
+              <a:ea typeface="+mn-ea"/>
+              <a:cs typeface="+mn-cs"/>
+            </a:endParaRPr>
+          </a:p>
+          <a:p>
+            <a:r>
+              <a:rPr lang="en-US" sz="1200" b="0" i="0" kern="1200" dirty="0">
+                <a:solidFill>
+                  <a:schemeClr val="tx1"/>
+                </a:solidFill>
+                <a:effectLst/>
+                <a:latin typeface="+mn-lt"/>
+                <a:ea typeface="+mn-ea"/>
+                <a:cs typeface="+mn-cs"/>
+              </a:rPr>
+              <a:t>Data flows from approved PDFs through extraction, chunking, and embedding into PostgreSQL</a:t>
+            </a:r>
+            <a:br>
+              <a:rPr lang="en-US" sz="1200" b="0" i="0" kern="1200" dirty="0">
+                <a:solidFill>
+                  <a:schemeClr val="tx1"/>
+                </a:solidFill>
+                <a:effectLst/>
+                <a:latin typeface="+mn-lt"/>
+                <a:ea typeface="+mn-ea"/>
+                <a:cs typeface="+mn-cs"/>
+              </a:rPr>
+            </a:br>
+            <a:r>
+              <a:rPr lang="en-US" sz="1200" b="0" i="0" kern="1200" dirty="0">
+                <a:solidFill>
+                  <a:schemeClr val="tx1"/>
+                </a:solidFill>
+                <a:effectLst/>
+                <a:latin typeface="+mn-lt"/>
+                <a:ea typeface="+mn-ea"/>
+                <a:cs typeface="+mn-cs"/>
+              </a:rPr>
+              <a:t> with p g vector. </a:t>
+            </a:r>
+          </a:p>
+          <a:p>
+            <a:endParaRPr lang="en-US" sz="1200" b="0" i="0" kern="1200" dirty="0">
+              <a:solidFill>
+                <a:schemeClr val="tx1"/>
+              </a:solidFill>
+              <a:effectLst/>
+              <a:latin typeface="+mn-lt"/>
+              <a:ea typeface="+mn-ea"/>
+              <a:cs typeface="+mn-cs"/>
+            </a:endParaRPr>
+          </a:p>
+          <a:p>
+            <a:r>
+              <a:rPr lang="en-US" sz="1200" b="0" i="0" kern="1200" dirty="0">
+                <a:solidFill>
+                  <a:schemeClr val="tx1"/>
+                </a:solidFill>
+                <a:effectLst/>
+                <a:latin typeface="+mn-lt"/>
+                <a:ea typeface="+mn-ea"/>
+                <a:cs typeface="+mn-cs"/>
+              </a:rPr>
+              <a:t>Retrieval then selects passages, </a:t>
+            </a:r>
+          </a:p>
+          <a:p>
+            <a:endParaRPr lang="en-US" sz="1200" b="0" i="0" kern="1200" dirty="0">
+              <a:solidFill>
+                <a:schemeClr val="tx1"/>
+              </a:solidFill>
+              <a:effectLst/>
+              <a:latin typeface="+mn-lt"/>
+              <a:ea typeface="+mn-ea"/>
+              <a:cs typeface="+mn-cs"/>
+            </a:endParaRPr>
+          </a:p>
+          <a:p>
+            <a:r>
+              <a:rPr lang="en-US" sz="1200" b="0" i="0" kern="1200" dirty="0">
+                <a:solidFill>
+                  <a:schemeClr val="tx1"/>
+                </a:solidFill>
+                <a:effectLst/>
+                <a:latin typeface="+mn-lt"/>
+                <a:ea typeface="+mn-ea"/>
+                <a:cs typeface="+mn-cs"/>
+              </a:rPr>
+              <a:t>the answer generator grounds every claim in those passages, </a:t>
+            </a:r>
+          </a:p>
+          <a:p>
+            <a:endParaRPr lang="en-US" sz="1200" b="0" i="0" kern="1200" dirty="0">
+              <a:solidFill>
+                <a:schemeClr val="tx1"/>
+              </a:solidFill>
+              <a:effectLst/>
+              <a:latin typeface="+mn-lt"/>
+              <a:ea typeface="+mn-ea"/>
+              <a:cs typeface="+mn-cs"/>
+            </a:endParaRPr>
+          </a:p>
+          <a:p>
+            <a:r>
+              <a:rPr lang="en-US" sz="1200" b="0" i="0" kern="1200" dirty="0">
+                <a:solidFill>
+                  <a:schemeClr val="tx1"/>
+                </a:solidFill>
+                <a:effectLst/>
+                <a:latin typeface="+mn-lt"/>
+                <a:ea typeface="+mn-ea"/>
+                <a:cs typeface="+mn-cs"/>
+              </a:rPr>
+              <a:t>and the UI displays citations back </a:t>
+            </a:r>
+            <a:br>
+              <a:rPr lang="en-US" sz="1200" b="0" i="0" kern="1200" dirty="0">
+                <a:solidFill>
+                  <a:schemeClr val="tx1"/>
+                </a:solidFill>
+                <a:effectLst/>
+                <a:latin typeface="+mn-lt"/>
+                <a:ea typeface="+mn-ea"/>
+                <a:cs typeface="+mn-cs"/>
+              </a:rPr>
+            </a:br>
+            <a:r>
+              <a:rPr lang="en-US" sz="1200" b="0" i="0" kern="1200" dirty="0">
+                <a:solidFill>
+                  <a:schemeClr val="tx1"/>
+                </a:solidFill>
+                <a:effectLst/>
+                <a:latin typeface="+mn-lt"/>
+                <a:ea typeface="+mn-ea"/>
+                <a:cs typeface="+mn-cs"/>
+              </a:rPr>
+              <a:t>to the original publication, section, </a:t>
+            </a:r>
+            <a:br>
+              <a:rPr lang="en-US" sz="1200" b="0" i="0" kern="1200" dirty="0">
+                <a:solidFill>
+                  <a:schemeClr val="tx1"/>
+                </a:solidFill>
+                <a:effectLst/>
+                <a:latin typeface="+mn-lt"/>
+                <a:ea typeface="+mn-ea"/>
+                <a:cs typeface="+mn-cs"/>
+              </a:rPr>
+            </a:br>
+            <a:r>
+              <a:rPr lang="en-US" sz="1200" b="0" i="0" kern="1200" dirty="0">
+                <a:solidFill>
+                  <a:schemeClr val="tx1"/>
+                </a:solidFill>
+                <a:effectLst/>
+                <a:latin typeface="+mn-lt"/>
+                <a:ea typeface="+mn-ea"/>
+                <a:cs typeface="+mn-cs"/>
+              </a:rPr>
+              <a:t>and page. </a:t>
+            </a:r>
+          </a:p>
+          <a:p>
+            <a:endParaRPr lang="en-US" sz="1200" b="0" i="0" kern="1200" dirty="0">
+              <a:solidFill>
+                <a:schemeClr val="tx1"/>
+              </a:solidFill>
+              <a:effectLst/>
+              <a:latin typeface="+mn-lt"/>
+              <a:ea typeface="+mn-ea"/>
+              <a:cs typeface="+mn-cs"/>
+            </a:endParaRPr>
+          </a:p>
+          <a:p>
+            <a:r>
+              <a:rPr lang="en-US" sz="1200" b="0" i="0" kern="1200" dirty="0">
+                <a:solidFill>
+                  <a:schemeClr val="tx1"/>
+                </a:solidFill>
+                <a:effectLst/>
+                <a:latin typeface="+mn-lt"/>
+                <a:ea typeface="+mn-ea"/>
+                <a:cs typeface="+mn-cs"/>
+              </a:rPr>
+              <a:t>The same provenance fields survive </a:t>
+            </a:r>
+            <a:br>
+              <a:rPr lang="en-US" sz="1200" b="0" i="0" kern="1200" dirty="0">
+                <a:solidFill>
+                  <a:schemeClr val="tx1"/>
+                </a:solidFill>
+                <a:effectLst/>
+                <a:latin typeface="+mn-lt"/>
+                <a:ea typeface="+mn-ea"/>
+                <a:cs typeface="+mn-cs"/>
+              </a:rPr>
+            </a:br>
+            <a:r>
+              <a:rPr lang="en-US" sz="1200" b="0" i="0" kern="1200" dirty="0">
+                <a:solidFill>
+                  <a:schemeClr val="tx1"/>
+                </a:solidFill>
+                <a:effectLst/>
+                <a:latin typeface="+mn-lt"/>
+                <a:ea typeface="+mn-ea"/>
+                <a:cs typeface="+mn-cs"/>
+              </a:rPr>
+              <a:t>the entire pipeline</a:t>
+            </a:r>
+            <a:br>
+              <a:rPr lang="en-US" sz="1200" b="0" i="0" kern="1200" dirty="0">
+                <a:solidFill>
+                  <a:schemeClr val="tx1"/>
+                </a:solidFill>
+                <a:effectLst/>
+                <a:latin typeface="+mn-lt"/>
+                <a:ea typeface="+mn-ea"/>
+                <a:cs typeface="+mn-cs"/>
+              </a:rPr>
+            </a:br>
+            <a:endParaRPr dirty="0"/>
           </a:p>
         </p:txBody>
       </p:sp>
@@ -3932,8 +5327,184 @@
           <a:lstStyle/>
           <a:p>
             <a:r>
-              <a:t>Show that users can inspect the approved corpus and open individual publication metadata, DOI, license, organism, exposure, and ingest status.</a:t>
-            </a:r>
+              <a:rPr lang="en-US" sz="1200" b="0" i="0" kern="1200" dirty="0">
+                <a:solidFill>
+                  <a:schemeClr val="tx1"/>
+                </a:solidFill>
+                <a:effectLst/>
+                <a:latin typeface="+mn-lt"/>
+                <a:ea typeface="+mn-ea"/>
+                <a:cs typeface="+mn-cs"/>
+              </a:rPr>
+              <a:t>Here you can see the Ask interface. </a:t>
+            </a:r>
+          </a:p>
+          <a:p>
+            <a:endParaRPr lang="en-US" sz="1200" b="0" i="0" kern="1200" dirty="0">
+              <a:solidFill>
+                <a:schemeClr val="tx1"/>
+              </a:solidFill>
+              <a:effectLst/>
+              <a:latin typeface="+mn-lt"/>
+              <a:ea typeface="+mn-ea"/>
+              <a:cs typeface="+mn-cs"/>
+            </a:endParaRPr>
+          </a:p>
+          <a:p>
+            <a:r>
+              <a:rPr lang="en-US" sz="1200" b="0" i="0" kern="1200" dirty="0">
+                <a:solidFill>
+                  <a:schemeClr val="tx1"/>
+                </a:solidFill>
+                <a:effectLst/>
+                <a:latin typeface="+mn-lt"/>
+                <a:ea typeface="+mn-ea"/>
+                <a:cs typeface="+mn-cs"/>
+              </a:rPr>
+              <a:t>The user asks a scientific question. </a:t>
+            </a:r>
+          </a:p>
+          <a:p>
+            <a:endParaRPr lang="en-US" sz="1200" b="0" i="0" kern="1200" dirty="0">
+              <a:solidFill>
+                <a:schemeClr val="tx1"/>
+              </a:solidFill>
+              <a:effectLst/>
+              <a:latin typeface="+mn-lt"/>
+              <a:ea typeface="+mn-ea"/>
+              <a:cs typeface="+mn-cs"/>
+            </a:endParaRPr>
+          </a:p>
+          <a:p>
+            <a:r>
+              <a:rPr lang="en-US" sz="1200" b="0" i="0" kern="1200" dirty="0">
+                <a:solidFill>
+                  <a:schemeClr val="tx1"/>
+                </a:solidFill>
+                <a:effectLst/>
+                <a:latin typeface="+mn-lt"/>
+                <a:ea typeface="+mn-ea"/>
+                <a:cs typeface="+mn-cs"/>
+              </a:rPr>
+              <a:t>The system retrieves relevant passages </a:t>
+            </a:r>
+            <a:br>
+              <a:rPr lang="en-US" sz="1200" b="0" i="0" kern="1200" dirty="0">
+                <a:solidFill>
+                  <a:schemeClr val="tx1"/>
+                </a:solidFill>
+                <a:effectLst/>
+                <a:latin typeface="+mn-lt"/>
+                <a:ea typeface="+mn-ea"/>
+                <a:cs typeface="+mn-cs"/>
+              </a:rPr>
+            </a:br>
+            <a:r>
+              <a:rPr lang="en-US" sz="1200" b="0" i="0" kern="1200" dirty="0">
+                <a:solidFill>
+                  <a:schemeClr val="tx1"/>
+                </a:solidFill>
+                <a:effectLst/>
+                <a:latin typeface="+mn-lt"/>
+                <a:ea typeface="+mn-ea"/>
+                <a:cs typeface="+mn-cs"/>
+              </a:rPr>
+              <a:t>and generates an answer </a:t>
+            </a:r>
+            <a:br>
+              <a:rPr lang="en-US" sz="1200" b="0" i="0" kern="1200" dirty="0">
+                <a:solidFill>
+                  <a:schemeClr val="tx1"/>
+                </a:solidFill>
+                <a:effectLst/>
+                <a:latin typeface="+mn-lt"/>
+                <a:ea typeface="+mn-ea"/>
+                <a:cs typeface="+mn-cs"/>
+              </a:rPr>
+            </a:br>
+            <a:r>
+              <a:rPr lang="en-US" sz="1200" b="0" i="0" kern="1200" dirty="0">
+                <a:solidFill>
+                  <a:schemeClr val="tx1"/>
+                </a:solidFill>
+                <a:effectLst/>
+                <a:latin typeface="+mn-lt"/>
+                <a:ea typeface="+mn-ea"/>
+                <a:cs typeface="+mn-cs"/>
+              </a:rPr>
+              <a:t>in which every claim maps to a retrieved citation. </a:t>
+            </a:r>
+          </a:p>
+          <a:p>
+            <a:endParaRPr lang="en-US" sz="1200" b="0" i="0" kern="1200" dirty="0">
+              <a:solidFill>
+                <a:schemeClr val="tx1"/>
+              </a:solidFill>
+              <a:effectLst/>
+              <a:latin typeface="+mn-lt"/>
+              <a:ea typeface="+mn-ea"/>
+              <a:cs typeface="+mn-cs"/>
+            </a:endParaRPr>
+          </a:p>
+          <a:p>
+            <a:r>
+              <a:rPr lang="en-US" sz="1200" b="0" i="0" kern="1200" dirty="0">
+                <a:solidFill>
+                  <a:schemeClr val="tx1"/>
+                </a:solidFill>
+                <a:effectLst/>
+                <a:latin typeface="+mn-lt"/>
+                <a:ea typeface="+mn-ea"/>
+                <a:cs typeface="+mn-cs"/>
+              </a:rPr>
+              <a:t>If no passages support a claim, </a:t>
+            </a:r>
+            <a:br>
+              <a:rPr lang="en-US" sz="1200" b="0" i="0" kern="1200" dirty="0">
+                <a:solidFill>
+                  <a:schemeClr val="tx1"/>
+                </a:solidFill>
+                <a:effectLst/>
+                <a:latin typeface="+mn-lt"/>
+                <a:ea typeface="+mn-ea"/>
+                <a:cs typeface="+mn-cs"/>
+              </a:rPr>
+            </a:br>
+            <a:r>
+              <a:rPr lang="en-US" sz="1200" b="0" i="0" kern="1200" dirty="0">
+                <a:solidFill>
+                  <a:schemeClr val="tx1"/>
+                </a:solidFill>
+                <a:effectLst/>
+                <a:latin typeface="+mn-lt"/>
+                <a:ea typeface="+mn-ea"/>
+                <a:cs typeface="+mn-cs"/>
+              </a:rPr>
+              <a:t>that claim is rejected rather than invented</a:t>
+            </a:r>
+            <a:br>
+              <a:rPr lang="en-US" sz="1200" b="0" i="0" kern="1200" dirty="0">
+                <a:solidFill>
+                  <a:schemeClr val="tx1"/>
+                </a:solidFill>
+                <a:effectLst/>
+                <a:latin typeface="+mn-lt"/>
+                <a:ea typeface="+mn-ea"/>
+                <a:cs typeface="+mn-cs"/>
+              </a:rPr>
+            </a:br>
+            <a:br>
+              <a:rPr lang="en-US" sz="1200" b="0" i="0" kern="1200" dirty="0">
+                <a:solidFill>
+                  <a:schemeClr val="tx1"/>
+                </a:solidFill>
+                <a:effectLst/>
+                <a:latin typeface="+mn-lt"/>
+                <a:ea typeface="+mn-ea"/>
+                <a:cs typeface="+mn-cs"/>
+              </a:rPr>
+            </a:br>
+            <a:endParaRPr dirty="0"/>
           </a:p>
         </p:txBody>
       </p:sp>
@@ -4002,8 +5573,183 @@
           <a:lstStyle/>
           <a:p>
             <a:r>
-              <a:t>Explain semantic/keyword search and the compare workspace. Comparison is metadata-based and deliberately does not invent cross-study findings.</a:t>
-            </a:r>
+              <a:rPr lang="en-US" sz="1200" b="0" i="0" kern="1200" dirty="0">
+                <a:solidFill>
+                  <a:schemeClr val="tx1"/>
+                </a:solidFill>
+                <a:effectLst/>
+                <a:latin typeface="+mn-lt"/>
+                <a:ea typeface="+mn-ea"/>
+                <a:cs typeface="+mn-cs"/>
+              </a:rPr>
+              <a:t>Users can inspect the approved corpus </a:t>
+            </a:r>
+          </a:p>
+          <a:p>
+            <a:endParaRPr lang="en-US" sz="1200" b="0" i="0" kern="1200" dirty="0">
+              <a:solidFill>
+                <a:schemeClr val="tx1"/>
+              </a:solidFill>
+              <a:effectLst/>
+              <a:latin typeface="+mn-lt"/>
+              <a:ea typeface="+mn-ea"/>
+              <a:cs typeface="+mn-cs"/>
+            </a:endParaRPr>
+          </a:p>
+          <a:p>
+            <a:r>
+              <a:rPr lang="en-US" sz="1200" b="0" i="0" kern="1200" dirty="0">
+                <a:solidFill>
+                  <a:schemeClr val="tx1"/>
+                </a:solidFill>
+                <a:effectLst/>
+                <a:latin typeface="+mn-lt"/>
+                <a:ea typeface="+mn-ea"/>
+                <a:cs typeface="+mn-cs"/>
+              </a:rPr>
+              <a:t>and open individual publication metadata: </a:t>
+            </a:r>
+            <a:br>
+              <a:rPr lang="en-US" sz="1200" b="0" i="0" kern="1200" dirty="0">
+                <a:solidFill>
+                  <a:schemeClr val="tx1"/>
+                </a:solidFill>
+                <a:effectLst/>
+                <a:latin typeface="+mn-lt"/>
+                <a:ea typeface="+mn-ea"/>
+                <a:cs typeface="+mn-cs"/>
+              </a:rPr>
+            </a:br>
+            <a:r>
+              <a:rPr lang="en-US" sz="1200" b="0" i="0" kern="1200" dirty="0">
+                <a:solidFill>
+                  <a:schemeClr val="tx1"/>
+                </a:solidFill>
+                <a:effectLst/>
+                <a:latin typeface="+mn-lt"/>
+                <a:ea typeface="+mn-ea"/>
+                <a:cs typeface="+mn-cs"/>
+              </a:rPr>
+              <a:t>title, DOI, license, </a:t>
+            </a:r>
+            <a:br>
+              <a:rPr lang="en-US" sz="1200" b="0" i="0" kern="1200" dirty="0">
+                <a:solidFill>
+                  <a:schemeClr val="tx1"/>
+                </a:solidFill>
+                <a:effectLst/>
+                <a:latin typeface="+mn-lt"/>
+                <a:ea typeface="+mn-ea"/>
+                <a:cs typeface="+mn-cs"/>
+              </a:rPr>
+            </a:br>
+            <a:r>
+              <a:rPr lang="en-US" sz="1200" b="0" i="0" kern="1200" dirty="0">
+                <a:solidFill>
+                  <a:schemeClr val="tx1"/>
+                </a:solidFill>
+                <a:effectLst/>
+                <a:latin typeface="+mn-lt"/>
+                <a:ea typeface="+mn-ea"/>
+                <a:cs typeface="+mn-cs"/>
+              </a:rPr>
+              <a:t>organism, exposure, </a:t>
+            </a:r>
+            <a:br>
+              <a:rPr lang="en-US" sz="1200" b="0" i="0" kern="1200" dirty="0">
+                <a:solidFill>
+                  <a:schemeClr val="tx1"/>
+                </a:solidFill>
+                <a:effectLst/>
+                <a:latin typeface="+mn-lt"/>
+                <a:ea typeface="+mn-ea"/>
+                <a:cs typeface="+mn-cs"/>
+              </a:rPr>
+            </a:br>
+            <a:r>
+              <a:rPr lang="en-US" sz="1200" b="0" i="0" kern="1200" dirty="0">
+                <a:solidFill>
+                  <a:schemeClr val="tx1"/>
+                </a:solidFill>
+                <a:effectLst/>
+                <a:latin typeface="+mn-lt"/>
+                <a:ea typeface="+mn-ea"/>
+                <a:cs typeface="+mn-cs"/>
+              </a:rPr>
+              <a:t>and ingest status. </a:t>
+            </a:r>
+          </a:p>
+          <a:p>
+            <a:endParaRPr lang="en-US" sz="1200" b="0" i="0" kern="1200" dirty="0">
+              <a:solidFill>
+                <a:schemeClr val="tx1"/>
+              </a:solidFill>
+              <a:effectLst/>
+              <a:latin typeface="+mn-lt"/>
+              <a:ea typeface="+mn-ea"/>
+              <a:cs typeface="+mn-cs"/>
+            </a:endParaRPr>
+          </a:p>
+          <a:p>
+            <a:r>
+              <a:rPr lang="en-US" sz="1200" b="0" i="0" kern="1200" dirty="0">
+                <a:solidFill>
+                  <a:schemeClr val="tx1"/>
+                </a:solidFill>
+                <a:effectLst/>
+                <a:latin typeface="+mn-lt"/>
+                <a:ea typeface="+mn-ea"/>
+                <a:cs typeface="+mn-cs"/>
+              </a:rPr>
+              <a:t>Every answer ultimately points back </a:t>
+            </a:r>
+            <a:br>
+              <a:rPr lang="en-US" sz="1200" b="0" i="0" kern="1200" dirty="0">
+                <a:solidFill>
+                  <a:schemeClr val="tx1"/>
+                </a:solidFill>
+                <a:effectLst/>
+                <a:latin typeface="+mn-lt"/>
+                <a:ea typeface="+mn-ea"/>
+                <a:cs typeface="+mn-cs"/>
+              </a:rPr>
+            </a:br>
+            <a:r>
+              <a:rPr lang="en-US" sz="1200" b="0" i="0" kern="1200" dirty="0">
+                <a:solidFill>
+                  <a:schemeClr val="tx1"/>
+                </a:solidFill>
+                <a:effectLst/>
+                <a:latin typeface="+mn-lt"/>
+                <a:ea typeface="+mn-ea"/>
+                <a:cs typeface="+mn-cs"/>
+              </a:rPr>
+              <a:t>to one of these sources, </a:t>
+            </a:r>
+            <a:br>
+              <a:rPr lang="en-US" sz="1200" b="0" i="0" kern="1200" dirty="0">
+                <a:solidFill>
+                  <a:schemeClr val="tx1"/>
+                </a:solidFill>
+                <a:effectLst/>
+                <a:latin typeface="+mn-lt"/>
+                <a:ea typeface="+mn-ea"/>
+                <a:cs typeface="+mn-cs"/>
+              </a:rPr>
+            </a:br>
+            <a:r>
+              <a:rPr lang="en-US" sz="1200" b="0" i="0" kern="1200" dirty="0">
+                <a:solidFill>
+                  <a:schemeClr val="tx1"/>
+                </a:solidFill>
+                <a:effectLst/>
+                <a:latin typeface="+mn-lt"/>
+                <a:ea typeface="+mn-ea"/>
+                <a:cs typeface="+mn-cs"/>
+              </a:rPr>
+              <a:t>so provenance is always visible</a:t>
+            </a:r>
+            <a:endParaRPr dirty="0"/>
           </a:p>
         </p:txBody>
       </p:sp>
@@ -4072,8 +5818,151 @@
           <a:lstStyle/>
           <a:p>
             <a:r>
-              <a:t>Cover the AI stack and safeguards. Keep the distinction clear: retrieval identifies evidence; generation summarizes only what retrieval supports.</a:t>
-            </a:r>
+              <a:rPr lang="en-US" sz="1200" b="0" i="0" kern="1200" dirty="0">
+                <a:solidFill>
+                  <a:schemeClr val="tx1"/>
+                </a:solidFill>
+                <a:effectLst/>
+                <a:latin typeface="+mn-lt"/>
+                <a:ea typeface="+mn-ea"/>
+                <a:cs typeface="+mn-cs"/>
+              </a:rPr>
+              <a:t>The system supports semantic </a:t>
+            </a:r>
+          </a:p>
+          <a:p>
+            <a:r>
+              <a:rPr lang="en-US" sz="1200" b="0" i="0" kern="1200" dirty="0">
+                <a:solidFill>
+                  <a:schemeClr val="tx1"/>
+                </a:solidFill>
+                <a:effectLst/>
+                <a:latin typeface="+mn-lt"/>
+                <a:ea typeface="+mn-ea"/>
+                <a:cs typeface="+mn-cs"/>
+              </a:rPr>
+              <a:t>and keyword search over indexed passages. </a:t>
+            </a:r>
+          </a:p>
+          <a:p>
+            <a:endParaRPr lang="en-US" sz="1200" b="0" i="0" kern="1200" dirty="0">
+              <a:solidFill>
+                <a:schemeClr val="tx1"/>
+              </a:solidFill>
+              <a:effectLst/>
+              <a:latin typeface="+mn-lt"/>
+              <a:ea typeface="+mn-ea"/>
+              <a:cs typeface="+mn-cs"/>
+            </a:endParaRPr>
+          </a:p>
+          <a:p>
+            <a:r>
+              <a:rPr lang="en-US" sz="1200" b="0" i="0" kern="1200" dirty="0">
+                <a:solidFill>
+                  <a:schemeClr val="tx1"/>
+                </a:solidFill>
+                <a:effectLst/>
+                <a:latin typeface="+mn-lt"/>
+                <a:ea typeface="+mn-ea"/>
+                <a:cs typeface="+mn-cs"/>
+              </a:rPr>
+              <a:t>The compare workspace lets researchers </a:t>
+            </a:r>
+            <a:br>
+              <a:rPr lang="en-US" sz="1200" b="0" i="0" kern="1200" dirty="0">
+                <a:solidFill>
+                  <a:schemeClr val="tx1"/>
+                </a:solidFill>
+                <a:effectLst/>
+                <a:latin typeface="+mn-lt"/>
+                <a:ea typeface="+mn-ea"/>
+                <a:cs typeface="+mn-cs"/>
+              </a:rPr>
+            </a:br>
+            <a:r>
+              <a:rPr lang="en-US" sz="1200" b="0" i="0" kern="1200" dirty="0">
+                <a:solidFill>
+                  <a:schemeClr val="tx1"/>
+                </a:solidFill>
+                <a:effectLst/>
+                <a:latin typeface="+mn-lt"/>
+                <a:ea typeface="+mn-ea"/>
+                <a:cs typeface="+mn-cs"/>
+              </a:rPr>
+              <a:t>place studies side by side. </a:t>
+            </a:r>
+          </a:p>
+          <a:p>
+            <a:endParaRPr lang="en-US" sz="1200" b="0" i="0" kern="1200" dirty="0">
+              <a:solidFill>
+                <a:schemeClr val="tx1"/>
+              </a:solidFill>
+              <a:effectLst/>
+              <a:latin typeface="+mn-lt"/>
+              <a:ea typeface="+mn-ea"/>
+              <a:cs typeface="+mn-cs"/>
+            </a:endParaRPr>
+          </a:p>
+          <a:p>
+            <a:r>
+              <a:rPr lang="en-US" sz="1200" b="0" i="0" kern="1200" dirty="0">
+                <a:solidFill>
+                  <a:schemeClr val="tx1"/>
+                </a:solidFill>
+                <a:effectLst/>
+                <a:latin typeface="+mn-lt"/>
+                <a:ea typeface="+mn-ea"/>
+                <a:cs typeface="+mn-cs"/>
+              </a:rPr>
+              <a:t>Comparison is metadata-based </a:t>
+            </a:r>
+            <a:br>
+              <a:rPr lang="en-US" sz="1200" b="0" i="0" kern="1200" dirty="0">
+                <a:solidFill>
+                  <a:schemeClr val="tx1"/>
+                </a:solidFill>
+                <a:effectLst/>
+                <a:latin typeface="+mn-lt"/>
+                <a:ea typeface="+mn-ea"/>
+                <a:cs typeface="+mn-cs"/>
+              </a:rPr>
+            </a:br>
+            <a:r>
+              <a:rPr lang="en-US" sz="1200" b="0" i="0" kern="1200" dirty="0">
+                <a:solidFill>
+                  <a:schemeClr val="tx1"/>
+                </a:solidFill>
+                <a:effectLst/>
+                <a:latin typeface="+mn-lt"/>
+                <a:ea typeface="+mn-ea"/>
+                <a:cs typeface="+mn-cs"/>
+              </a:rPr>
+              <a:t>and deliberately </a:t>
+            </a:r>
+            <a:br>
+              <a:rPr lang="en-US" sz="1200" b="0" i="0" kern="1200" dirty="0">
+                <a:solidFill>
+                  <a:schemeClr val="tx1"/>
+                </a:solidFill>
+                <a:effectLst/>
+                <a:latin typeface="+mn-lt"/>
+                <a:ea typeface="+mn-ea"/>
+                <a:cs typeface="+mn-cs"/>
+              </a:rPr>
+            </a:br>
+            <a:r>
+              <a:rPr lang="en-US" sz="1200" b="0" i="0" kern="1200" dirty="0">
+                <a:solidFill>
+                  <a:schemeClr val="tx1"/>
+                </a:solidFill>
+                <a:effectLst/>
+                <a:latin typeface="+mn-lt"/>
+                <a:ea typeface="+mn-ea"/>
+                <a:cs typeface="+mn-cs"/>
+              </a:rPr>
+              <a:t>does not invent cross-study findings</a:t>
+            </a:r>
+            <a:endParaRPr dirty="0"/>
           </a:p>
         </p:txBody>
       </p:sp>
@@ -4142,8 +6031,194 @@
           <a:lstStyle/>
           <a:p>
             <a:r>
-              <a:t>Summarize measurable engineering results. Avoid claiming scientific accuracy beyond the available evaluation fixtures and human review process.</a:t>
-            </a:r>
+              <a:rPr lang="en-US" sz="1200" b="0" i="0" kern="1200" dirty="0">
+                <a:solidFill>
+                  <a:schemeClr val="tx1"/>
+                </a:solidFill>
+                <a:effectLst/>
+                <a:latin typeface="+mn-lt"/>
+                <a:ea typeface="+mn-ea"/>
+                <a:cs typeface="+mn-cs"/>
+              </a:rPr>
+              <a:t>The AI stack uses local embeddings by default, </a:t>
+            </a:r>
+            <a:br>
+              <a:rPr lang="en-US" sz="1200" b="0" i="0" kern="1200" dirty="0">
+                <a:solidFill>
+                  <a:schemeClr val="tx1"/>
+                </a:solidFill>
+                <a:effectLst/>
+                <a:latin typeface="+mn-lt"/>
+                <a:ea typeface="+mn-ea"/>
+                <a:cs typeface="+mn-cs"/>
+              </a:rPr>
+            </a:br>
+            <a:r>
+              <a:rPr lang="en-US" sz="1200" b="0" i="0" kern="1200" dirty="0">
+                <a:solidFill>
+                  <a:schemeClr val="tx1"/>
+                </a:solidFill>
+                <a:effectLst/>
+                <a:latin typeface="+mn-lt"/>
+                <a:ea typeface="+mn-ea"/>
+                <a:cs typeface="+mn-cs"/>
+              </a:rPr>
+              <a:t>with an optional OpenAI model for generation. </a:t>
+            </a:r>
+          </a:p>
+          <a:p>
+            <a:endParaRPr lang="en-US" sz="1200" b="0" i="0" kern="1200" dirty="0">
+              <a:solidFill>
+                <a:schemeClr val="tx1"/>
+              </a:solidFill>
+              <a:effectLst/>
+              <a:latin typeface="+mn-lt"/>
+              <a:ea typeface="+mn-ea"/>
+              <a:cs typeface="+mn-cs"/>
+            </a:endParaRPr>
+          </a:p>
+          <a:p>
+            <a:r>
+              <a:rPr lang="en-US" sz="1200" b="0" i="0" kern="1200" dirty="0">
+                <a:solidFill>
+                  <a:schemeClr val="tx1"/>
+                </a:solidFill>
+                <a:effectLst/>
+                <a:latin typeface="+mn-lt"/>
+                <a:ea typeface="+mn-ea"/>
+                <a:cs typeface="+mn-cs"/>
+              </a:rPr>
+              <a:t>The key safeguard is the distinction </a:t>
+            </a:r>
+            <a:br>
+              <a:rPr lang="en-US" sz="1200" b="0" i="0" kern="1200" dirty="0">
+                <a:solidFill>
+                  <a:schemeClr val="tx1"/>
+                </a:solidFill>
+                <a:effectLst/>
+                <a:latin typeface="+mn-lt"/>
+                <a:ea typeface="+mn-ea"/>
+                <a:cs typeface="+mn-cs"/>
+              </a:rPr>
+            </a:br>
+            <a:r>
+              <a:rPr lang="en-US" sz="1200" b="0" i="0" kern="1200" dirty="0">
+                <a:solidFill>
+                  <a:schemeClr val="tx1"/>
+                </a:solidFill>
+                <a:effectLst/>
+                <a:latin typeface="+mn-lt"/>
+                <a:ea typeface="+mn-ea"/>
+                <a:cs typeface="+mn-cs"/>
+              </a:rPr>
+              <a:t>between retrieval and generation: </a:t>
+            </a:r>
+            <a:br>
+              <a:rPr lang="en-US" sz="1200" b="0" i="0" kern="1200" dirty="0">
+                <a:solidFill>
+                  <a:schemeClr val="tx1"/>
+                </a:solidFill>
+                <a:effectLst/>
+                <a:latin typeface="+mn-lt"/>
+                <a:ea typeface="+mn-ea"/>
+                <a:cs typeface="+mn-cs"/>
+              </a:rPr>
+            </a:br>
+            <a:endParaRPr lang="en-US" sz="1200" b="0" i="0" kern="1200" dirty="0">
+              <a:solidFill>
+                <a:schemeClr val="tx1"/>
+              </a:solidFill>
+              <a:effectLst/>
+              <a:latin typeface="+mn-lt"/>
+              <a:ea typeface="+mn-ea"/>
+              <a:cs typeface="+mn-cs"/>
+            </a:endParaRPr>
+          </a:p>
+          <a:p>
+            <a:r>
+              <a:rPr lang="en-US" sz="1200" b="0" i="0" kern="1200" dirty="0">
+                <a:solidFill>
+                  <a:schemeClr val="tx1"/>
+                </a:solidFill>
+                <a:effectLst/>
+                <a:latin typeface="+mn-lt"/>
+                <a:ea typeface="+mn-ea"/>
+                <a:cs typeface="+mn-cs"/>
+              </a:rPr>
+              <a:t>retrieval identifies evidence, </a:t>
+            </a:r>
+            <a:br>
+              <a:rPr lang="en-US" sz="1200" b="0" i="0" kern="1200" dirty="0">
+                <a:solidFill>
+                  <a:schemeClr val="tx1"/>
+                </a:solidFill>
+                <a:effectLst/>
+                <a:latin typeface="+mn-lt"/>
+                <a:ea typeface="+mn-ea"/>
+                <a:cs typeface="+mn-cs"/>
+              </a:rPr>
+            </a:br>
+            <a:r>
+              <a:rPr lang="en-US" sz="1200" b="0" i="0" kern="1200" dirty="0">
+                <a:solidFill>
+                  <a:schemeClr val="tx1"/>
+                </a:solidFill>
+                <a:effectLst/>
+                <a:latin typeface="+mn-lt"/>
+                <a:ea typeface="+mn-ea"/>
+                <a:cs typeface="+mn-cs"/>
+              </a:rPr>
+              <a:t>and generation summarizes </a:t>
+            </a:r>
+            <a:br>
+              <a:rPr lang="en-US" sz="1200" b="0" i="0" kern="1200" dirty="0">
+                <a:solidFill>
+                  <a:schemeClr val="tx1"/>
+                </a:solidFill>
+                <a:effectLst/>
+                <a:latin typeface="+mn-lt"/>
+                <a:ea typeface="+mn-ea"/>
+                <a:cs typeface="+mn-cs"/>
+              </a:rPr>
+            </a:br>
+            <a:r>
+              <a:rPr lang="en-US" sz="1200" b="0" i="0" kern="1200" dirty="0">
+                <a:solidFill>
+                  <a:schemeClr val="tx1"/>
+                </a:solidFill>
+                <a:effectLst/>
+                <a:latin typeface="+mn-lt"/>
+                <a:ea typeface="+mn-ea"/>
+                <a:cs typeface="+mn-cs"/>
+              </a:rPr>
+              <a:t>only what retrieval supports. </a:t>
+            </a:r>
+          </a:p>
+          <a:p>
+            <a:endParaRPr lang="en-US" sz="1200" b="0" i="0" kern="1200" dirty="0">
+              <a:solidFill>
+                <a:schemeClr val="tx1"/>
+              </a:solidFill>
+              <a:effectLst/>
+              <a:latin typeface="+mn-lt"/>
+              <a:ea typeface="+mn-ea"/>
+              <a:cs typeface="+mn-cs"/>
+            </a:endParaRPr>
+          </a:p>
+          <a:p>
+            <a:r>
+              <a:rPr lang="en-US" sz="1200" b="0" i="0" kern="1200" dirty="0">
+                <a:solidFill>
+                  <a:schemeClr val="tx1"/>
+                </a:solidFill>
+                <a:effectLst/>
+                <a:latin typeface="+mn-lt"/>
+                <a:ea typeface="+mn-ea"/>
+                <a:cs typeface="+mn-cs"/>
+              </a:rPr>
+              <a:t>Nothing more</a:t>
+            </a:r>
+            <a:endParaRPr dirty="0"/>
           </a:p>
         </p:txBody>
       </p:sp>
@@ -4212,8 +6287,188 @@
           <a:lstStyle/>
           <a:p>
             <a:r>
-              <a:t>Explain the live-demo sequence and backup plan. The student has already notified the program that he will not participate in the live final showcase presentation; these artifacts support evaluation and handoff.</a:t>
-            </a:r>
+              <a:rPr lang="en-US" sz="1200" b="0" i="0" kern="1200" dirty="0">
+                <a:solidFill>
+                  <a:schemeClr val="tx1"/>
+                </a:solidFill>
+                <a:effectLst/>
+                <a:latin typeface="+mn-lt"/>
+                <a:ea typeface="+mn-ea"/>
+                <a:cs typeface="+mn-cs"/>
+              </a:rPr>
+              <a:t>Engineering validation includes linting, </a:t>
+            </a:r>
+          </a:p>
+          <a:p>
+            <a:r>
+              <a:rPr lang="en-US" sz="1200" b="0" i="0" kern="1200" dirty="0">
+                <a:solidFill>
+                  <a:schemeClr val="tx1"/>
+                </a:solidFill>
+                <a:effectLst/>
+                <a:latin typeface="+mn-lt"/>
+                <a:ea typeface="+mn-ea"/>
+                <a:cs typeface="+mn-cs"/>
+              </a:rPr>
+              <a:t>type checking, </a:t>
+            </a:r>
+          </a:p>
+          <a:p>
+            <a:r>
+              <a:rPr lang="en-US" sz="1200" b="0" i="0" kern="1200" dirty="0">
+                <a:solidFill>
+                  <a:schemeClr val="tx1"/>
+                </a:solidFill>
+                <a:effectLst/>
+                <a:latin typeface="+mn-lt"/>
+                <a:ea typeface="+mn-ea"/>
+                <a:cs typeface="+mn-cs"/>
+              </a:rPr>
+              <a:t>unit tests, </a:t>
+            </a:r>
+          </a:p>
+          <a:p>
+            <a:r>
+              <a:rPr lang="en-US" sz="1200" b="0" i="0" kern="1200" dirty="0">
+                <a:solidFill>
+                  <a:schemeClr val="tx1"/>
+                </a:solidFill>
+                <a:effectLst/>
+                <a:latin typeface="+mn-lt"/>
+                <a:ea typeface="+mn-ea"/>
+                <a:cs typeface="+mn-cs"/>
+              </a:rPr>
+              <a:t>web tests, </a:t>
+            </a:r>
+          </a:p>
+          <a:p>
+            <a:r>
+              <a:rPr lang="en-US" sz="1200" b="0" i="0" kern="1200" dirty="0">
+                <a:solidFill>
+                  <a:schemeClr val="tx1"/>
+                </a:solidFill>
+                <a:effectLst/>
+                <a:latin typeface="+mn-lt"/>
+                <a:ea typeface="+mn-ea"/>
+                <a:cs typeface="+mn-cs"/>
+              </a:rPr>
+              <a:t>and a production </a:t>
+            </a:r>
+            <a:r>
+              <a:rPr lang="en-US" sz="1200" b="0" i="0" kern="1200" dirty="0" err="1">
+                <a:solidFill>
+                  <a:schemeClr val="tx1"/>
+                </a:solidFill>
+                <a:effectLst/>
+                <a:latin typeface="+mn-lt"/>
+                <a:ea typeface="+mn-ea"/>
+                <a:cs typeface="+mn-cs"/>
+              </a:rPr>
+              <a:t>Next.js</a:t>
+            </a:r>
+            <a:r>
+              <a:rPr lang="en-US" sz="1200" b="0" i="0" kern="1200" dirty="0">
+                <a:solidFill>
+                  <a:schemeClr val="tx1"/>
+                </a:solidFill>
+                <a:effectLst/>
+                <a:latin typeface="+mn-lt"/>
+                <a:ea typeface="+mn-ea"/>
+                <a:cs typeface="+mn-cs"/>
+              </a:rPr>
+              <a:t> build. </a:t>
+            </a:r>
+          </a:p>
+          <a:p>
+            <a:endParaRPr lang="en-US" sz="1200" b="0" i="0" kern="1200" dirty="0">
+              <a:solidFill>
+                <a:schemeClr val="tx1"/>
+              </a:solidFill>
+              <a:effectLst/>
+              <a:latin typeface="+mn-lt"/>
+              <a:ea typeface="+mn-ea"/>
+              <a:cs typeface="+mn-cs"/>
+            </a:endParaRPr>
+          </a:p>
+          <a:p>
+            <a:r>
+              <a:rPr lang="en-US" sz="1200" b="0" i="0" kern="1200" dirty="0">
+                <a:solidFill>
+                  <a:schemeClr val="tx1"/>
+                </a:solidFill>
+                <a:effectLst/>
+                <a:latin typeface="+mn-lt"/>
+                <a:ea typeface="+mn-ea"/>
+                <a:cs typeface="+mn-cs"/>
+              </a:rPr>
+              <a:t>The app reports measurable engineering results </a:t>
+            </a:r>
+          </a:p>
+          <a:p>
+            <a:r>
+              <a:rPr lang="en-US" sz="1200" b="0" i="0" kern="1200" dirty="0">
+                <a:solidFill>
+                  <a:schemeClr val="tx1"/>
+                </a:solidFill>
+                <a:effectLst/>
+                <a:latin typeface="+mn-lt"/>
+                <a:ea typeface="+mn-ea"/>
+                <a:cs typeface="+mn-cs"/>
+              </a:rPr>
+              <a:t>while avoiding claims of scientific accuracy </a:t>
+            </a:r>
+          </a:p>
+          <a:p>
+            <a:r>
+              <a:rPr lang="en-US" sz="1200" b="0" i="0" kern="1200" dirty="0">
+                <a:solidFill>
+                  <a:schemeClr val="tx1"/>
+                </a:solidFill>
+                <a:effectLst/>
+                <a:latin typeface="+mn-lt"/>
+                <a:ea typeface="+mn-ea"/>
+                <a:cs typeface="+mn-cs"/>
+              </a:rPr>
+              <a:t>beyond </a:t>
+            </a:r>
+            <a:br>
+              <a:rPr lang="en-US" sz="1200" b="0" i="0" kern="1200" dirty="0">
+                <a:solidFill>
+                  <a:schemeClr val="tx1"/>
+                </a:solidFill>
+                <a:effectLst/>
+                <a:latin typeface="+mn-lt"/>
+                <a:ea typeface="+mn-ea"/>
+                <a:cs typeface="+mn-cs"/>
+              </a:rPr>
+            </a:br>
+            <a:r>
+              <a:rPr lang="en-US" sz="1200" b="0" i="0" kern="1200" dirty="0">
+                <a:solidFill>
+                  <a:schemeClr val="tx1"/>
+                </a:solidFill>
+                <a:effectLst/>
+                <a:latin typeface="+mn-lt"/>
+                <a:ea typeface="+mn-ea"/>
+                <a:cs typeface="+mn-cs"/>
+              </a:rPr>
+              <a:t>the available evaluation fixtures </a:t>
+            </a:r>
+          </a:p>
+          <a:p>
+            <a:r>
+              <a:rPr lang="en-US" sz="1200" b="0" i="0" kern="1200" dirty="0">
+                <a:solidFill>
+                  <a:schemeClr val="tx1"/>
+                </a:solidFill>
+                <a:effectLst/>
+                <a:latin typeface="+mn-lt"/>
+                <a:ea typeface="+mn-ea"/>
+                <a:cs typeface="+mn-cs"/>
+              </a:rPr>
+              <a:t>and human review process</a:t>
+            </a:r>
+            <a:endParaRPr dirty="0"/>
           </a:p>
         </p:txBody>
       </p:sp>
@@ -4416,7 +6671,7 @@
           <a:p>
             <a:fld id="{5BCAD085-E8A6-8845-BD4E-CB4CCA059FC4}" type="datetimeFigureOut">
               <a:rPr lang="en-US" smtClean="0"/>
-              <a:t>8/26/26</a:t>
+              <a:t>8/29/26</a:t>
             </a:fld>
             <a:endParaRPr lang="en-US"/>
           </a:p>
@@ -4584,7 +6839,7 @@
           <a:p>
             <a:fld id="{5BCAD085-E8A6-8845-BD4E-CB4CCA059FC4}" type="datetimeFigureOut">
               <a:rPr lang="en-US" smtClean="0"/>
-              <a:t>8/26/26</a:t>
+              <a:t>8/29/26</a:t>
             </a:fld>
             <a:endParaRPr lang="en-US"/>
           </a:p>
@@ -4762,7 +7017,7 @@
           <a:p>
             <a:fld id="{5BCAD085-E8A6-8845-BD4E-CB4CCA059FC4}" type="datetimeFigureOut">
               <a:rPr lang="en-US" smtClean="0"/>
-              <a:t>8/26/26</a:t>
+              <a:t>8/29/26</a:t>
             </a:fld>
             <a:endParaRPr lang="en-US"/>
           </a:p>
@@ -4930,7 +7185,7 @@
           <a:p>
             <a:fld id="{5BCAD085-E8A6-8845-BD4E-CB4CCA059FC4}" type="datetimeFigureOut">
               <a:rPr lang="en-US" smtClean="0"/>
-              <a:t>8/26/26</a:t>
+              <a:t>8/29/26</a:t>
             </a:fld>
             <a:endParaRPr lang="en-US"/>
           </a:p>
@@ -5175,7 +7430,7 @@
           <a:p>
             <a:fld id="{5BCAD085-E8A6-8845-BD4E-CB4CCA059FC4}" type="datetimeFigureOut">
               <a:rPr lang="en-US" smtClean="0"/>
-              <a:t>8/26/26</a:t>
+              <a:t>8/29/26</a:t>
             </a:fld>
             <a:endParaRPr lang="en-US"/>
           </a:p>
@@ -5460,7 +7715,7 @@
           <a:p>
             <a:fld id="{5BCAD085-E8A6-8845-BD4E-CB4CCA059FC4}" type="datetimeFigureOut">
               <a:rPr lang="en-US" smtClean="0"/>
-              <a:t>8/26/26</a:t>
+              <a:t>8/29/26</a:t>
             </a:fld>
             <a:endParaRPr lang="en-US"/>
           </a:p>
@@ -5879,7 +8134,7 @@
           <a:p>
             <a:fld id="{5BCAD085-E8A6-8845-BD4E-CB4CCA059FC4}" type="datetimeFigureOut">
               <a:rPr lang="en-US" smtClean="0"/>
-              <a:t>8/26/26</a:t>
+              <a:t>8/29/26</a:t>
             </a:fld>
             <a:endParaRPr lang="en-US"/>
           </a:p>
@@ -5996,7 +8251,7 @@
           <a:p>
             <a:fld id="{5BCAD085-E8A6-8845-BD4E-CB4CCA059FC4}" type="datetimeFigureOut">
               <a:rPr lang="en-US" smtClean="0"/>
-              <a:t>8/26/26</a:t>
+              <a:t>8/29/26</a:t>
             </a:fld>
             <a:endParaRPr lang="en-US"/>
           </a:p>
@@ -6091,7 +8346,7 @@
           <a:p>
             <a:fld id="{5BCAD085-E8A6-8845-BD4E-CB4CCA059FC4}" type="datetimeFigureOut">
               <a:rPr lang="en-US" smtClean="0"/>
-              <a:t>8/26/26</a:t>
+              <a:t>8/29/26</a:t>
             </a:fld>
             <a:endParaRPr lang="en-US"/>
           </a:p>
@@ -6366,7 +8621,7 @@
           <a:p>
             <a:fld id="{5BCAD085-E8A6-8845-BD4E-CB4CCA059FC4}" type="datetimeFigureOut">
               <a:rPr lang="en-US" smtClean="0"/>
-              <a:t>8/26/26</a:t>
+              <a:t>8/29/26</a:t>
             </a:fld>
             <a:endParaRPr lang="en-US"/>
           </a:p>
@@ -6618,7 +8873,7 @@
           <a:p>
             <a:fld id="{5BCAD085-E8A6-8845-BD4E-CB4CCA059FC4}" type="datetimeFigureOut">
               <a:rPr lang="en-US" smtClean="0"/>
-              <a:t>8/26/26</a:t>
+              <a:t>8/29/26</a:t>
             </a:fld>
             <a:endParaRPr lang="en-US"/>
           </a:p>
@@ -6829,7 +9084,7 @@
           <a:p>
             <a:fld id="{5BCAD085-E8A6-8845-BD4E-CB4CCA059FC4}" type="datetimeFigureOut">
               <a:rPr lang="en-US" smtClean="0"/>
-              <a:t>8/26/26</a:t>
+              <a:t>8/29/26</a:t>
             </a:fld>
             <a:endParaRPr lang="en-US"/>
           </a:p>
@@ -7219,7 +9474,7 @@
           <p:nvPr/>
         </p:nvPicPr>
         <p:blipFill>
-          <a:blip r:embed="rId2"/>
+          <a:blip r:embed="rId3"/>
           <a:stretch>
             <a:fillRect/>
           </a:stretch>
@@ -7249,7 +9504,7 @@
           <p:nvPr/>
         </p:nvPicPr>
         <p:blipFill>
-          <a:blip r:embed="rId3"/>
+          <a:blip r:embed="rId4"/>
           <a:stretch>
             <a:fillRect/>
           </a:stretch>
@@ -7409,6 +9664,18 @@
   <p:clrMapOvr>
     <a:masterClrMapping/>
   </p:clrMapOvr>
+  <mc:AlternateContent xmlns:mc="http://schemas.openxmlformats.org/markup-compatibility/2006" xmlns:p14="http://schemas.microsoft.com/office/powerpoint/2010/main">
+    <mc:Choice Requires="p14">
+      <p:transition spd="med" p14:dur="700" advTm="41566">
+        <p:fade/>
+      </p:transition>
+    </mc:Choice>
+    <mc:Fallback xmlns="">
+      <p:transition spd="med" advTm="41566">
+        <p:fade/>
+      </p:transition>
+    </mc:Fallback>
+  </mc:AlternateContent>
 </p:sld>
 </file>
 
@@ -7763,6 +10030,18 @@
   <p:clrMapOvr>
     <a:masterClrMapping/>
   </p:clrMapOvr>
+  <mc:AlternateContent xmlns:mc="http://schemas.openxmlformats.org/markup-compatibility/2006" xmlns:p14="http://schemas.microsoft.com/office/powerpoint/2010/main">
+    <mc:Choice Requires="p14">
+      <p:transition spd="med" p14:dur="700" advTm="17266">
+        <p:fade/>
+      </p:transition>
+    </mc:Choice>
+    <mc:Fallback xmlns="">
+      <p:transition spd="med" advTm="17266">
+        <p:fade/>
+      </p:transition>
+    </mc:Fallback>
+  </mc:AlternateContent>
 </p:sld>
 </file>
 
@@ -7926,6 +10205,18 @@
   <p:clrMapOvr>
     <a:masterClrMapping/>
   </p:clrMapOvr>
+  <mc:AlternateContent xmlns:mc="http://schemas.openxmlformats.org/markup-compatibility/2006" xmlns:p14="http://schemas.microsoft.com/office/powerpoint/2010/main">
+    <mc:Choice Requires="p14">
+      <p:transition spd="med" p14:dur="700" advTm="19866">
+        <p:fade/>
+      </p:transition>
+    </mc:Choice>
+    <mc:Fallback xmlns="">
+      <p:transition spd="med" advTm="19866">
+        <p:fade/>
+      </p:transition>
+    </mc:Fallback>
+  </mc:AlternateContent>
 </p:sld>
 </file>
 
@@ -7961,7 +10252,7 @@
           <p:nvPr/>
         </p:nvPicPr>
         <p:blipFill>
-          <a:blip r:embed="rId2"/>
+          <a:blip r:embed="rId3"/>
           <a:stretch>
             <a:fillRect/>
           </a:stretch>
@@ -8265,7 +10556,7 @@
           <p:nvPr/>
         </p:nvPicPr>
         <p:blipFill>
-          <a:blip r:embed="rId3"/>
+          <a:blip r:embed="rId4"/>
           <a:stretch>
             <a:fillRect/>
           </a:stretch>
@@ -8290,6 +10581,18 @@
   <p:clrMapOvr>
     <a:masterClrMapping/>
   </p:clrMapOvr>
+  <mc:AlternateContent xmlns:mc="http://schemas.openxmlformats.org/markup-compatibility/2006" xmlns:p14="http://schemas.microsoft.com/office/powerpoint/2010/main">
+    <mc:Choice Requires="p14">
+      <p:transition spd="med" p14:dur="700" advTm="10700">
+        <p:fade/>
+      </p:transition>
+    </mc:Choice>
+    <mc:Fallback xmlns="">
+      <p:transition spd="med" advTm="10700">
+        <p:fade/>
+      </p:transition>
+    </mc:Fallback>
+  </mc:AlternateContent>
 </p:sld>
 </file>
 
@@ -8683,6 +10986,18 @@
   <p:clrMapOvr>
     <a:masterClrMapping/>
   </p:clrMapOvr>
+  <mc:AlternateContent xmlns:mc="http://schemas.openxmlformats.org/markup-compatibility/2006" xmlns:p14="http://schemas.microsoft.com/office/powerpoint/2010/main">
+    <mc:Choice Requires="p14">
+      <p:transition spd="med" p14:dur="700" advTm="20833">
+        <p:fade/>
+      </p:transition>
+    </mc:Choice>
+    <mc:Fallback xmlns="">
+      <p:transition spd="med" advTm="20833">
+        <p:fade/>
+      </p:transition>
+    </mc:Fallback>
+  </mc:AlternateContent>
 </p:sld>
 </file>
 
@@ -9007,6 +11322,18 @@
   <p:clrMapOvr>
     <a:masterClrMapping/>
   </p:clrMapOvr>
+  <mc:AlternateContent xmlns:mc="http://schemas.openxmlformats.org/markup-compatibility/2006" xmlns:p14="http://schemas.microsoft.com/office/powerpoint/2010/main">
+    <mc:Choice Requires="p14">
+      <p:transition spd="med" p14:dur="700" advTm="19433">
+        <p:fade/>
+      </p:transition>
+    </mc:Choice>
+    <mc:Fallback xmlns="">
+      <p:transition spd="med" advTm="19433">
+        <p:fade/>
+      </p:transition>
+    </mc:Fallback>
+  </mc:AlternateContent>
 </p:sld>
 </file>
 
@@ -9782,6 +12109,18 @@
   <p:clrMapOvr>
     <a:masterClrMapping/>
   </p:clrMapOvr>
+  <mc:AlternateContent xmlns:mc="http://schemas.openxmlformats.org/markup-compatibility/2006" xmlns:p14="http://schemas.microsoft.com/office/powerpoint/2010/main">
+    <mc:Choice Requires="p14">
+      <p:transition spd="med" p14:dur="700" advTm="25600">
+        <p:fade/>
+      </p:transition>
+    </mc:Choice>
+    <mc:Fallback xmlns="">
+      <p:transition spd="med" advTm="25600">
+        <p:fade/>
+      </p:transition>
+    </mc:Fallback>
+  </mc:AlternateContent>
 </p:sld>
 </file>
 
@@ -10115,6 +12454,18 @@
   <p:clrMapOvr>
     <a:masterClrMapping/>
   </p:clrMapOvr>
+  <mc:AlternateContent xmlns:mc="http://schemas.openxmlformats.org/markup-compatibility/2006" xmlns:p14="http://schemas.microsoft.com/office/powerpoint/2010/main">
+    <mc:Choice Requires="p14">
+      <p:transition spd="med" p14:dur="700" advTm="18400">
+        <p:fade/>
+      </p:transition>
+    </mc:Choice>
+    <mc:Fallback xmlns="">
+      <p:transition spd="med" advTm="18400">
+        <p:fade/>
+      </p:transition>
+    </mc:Fallback>
+  </mc:AlternateContent>
 </p:sld>
 </file>
 
@@ -10386,6 +12737,18 @@
   <p:clrMapOvr>
     <a:masterClrMapping/>
   </p:clrMapOvr>
+  <mc:AlternateContent xmlns:mc="http://schemas.openxmlformats.org/markup-compatibility/2006" xmlns:p14="http://schemas.microsoft.com/office/powerpoint/2010/main">
+    <mc:Choice Requires="p14">
+      <p:transition spd="med" p14:dur="700" advTm="19283">
+        <p:fade/>
+      </p:transition>
+    </mc:Choice>
+    <mc:Fallback xmlns="">
+      <p:transition spd="med" advTm="19283">
+        <p:fade/>
+      </p:transition>
+    </mc:Fallback>
+  </mc:AlternateContent>
 </p:sld>
 </file>
 
@@ -10682,6 +13045,18 @@
   <p:clrMapOvr>
     <a:masterClrMapping/>
   </p:clrMapOvr>
+  <mc:AlternateContent xmlns:mc="http://schemas.openxmlformats.org/markup-compatibility/2006" xmlns:p14="http://schemas.microsoft.com/office/powerpoint/2010/main">
+    <mc:Choice Requires="p14">
+      <p:transition spd="med" p14:dur="700" advTm="16933">
+        <p:fade/>
+      </p:transition>
+    </mc:Choice>
+    <mc:Fallback xmlns="">
+      <p:transition spd="med" advTm="16933">
+        <p:fade/>
+      </p:transition>
+    </mc:Fallback>
+  </mc:AlternateContent>
 </p:sld>
 </file>
 
@@ -11249,6 +13624,18 @@
   <p:clrMapOvr>
     <a:masterClrMapping/>
   </p:clrMapOvr>
+  <mc:AlternateContent xmlns:mc="http://schemas.openxmlformats.org/markup-compatibility/2006" xmlns:p14="http://schemas.microsoft.com/office/powerpoint/2010/main">
+    <mc:Choice Requires="p14">
+      <p:transition spd="med" p14:dur="700" advTm="19780">
+        <p:fade/>
+      </p:transition>
+    </mc:Choice>
+    <mc:Fallback xmlns="">
+      <p:transition spd="med" advTm="19780">
+        <p:fade/>
+      </p:transition>
+    </mc:Fallback>
+  </mc:AlternateContent>
 </p:sld>
 </file>
 
@@ -11701,6 +14088,18 @@
   <p:clrMapOvr>
     <a:masterClrMapping/>
   </p:clrMapOvr>
+  <mc:AlternateContent xmlns:mc="http://schemas.openxmlformats.org/markup-compatibility/2006" xmlns:p14="http://schemas.microsoft.com/office/powerpoint/2010/main">
+    <mc:Choice Requires="p14">
+      <p:transition spd="med" p14:dur="700" advTm="17700">
+        <p:fade/>
+      </p:transition>
+    </mc:Choice>
+    <mc:Fallback xmlns="">
+      <p:transition spd="med" advTm="17700">
+        <p:fade/>
+      </p:transition>
+    </mc:Fallback>
+  </mc:AlternateContent>
 </p:sld>
 </file>
 
